--- a/python-in-excel-first-hour-deck.pptx
+++ b/python-in-excel-first-hour-deck.pptx
@@ -4,36 +4,36 @@
   <p:sldMasterIdLst>
     <p:sldMasterId id="2147483648" r:id="rId1"/>
   </p:sldMasterIdLst>
+  <p:sldIdLst>
+    <p:sldId id="256" r:id="rId2"/>
+    <p:sldId id="257" r:id="rId3"/>
+    <p:sldId id="258" r:id="rId4"/>
+    <p:sldId id="259" r:id="rId5"/>
+    <p:sldId id="260" r:id="rId6"/>
+    <p:sldId id="261" r:id="rId7"/>
+    <p:sldId id="262" r:id="rId8"/>
+    <p:sldId id="263" r:id="rId9"/>
+    <p:sldId id="264" r:id="rId10"/>
+    <p:sldId id="265" r:id="rId11"/>
+    <p:sldId id="266" r:id="rId12"/>
+    <p:sldId id="267" r:id="rId13"/>
+    <p:sldId id="268" r:id="rId14"/>
+    <p:sldId id="269" r:id="rId15"/>
+    <p:sldId id="270" r:id="rId16"/>
+    <p:sldId id="271" r:id="rId17"/>
+    <p:sldId id="272" r:id="rId18"/>
+    <p:sldId id="273" r:id="rId19"/>
+    <p:sldId id="274" r:id="rId20"/>
+    <p:sldId id="275" r:id="rId21"/>
+    <p:sldId id="276" r:id="rId22"/>
+    <p:sldId id="277" r:id="rId23"/>
+    <p:sldId id="278" r:id="rId24"/>
+    <p:sldId id="279" r:id="rId25"/>
+  </p:sldIdLst>
   <p:notesMasterIdLst>
     <p:notesMasterId r:id="rId26"/>
   </p:notesMasterIdLst>
-  <p:sldIdLst>
-    <p:sldId id="280" r:id="rId2"/>
-    <p:sldId id="281" r:id="rId3"/>
-    <p:sldId id="282" r:id="rId4"/>
-    <p:sldId id="283" r:id="rId5"/>
-    <p:sldId id="284" r:id="rId6"/>
-    <p:sldId id="285" r:id="rId7"/>
-    <p:sldId id="286" r:id="rId8"/>
-    <p:sldId id="287" r:id="rId9"/>
-    <p:sldId id="288" r:id="rId10"/>
-    <p:sldId id="289" r:id="rId11"/>
-    <p:sldId id="290" r:id="rId12"/>
-    <p:sldId id="291" r:id="rId13"/>
-    <p:sldId id="292" r:id="rId14"/>
-    <p:sldId id="293" r:id="rId15"/>
-    <p:sldId id="294" r:id="rId16"/>
-    <p:sldId id="295" r:id="rId17"/>
-    <p:sldId id="296" r:id="rId18"/>
-    <p:sldId id="297" r:id="rId19"/>
-    <p:sldId id="298" r:id="rId20"/>
-    <p:sldId id="299" r:id="rId21"/>
-    <p:sldId id="300" r:id="rId22"/>
-    <p:sldId id="301" r:id="rId23"/>
-    <p:sldId id="302" r:id="rId24"/>
-    <p:sldId id="303" r:id="rId25"/>
-  </p:sldIdLst>
-  <p:sldSz cx="9144000" cy="5143500" type="screen16x9"/>
+  <p:sldSz cx="9144000" cy="5143500"/>
   <p:notesSz cx="5143500" cy="9144000"/>
   <p:defaultTextStyle>
     <a:lvl1pPr marL="0" algn="l" defTabSz="914400" rtl="0" eaLnBrk="1" latinLnBrk="0" hangingPunct="1">
@@ -127,11 +127,6 @@
       </a:defRPr>
     </a:lvl9pPr>
   </p:defaultTextStyle>
-  <p:extLst>
-    <p:ext uri="{EFAFB233-063F-42B5-8137-9DF3F51BA10A}">
-      <p15:sldGuideLst xmlns:p15="http://schemas.microsoft.com/office/powerpoint/2012/main"/>
-    </p:ext>
-  </p:extLst>
 </p:presentation>
 </file>
 
@@ -157,10 +152,234 @@
           <a:chExt cx="0" cy="0"/>
         </a:xfrm>
       </p:grpSpPr>
+      <p:sp>
+        <p:nvSpPr>
+          <p:cNvPr id="2" name="Header Placeholder 1"/>
+          <p:cNvSpPr>
+            <a:spLocks noGrp="1"/>
+          </p:cNvSpPr>
+          <p:nvPr>
+            <p:ph type="hdr" sz="quarter"/>
+          </p:nvPr>
+        </p:nvSpPr>
+        <p:spPr>
+          <a:xfrm>
+            <a:off x="0" y="0"/>
+            <a:ext cx="2971800" cy="458788"/>
+          </a:xfrm>
+          <a:prstGeom prst="rect">
+            <a:avLst/>
+          </a:prstGeom>
+        </p:spPr>
+        <p:txBody>
+          <a:bodyPr vert="horz" lIns="91440" tIns="45720" rIns="91440" bIns="45720" rtlCol="0"/>
+          <a:lstStyle>
+            <a:lvl1pPr algn="l">
+              <a:defRPr sz="1200"/>
+            </a:lvl1pPr>
+          </a:lstStyle>
+          <a:p>
+            <a:endParaRPr lang="en-US"/>
+          </a:p>
+        </p:txBody>
+      </p:sp>
+      <p:sp>
+        <p:nvSpPr>
+          <p:cNvPr id="3" name="Date Placeholder 2"/>
+          <p:cNvSpPr>
+            <a:spLocks noGrp="1"/>
+          </p:cNvSpPr>
+          <p:nvPr>
+            <p:ph type="dt" idx="1"/>
+          </p:nvPr>
+        </p:nvSpPr>
+        <p:spPr>
+          <a:xfrm>
+            <a:off x="3884613" y="0"/>
+            <a:ext cx="2971800" cy="458788"/>
+          </a:xfrm>
+          <a:prstGeom prst="rect">
+            <a:avLst/>
+          </a:prstGeom>
+        </p:spPr>
+        <p:txBody>
+          <a:bodyPr vert="horz" lIns="91440" tIns="45720" rIns="91440" bIns="45720" rtlCol="0"/>
+          <a:lstStyle>
+            <a:lvl1pPr algn="r">
+              <a:defRPr sz="1200"/>
+            </a:lvl1pPr>
+          </a:lstStyle>
+          <a:p>
+            <a:fld id="{5282F153-3F37-0F45-9E97-73ACFA13230C}" type="datetimeFigureOut">
+              <a:rPr lang="en-US"/>
+              <a:t>7/23/19</a:t>
+            </a:fld>
+            <a:endParaRPr lang="en-US"/>
+          </a:p>
+        </p:txBody>
+      </p:sp>
+      <p:sp>
+        <p:nvSpPr>
+          <p:cNvPr id="4" name="Slide Image Placeholder 3"/>
+          <p:cNvSpPr>
+            <a:spLocks noGrp="1" noRot="1" noChangeAspect="1"/>
+          </p:cNvSpPr>
+          <p:nvPr>
+            <p:ph type="sldImg" idx="2"/>
+          </p:nvPr>
+        </p:nvSpPr>
+        <p:spPr>
+          <a:xfrm>
+            <a:off x="685800" y="1143000"/>
+            <a:ext cx="5486400" cy="3086100"/>
+          </a:xfrm>
+          <a:prstGeom prst="rect">
+            <a:avLst/>
+          </a:prstGeom>
+          <a:noFill/>
+          <a:ln w="12700">
+            <a:solidFill>
+              <a:prstClr val="black"/>
+            </a:solidFill>
+          </a:ln>
+        </p:spPr>
+        <p:txBody>
+          <a:bodyPr vert="horz" lIns="91440" tIns="45720" rIns="91440" bIns="45720" rtlCol="0" anchor="ctr"/>
+          <a:lstStyle/>
+          <a:p>
+            <a:endParaRPr lang="en-US"/>
+          </a:p>
+        </p:txBody>
+      </p:sp>
+      <p:sp>
+        <p:nvSpPr>
+          <p:cNvPr id="5" name="Notes Placeholder 4"/>
+          <p:cNvSpPr>
+            <a:spLocks noGrp="1"/>
+          </p:cNvSpPr>
+          <p:nvPr>
+            <p:ph type="body" sz="quarter" idx="3"/>
+          </p:nvPr>
+        </p:nvSpPr>
+        <p:spPr>
+          <a:xfrm>
+            <a:off x="685800" y="4400550"/>
+            <a:ext cx="5486400" cy="3600450"/>
+          </a:xfrm>
+          <a:prstGeom prst="rect">
+            <a:avLst/>
+          </a:prstGeom>
+        </p:spPr>
+        <p:txBody>
+          <a:bodyPr vert="horz" lIns="91440" tIns="45720" rIns="91440" bIns="45720" rtlCol="0"/>
+          <a:lstStyle/>
+          <a:p>
+            <a:pPr lvl="0"/>
+            <a:r>
+              <a:rPr lang="en-US"/>
+              <a:t>Click to edit Master text styles</a:t>
+            </a:r>
+          </a:p>
+          <a:p>
+            <a:pPr lvl="1"/>
+            <a:r>
+              <a:rPr lang="en-US"/>
+              <a:t>Second level</a:t>
+            </a:r>
+          </a:p>
+          <a:p>
+            <a:pPr lvl="2"/>
+            <a:r>
+              <a:rPr lang="en-US"/>
+              <a:t>Third level</a:t>
+            </a:r>
+          </a:p>
+          <a:p>
+            <a:pPr lvl="3"/>
+            <a:r>
+              <a:rPr lang="en-US"/>
+              <a:t>Fourth level</a:t>
+            </a:r>
+          </a:p>
+          <a:p>
+            <a:pPr lvl="4"/>
+            <a:r>
+              <a:rPr lang="en-US"/>
+              <a:t>Fifth level</a:t>
+            </a:r>
+          </a:p>
+        </p:txBody>
+      </p:sp>
+      <p:sp>
+        <p:nvSpPr>
+          <p:cNvPr id="6" name="Footer Placeholder 5"/>
+          <p:cNvSpPr>
+            <a:spLocks noGrp="1"/>
+          </p:cNvSpPr>
+          <p:nvPr>
+            <p:ph type="ftr" sz="quarter" idx="4"/>
+          </p:nvPr>
+        </p:nvSpPr>
+        <p:spPr>
+          <a:xfrm>
+            <a:off x="0" y="8685213"/>
+            <a:ext cx="2971800" cy="458787"/>
+          </a:xfrm>
+          <a:prstGeom prst="rect">
+            <a:avLst/>
+          </a:prstGeom>
+        </p:spPr>
+        <p:txBody>
+          <a:bodyPr vert="horz" lIns="91440" tIns="45720" rIns="91440" bIns="45720" rtlCol="0" anchor="b"/>
+          <a:lstStyle>
+            <a:lvl1pPr algn="l">
+              <a:defRPr sz="1200"/>
+            </a:lvl1pPr>
+          </a:lstStyle>
+          <a:p>
+            <a:endParaRPr lang="en-US"/>
+          </a:p>
+        </p:txBody>
+      </p:sp>
+      <p:sp>
+        <p:nvSpPr>
+          <p:cNvPr id="7" name="Slide Number Placeholder 6"/>
+          <p:cNvSpPr>
+            <a:spLocks noGrp="1"/>
+          </p:cNvSpPr>
+          <p:nvPr>
+            <p:ph type="sldNum" sz="quarter" idx="5"/>
+          </p:nvPr>
+        </p:nvSpPr>
+        <p:spPr>
+          <a:xfrm>
+            <a:off x="3884613" y="8685213"/>
+            <a:ext cx="2971800" cy="458787"/>
+          </a:xfrm>
+          <a:prstGeom prst="rect">
+            <a:avLst/>
+          </a:prstGeom>
+        </p:spPr>
+        <p:txBody>
+          <a:bodyPr vert="horz" lIns="91440" tIns="45720" rIns="91440" bIns="45720" rtlCol="0" anchor="b"/>
+          <a:lstStyle>
+            <a:lvl1pPr algn="r">
+              <a:defRPr sz="1200"/>
+            </a:lvl1pPr>
+          </a:lstStyle>
+          <a:p>
+            <a:fld id="{CE5E9CC1-C706-0F49-92D6-E571CC5EEA8F}" type="slidenum">
+              <a:rPr lang="en-US"/>
+              <a:t>‹#›</a:t>
+            </a:fld>
+            <a:endParaRPr lang="en-US"/>
+          </a:p>
+        </p:txBody>
+      </p:sp>
     </p:spTree>
     <p:extLst>
       <p:ext uri="{BB962C8B-B14F-4D97-AF65-F5344CB8AC3E}">
-        <p14:creationId xmlns:p14="http://schemas.microsoft.com/office/powerpoint/2010/main" val="631278404"/>
+        <p14:creationId xmlns:p14="http://schemas.microsoft.com/office/powerpoint/2010/main" val="1024086991"/>
       </p:ext>
     </p:extLst>
   </p:cSld>
@@ -306,26 +525,9 @@
           <a:p>
             <a:r>
               <a:rPr lang="en-US" dirty="0"/>
-              <a:t>Welcome in — glad you're here.</a:t>
-            </a:r>
-          </a:p>
-          <a:p>
-            <a:r>
-              <a:rPr lang="en-US" dirty="0"/>
-              <a:t>Over the next hour, we're going to do three things together. Load a real dataset into Excel. Explore it with pandas. And build a chart that honestly, Excel can't touch on its own.</a:t>
-            </a:r>
-          </a:p>
-          <a:p>
-            <a:r>
-              <a:rPr lang="en-US" dirty="0"/>
-              <a:t>This is a working session, not a lecture. By the end, you'll have actually written Python inside Excel — not just watched me do it.</a:t>
-            </a:r>
-          </a:p>
-          <a:p>
-            <a:r>
-              <a:rPr lang="en-US" dirty="0"/>
-              <a:t>Quick housekeeping before we start. Drop questions in the chat as we go. I'll batch them at the end of each section.</a:t>
-            </a:r>
+              <a:t/>
+            </a:r>
+            <a:endParaRPr lang="en-US" dirty="0"/>
           </a:p>
         </p:txBody>
       </p:sp>
@@ -411,32 +613,9 @@
           <a:p>
             <a:r>
               <a:rPr lang="en-US" dirty="0"/>
-              <a:t>Okay. This is the one gotcha that will trip you up. I promise. It will happen — probably tonight when you go try this yourself.</a:t>
-            </a:r>
-          </a:p>
-          <a:p>
-            <a:r>
-              <a:rPr lang="en-US" dirty="0"/>
-              <a:t>Python in Excel runs your cells like you're reading a page. Left to right, top to bottom. That's the calc order.</a:t>
-            </a:r>
-          </a:p>
-          <a:p>
-            <a:r>
-              <a:rPr lang="en-US" dirty="0"/>
-              <a:t>Which means — if you define a variable in cell B2, you can reference it anywhere to the right of B2 in row 2. Or anywhere on rows 3, 4, 5, all the way down.</a:t>
-            </a:r>
-          </a:p>
-          <a:p>
-            <a:r>
-              <a:rPr lang="en-US" dirty="0"/>
-              <a:t>But you cannot reference it in row 1. And specifically you can't reference it in A1, because A1 runs before B2. You'll get a hashtag-PYTHON error, and you'll spend ten minutes wondering why your code is wrong. Your code isn't wrong. The cell is in the wrong place.</a:t>
-            </a:r>
-          </a:p>
-          <a:p>
-            <a:r>
-              <a:rPr lang="en-US" dirty="0"/>
-              <a:t>Recovery move — and this is what I do in every workbook — put your imports and your variables in the top-left of the sheet. Then build down and to the right. If you do that one thing, you avoid the entire problem.</a:t>
-            </a:r>
+              <a:t/>
+            </a:r>
+            <a:endParaRPr lang="en-US" dirty="0"/>
           </a:p>
         </p:txBody>
       </p:sp>
@@ -522,20 +701,9 @@
           <a:p>
             <a:r>
               <a:rPr lang="en-US" dirty="0"/>
-              <a:t>Part three. The longest section — about twenty-five minutes. This is the real meat of the workshop.</a:t>
-            </a:r>
-          </a:p>
-          <a:p>
-            <a:r>
-              <a:rPr lang="en-US" dirty="0"/>
-              <a:t>Switch over to ch underscore zero two dot xlsx. That's the other workbook from your inbox.</a:t>
-            </a:r>
-          </a:p>
-          <a:p>
-            <a:r>
-              <a:rPr lang="en-US" dirty="0"/>
-              <a:t>Two hundred sales orders. Six pandas methods. And — I promise — zero pivot tables. By the end you'll have profiled a dataset you've never seen, and you'll see how a handful of pandas moves replace a small forest of formulas.</a:t>
-            </a:r>
+              <a:t/>
+            </a:r>
+            <a:endParaRPr lang="en-US" dirty="0"/>
           </a:p>
         </p:txBody>
       </p:sp>
@@ -621,38 +789,9 @@
           <a:p>
             <a:r>
               <a:rPr lang="en-US" dirty="0"/>
-              <a:t>Step one — get the data into a DataFrame. A DataFrame is just pandas's word for a table.</a:t>
-            </a:r>
-          </a:p>
-          <a:p>
-            <a:r>
-              <a:rPr lang="en-US" dirty="0"/>
-              <a:t>Before we do anything else, I want you to convert your range to an Excel Table. Insert tab, Table. And give it a name — I'm using "sales" — because we're about to reference it by name.</a:t>
-            </a:r>
-          </a:p>
-          <a:p>
-            <a:r>
-              <a:rPr lang="en-US" dirty="0"/>
-              <a:t>Now in a P-Y cell: sales underscore d-f equals x-l, in quotes, sales square-bracket hashtag-All, comma headers equals True.</a:t>
-            </a:r>
-          </a:p>
-          <a:p>
-            <a:r>
-              <a:rPr lang="en-US" dirty="0"/>
-              <a:t>Two things to notice. First, that little x-l function is the bridge from a worksheet range or table into Python. That's how data crosses the border.</a:t>
-            </a:r>
-          </a:p>
-          <a:p>
-            <a:r>
-              <a:rPr lang="en-US" dirty="0"/>
-              <a:t>Second — headers equals True. When you point x-l at a Table, Excel adds that for you automatically. Keep it. It tells pandas the first row is column names, not data.</a:t>
-            </a:r>
-          </a:p>
-          <a:p>
-            <a:r>
-              <a:rPr lang="en-US" dirty="0"/>
-              <a:t>And on the next line, I just type the name of the DataFrame on its own. That gives me the data card preview right there in the cell — instant gut check that the data loaded the way I expected.</a:t>
-            </a:r>
+              <a:t/>
+            </a:r>
+            <a:endParaRPr lang="en-US" dirty="0"/>
           </a:p>
         </p:txBody>
       </p:sp>
@@ -738,38 +877,9 @@
           <a:p>
             <a:r>
               <a:rPr lang="en-US" dirty="0"/>
-              <a:t>Now we profile. Four moves I do before I touch any dataset seriously.</a:t>
-            </a:r>
-          </a:p>
-          <a:p>
-            <a:r>
-              <a:rPr lang="en-US" dirty="0"/>
-              <a:t>Dot head — gives me the first five rows. Quick sanity check that the data loaded and the columns look right.</a:t>
-            </a:r>
-          </a:p>
-          <a:p>
-            <a:r>
-              <a:rPr lang="en-US" dirty="0"/>
-              <a:t>Dot tail — the last five rows. I do this because the bottom of a dataset is often where the mess is. Stray totals, blank rows, weird footer notes — they hide at the bottom.</a:t>
-            </a:r>
-          </a:p>
-          <a:p>
-            <a:r>
-              <a:rPr lang="en-US" dirty="0"/>
-              <a:t>Dot sample, with a five inside the parentheses — five random rows. This catches issues that head and tail can both miss. Maybe row 87 has a problem you'd never see otherwise.</a:t>
-            </a:r>
-          </a:p>
-          <a:p>
-            <a:r>
-              <a:rPr lang="en-US" dirty="0"/>
-              <a:t>And dot shape — gives me rows times columns. For this file: two hundred rows, seven columns. Confirms I've got what I think I've got.</a:t>
-            </a:r>
-          </a:p>
-          <a:p>
-            <a:r>
-              <a:rPr lang="en-US" dirty="0"/>
-              <a:t>Four lines. Thirty seconds. And you already know more about this dataset than most people ever bother to learn.</a:t>
-            </a:r>
+              <a:t/>
+            </a:r>
+            <a:endParaRPr lang="en-US" dirty="0"/>
           </a:p>
         </p:txBody>
       </p:sp>
@@ -855,26 +965,9 @@
           <a:p>
             <a:r>
               <a:rPr lang="en-US" dirty="0"/>
-              <a:t>Two more profiling moves that earn their keep every single time.</a:t>
-            </a:r>
-          </a:p>
-          <a:p>
-            <a:r>
-              <a:rPr lang="en-US" dirty="0"/>
-              <a:t>First — dot describe. One method, and you get count, mean, standard deviation, min, max, and the quartiles, for every numeric column at once. By default it only looks at numbers, but if you pass exclude equals number, you get the same summary for your text columns — most common value, how many unique values, that kind of thing.</a:t>
-            </a:r>
-          </a:p>
-          <a:p>
-            <a:r>
-              <a:rPr lang="en-US" dirty="0"/>
-              <a:t>Second — is-na dot sum. This counts missing values per column. And in our file, customer underscore age has six missing values. That's not a problem — that's a teaching moment. In a couple of minutes we'll decide what to do about it.</a:t>
-            </a:r>
-          </a:p>
-          <a:p>
-            <a:r>
-              <a:rPr lang="en-US" dirty="0"/>
-              <a:t>Two methods. The amount of insight you just got would be — I'm not exaggerating — fifteen formulas in native Excel. And you didn't write a single one.</a:t>
-            </a:r>
+              <a:t/>
+            </a:r>
+            <a:endParaRPr lang="en-US" dirty="0"/>
           </a:p>
         </p:txBody>
       </p:sp>
@@ -960,26 +1053,9 @@
           <a:p>
             <a:r>
               <a:rPr lang="en-US" dirty="0"/>
-              <a:t>Counting categories. If you spend any time in Excel, you've built this exact analysis as a PivotTable — drag a column into rows, drag the same column into values, set it to Count. We're doing the same thing in one line.</a:t>
-            </a:r>
-          </a:p>
-          <a:p>
-            <a:r>
-              <a:rPr lang="en-US" dirty="0"/>
-              <a:t>Pick a column — country, in this case — and call dot value underscore counts. That's it. You get every unique value and how many times it shows up, sorted from most to least.</a:t>
-            </a:r>
-          </a:p>
-          <a:p>
-            <a:r>
-              <a:rPr lang="en-US" dirty="0"/>
-              <a:t>If you want proportions instead of raw counts, pass normalize equals True. Now you've got percentages.</a:t>
-            </a:r>
-          </a:p>
-          <a:p>
-            <a:r>
-              <a:rPr lang="en-US" dirty="0"/>
-              <a:t>Look at the output. United States, seventy-seven. Germany, forty-three. UK, thirty-nine. You just built a one-column PivotTable without ever opening the PivotTable dialog.</a:t>
-            </a:r>
+              <a:t/>
+            </a:r>
+            <a:endParaRPr lang="en-US" dirty="0"/>
           </a:p>
         </p:txBody>
       </p:sp>
@@ -1065,38 +1141,9 @@
           <a:p>
             <a:r>
               <a:rPr lang="en-US" dirty="0"/>
-              <a:t>And here's the big one. Groupby. If you take one method home from today, take this one.</a:t>
-            </a:r>
-          </a:p>
-          <a:p>
-            <a:r>
-              <a:rPr lang="en-US" dirty="0"/>
-              <a:t>The mental model — split, apply, combine. Split the data into groups. Apply a calculation to each group. Combine the answers back into one table.</a:t>
-            </a:r>
-          </a:p>
-          <a:p>
-            <a:r>
-              <a:rPr lang="en-US" dirty="0"/>
-              <a:t>Average price by country: sales-df dot groupby country, bracket unit underscore price, dot mean. Six words. Done.</a:t>
-            </a:r>
-          </a:p>
-          <a:p>
-            <a:r>
-              <a:rPr lang="en-US" dirty="0"/>
-              <a:t>Want multiple stats at once? Swap mean for dot a-g-g, and pass a list — mean, min, max. Now you've got three columns instead of one.</a:t>
-            </a:r>
-          </a:p>
-          <a:p>
-            <a:r>
-              <a:rPr lang="en-US" dirty="0"/>
-              <a:t>Want to group by two columns? Pass a list to groupby — country and category. Now you've got a two-level breakdown.</a:t>
-            </a:r>
-          </a:p>
-          <a:p>
-            <a:r>
-              <a:rPr lang="en-US" dirty="0"/>
-              <a:t>Yes, it's a PivotTable. But because it's code, you can chain it, you can filter it, you can pipe it into a chart, and you can re-run it tomorrow on next month's data without touching the dialog box.</a:t>
-            </a:r>
+              <a:t/>
+            </a:r>
+            <a:endParaRPr lang="en-US" dirty="0"/>
           </a:p>
         </p:txBody>
       </p:sp>
@@ -1182,38 +1229,9 @@
           <a:p>
             <a:r>
               <a:rPr lang="en-US" dirty="0"/>
-              <a:t>Let me stitch it together with a real question. "What's the average price by category, but only in the US, sorted from highest to lowest?"</a:t>
-            </a:r>
-          </a:p>
-          <a:p>
-            <a:r>
-              <a:rPr lang="en-US" dirty="0"/>
-              <a:t>Three steps. Filter, group, sort.</a:t>
-            </a:r>
-          </a:p>
-          <a:p>
-            <a:r>
-              <a:rPr lang="en-US" dirty="0"/>
-              <a:t>First — filter. u-s equals sales-df, square bracket, sales-df country equals equals United States. That gives me only the US orders.</a:t>
-            </a:r>
-          </a:p>
-          <a:p>
-            <a:r>
-              <a:rPr lang="en-US" dirty="0"/>
-              <a:t>Then group. by underscore cat equals u-s dot groupby category, bracket unit-price, dot mean.</a:t>
-            </a:r>
-          </a:p>
-          <a:p>
-            <a:r>
-              <a:rPr lang="en-US" dirty="0"/>
-              <a:t>Then sort. by-cat dot sort underscore values, ascending equals False, so highest first.</a:t>
-            </a:r>
-          </a:p>
-          <a:p>
-            <a:r>
-              <a:rPr lang="en-US" dirty="0"/>
-              <a:t>Stop and look at that for a second. Filter, group, sort. That's the exact same workflow you'd run in Excel — just spelled in code. Once you see that the verbs are the same, the syntax stops feeling foreign.</a:t>
-            </a:r>
+              <a:t/>
+            </a:r>
+            <a:endParaRPr lang="en-US" dirty="0"/>
           </a:p>
         </p:txBody>
       </p:sp>
@@ -1299,20 +1317,9 @@
           <a:p>
             <a:r>
               <a:rPr lang="en-US" dirty="0"/>
-              <a:t>Part four. About ten minutes. The fun part.</a:t>
-            </a:r>
-          </a:p>
-          <a:p>
-            <a:r>
-              <a:rPr lang="en-US" dirty="0"/>
-              <a:t>I promised you a chart that earns gasps, and we are going to deliver. A correlation heatmap. One line of code.</a:t>
-            </a:r>
-          </a:p>
-          <a:p>
-            <a:r>
-              <a:rPr lang="en-US" dirty="0"/>
-              <a:t>If you've ever tried to build a heatmap in native Excel — conditional formatting, manual cell ranges, the works — you know it's a twenty-minute project. We're going to do it in about fifteen seconds.</a:t>
-            </a:r>
+              <a:t/>
+            </a:r>
+            <a:endParaRPr lang="en-US" dirty="0"/>
           </a:p>
         </p:txBody>
       </p:sp>
@@ -1398,38 +1405,9 @@
           <a:p>
             <a:r>
               <a:rPr lang="en-US" dirty="0"/>
-              <a:t>Here's the whole recipe. I'll walk through it slowly because every line earns its place.</a:t>
-            </a:r>
-          </a:p>
-          <a:p>
-            <a:r>
-              <a:rPr lang="en-US" dirty="0"/>
-              <a:t>Line one — import seaborn as s-n-s. That's the visualization library. Standard convention to alias it as s-n-s.</a:t>
-            </a:r>
-          </a:p>
-          <a:p>
-            <a:r>
-              <a:rPr lang="en-US" dirty="0"/>
-              <a:t>Then I'm adding a revenue column — unit price times quantity. Just so we have one more numeric column to correlate against.</a:t>
-            </a:r>
-          </a:p>
-          <a:p>
-            <a:r>
-              <a:rPr lang="en-US" dirty="0"/>
-              <a:t>And then — the chart. s-n-s dot heatmap. Inside the parentheses: sales-df dot corr, with numeric only equals True, so it only looks at numeric columns. Then annot equals True, which prints the correlation value inside each cell. c-map equals R-d-G-y underscore r — that's a diverging red-grey color scale. And center equals zero, so zero correlation is the neutral midpoint.</a:t>
-            </a:r>
-          </a:p>
-          <a:p>
-            <a:r>
-              <a:rPr lang="en-US" dirty="0"/>
-              <a:t>Eight lines including the import and the calculated column. The actual chart is one line.</a:t>
-            </a:r>
-          </a:p>
-          <a:p>
-            <a:r>
-              <a:rPr lang="en-US" dirty="0"/>
-              <a:t>Look at the result. Strong correlations jump out in red. Weak ones in grey. Negative ones in the opposite red. You can read a story off this in about three seconds. In native Excel — twenty minutes of conditional formatting, and it still wouldn't look this clean.</a:t>
-            </a:r>
+              <a:t/>
+            </a:r>
+            <a:endParaRPr lang="en-US" dirty="0"/>
           </a:p>
         </p:txBody>
       </p:sp>
@@ -1515,32 +1493,9 @@
           <a:p>
             <a:r>
               <a:rPr lang="en-US" dirty="0"/>
-              <a:t>Let me make sure you're in the right room.</a:t>
-            </a:r>
-          </a:p>
-          <a:p>
-            <a:r>
-              <a:rPr lang="en-US" dirty="0"/>
-              <a:t>If you've heard the words "Python in Excel" but you haven't actually typed equals P-Y open-paren yet — you're in the right room.</a:t>
-            </a:r>
-          </a:p>
-          <a:p>
-            <a:r>
-              <a:rPr lang="en-US" dirty="0"/>
-              <a:t>If you're comfortable in Excel — you know your way around formulas, tables, PivotTables — but that next step into Python feels intimidating — you're in the right room.</a:t>
-            </a:r>
-          </a:p>
-          <a:p>
-            <a:r>
-              <a:rPr lang="en-US" dirty="0"/>
-              <a:t>And if you want to leave this hour having actually done it, not just watched a demo — you are very much in the right room.</a:t>
-            </a:r>
-          </a:p>
-          <a:p>
-            <a:r>
-              <a:rPr lang="en-US" dirty="0"/>
-              <a:t>If none of those describe you, no judgment, but the next hour might be a little slow. For everyone else: let's go.</a:t>
-            </a:r>
+              <a:t/>
+            </a:r>
+            <a:endParaRPr lang="en-US" dirty="0"/>
           </a:p>
         </p:txBody>
       </p:sp>
@@ -1626,32 +1581,9 @@
           <a:p>
             <a:r>
               <a:rPr lang="en-US" dirty="0"/>
-              <a:t>If we have time — and only if — one bonus flourish.</a:t>
-            </a:r>
-          </a:p>
-          <a:p>
-            <a:r>
-              <a:rPr lang="en-US" dirty="0"/>
-              <a:t>s-n-s dot pairplot, sales-df, hue equals category. One line.</a:t>
-            </a:r>
-          </a:p>
-          <a:p>
-            <a:r>
-              <a:rPr lang="en-US" dirty="0"/>
-              <a:t>What it does — it plots every numeric variable against every other numeric variable, and color-codes the dots by category. So in one image, you can spot relationships, clusters, and outliers across the entire dataset.</a:t>
-            </a:r>
-          </a:p>
-          <a:p>
-            <a:r>
-              <a:rPr lang="en-US" dirty="0"/>
-              <a:t>One small warning. Pairplots are heavy. In the cloud-backed P-Y cell, they can take a while to render. So I show this slide, I get the gasp, and I move on. I don't try to live-tweak it.</a:t>
-            </a:r>
-          </a:p>
-          <a:p>
-            <a:r>
-              <a:rPr lang="en-US" dirty="0"/>
-              <a:t>The reason this slide exists at all — once you see what one line of seaborn can do, Excel charts start to feel a little ceremonial. There's a place for both, but seaborn one-liners are honestly hard to beat.</a:t>
-            </a:r>
+              <a:t/>
+            </a:r>
+            <a:endParaRPr lang="en-US" dirty="0"/>
           </a:p>
         </p:txBody>
       </p:sp>
@@ -1737,20 +1669,9 @@
           <a:p>
             <a:r>
               <a:rPr lang="en-US" dirty="0"/>
-              <a:t>Part five. We're at the home stretch.</a:t>
-            </a:r>
-          </a:p>
-          <a:p>
-            <a:r>
-              <a:rPr lang="en-US" dirty="0"/>
-              <a:t>We've done what I promised — written a P-Y cell, profiled a dataset, and built a chart Excel can't touch.</a:t>
-            </a:r>
-          </a:p>
-          <a:p>
-            <a:r>
-              <a:rPr lang="en-US" dirty="0"/>
-              <a:t>The last few slides are about what to do tomorrow. Where to keep learning, what to read, and the three things I really want you to remember on Monday morning when nobody's there to help you.</a:t>
-            </a:r>
+              <a:t/>
+            </a:r>
+            <a:endParaRPr lang="en-US" dirty="0"/>
           </a:p>
         </p:txBody>
       </p:sp>
@@ -1836,32 +1757,9 @@
           <a:p>
             <a:r>
               <a:rPr lang="en-US" dirty="0"/>
-              <a:t>Three places to take this further.</a:t>
-            </a:r>
-          </a:p>
-          <a:p>
-            <a:r>
-              <a:rPr lang="en-US" dirty="0"/>
-              <a:t>First — the official Microsoft docs. They're at learn dot microsoft dot com. The platform is still moving fast — new packages, new features show up regularly — so this is the source of truth. Bookmark it.</a:t>
-            </a:r>
-          </a:p>
-          <a:p>
-            <a:r>
-              <a:rPr lang="en-US" dirty="0"/>
-              <a:t>Second — practice. The two workbooks from today are yours to keep. I'll send them to your inbox right after this. Re-run the demos in your own time, and then — and this is the part that matters — point x-l at one of your own tables and see what falls out.</a:t>
-            </a:r>
-          </a:p>
-          <a:p>
-            <a:r>
-              <a:rPr lang="en-US" dirty="0"/>
-              <a:t>Third — if you want to go deeper, the book this workshop is built on. Python in Excel for Data Analytics, from Packt. Chapters one and two cover everything we did today. The later chapters take it through exploratory analysis, regression, and time series.</a:t>
-            </a:r>
-          </a:p>
-          <a:p>
-            <a:r>
-              <a:rPr lang="en-US" dirty="0"/>
-              <a:t>Pick whichever one matches where you are. Don't try to do all three this week.</a:t>
-            </a:r>
+              <a:t/>
+            </a:r>
+            <a:endParaRPr lang="en-US" dirty="0"/>
           </a:p>
         </p:txBody>
       </p:sp>
@@ -1947,32 +1845,9 @@
           <a:p>
             <a:r>
               <a:rPr lang="en-US" dirty="0"/>
-              <a:t>Three things to remember tomorrow. If you only retain three things from the whole hour — these.</a:t>
-            </a:r>
-          </a:p>
-          <a:p>
-            <a:r>
-              <a:rPr lang="en-US" dirty="0"/>
-              <a:t>One. Cells run top-left to bottom-right. If you reference a variable in a cell above or to the left of where you defined it, you'll get a hashtag-PYTHON error. The fix is the same every time — put your imports and your setup variables in the top-left, and build down and to the right.</a:t>
-            </a:r>
-          </a:p>
-          <a:p>
-            <a:r>
-              <a:rPr lang="en-US" dirty="0"/>
-              <a:t>Two. It runs in the cloud. Python in Excel sends your code to Microsoft's servers for execution. Which means — no internet, no P-Y. And don't expect to scrape a website or read a local CSV file. You can only pull data from inside the workbook itself.</a:t>
-            </a:r>
-          </a:p>
-          <a:p>
-            <a:r>
-              <a:rPr lang="en-US" dirty="0"/>
-              <a:t>Three. The default output is Python Object, not Excel Value. So when you write your first P-Y cell and you see a little card icon and nothing spilled into the grid — that's not a bug. That's the default. If you want the data on the sheet, toggle with Control, Alt, Shift, M.</a:t>
-            </a:r>
-          </a:p>
-          <a:p>
-            <a:r>
-              <a:rPr lang="en-US" dirty="0"/>
-              <a:t>Take a picture of this slide. Honestly. These three things will save you the support ticket.</a:t>
-            </a:r>
+              <a:t/>
+            </a:r>
+            <a:endParaRPr lang="en-US" dirty="0"/>
           </a:p>
         </p:txBody>
       </p:sp>
@@ -2058,20 +1933,9 @@
           <a:p>
             <a:r>
               <a:rPr lang="en-US" dirty="0"/>
-              <a:t>And that's the first hour.</a:t>
-            </a:r>
-          </a:p>
-          <a:p>
-            <a:r>
-              <a:rPr lang="en-US" dirty="0"/>
-              <a:t>Drop your questions in the chat — I'll work through as many as we can in the time we've got left.</a:t>
-            </a:r>
-          </a:p>
-          <a:p>
-            <a:r>
-              <a:rPr lang="en-US" dirty="0"/>
-              <a:t>Cheat sheet and both sample files are heading to your inbox right after we wrap. Thanks for spending the hour with me.</a:t>
-            </a:r>
+              <a:t/>
+            </a:r>
+            <a:endParaRPr lang="en-US" dirty="0"/>
           </a:p>
         </p:txBody>
       </p:sp>
@@ -2157,32 +2021,9 @@
           <a:p>
             <a:r>
               <a:rPr lang="en-US" dirty="0"/>
-              <a:t>Here's what success looks like at minute sixty.</a:t>
-            </a:r>
-          </a:p>
-          <a:p>
-            <a:r>
-              <a:rPr lang="en-US" dirty="0"/>
-              <a:t>First — you'll have written your first P-Y cell. Hello world, inside Excel. And just as importantly, you'll know why your A1 reference threw an error, because it will, and that surprises everyone the first time.</a:t>
-            </a:r>
-          </a:p>
-          <a:p>
-            <a:r>
-              <a:rPr lang="en-US" dirty="0"/>
-              <a:t>Second — you'll have profiled a real dataset. Two hundred sales orders, six pandas moves. Fewer formulas than you'd guess.</a:t>
-            </a:r>
-          </a:p>
-          <a:p>
-            <a:r>
-              <a:rPr lang="en-US" dirty="0"/>
-              <a:t>And third — you'll have built a chart that earns gasps. A correlation heatmap. One line of code. Try doing that natively in Excel — I'll wait.</a:t>
-            </a:r>
-          </a:p>
-          <a:p>
-            <a:r>
-              <a:rPr lang="en-US" dirty="0"/>
-              <a:t>Three concrete wins. Let's earn them.</a:t>
-            </a:r>
+              <a:t/>
+            </a:r>
+            <a:endParaRPr lang="en-US" dirty="0"/>
           </a:p>
         </p:txBody>
       </p:sp>
@@ -2268,20 +2109,9 @@
           <a:p>
             <a:r>
               <a:rPr lang="en-US" dirty="0"/>
-              <a:t>Part one. About ten minutes.</a:t>
-            </a:r>
-          </a:p>
-          <a:p>
-            <a:r>
-              <a:rPr lang="en-US" dirty="0"/>
-              <a:t>Before we touch a single P-Y cell, I want to answer the obvious question — why does this thing even exist?</a:t>
-            </a:r>
-          </a:p>
-          <a:p>
-            <a:r>
-              <a:rPr lang="en-US" dirty="0"/>
-              <a:t>Excel already has formulas. It already has Power Query. So when does Python earn its place on the grid, and when is it the wrong tool? That's what the next few slides are about.</a:t>
-            </a:r>
+              <a:t/>
+            </a:r>
+            <a:endParaRPr lang="en-US" dirty="0"/>
           </a:p>
         </p:txBody>
       </p:sp>
@@ -2367,38 +2197,9 @@
           <a:p>
             <a:r>
               <a:rPr lang="en-US" dirty="0"/>
-              <a:t>I want to start by acknowledging something. The Excel grid is brilliant. I've made a career on it. I'm not here to bury Excel — I'm here to tell you where it starts to feel cumbersome.</a:t>
-            </a:r>
-          </a:p>
-          <a:p>
-            <a:r>
-              <a:rPr lang="en-US" dirty="0"/>
-              <a:t>Counting missing values across every column. In native Excel, that's a nested COUNTBLANK per column. In pandas, it's one line — sales-df dot is-na dot sum.</a:t>
-            </a:r>
-          </a:p>
-          <a:p>
-            <a:r>
-              <a:rPr lang="en-US" dirty="0"/>
-              <a:t>Resampling a time series into monthly buckets, or doing a rolling average. Native Excel — heroic helper columns. Pandas — one dot-resample call.</a:t>
-            </a:r>
-          </a:p>
-          <a:p>
-            <a:r>
-              <a:rPr lang="en-US" dirty="0"/>
-              <a:t>Small multiples, jitter plots, heatmaps. Native Excel — honestly, not really. Seaborn — one line.</a:t>
-            </a:r>
-          </a:p>
-          <a:p>
-            <a:r>
-              <a:rPr lang="en-US" dirty="0"/>
-              <a:t>Multi-variable descriptive stats. Native Excel pushes you into the Analysis ToolPak, which is a round-trip. Pandas — dot-describe. Done.</a:t>
-            </a:r>
-          </a:p>
-          <a:p>
-            <a:r>
-              <a:rPr lang="en-US" dirty="0"/>
-              <a:t>If you recognize any of these as a Monday-morning pain point — that's your reason to keep listening.</a:t>
-            </a:r>
+              <a:t/>
+            </a:r>
+            <a:endParaRPr lang="en-US" dirty="0"/>
           </a:p>
         </p:txBody>
       </p:sp>
@@ -2484,32 +2285,9 @@
           <a:p>
             <a:r>
               <a:rPr lang="en-US" dirty="0"/>
-              <a:t>Here's the mental model I want you to leave with. Three tools, three jobs. They're not competitors — they live happily in the same workbook.</a:t>
-            </a:r>
-          </a:p>
-          <a:p>
-            <a:r>
-              <a:rPr lang="en-US" dirty="0"/>
-              <a:t>Formulas are for quick lookups, references, ad-hoc math. When the answer lives in nearby cells — XLOOKUP, IF, SUMIFS — formulas are the right call. Don't over-engineer it.</a:t>
-            </a:r>
-          </a:p>
-          <a:p>
-            <a:r>
-              <a:rPr lang="en-US" dirty="0"/>
-              <a:t>Power Query is for repeatable data prep and connections. The test I use — if the same prep is going to run again next month, that work belongs in Power Query, not in formulas you'll forget how to maintain.</a:t>
-            </a:r>
-          </a:p>
-          <a:p>
-            <a:r>
-              <a:rPr lang="en-US" dirty="0"/>
-              <a:t>And Python in Excel is for analysis, statistics, and custom visualization. When you need pandas, seaborn, or statsmodels — that's the green light to drop into a P-Y cell.</a:t>
-            </a:r>
-          </a:p>
-          <a:p>
-            <a:r>
-              <a:rPr lang="en-US" dirty="0"/>
-              <a:t>The skill is knowing which tool you're reaching for, and why. Today is about adding the third tool to that toolkit.</a:t>
-            </a:r>
+              <a:t/>
+            </a:r>
+            <a:endParaRPr lang="en-US" dirty="0"/>
           </a:p>
         </p:txBody>
       </p:sp>
@@ -2595,20 +2373,9 @@
           <a:p>
             <a:r>
               <a:rPr lang="en-US" dirty="0"/>
-              <a:t>Part two. Hello world, in a cell. Another ten minutes or so.</a:t>
-            </a:r>
-          </a:p>
-          <a:p>
-            <a:r>
-              <a:rPr lang="en-US" dirty="0"/>
-              <a:t>If you haven't already, open the file called ch underscore zero one dot xlsx. That's the workbook we'll use for this section.</a:t>
-            </a:r>
-          </a:p>
-          <a:p>
-            <a:r>
-              <a:rPr lang="en-US" dirty="0"/>
-              <a:t>Three things to cover here. How a P-Y cell actually works. The two output modes — and how to switch between them. And one calculation-order gotcha that catches absolutely everyone the first time.</a:t>
-            </a:r>
+              <a:t/>
+            </a:r>
+            <a:endParaRPr lang="en-US" dirty="0"/>
           </a:p>
         </p:txBody>
       </p:sp>
@@ -2694,32 +2461,9 @@
           <a:p>
             <a:r>
               <a:rPr lang="en-US" dirty="0"/>
-              <a:t>Three ways to turn a cell into a P-Y cell. Use whichever one feels least like work.</a:t>
-            </a:r>
-          </a:p>
-          <a:p>
-            <a:r>
-              <a:rPr lang="en-US" dirty="0"/>
-              <a:t>Option one — the ribbon. Formulas tab, then Insert Python. This is the discoverable one. If you forget the others, you can always find this.</a:t>
-            </a:r>
-          </a:p>
-          <a:p>
-            <a:r>
-              <a:rPr lang="en-US" dirty="0"/>
-              <a:t>Option two — just type it. Equals, P, Y, open-paren. The cell flips into Python mode. Use this once you trust it.</a:t>
-            </a:r>
-          </a:p>
-          <a:p>
-            <a:r>
-              <a:rPr lang="en-US" dirty="0"/>
-              <a:t>Option three — the keyboard shortcut. Control, Alt, Shift, P. Four-finger chord. Use this once you're showing off.</a:t>
-            </a:r>
-          </a:p>
-          <a:p>
-            <a:r>
-              <a:rPr lang="en-US" dirty="0"/>
-              <a:t>However you get in, look for the little green P-Y badge — it shows up in the cell and in the formula bar. That's your confirmation you're in Python mode and not still typing a formula.</a:t>
-            </a:r>
+              <a:t/>
+            </a:r>
+            <a:endParaRPr lang="en-US" dirty="0"/>
           </a:p>
         </p:txBody>
       </p:sp>
@@ -2805,32 +2549,9 @@
           <a:p>
             <a:r>
               <a:rPr lang="en-US" dirty="0"/>
-              <a:t>Once you've written a P-Y cell, you've got a choice to make about how you want to see the result. There are two modes, and the toggle is Control, Alt, Shift, M. Or click the little icon just to the left of the formula bar.</a:t>
-            </a:r>
-          </a:p>
-          <a:p>
-            <a:r>
-              <a:rPr lang="en-US" dirty="0"/>
-              <a:t>Mode one — Python Object. This is the default. You'll see a card icon, the dimensions of the object, and a small preview. The whole thing stays inside one cell. It doesn't spill.</a:t>
-            </a:r>
-          </a:p>
-          <a:p>
-            <a:r>
-              <a:rPr lang="en-US" dirty="0"/>
-              <a:t>Why default to this? Because mid-analysis, you want the object to stay an object. You want to chain operations on it — group it, filter it, plot it. Think of it as a linked data type.</a:t>
-            </a:r>
-          </a:p>
-          <a:p>
-            <a:r>
-              <a:rPr lang="en-US" dirty="0"/>
-              <a:t>Mode two — Excel Value. This spills the result out into the grid as a dynamic array, just like a regular formula. Once it's spilled, you can format it with normal Excel tools, point a chart at it, reference it from another cell.</a:t>
-            </a:r>
-          </a:p>
-          <a:p>
-            <a:r>
-              <a:rPr lang="en-US" dirty="0"/>
-              <a:t>The rule of thumb — Python Object while you're working. Excel Value at the end, when you're handing the result back to the spreadsheet.</a:t>
-            </a:r>
+              <a:t/>
+            </a:r>
+            <a:endParaRPr lang="en-US" dirty="0"/>
           </a:p>
         </p:txBody>
       </p:sp>
@@ -2903,11 +2624,6 @@
 <file path=ppt/slideMasters/slideMaster1.xml><?xml version="1.0" encoding="utf-8"?>
 <p:sldMaster xmlns:a="http://schemas.openxmlformats.org/drawingml/2006/main" xmlns:r="http://schemas.openxmlformats.org/officeDocument/2006/relationships" xmlns:p="http://schemas.openxmlformats.org/presentationml/2006/main">
   <p:cSld>
-    <p:bg>
-      <p:bgRef idx="1001">
-        <a:schemeClr val="bg1"/>
-      </p:bgRef>
-    </p:bg>
     <p:spTree>
       <p:nvGrpSpPr>
         <p:cNvPr id="1" name=""/>
@@ -3188,9 +2904,8 @@
     <p:bg>
       <p:bgPr>
         <a:solidFill>
-          <a:srgbClr val="EEECE1"/>
+          <a:srgbClr val="FAFAF7"/>
         </a:solidFill>
-        <a:effectLst/>
       </p:bgPr>
     </p:bg>
     <p:spTree>
@@ -3228,13 +2943,13 @@
           <a:bodyPr wrap="square" lIns="0" tIns="0" rIns="0" bIns="0" rtlCol="0" anchor="ctr"/>
           <a:lstStyle/>
           <a:p>
-            <a:pPr marL="0" indent="0">
-              <a:buNone/>
-            </a:pPr>
-            <a:r>
-              <a:rPr lang="en-US" sz="1400" b="1" kern="0" spc="800" dirty="0">
-                <a:solidFill>
-                  <a:srgbClr val="CF3338"/>
+            <a:pPr indent="0" marL="0">
+              <a:buNone/>
+            </a:pPr>
+            <a:r>
+              <a:rPr lang="en-US" sz="1400" b="1" spc="800" kern="0" dirty="0">
+                <a:solidFill>
+                  <a:srgbClr val="2A4365"/>
                 </a:solidFill>
                 <a:latin typeface="Arial" pitchFamily="34" charset="0"/>
                 <a:ea typeface="Arial" pitchFamily="34" charset="-122"/>
@@ -3267,13 +2982,13 @@
           <a:bodyPr wrap="square" lIns="0" tIns="0" rIns="0" bIns="0" rtlCol="0" anchor="ctr"/>
           <a:lstStyle/>
           <a:p>
-            <a:pPr marL="0" indent="0">
+            <a:pPr indent="0" marL="0">
               <a:buNone/>
             </a:pPr>
             <a:r>
               <a:rPr lang="en-US" sz="6000" b="1" dirty="0">
                 <a:solidFill>
-                  <a:srgbClr val="CF3338"/>
+                  <a:srgbClr val="2A4365"/>
                 </a:solidFill>
                 <a:latin typeface="Arial Black" pitchFamily="34" charset="0"/>
                 <a:ea typeface="Arial Black" pitchFamily="34" charset="-122"/>
@@ -3306,13 +3021,13 @@
           <a:bodyPr wrap="square" lIns="0" tIns="0" rIns="0" bIns="0" rtlCol="0" anchor="ctr"/>
           <a:lstStyle/>
           <a:p>
-            <a:pPr marL="0" indent="0">
+            <a:pPr indent="0" marL="0">
               <a:buNone/>
             </a:pPr>
             <a:r>
               <a:rPr lang="en-US" sz="6000" b="1" dirty="0">
                 <a:solidFill>
-                  <a:srgbClr val="1F2120"/>
+                  <a:srgbClr val="1A202C"/>
                 </a:solidFill>
                 <a:latin typeface="Arial Black" pitchFamily="34" charset="0"/>
                 <a:ea typeface="Arial Black" pitchFamily="34" charset="-122"/>
@@ -3345,13 +3060,13 @@
           <a:bodyPr wrap="square" lIns="0" tIns="0" rIns="0" bIns="0" rtlCol="0" anchor="ctr"/>
           <a:lstStyle/>
           <a:p>
-            <a:pPr marL="0" indent="0">
+            <a:pPr indent="0" marL="0">
               <a:buNone/>
             </a:pPr>
             <a:r>
               <a:rPr lang="en-US" sz="1600" i="1" dirty="0">
                 <a:solidFill>
-                  <a:srgbClr val="707070"/>
+                  <a:srgbClr val="4A5568"/>
                 </a:solidFill>
                 <a:latin typeface="Arial" pitchFamily="34" charset="0"/>
                 <a:ea typeface="Arial" pitchFamily="34" charset="-122"/>
@@ -3378,29 +3093,17 @@
             <a:avLst/>
           </a:prstGeom>
           <a:solidFill>
-            <a:srgbClr val="CF3338"/>
+            <a:srgbClr val="2A4365"/>
           </a:solidFill>
           <a:ln w="12700">
             <a:solidFill>
-              <a:srgbClr val="CF3338"/>
+              <a:srgbClr val="2A4365"/>
             </a:solidFill>
             <a:prstDash val="solid"/>
           </a:ln>
         </p:spPr>
-        <p:txBody>
-          <a:bodyPr/>
-          <a:lstStyle/>
-          <a:p>
-            <a:endParaRPr lang="en-US"/>
-          </a:p>
-        </p:txBody>
       </p:sp>
     </p:spTree>
-    <p:extLst>
-      <p:ext uri="{BB962C8B-B14F-4D97-AF65-F5344CB8AC3E}">
-        <p14:creationId xmlns:p14="http://schemas.microsoft.com/office/powerpoint/2010/main" val="2460597134"/>
-      </p:ext>
-    </p:extLst>
   </p:cSld>
   <p:clrMapOvr>
     <a:masterClrMapping/>
@@ -3414,9 +3117,8 @@
     <p:bg>
       <p:bgPr>
         <a:solidFill>
-          <a:srgbClr val="EEECE1"/>
+          <a:srgbClr val="FAFAF7"/>
         </a:solidFill>
-        <a:effectLst/>
       </p:bgPr>
     </p:bg>
     <p:spTree>
@@ -3454,13 +3156,13 @@
           <a:bodyPr wrap="square" lIns="0" tIns="0" rIns="0" bIns="0" rtlCol="0" anchor="ctr"/>
           <a:lstStyle/>
           <a:p>
-            <a:pPr marL="0" indent="0">
+            <a:pPr indent="0" marL="0">
               <a:buNone/>
             </a:pPr>
             <a:r>
               <a:rPr lang="en-US" sz="3000" b="1" dirty="0">
                 <a:solidFill>
-                  <a:srgbClr val="CF3338"/>
+                  <a:srgbClr val="2A4365"/>
                 </a:solidFill>
                 <a:latin typeface="Arial Black" pitchFamily="34" charset="0"/>
                 <a:ea typeface="Arial Black" pitchFamily="34" charset="-122"/>
@@ -3493,13 +3195,13 @@
           <a:bodyPr wrap="square" lIns="0" tIns="0" rIns="0" bIns="0" rtlCol="0" anchor="ctr"/>
           <a:lstStyle/>
           <a:p>
-            <a:pPr marL="0" indent="0">
+            <a:pPr indent="0" marL="0">
               <a:buNone/>
             </a:pPr>
             <a:r>
               <a:rPr lang="en-US" sz="1500" i="1" dirty="0">
                 <a:solidFill>
-                  <a:srgbClr val="1F2120"/>
+                  <a:srgbClr val="1A202C"/>
                 </a:solidFill>
                 <a:latin typeface="Arial" pitchFamily="34" charset="0"/>
                 <a:ea typeface="Arial" pitchFamily="34" charset="-122"/>
@@ -3513,14 +3215,14 @@
       </p:sp>
       <p:pic>
         <p:nvPicPr>
-          <p:cNvPr id="4" name="Image 0" descr="/sessions/festive-gallant-bohr/mnt/outputs/images/calc-order.png"/>
+          <p:cNvPr id="4" name="Image 0" descr="/sessions/festive-gallant-bohr/mnt/outputs/images/calc-order.png">    </p:cNvPr>
           <p:cNvPicPr>
             <a:picLocks noChangeAspect="1"/>
           </p:cNvPicPr>
           <p:nvPr/>
         </p:nvPicPr>
         <p:blipFill>
-          <a:blip r:embed="rId3"/>
+          <a:blip r:embed="rId1"/>
           <a:stretch>
             <a:fillRect/>
           </a:stretch>
@@ -3556,13 +3258,13 @@
           <a:bodyPr wrap="square" lIns="0" tIns="0" rIns="0" bIns="0" rtlCol="0" anchor="ctr"/>
           <a:lstStyle/>
           <a:p>
-            <a:pPr marL="0" indent="0">
+            <a:pPr indent="0" marL="0">
               <a:buNone/>
             </a:pPr>
             <a:r>
               <a:rPr lang="en-US" sz="1300" b="1" dirty="0">
                 <a:solidFill>
-                  <a:srgbClr val="1F2120"/>
+                  <a:srgbClr val="1A202C"/>
                 </a:solidFill>
                 <a:latin typeface="Arial" pitchFamily="34" charset="0"/>
                 <a:ea typeface="Arial" pitchFamily="34" charset="-122"/>
@@ -3605,7 +3307,7 @@
             <a:r>
               <a:rPr lang="en-US" sz="1300" dirty="0">
                 <a:solidFill>
-                  <a:srgbClr val="1F2120"/>
+                  <a:srgbClr val="1A202C"/>
                 </a:solidFill>
                 <a:latin typeface="Arial" pitchFamily="34" charset="0"/>
                 <a:ea typeface="Arial" pitchFamily="34" charset="-122"/>
@@ -3626,7 +3328,7 @@
             <a:r>
               <a:rPr lang="en-US" sz="1300" dirty="0">
                 <a:solidFill>
-                  <a:srgbClr val="1F2120"/>
+                  <a:srgbClr val="1A202C"/>
                 </a:solidFill>
                 <a:latin typeface="Arial" pitchFamily="34" charset="0"/>
                 <a:ea typeface="Arial" pitchFamily="34" charset="-122"/>
@@ -3647,7 +3349,7 @@
             <a:r>
               <a:rPr lang="en-US" sz="1300" dirty="0">
                 <a:solidFill>
-                  <a:srgbClr val="1F2120"/>
+                  <a:srgbClr val="1A202C"/>
                 </a:solidFill>
                 <a:latin typeface="Arial" pitchFamily="34" charset="0"/>
                 <a:ea typeface="Arial" pitchFamily="34" charset="-122"/>
@@ -3680,13 +3382,13 @@
           <a:bodyPr wrap="square" lIns="0" tIns="0" rIns="0" bIns="0" rtlCol="0" anchor="ctr"/>
           <a:lstStyle/>
           <a:p>
-            <a:pPr marL="0" indent="0">
+            <a:pPr indent="0" marL="0">
               <a:buNone/>
             </a:pPr>
             <a:r>
               <a:rPr lang="en-US" sz="1300" b="1" dirty="0">
                 <a:solidFill>
-                  <a:srgbClr val="1F2120"/>
+                  <a:srgbClr val="1A202C"/>
                 </a:solidFill>
                 <a:latin typeface="Arial" pitchFamily="34" charset="0"/>
                 <a:ea typeface="Arial" pitchFamily="34" charset="-122"/>
@@ -3719,13 +3421,13 @@
           <a:bodyPr wrap="square" lIns="0" tIns="0" rIns="0" bIns="0" rtlCol="0" anchor="ctr"/>
           <a:lstStyle/>
           <a:p>
-            <a:pPr marL="0" indent="0">
+            <a:pPr indent="0" marL="0">
               <a:buNone/>
             </a:pPr>
             <a:r>
               <a:rPr lang="en-US" sz="1200" i="1" dirty="0">
                 <a:solidFill>
-                  <a:srgbClr val="707070"/>
+                  <a:srgbClr val="4A5568"/>
                 </a:solidFill>
                 <a:latin typeface="Arial" pitchFamily="34" charset="0"/>
                 <a:ea typeface="Arial" pitchFamily="34" charset="-122"/>
@@ -3738,11 +3440,6 @@
         </p:txBody>
       </p:sp>
     </p:spTree>
-    <p:extLst>
-      <p:ext uri="{BB962C8B-B14F-4D97-AF65-F5344CB8AC3E}">
-        <p14:creationId xmlns:p14="http://schemas.microsoft.com/office/powerpoint/2010/main" val="3358648697"/>
-      </p:ext>
-    </p:extLst>
   </p:cSld>
   <p:clrMapOvr>
     <a:masterClrMapping/>
@@ -3756,9 +3453,8 @@
     <p:bg>
       <p:bgPr>
         <a:solidFill>
-          <a:srgbClr val="C00000"/>
+          <a:srgbClr val="1A365D"/>
         </a:solidFill>
-        <a:effectLst/>
       </p:bgPr>
     </p:bg>
     <p:spTree>
@@ -3796,11 +3492,11 @@
           <a:bodyPr wrap="square" lIns="0" tIns="0" rIns="0" bIns="0" rtlCol="0" anchor="ctr"/>
           <a:lstStyle/>
           <a:p>
-            <a:pPr marL="0" indent="0">
-              <a:buNone/>
-            </a:pPr>
-            <a:r>
-              <a:rPr lang="en-US" sz="2000" kern="0" spc="800" dirty="0">
+            <a:pPr indent="0" marL="0">
+              <a:buNone/>
+            </a:pPr>
+            <a:r>
+              <a:rPr lang="en-US" sz="2000" spc="800" kern="0" dirty="0">
                 <a:solidFill>
                   <a:srgbClr val="FFFFFF"/>
                 </a:solidFill>
@@ -3835,7 +3531,7 @@
           <a:bodyPr wrap="square" lIns="0" tIns="0" rIns="0" bIns="0" rtlCol="0" anchor="ctr"/>
           <a:lstStyle/>
           <a:p>
-            <a:pPr marL="0" indent="0">
+            <a:pPr indent="0" marL="0">
               <a:buNone/>
             </a:pPr>
             <a:r>
@@ -3874,7 +3570,7 @@
           <a:bodyPr wrap="square" lIns="0" tIns="0" rIns="0" bIns="0" rtlCol="0" anchor="ctr"/>
           <a:lstStyle/>
           <a:p>
-            <a:pPr marL="0" indent="0">
+            <a:pPr indent="0" marL="0">
               <a:buNone/>
             </a:pPr>
             <a:r>
@@ -3913,7 +3609,7 @@
           <a:bodyPr wrap="square" lIns="0" tIns="0" rIns="0" bIns="0" rtlCol="0" anchor="ctr"/>
           <a:lstStyle/>
           <a:p>
-            <a:pPr marL="0" indent="0">
+            <a:pPr indent="0" marL="0">
               <a:buNone/>
             </a:pPr>
             <a:r>
@@ -3932,11 +3628,6 @@
         </p:txBody>
       </p:sp>
     </p:spTree>
-    <p:extLst>
-      <p:ext uri="{BB962C8B-B14F-4D97-AF65-F5344CB8AC3E}">
-        <p14:creationId xmlns:p14="http://schemas.microsoft.com/office/powerpoint/2010/main" val="2389995823"/>
-      </p:ext>
-    </p:extLst>
   </p:cSld>
   <p:clrMapOvr>
     <a:masterClrMapping/>
@@ -3950,9 +3641,8 @@
     <p:bg>
       <p:bgPr>
         <a:solidFill>
-          <a:srgbClr val="EEECE1"/>
+          <a:srgbClr val="FAFAF7"/>
         </a:solidFill>
-        <a:effectLst/>
       </p:bgPr>
     </p:bg>
     <p:spTree>
@@ -3990,13 +3680,13 @@
           <a:bodyPr wrap="square" lIns="0" tIns="0" rIns="0" bIns="0" rtlCol="0" anchor="ctr"/>
           <a:lstStyle/>
           <a:p>
-            <a:pPr marL="0" indent="0">
+            <a:pPr indent="0" marL="0">
               <a:buNone/>
             </a:pPr>
             <a:r>
               <a:rPr lang="en-US" sz="2800" b="1" dirty="0">
                 <a:solidFill>
-                  <a:srgbClr val="1F2120"/>
+                  <a:srgbClr val="1A202C"/>
                 </a:solidFill>
                 <a:latin typeface="Arial Black" pitchFamily="34" charset="0"/>
                 <a:ea typeface="Arial Black" pitchFamily="34" charset="-122"/>
@@ -4029,13 +3719,13 @@
           <a:bodyPr wrap="square" lIns="0" tIns="0" rIns="0" bIns="0" rtlCol="0" anchor="ctr"/>
           <a:lstStyle/>
           <a:p>
-            <a:pPr marL="0" indent="0">
+            <a:pPr indent="0" marL="0">
               <a:buNone/>
             </a:pPr>
             <a:r>
               <a:rPr lang="en-US" sz="1400" i="1" dirty="0">
                 <a:solidFill>
-                  <a:srgbClr val="707070"/>
+                  <a:srgbClr val="4A5568"/>
                 </a:solidFill>
                 <a:latin typeface="Arial" pitchFamily="34" charset="0"/>
                 <a:ea typeface="Arial" pitchFamily="34" charset="-122"/>
@@ -4066,18 +3756,11 @@
           </a:solidFill>
           <a:ln w="12700">
             <a:solidFill>
-              <a:srgbClr val="E0DDD0"/>
+              <a:srgbClr val="E2E1DC"/>
             </a:solidFill>
             <a:prstDash val="solid"/>
           </a:ln>
         </p:spPr>
-        <p:txBody>
-          <a:bodyPr/>
-          <a:lstStyle/>
-          <a:p>
-            <a:endParaRPr lang="en-US"/>
-          </a:p>
-        </p:txBody>
       </p:sp>
       <p:sp>
         <p:nvSpPr>
@@ -4094,22 +3777,15 @@
             <a:avLst/>
           </a:prstGeom>
           <a:solidFill>
-            <a:srgbClr val="CF3338"/>
+            <a:srgbClr val="2A4365"/>
           </a:solidFill>
           <a:ln w="12700">
             <a:solidFill>
-              <a:srgbClr val="CF3338"/>
+              <a:srgbClr val="2A4365"/>
             </a:solidFill>
             <a:prstDash val="solid"/>
           </a:ln>
         </p:spPr>
-        <p:txBody>
-          <a:bodyPr/>
-          <a:lstStyle/>
-          <a:p>
-            <a:endParaRPr lang="en-US"/>
-          </a:p>
-        </p:txBody>
       </p:sp>
       <p:sp>
         <p:nvSpPr>
@@ -4132,13 +3808,13 @@
           <a:bodyPr wrap="square" lIns="0" tIns="0" rIns="0" bIns="0" rtlCol="0" anchor="ctr"/>
           <a:lstStyle/>
           <a:p>
-            <a:pPr marL="0" indent="0">
+            <a:pPr indent="0" marL="0">
               <a:buNone/>
             </a:pPr>
             <a:r>
               <a:rPr lang="en-US" sz="1600" dirty="0">
                 <a:solidFill>
-                  <a:srgbClr val="1F2120"/>
+                  <a:srgbClr val="1A202C"/>
                 </a:solidFill>
                 <a:latin typeface="Courier New" pitchFamily="34" charset="0"/>
                 <a:ea typeface="Courier New" pitchFamily="34" charset="-122"/>
@@ -4149,13 +3825,13 @@
             <a:endParaRPr lang="en-US" sz="1600" dirty="0"/>
           </a:p>
           <a:p>
-            <a:pPr marL="0" indent="0">
+            <a:pPr indent="0" marL="0">
               <a:buNone/>
             </a:pPr>
             <a:r>
               <a:rPr lang="en-US" sz="1600" dirty="0">
                 <a:solidFill>
-                  <a:srgbClr val="1F2120"/>
+                  <a:srgbClr val="1A202C"/>
                 </a:solidFill>
                 <a:latin typeface="Courier New" pitchFamily="34" charset="0"/>
                 <a:ea typeface="Courier New" pitchFamily="34" charset="-122"/>
@@ -4188,13 +3864,13 @@
           <a:bodyPr wrap="square" lIns="0" tIns="0" rIns="0" bIns="0" rtlCol="0" anchor="ctr"/>
           <a:lstStyle/>
           <a:p>
-            <a:pPr marL="0" indent="0">
+            <a:pPr indent="0" marL="0">
               <a:buNone/>
             </a:pPr>
             <a:r>
               <a:rPr lang="en-US" sz="1600" b="1" dirty="0">
                 <a:solidFill>
-                  <a:srgbClr val="1F2120"/>
+                  <a:srgbClr val="1A202C"/>
                 </a:solidFill>
                 <a:latin typeface="Arial" pitchFamily="34" charset="0"/>
                 <a:ea typeface="Arial" pitchFamily="34" charset="-122"/>
@@ -4237,7 +3913,7 @@
             <a:r>
               <a:rPr lang="en-US" sz="1600" dirty="0">
                 <a:solidFill>
-                  <a:srgbClr val="1F2120"/>
+                  <a:srgbClr val="1A202C"/>
                 </a:solidFill>
                 <a:latin typeface="Arial" pitchFamily="34" charset="0"/>
                 <a:ea typeface="Arial" pitchFamily="34" charset="-122"/>
@@ -4258,7 +3934,7 @@
             <a:r>
               <a:rPr lang="en-US" sz="1600" dirty="0">
                 <a:solidFill>
-                  <a:srgbClr val="1F2120"/>
+                  <a:srgbClr val="1A202C"/>
                 </a:solidFill>
                 <a:latin typeface="Arial" pitchFamily="34" charset="0"/>
                 <a:ea typeface="Arial" pitchFamily="34" charset="-122"/>
@@ -4279,7 +3955,7 @@
             <a:r>
               <a:rPr lang="en-US" sz="1600" dirty="0">
                 <a:solidFill>
-                  <a:srgbClr val="1F2120"/>
+                  <a:srgbClr val="1A202C"/>
                 </a:solidFill>
                 <a:latin typeface="Arial" pitchFamily="34" charset="0"/>
                 <a:ea typeface="Arial" pitchFamily="34" charset="-122"/>
@@ -4292,11 +3968,6 @@
         </p:txBody>
       </p:sp>
     </p:spTree>
-    <p:extLst>
-      <p:ext uri="{BB962C8B-B14F-4D97-AF65-F5344CB8AC3E}">
-        <p14:creationId xmlns:p14="http://schemas.microsoft.com/office/powerpoint/2010/main" val="2861359310"/>
-      </p:ext>
-    </p:extLst>
   </p:cSld>
   <p:clrMapOvr>
     <a:masterClrMapping/>
@@ -4310,9 +3981,8 @@
     <p:bg>
       <p:bgPr>
         <a:solidFill>
-          <a:srgbClr val="EEECE1"/>
+          <a:srgbClr val="FAFAF7"/>
         </a:solidFill>
-        <a:effectLst/>
       </p:bgPr>
     </p:bg>
     <p:spTree>
@@ -4350,13 +4020,13 @@
           <a:bodyPr wrap="square" lIns="0" tIns="0" rIns="0" bIns="0" rtlCol="0" anchor="ctr"/>
           <a:lstStyle/>
           <a:p>
-            <a:pPr marL="0" indent="0">
+            <a:pPr indent="0" marL="0">
               <a:buNone/>
             </a:pPr>
             <a:r>
               <a:rPr lang="en-US" sz="3000" b="1" dirty="0">
                 <a:solidFill>
-                  <a:srgbClr val="1F2120"/>
+                  <a:srgbClr val="1A202C"/>
                 </a:solidFill>
                 <a:latin typeface="Arial Black" pitchFamily="34" charset="0"/>
                 <a:ea typeface="Arial Black" pitchFamily="34" charset="-122"/>
@@ -4389,13 +4059,13 @@
           <a:bodyPr wrap="square" lIns="0" tIns="0" rIns="0" bIns="0" rtlCol="0" anchor="ctr"/>
           <a:lstStyle/>
           <a:p>
-            <a:pPr marL="0" indent="0">
+            <a:pPr indent="0" marL="0">
               <a:buNone/>
             </a:pPr>
             <a:r>
               <a:rPr lang="en-US" sz="1500" i="1" dirty="0">
                 <a:solidFill>
-                  <a:srgbClr val="707070"/>
+                  <a:srgbClr val="4A5568"/>
                 </a:solidFill>
                 <a:latin typeface="Arial" pitchFamily="34" charset="0"/>
                 <a:ea typeface="Arial" pitchFamily="34" charset="-122"/>
@@ -4426,18 +4096,11 @@
           </a:solidFill>
           <a:ln w="12700">
             <a:solidFill>
-              <a:srgbClr val="E0DDD0"/>
+              <a:srgbClr val="E2E1DC"/>
             </a:solidFill>
             <a:prstDash val="solid"/>
           </a:ln>
         </p:spPr>
-        <p:txBody>
-          <a:bodyPr/>
-          <a:lstStyle/>
-          <a:p>
-            <a:endParaRPr lang="en-US"/>
-          </a:p>
-        </p:txBody>
       </p:sp>
       <p:sp>
         <p:nvSpPr>
@@ -4454,22 +4117,15 @@
             <a:avLst/>
           </a:prstGeom>
           <a:solidFill>
-            <a:srgbClr val="CF3338"/>
+            <a:srgbClr val="2A4365"/>
           </a:solidFill>
           <a:ln w="12700">
             <a:solidFill>
-              <a:srgbClr val="CF3338"/>
+              <a:srgbClr val="2A4365"/>
             </a:solidFill>
             <a:prstDash val="solid"/>
           </a:ln>
         </p:spPr>
-        <p:txBody>
-          <a:bodyPr/>
-          <a:lstStyle/>
-          <a:p>
-            <a:endParaRPr lang="en-US"/>
-          </a:p>
-        </p:txBody>
       </p:sp>
       <p:sp>
         <p:nvSpPr>
@@ -4492,13 +4148,13 @@
           <a:bodyPr wrap="square" lIns="0" tIns="0" rIns="0" bIns="0" rtlCol="0" anchor="ctr"/>
           <a:lstStyle/>
           <a:p>
-            <a:pPr marL="0" indent="0">
+            <a:pPr indent="0" marL="0">
               <a:buNone/>
             </a:pPr>
             <a:r>
               <a:rPr lang="en-US" sz="1500" dirty="0">
                 <a:solidFill>
-                  <a:srgbClr val="1F2120"/>
+                  <a:srgbClr val="1A202C"/>
                 </a:solidFill>
                 <a:latin typeface="Courier New" pitchFamily="34" charset="0"/>
                 <a:ea typeface="Courier New" pitchFamily="34" charset="-122"/>
@@ -4531,13 +4187,13 @@
           <a:bodyPr wrap="square" lIns="0" tIns="0" rIns="0" bIns="0" rtlCol="0" anchor="ctr"/>
           <a:lstStyle/>
           <a:p>
-            <a:pPr marL="0" indent="0">
+            <a:pPr indent="0" marL="0">
               <a:buNone/>
             </a:pPr>
             <a:r>
               <a:rPr lang="en-US" sz="1400" i="1" dirty="0">
                 <a:solidFill>
-                  <a:srgbClr val="1F2120"/>
+                  <a:srgbClr val="1A202C"/>
                 </a:solidFill>
                 <a:latin typeface="Arial" pitchFamily="34" charset="0"/>
                 <a:ea typeface="Arial" pitchFamily="34" charset="-122"/>
@@ -4568,18 +4224,11 @@
           </a:solidFill>
           <a:ln w="12700">
             <a:solidFill>
-              <a:srgbClr val="E0DDD0"/>
+              <a:srgbClr val="E2E1DC"/>
             </a:solidFill>
             <a:prstDash val="solid"/>
           </a:ln>
         </p:spPr>
-        <p:txBody>
-          <a:bodyPr/>
-          <a:lstStyle/>
-          <a:p>
-            <a:endParaRPr lang="en-US"/>
-          </a:p>
-        </p:txBody>
       </p:sp>
       <p:sp>
         <p:nvSpPr>
@@ -4596,22 +4245,15 @@
             <a:avLst/>
           </a:prstGeom>
           <a:solidFill>
-            <a:srgbClr val="CF3338"/>
+            <a:srgbClr val="2A4365"/>
           </a:solidFill>
           <a:ln w="12700">
             <a:solidFill>
-              <a:srgbClr val="CF3338"/>
+              <a:srgbClr val="2A4365"/>
             </a:solidFill>
             <a:prstDash val="solid"/>
           </a:ln>
         </p:spPr>
-        <p:txBody>
-          <a:bodyPr/>
-          <a:lstStyle/>
-          <a:p>
-            <a:endParaRPr lang="en-US"/>
-          </a:p>
-        </p:txBody>
       </p:sp>
       <p:sp>
         <p:nvSpPr>
@@ -4634,13 +4276,13 @@
           <a:bodyPr wrap="square" lIns="0" tIns="0" rIns="0" bIns="0" rtlCol="0" anchor="ctr"/>
           <a:lstStyle/>
           <a:p>
-            <a:pPr marL="0" indent="0">
+            <a:pPr indent="0" marL="0">
               <a:buNone/>
             </a:pPr>
             <a:r>
               <a:rPr lang="en-US" sz="1500" dirty="0">
                 <a:solidFill>
-                  <a:srgbClr val="1F2120"/>
+                  <a:srgbClr val="1A202C"/>
                 </a:solidFill>
                 <a:latin typeface="Courier New" pitchFamily="34" charset="0"/>
                 <a:ea typeface="Courier New" pitchFamily="34" charset="-122"/>
@@ -4673,13 +4315,13 @@
           <a:bodyPr wrap="square" lIns="0" tIns="0" rIns="0" bIns="0" rtlCol="0" anchor="ctr"/>
           <a:lstStyle/>
           <a:p>
-            <a:pPr marL="0" indent="0">
+            <a:pPr indent="0" marL="0">
               <a:buNone/>
             </a:pPr>
             <a:r>
               <a:rPr lang="en-US" sz="1400" i="1" dirty="0">
                 <a:solidFill>
-                  <a:srgbClr val="1F2120"/>
+                  <a:srgbClr val="1A202C"/>
                 </a:solidFill>
                 <a:latin typeface="Arial" pitchFamily="34" charset="0"/>
                 <a:ea typeface="Arial" pitchFamily="34" charset="-122"/>
@@ -4710,18 +4352,11 @@
           </a:solidFill>
           <a:ln w="12700">
             <a:solidFill>
-              <a:srgbClr val="E0DDD0"/>
+              <a:srgbClr val="E2E1DC"/>
             </a:solidFill>
             <a:prstDash val="solid"/>
           </a:ln>
         </p:spPr>
-        <p:txBody>
-          <a:bodyPr/>
-          <a:lstStyle/>
-          <a:p>
-            <a:endParaRPr lang="en-US"/>
-          </a:p>
-        </p:txBody>
       </p:sp>
       <p:sp>
         <p:nvSpPr>
@@ -4738,22 +4373,15 @@
             <a:avLst/>
           </a:prstGeom>
           <a:solidFill>
-            <a:srgbClr val="CF3338"/>
+            <a:srgbClr val="2A4365"/>
           </a:solidFill>
           <a:ln w="12700">
             <a:solidFill>
-              <a:srgbClr val="CF3338"/>
+              <a:srgbClr val="2A4365"/>
             </a:solidFill>
             <a:prstDash val="solid"/>
           </a:ln>
         </p:spPr>
-        <p:txBody>
-          <a:bodyPr/>
-          <a:lstStyle/>
-          <a:p>
-            <a:endParaRPr lang="en-US"/>
-          </a:p>
-        </p:txBody>
       </p:sp>
       <p:sp>
         <p:nvSpPr>
@@ -4776,13 +4404,13 @@
           <a:bodyPr wrap="square" lIns="0" tIns="0" rIns="0" bIns="0" rtlCol="0" anchor="ctr"/>
           <a:lstStyle/>
           <a:p>
-            <a:pPr marL="0" indent="0">
+            <a:pPr indent="0" marL="0">
               <a:buNone/>
             </a:pPr>
             <a:r>
               <a:rPr lang="en-US" sz="1500" dirty="0">
                 <a:solidFill>
-                  <a:srgbClr val="1F2120"/>
+                  <a:srgbClr val="1A202C"/>
                 </a:solidFill>
                 <a:latin typeface="Courier New" pitchFamily="34" charset="0"/>
                 <a:ea typeface="Courier New" pitchFamily="34" charset="-122"/>
@@ -4815,13 +4443,13 @@
           <a:bodyPr wrap="square" lIns="0" tIns="0" rIns="0" bIns="0" rtlCol="0" anchor="ctr"/>
           <a:lstStyle/>
           <a:p>
-            <a:pPr marL="0" indent="0">
+            <a:pPr indent="0" marL="0">
               <a:buNone/>
             </a:pPr>
             <a:r>
               <a:rPr lang="en-US" sz="1400" i="1" dirty="0">
                 <a:solidFill>
-                  <a:srgbClr val="1F2120"/>
+                  <a:srgbClr val="1A202C"/>
                 </a:solidFill>
                 <a:latin typeface="Arial" pitchFamily="34" charset="0"/>
                 <a:ea typeface="Arial" pitchFamily="34" charset="-122"/>
@@ -4852,18 +4480,11 @@
           </a:solidFill>
           <a:ln w="12700">
             <a:solidFill>
-              <a:srgbClr val="E0DDD0"/>
+              <a:srgbClr val="E2E1DC"/>
             </a:solidFill>
             <a:prstDash val="solid"/>
           </a:ln>
         </p:spPr>
-        <p:txBody>
-          <a:bodyPr/>
-          <a:lstStyle/>
-          <a:p>
-            <a:endParaRPr lang="en-US"/>
-          </a:p>
-        </p:txBody>
       </p:sp>
       <p:sp>
         <p:nvSpPr>
@@ -4880,22 +4501,15 @@
             <a:avLst/>
           </a:prstGeom>
           <a:solidFill>
-            <a:srgbClr val="CF3338"/>
+            <a:srgbClr val="2A4365"/>
           </a:solidFill>
           <a:ln w="12700">
             <a:solidFill>
-              <a:srgbClr val="CF3338"/>
+              <a:srgbClr val="2A4365"/>
             </a:solidFill>
             <a:prstDash val="solid"/>
           </a:ln>
         </p:spPr>
-        <p:txBody>
-          <a:bodyPr/>
-          <a:lstStyle/>
-          <a:p>
-            <a:endParaRPr lang="en-US"/>
-          </a:p>
-        </p:txBody>
       </p:sp>
       <p:sp>
         <p:nvSpPr>
@@ -4918,13 +4532,13 @@
           <a:bodyPr wrap="square" lIns="0" tIns="0" rIns="0" bIns="0" rtlCol="0" anchor="ctr"/>
           <a:lstStyle/>
           <a:p>
-            <a:pPr marL="0" indent="0">
+            <a:pPr indent="0" marL="0">
               <a:buNone/>
             </a:pPr>
             <a:r>
               <a:rPr lang="en-US" sz="1500" dirty="0">
                 <a:solidFill>
-                  <a:srgbClr val="1F2120"/>
+                  <a:srgbClr val="1A202C"/>
                 </a:solidFill>
                 <a:latin typeface="Courier New" pitchFamily="34" charset="0"/>
                 <a:ea typeface="Courier New" pitchFamily="34" charset="-122"/>
@@ -4957,13 +4571,13 @@
           <a:bodyPr wrap="square" lIns="0" tIns="0" rIns="0" bIns="0" rtlCol="0" anchor="ctr"/>
           <a:lstStyle/>
           <a:p>
-            <a:pPr marL="0" indent="0">
+            <a:pPr indent="0" marL="0">
               <a:buNone/>
             </a:pPr>
             <a:r>
               <a:rPr lang="en-US" sz="1400" i="1" dirty="0">
                 <a:solidFill>
-                  <a:srgbClr val="1F2120"/>
+                  <a:srgbClr val="1A202C"/>
                 </a:solidFill>
                 <a:latin typeface="Arial" pitchFamily="34" charset="0"/>
                 <a:ea typeface="Arial" pitchFamily="34" charset="-122"/>
@@ -4976,11 +4590,6 @@
         </p:txBody>
       </p:sp>
     </p:spTree>
-    <p:extLst>
-      <p:ext uri="{BB962C8B-B14F-4D97-AF65-F5344CB8AC3E}">
-        <p14:creationId xmlns:p14="http://schemas.microsoft.com/office/powerpoint/2010/main" val="3711360700"/>
-      </p:ext>
-    </p:extLst>
   </p:cSld>
   <p:clrMapOvr>
     <a:masterClrMapping/>
@@ -4994,9 +4603,8 @@
     <p:bg>
       <p:bgPr>
         <a:solidFill>
-          <a:srgbClr val="EEECE1"/>
+          <a:srgbClr val="FAFAF7"/>
         </a:solidFill>
-        <a:effectLst/>
       </p:bgPr>
     </p:bg>
     <p:spTree>
@@ -5034,13 +4642,13 @@
           <a:bodyPr wrap="square" lIns="0" tIns="0" rIns="0" bIns="0" rtlCol="0" anchor="ctr"/>
           <a:lstStyle/>
           <a:p>
-            <a:pPr marL="0" indent="0">
+            <a:pPr indent="0" marL="0">
               <a:buNone/>
             </a:pPr>
             <a:r>
               <a:rPr lang="en-US" sz="3000" b="1" dirty="0">
                 <a:solidFill>
-                  <a:srgbClr val="1F2120"/>
+                  <a:srgbClr val="1A202C"/>
                 </a:solidFill>
                 <a:latin typeface="Arial Black" pitchFamily="34" charset="0"/>
                 <a:ea typeface="Arial Black" pitchFamily="34" charset="-122"/>
@@ -5071,18 +4679,11 @@
           </a:solidFill>
           <a:ln w="12700">
             <a:solidFill>
-              <a:srgbClr val="E0DDD0"/>
+              <a:srgbClr val="E2E1DC"/>
             </a:solidFill>
             <a:prstDash val="solid"/>
           </a:ln>
         </p:spPr>
-        <p:txBody>
-          <a:bodyPr/>
-          <a:lstStyle/>
-          <a:p>
-            <a:endParaRPr lang="en-US"/>
-          </a:p>
-        </p:txBody>
       </p:sp>
       <p:sp>
         <p:nvSpPr>
@@ -5099,22 +4700,15 @@
             <a:avLst/>
           </a:prstGeom>
           <a:solidFill>
-            <a:srgbClr val="CF3338"/>
+            <a:srgbClr val="2A4365"/>
           </a:solidFill>
           <a:ln w="12700">
             <a:solidFill>
-              <a:srgbClr val="CF3338"/>
+              <a:srgbClr val="2A4365"/>
             </a:solidFill>
             <a:prstDash val="solid"/>
           </a:ln>
         </p:spPr>
-        <p:txBody>
-          <a:bodyPr/>
-          <a:lstStyle/>
-          <a:p>
-            <a:endParaRPr lang="en-US"/>
-          </a:p>
-        </p:txBody>
       </p:sp>
       <p:sp>
         <p:nvSpPr>
@@ -5137,7 +4731,7 @@
           <a:bodyPr wrap="square" lIns="0" tIns="0" rIns="0" bIns="0" rtlCol="0" anchor="ctr"/>
           <a:lstStyle/>
           <a:p>
-            <a:pPr marL="0" indent="0">
+            <a:pPr indent="0" marL="0">
               <a:buNone/>
             </a:pPr>
             <a:r>
@@ -5176,13 +4770,13 @@
           <a:bodyPr wrap="square" lIns="0" tIns="0" rIns="0" bIns="0" rtlCol="0" anchor="ctr"/>
           <a:lstStyle/>
           <a:p>
-            <a:pPr marL="0" indent="0">
+            <a:pPr indent="0" marL="0">
               <a:buNone/>
             </a:pPr>
             <a:r>
               <a:rPr lang="en-US" sz="1300" i="1" dirty="0">
                 <a:solidFill>
-                  <a:srgbClr val="707070"/>
+                  <a:srgbClr val="4A5568"/>
                 </a:solidFill>
                 <a:latin typeface="Arial" pitchFamily="34" charset="0"/>
                 <a:ea typeface="Arial" pitchFamily="34" charset="-122"/>
@@ -5215,13 +4809,13 @@
           <a:bodyPr wrap="square" lIns="0" tIns="0" rIns="0" bIns="0" rtlCol="0" anchor="ctr"/>
           <a:lstStyle/>
           <a:p>
-            <a:pPr marL="0" indent="0">
+            <a:pPr indent="0" marL="0">
               <a:buNone/>
             </a:pPr>
             <a:r>
               <a:rPr lang="en-US" sz="1300" dirty="0">
                 <a:solidFill>
-                  <a:srgbClr val="1F2120"/>
+                  <a:srgbClr val="1A202C"/>
                 </a:solidFill>
                 <a:latin typeface="Courier New" pitchFamily="34" charset="0"/>
                 <a:ea typeface="Courier New" pitchFamily="34" charset="-122"/>
@@ -5232,19 +4826,19 @@
             <a:endParaRPr lang="en-US" sz="1300" dirty="0"/>
           </a:p>
           <a:p>
-            <a:pPr marL="0" indent="0">
+            <a:pPr indent="0" marL="0">
               <a:buNone/>
             </a:pPr>
             <a:endParaRPr lang="en-US" sz="1300" dirty="0"/>
           </a:p>
           <a:p>
-            <a:pPr marL="0" indent="0">
+            <a:pPr indent="0" marL="0">
               <a:buNone/>
             </a:pPr>
             <a:r>
               <a:rPr lang="en-US" sz="1300" dirty="0">
                 <a:solidFill>
-                  <a:srgbClr val="1F2120"/>
+                  <a:srgbClr val="1A202C"/>
                 </a:solidFill>
                 <a:latin typeface="Courier New" pitchFamily="34" charset="0"/>
                 <a:ea typeface="Courier New" pitchFamily="34" charset="-122"/>
@@ -5255,13 +4849,13 @@
             <a:endParaRPr lang="en-US" sz="1300" dirty="0"/>
           </a:p>
           <a:p>
-            <a:pPr marL="0" indent="0">
+            <a:pPr indent="0" marL="0">
               <a:buNone/>
             </a:pPr>
             <a:r>
               <a:rPr lang="en-US" sz="1300" dirty="0">
                 <a:solidFill>
-                  <a:srgbClr val="1F2120"/>
+                  <a:srgbClr val="1A202C"/>
                 </a:solidFill>
                 <a:latin typeface="Courier New" pitchFamily="34" charset="0"/>
                 <a:ea typeface="Courier New" pitchFamily="34" charset="-122"/>
@@ -5272,19 +4866,19 @@
             <a:endParaRPr lang="en-US" sz="1300" dirty="0"/>
           </a:p>
           <a:p>
-            <a:pPr marL="0" indent="0">
+            <a:pPr indent="0" marL="0">
               <a:buNone/>
             </a:pPr>
             <a:endParaRPr lang="en-US" sz="1300" dirty="0"/>
           </a:p>
           <a:p>
-            <a:pPr marL="0" indent="0">
+            <a:pPr indent="0" marL="0">
               <a:buNone/>
             </a:pPr>
             <a:r>
               <a:rPr lang="en-US" sz="1300" dirty="0">
                 <a:solidFill>
-                  <a:srgbClr val="1F2120"/>
+                  <a:srgbClr val="1A202C"/>
                 </a:solidFill>
                 <a:latin typeface="Courier New" pitchFamily="34" charset="0"/>
                 <a:ea typeface="Courier New" pitchFamily="34" charset="-122"/>
@@ -5295,13 +4889,13 @@
             <a:endParaRPr lang="en-US" sz="1300" dirty="0"/>
           </a:p>
           <a:p>
-            <a:pPr marL="0" indent="0">
+            <a:pPr indent="0" marL="0">
               <a:buNone/>
             </a:pPr>
             <a:r>
               <a:rPr lang="en-US" sz="1300" dirty="0">
                 <a:solidFill>
-                  <a:srgbClr val="1F2120"/>
+                  <a:srgbClr val="1A202C"/>
                 </a:solidFill>
                 <a:latin typeface="Courier New" pitchFamily="34" charset="0"/>
                 <a:ea typeface="Courier New" pitchFamily="34" charset="-122"/>
@@ -5334,13 +4928,13 @@
           <a:bodyPr wrap="square" lIns="0" tIns="0" rIns="0" bIns="0" rtlCol="0" anchor="ctr"/>
           <a:lstStyle/>
           <a:p>
-            <a:pPr marL="0" indent="0">
+            <a:pPr indent="0" marL="0">
               <a:buNone/>
             </a:pPr>
             <a:r>
               <a:rPr lang="en-US" sz="1100" i="1" dirty="0">
                 <a:solidFill>
-                  <a:srgbClr val="707070"/>
+                  <a:srgbClr val="4A5568"/>
                 </a:solidFill>
                 <a:latin typeface="Arial" pitchFamily="34" charset="0"/>
                 <a:ea typeface="Arial" pitchFamily="34" charset="-122"/>
@@ -5371,18 +4965,11 @@
           </a:solidFill>
           <a:ln w="12700">
             <a:solidFill>
-              <a:srgbClr val="E0DDD0"/>
+              <a:srgbClr val="E2E1DC"/>
             </a:solidFill>
             <a:prstDash val="solid"/>
           </a:ln>
         </p:spPr>
-        <p:txBody>
-          <a:bodyPr/>
-          <a:lstStyle/>
-          <a:p>
-            <a:endParaRPr lang="en-US"/>
-          </a:p>
-        </p:txBody>
       </p:sp>
       <p:sp>
         <p:nvSpPr>
@@ -5399,22 +4986,15 @@
             <a:avLst/>
           </a:prstGeom>
           <a:solidFill>
-            <a:srgbClr val="CF3338"/>
+            <a:srgbClr val="2A4365"/>
           </a:solidFill>
           <a:ln w="12700">
             <a:solidFill>
-              <a:srgbClr val="CF3338"/>
+              <a:srgbClr val="2A4365"/>
             </a:solidFill>
             <a:prstDash val="solid"/>
           </a:ln>
         </p:spPr>
-        <p:txBody>
-          <a:bodyPr/>
-          <a:lstStyle/>
-          <a:p>
-            <a:endParaRPr lang="en-US"/>
-          </a:p>
-        </p:txBody>
       </p:sp>
       <p:sp>
         <p:nvSpPr>
@@ -5437,7 +5017,7 @@
           <a:bodyPr wrap="square" lIns="0" tIns="0" rIns="0" bIns="0" rtlCol="0" anchor="ctr"/>
           <a:lstStyle/>
           <a:p>
-            <a:pPr marL="0" indent="0">
+            <a:pPr indent="0" marL="0">
               <a:buNone/>
             </a:pPr>
             <a:r>
@@ -5476,13 +5056,13 @@
           <a:bodyPr wrap="square" lIns="0" tIns="0" rIns="0" bIns="0" rtlCol="0" anchor="ctr"/>
           <a:lstStyle/>
           <a:p>
-            <a:pPr marL="0" indent="0">
+            <a:pPr indent="0" marL="0">
               <a:buNone/>
             </a:pPr>
             <a:r>
               <a:rPr lang="en-US" sz="1300" i="1" dirty="0">
                 <a:solidFill>
-                  <a:srgbClr val="707070"/>
+                  <a:srgbClr val="4A5568"/>
                 </a:solidFill>
                 <a:latin typeface="Arial" pitchFamily="34" charset="0"/>
                 <a:ea typeface="Arial" pitchFamily="34" charset="-122"/>
@@ -5515,13 +5095,13 @@
           <a:bodyPr wrap="square" lIns="0" tIns="0" rIns="0" bIns="0" rtlCol="0" anchor="ctr"/>
           <a:lstStyle/>
           <a:p>
-            <a:pPr marL="0" indent="0">
+            <a:pPr indent="0" marL="0">
               <a:buNone/>
             </a:pPr>
             <a:r>
               <a:rPr lang="en-US" sz="1200" dirty="0">
                 <a:solidFill>
-                  <a:srgbClr val="1F2120"/>
+                  <a:srgbClr val="1A202C"/>
                 </a:solidFill>
                 <a:latin typeface="Courier New" pitchFamily="34" charset="0"/>
                 <a:ea typeface="Courier New" pitchFamily="34" charset="-122"/>
@@ -5532,19 +5112,19 @@
             <a:endParaRPr lang="en-US" sz="1200" dirty="0"/>
           </a:p>
           <a:p>
-            <a:pPr marL="0" indent="0">
+            <a:pPr indent="0" marL="0">
               <a:buNone/>
             </a:pPr>
             <a:endParaRPr lang="en-US" sz="1200" dirty="0"/>
           </a:p>
           <a:p>
-            <a:pPr marL="0" indent="0">
+            <a:pPr indent="0" marL="0">
               <a:buNone/>
             </a:pPr>
             <a:r>
               <a:rPr lang="en-US" sz="1200" dirty="0">
                 <a:solidFill>
-                  <a:srgbClr val="1F2120"/>
+                  <a:srgbClr val="1A202C"/>
                 </a:solidFill>
                 <a:latin typeface="Courier New" pitchFamily="34" charset="0"/>
                 <a:ea typeface="Courier New" pitchFamily="34" charset="-122"/>
@@ -5555,13 +5135,13 @@
             <a:endParaRPr lang="en-US" sz="1200" dirty="0"/>
           </a:p>
           <a:p>
-            <a:pPr marL="0" indent="0">
+            <a:pPr indent="0" marL="0">
               <a:buNone/>
             </a:pPr>
             <a:r>
               <a:rPr lang="en-US" sz="1200" dirty="0">
                 <a:solidFill>
-                  <a:srgbClr val="1F2120"/>
+                  <a:srgbClr val="1A202C"/>
                 </a:solidFill>
                 <a:latin typeface="Courier New" pitchFamily="34" charset="0"/>
                 <a:ea typeface="Courier New" pitchFamily="34" charset="-122"/>
@@ -5572,19 +5152,19 @@
             <a:endParaRPr lang="en-US" sz="1200" dirty="0"/>
           </a:p>
           <a:p>
-            <a:pPr marL="0" indent="0">
+            <a:pPr indent="0" marL="0">
               <a:buNone/>
             </a:pPr>
             <a:endParaRPr lang="en-US" sz="1200" dirty="0"/>
           </a:p>
           <a:p>
-            <a:pPr marL="0" indent="0">
+            <a:pPr indent="0" marL="0">
               <a:buNone/>
             </a:pPr>
             <a:r>
               <a:rPr lang="en-US" sz="1200" dirty="0">
                 <a:solidFill>
-                  <a:srgbClr val="1F2120"/>
+                  <a:srgbClr val="1A202C"/>
                 </a:solidFill>
                 <a:latin typeface="Courier New" pitchFamily="34" charset="0"/>
                 <a:ea typeface="Courier New" pitchFamily="34" charset="-122"/>
@@ -5595,13 +5175,13 @@
             <a:endParaRPr lang="en-US" sz="1200" dirty="0"/>
           </a:p>
           <a:p>
-            <a:pPr marL="0" indent="0">
+            <a:pPr indent="0" marL="0">
               <a:buNone/>
             </a:pPr>
             <a:r>
               <a:rPr lang="en-US" sz="1200" dirty="0">
                 <a:solidFill>
-                  <a:srgbClr val="1F2120"/>
+                  <a:srgbClr val="1A202C"/>
                 </a:solidFill>
                 <a:latin typeface="Courier New" pitchFamily="34" charset="0"/>
                 <a:ea typeface="Courier New" pitchFamily="34" charset="-122"/>
@@ -5612,13 +5192,13 @@
             <a:endParaRPr lang="en-US" sz="1200" dirty="0"/>
           </a:p>
           <a:p>
-            <a:pPr marL="0" indent="0">
+            <a:pPr indent="0" marL="0">
               <a:buNone/>
             </a:pPr>
             <a:r>
               <a:rPr lang="en-US" sz="1200" dirty="0">
                 <a:solidFill>
-                  <a:srgbClr val="1F2120"/>
+                  <a:srgbClr val="1A202C"/>
                 </a:solidFill>
                 <a:latin typeface="Courier New" pitchFamily="34" charset="0"/>
                 <a:ea typeface="Courier New" pitchFamily="34" charset="-122"/>
@@ -5651,13 +5231,13 @@
           <a:bodyPr wrap="square" lIns="0" tIns="0" rIns="0" bIns="0" rtlCol="0" anchor="ctr"/>
           <a:lstStyle/>
           <a:p>
-            <a:pPr marL="0" indent="0">
+            <a:pPr indent="0" marL="0">
               <a:buNone/>
             </a:pPr>
             <a:r>
               <a:rPr lang="en-US" sz="1100" i="1" dirty="0">
                 <a:solidFill>
-                  <a:srgbClr val="707070"/>
+                  <a:srgbClr val="4A5568"/>
                 </a:solidFill>
                 <a:latin typeface="Arial" pitchFamily="34" charset="0"/>
                 <a:ea typeface="Arial" pitchFamily="34" charset="-122"/>
@@ -5670,11 +5250,6 @@
         </p:txBody>
       </p:sp>
     </p:spTree>
-    <p:extLst>
-      <p:ext uri="{BB962C8B-B14F-4D97-AF65-F5344CB8AC3E}">
-        <p14:creationId xmlns:p14="http://schemas.microsoft.com/office/powerpoint/2010/main" val="4011414745"/>
-      </p:ext>
-    </p:extLst>
   </p:cSld>
   <p:clrMapOvr>
     <a:masterClrMapping/>
@@ -5688,9 +5263,8 @@
     <p:bg>
       <p:bgPr>
         <a:solidFill>
-          <a:srgbClr val="EEECE1"/>
+          <a:srgbClr val="FAFAF7"/>
         </a:solidFill>
-        <a:effectLst/>
       </p:bgPr>
     </p:bg>
     <p:spTree>
@@ -5728,13 +5302,13 @@
           <a:bodyPr wrap="square" lIns="0" tIns="0" rIns="0" bIns="0" rtlCol="0" anchor="ctr"/>
           <a:lstStyle/>
           <a:p>
-            <a:pPr marL="0" indent="0">
+            <a:pPr indent="0" marL="0">
               <a:buNone/>
             </a:pPr>
             <a:r>
               <a:rPr lang="en-US" sz="3000" b="1" dirty="0">
                 <a:solidFill>
-                  <a:srgbClr val="1F2120"/>
+                  <a:srgbClr val="1A202C"/>
                 </a:solidFill>
                 <a:latin typeface="Arial Black" pitchFamily="34" charset="0"/>
                 <a:ea typeface="Arial Black" pitchFamily="34" charset="-122"/>
@@ -5767,13 +5341,13 @@
           <a:bodyPr wrap="square" lIns="0" tIns="0" rIns="0" bIns="0" rtlCol="0" anchor="ctr"/>
           <a:lstStyle/>
           <a:p>
-            <a:pPr marL="0" indent="0">
+            <a:pPr indent="0" marL="0">
               <a:buNone/>
             </a:pPr>
             <a:r>
               <a:rPr lang="en-US" sz="1500" i="1" dirty="0">
                 <a:solidFill>
-                  <a:srgbClr val="707070"/>
+                  <a:srgbClr val="4A5568"/>
                 </a:solidFill>
                 <a:latin typeface="Arial" pitchFamily="34" charset="0"/>
                 <a:ea typeface="Arial" pitchFamily="34" charset="-122"/>
@@ -5804,18 +5378,11 @@
           </a:solidFill>
           <a:ln w="12700">
             <a:solidFill>
-              <a:srgbClr val="E0DDD0"/>
+              <a:srgbClr val="E2E1DC"/>
             </a:solidFill>
             <a:prstDash val="solid"/>
           </a:ln>
         </p:spPr>
-        <p:txBody>
-          <a:bodyPr/>
-          <a:lstStyle/>
-          <a:p>
-            <a:endParaRPr lang="en-US"/>
-          </a:p>
-        </p:txBody>
       </p:sp>
       <p:sp>
         <p:nvSpPr>
@@ -5832,22 +5399,15 @@
             <a:avLst/>
           </a:prstGeom>
           <a:solidFill>
-            <a:srgbClr val="CF3338"/>
+            <a:srgbClr val="2A4365"/>
           </a:solidFill>
           <a:ln w="12700">
             <a:solidFill>
-              <a:srgbClr val="CF3338"/>
+              <a:srgbClr val="2A4365"/>
             </a:solidFill>
             <a:prstDash val="solid"/>
           </a:ln>
         </p:spPr>
-        <p:txBody>
-          <a:bodyPr/>
-          <a:lstStyle/>
-          <a:p>
-            <a:endParaRPr lang="en-US"/>
-          </a:p>
-        </p:txBody>
       </p:sp>
       <p:sp>
         <p:nvSpPr>
@@ -5870,13 +5430,13 @@
           <a:bodyPr wrap="square" lIns="0" tIns="0" rIns="0" bIns="0" rtlCol="0" anchor="ctr"/>
           <a:lstStyle/>
           <a:p>
-            <a:pPr marL="0" indent="0">
+            <a:pPr indent="0" marL="0">
               <a:buNone/>
             </a:pPr>
             <a:r>
               <a:rPr lang="en-US" sz="1100" i="1" dirty="0">
                 <a:solidFill>
-                  <a:srgbClr val="707070"/>
+                  <a:srgbClr val="4A5568"/>
                 </a:solidFill>
                 <a:latin typeface="Arial" pitchFamily="34" charset="0"/>
                 <a:ea typeface="Arial" pitchFamily="34" charset="-122"/>
@@ -5909,13 +5469,13 @@
           <a:bodyPr wrap="square" lIns="0" tIns="0" rIns="0" bIns="0" rtlCol="0" anchor="ctr"/>
           <a:lstStyle/>
           <a:p>
-            <a:pPr marL="0" indent="0">
+            <a:pPr indent="0" marL="0">
               <a:buNone/>
             </a:pPr>
             <a:r>
               <a:rPr lang="en-US" sz="1300" dirty="0">
                 <a:solidFill>
-                  <a:srgbClr val="1F2120"/>
+                  <a:srgbClr val="1A202C"/>
                 </a:solidFill>
                 <a:latin typeface="Courier New" pitchFamily="34" charset="0"/>
                 <a:ea typeface="Courier New" pitchFamily="34" charset="-122"/>
@@ -5926,13 +5486,13 @@
             <a:endParaRPr lang="en-US" sz="1300" dirty="0"/>
           </a:p>
           <a:p>
-            <a:pPr marL="0" indent="0">
+            <a:pPr indent="0" marL="0">
               <a:buNone/>
             </a:pPr>
             <a:r>
               <a:rPr lang="en-US" sz="1300" dirty="0">
                 <a:solidFill>
-                  <a:srgbClr val="1F2120"/>
+                  <a:srgbClr val="1A202C"/>
                 </a:solidFill>
                 <a:latin typeface="Courier New" pitchFamily="34" charset="0"/>
                 <a:ea typeface="Courier New" pitchFamily="34" charset="-122"/>
@@ -5943,19 +5503,19 @@
             <a:endParaRPr lang="en-US" sz="1300" dirty="0"/>
           </a:p>
           <a:p>
-            <a:pPr marL="0" indent="0">
+            <a:pPr indent="0" marL="0">
               <a:buNone/>
             </a:pPr>
             <a:endParaRPr lang="en-US" sz="1300" dirty="0"/>
           </a:p>
           <a:p>
-            <a:pPr marL="0" indent="0">
+            <a:pPr indent="0" marL="0">
               <a:buNone/>
             </a:pPr>
             <a:r>
               <a:rPr lang="en-US" sz="1300" dirty="0">
                 <a:solidFill>
-                  <a:srgbClr val="1F2120"/>
+                  <a:srgbClr val="1A202C"/>
                 </a:solidFill>
                 <a:latin typeface="Courier New" pitchFamily="34" charset="0"/>
                 <a:ea typeface="Courier New" pitchFamily="34" charset="-122"/>
@@ -5966,13 +5526,13 @@
             <a:endParaRPr lang="en-US" sz="1300" dirty="0"/>
           </a:p>
           <a:p>
-            <a:pPr marL="0" indent="0">
+            <a:pPr indent="0" marL="0">
               <a:buNone/>
             </a:pPr>
             <a:r>
               <a:rPr lang="en-US" sz="1300" dirty="0">
                 <a:solidFill>
-                  <a:srgbClr val="1F2120"/>
+                  <a:srgbClr val="1A202C"/>
                 </a:solidFill>
                 <a:latin typeface="Courier New" pitchFamily="34" charset="0"/>
                 <a:ea typeface="Courier New" pitchFamily="34" charset="-122"/>
@@ -5983,13 +5543,13 @@
             <a:endParaRPr lang="en-US" sz="1300" dirty="0"/>
           </a:p>
           <a:p>
-            <a:pPr marL="0" indent="0">
+            <a:pPr indent="0" marL="0">
               <a:buNone/>
             </a:pPr>
             <a:r>
               <a:rPr lang="en-US" sz="1300" dirty="0">
                 <a:solidFill>
-                  <a:srgbClr val="1F2120"/>
+                  <a:srgbClr val="1A202C"/>
                 </a:solidFill>
                 <a:latin typeface="Courier New" pitchFamily="34" charset="0"/>
                 <a:ea typeface="Courier New" pitchFamily="34" charset="-122"/>
@@ -6000,13 +5560,13 @@
             <a:endParaRPr lang="en-US" sz="1300" dirty="0"/>
           </a:p>
           <a:p>
-            <a:pPr marL="0" indent="0">
+            <a:pPr indent="0" marL="0">
               <a:buNone/>
             </a:pPr>
             <a:r>
               <a:rPr lang="en-US" sz="1300" dirty="0">
                 <a:solidFill>
-                  <a:srgbClr val="1F2120"/>
+                  <a:srgbClr val="1A202C"/>
                 </a:solidFill>
                 <a:latin typeface="Courier New" pitchFamily="34" charset="0"/>
                 <a:ea typeface="Courier New" pitchFamily="34" charset="-122"/>
@@ -6037,18 +5597,11 @@
           </a:solidFill>
           <a:ln w="12700">
             <a:solidFill>
-              <a:srgbClr val="E0DDD0"/>
+              <a:srgbClr val="E2E1DC"/>
             </a:solidFill>
             <a:prstDash val="solid"/>
           </a:ln>
         </p:spPr>
-        <p:txBody>
-          <a:bodyPr/>
-          <a:lstStyle/>
-          <a:p>
-            <a:endParaRPr lang="en-US"/>
-          </a:p>
-        </p:txBody>
       </p:sp>
       <p:sp>
         <p:nvSpPr>
@@ -6071,13 +5624,13 @@
           <a:bodyPr wrap="square" lIns="0" tIns="0" rIns="0" bIns="0" rtlCol="0" anchor="ctr"/>
           <a:lstStyle/>
           <a:p>
-            <a:pPr marL="0" indent="0">
+            <a:pPr indent="0" marL="0">
               <a:buNone/>
             </a:pPr>
             <a:r>
               <a:rPr lang="en-US" sz="1100" i="1" dirty="0">
                 <a:solidFill>
-                  <a:srgbClr val="707070"/>
+                  <a:srgbClr val="4A5568"/>
                 </a:solidFill>
                 <a:latin typeface="Arial" pitchFamily="34" charset="0"/>
                 <a:ea typeface="Arial" pitchFamily="34" charset="-122"/>
@@ -6110,13 +5663,13 @@
           <a:bodyPr wrap="square" lIns="0" tIns="0" rIns="0" bIns="0" rtlCol="0" anchor="ctr"/>
           <a:lstStyle/>
           <a:p>
-            <a:pPr marL="0" indent="0">
+            <a:pPr indent="0" marL="0">
               <a:buNone/>
             </a:pPr>
             <a:r>
               <a:rPr lang="en-US" sz="1400" dirty="0">
                 <a:solidFill>
-                  <a:srgbClr val="1F2120"/>
+                  <a:srgbClr val="1A202C"/>
                 </a:solidFill>
                 <a:latin typeface="Courier New" pitchFamily="34" charset="0"/>
                 <a:ea typeface="Courier New" pitchFamily="34" charset="-122"/>
@@ -6149,13 +5702,13 @@
           <a:bodyPr wrap="square" lIns="0" tIns="0" rIns="0" bIns="0" rtlCol="0" anchor="ctr"/>
           <a:lstStyle/>
           <a:p>
-            <a:pPr marL="0" indent="0" algn="r">
+            <a:pPr algn="r" indent="0" marL="0">
               <a:buNone/>
             </a:pPr>
             <a:r>
               <a:rPr lang="en-US" sz="1400" b="1" dirty="0">
                 <a:solidFill>
-                  <a:srgbClr val="CF3338"/>
+                  <a:srgbClr val="2A4365"/>
                 </a:solidFill>
                 <a:latin typeface="Courier New" pitchFamily="34" charset="0"/>
                 <a:ea typeface="Courier New" pitchFamily="34" charset="-122"/>
@@ -6188,13 +5741,13 @@
           <a:bodyPr wrap="square" lIns="0" tIns="0" rIns="0" bIns="0" rtlCol="0" anchor="ctr"/>
           <a:lstStyle/>
           <a:p>
-            <a:pPr marL="0" indent="0">
+            <a:pPr indent="0" marL="0">
               <a:buNone/>
             </a:pPr>
             <a:r>
               <a:rPr lang="en-US" sz="1400" dirty="0">
                 <a:solidFill>
-                  <a:srgbClr val="1F2120"/>
+                  <a:srgbClr val="1A202C"/>
                 </a:solidFill>
                 <a:latin typeface="Courier New" pitchFamily="34" charset="0"/>
                 <a:ea typeface="Courier New" pitchFamily="34" charset="-122"/>
@@ -6227,13 +5780,13 @@
           <a:bodyPr wrap="square" lIns="0" tIns="0" rIns="0" bIns="0" rtlCol="0" anchor="ctr"/>
           <a:lstStyle/>
           <a:p>
-            <a:pPr marL="0" indent="0" algn="r">
+            <a:pPr algn="r" indent="0" marL="0">
               <a:buNone/>
             </a:pPr>
             <a:r>
               <a:rPr lang="en-US" sz="1400" b="1" dirty="0">
                 <a:solidFill>
-                  <a:srgbClr val="CF3338"/>
+                  <a:srgbClr val="2A4365"/>
                 </a:solidFill>
                 <a:latin typeface="Courier New" pitchFamily="34" charset="0"/>
                 <a:ea typeface="Courier New" pitchFamily="34" charset="-122"/>
@@ -6266,13 +5819,13 @@
           <a:bodyPr wrap="square" lIns="0" tIns="0" rIns="0" bIns="0" rtlCol="0" anchor="ctr"/>
           <a:lstStyle/>
           <a:p>
-            <a:pPr marL="0" indent="0">
+            <a:pPr indent="0" marL="0">
               <a:buNone/>
             </a:pPr>
             <a:r>
               <a:rPr lang="en-US" sz="1400" dirty="0">
                 <a:solidFill>
-                  <a:srgbClr val="1F2120"/>
+                  <a:srgbClr val="1A202C"/>
                 </a:solidFill>
                 <a:latin typeface="Courier New" pitchFamily="34" charset="0"/>
                 <a:ea typeface="Courier New" pitchFamily="34" charset="-122"/>
@@ -6305,13 +5858,13 @@
           <a:bodyPr wrap="square" lIns="0" tIns="0" rIns="0" bIns="0" rtlCol="0" anchor="ctr"/>
           <a:lstStyle/>
           <a:p>
-            <a:pPr marL="0" indent="0" algn="r">
+            <a:pPr algn="r" indent="0" marL="0">
               <a:buNone/>
             </a:pPr>
             <a:r>
               <a:rPr lang="en-US" sz="1400" b="1" dirty="0">
                 <a:solidFill>
-                  <a:srgbClr val="CF3338"/>
+                  <a:srgbClr val="2A4365"/>
                 </a:solidFill>
                 <a:latin typeface="Courier New" pitchFamily="34" charset="0"/>
                 <a:ea typeface="Courier New" pitchFamily="34" charset="-122"/>
@@ -6344,13 +5897,13 @@
           <a:bodyPr wrap="square" lIns="0" tIns="0" rIns="0" bIns="0" rtlCol="0" anchor="ctr"/>
           <a:lstStyle/>
           <a:p>
-            <a:pPr marL="0" indent="0">
+            <a:pPr indent="0" marL="0">
               <a:buNone/>
             </a:pPr>
             <a:r>
               <a:rPr lang="en-US" sz="1400" dirty="0">
                 <a:solidFill>
-                  <a:srgbClr val="1F2120"/>
+                  <a:srgbClr val="1A202C"/>
                 </a:solidFill>
                 <a:latin typeface="Courier New" pitchFamily="34" charset="0"/>
                 <a:ea typeface="Courier New" pitchFamily="34" charset="-122"/>
@@ -6383,13 +5936,13 @@
           <a:bodyPr wrap="square" lIns="0" tIns="0" rIns="0" bIns="0" rtlCol="0" anchor="ctr"/>
           <a:lstStyle/>
           <a:p>
-            <a:pPr marL="0" indent="0" algn="r">
+            <a:pPr algn="r" indent="0" marL="0">
               <a:buNone/>
             </a:pPr>
             <a:r>
               <a:rPr lang="en-US" sz="1400" b="1" dirty="0">
                 <a:solidFill>
-                  <a:srgbClr val="CF3338"/>
+                  <a:srgbClr val="2A4365"/>
                 </a:solidFill>
                 <a:latin typeface="Courier New" pitchFamily="34" charset="0"/>
                 <a:ea typeface="Courier New" pitchFamily="34" charset="-122"/>
@@ -6422,13 +5975,13 @@
           <a:bodyPr wrap="square" lIns="0" tIns="0" rIns="0" bIns="0" rtlCol="0" anchor="ctr"/>
           <a:lstStyle/>
           <a:p>
-            <a:pPr marL="0" indent="0">
+            <a:pPr indent="0" marL="0">
               <a:buNone/>
             </a:pPr>
             <a:r>
               <a:rPr lang="en-US" sz="1400" dirty="0">
                 <a:solidFill>
-                  <a:srgbClr val="1F2120"/>
+                  <a:srgbClr val="1A202C"/>
                 </a:solidFill>
                 <a:latin typeface="Courier New" pitchFamily="34" charset="0"/>
                 <a:ea typeface="Courier New" pitchFamily="34" charset="-122"/>
@@ -6461,13 +6014,13 @@
           <a:bodyPr wrap="square" lIns="0" tIns="0" rIns="0" bIns="0" rtlCol="0" anchor="ctr"/>
           <a:lstStyle/>
           <a:p>
-            <a:pPr marL="0" indent="0" algn="r">
+            <a:pPr algn="r" indent="0" marL="0">
               <a:buNone/>
             </a:pPr>
             <a:r>
               <a:rPr lang="en-US" sz="1400" b="1" dirty="0">
                 <a:solidFill>
-                  <a:srgbClr val="CF3338"/>
+                  <a:srgbClr val="2A4365"/>
                 </a:solidFill>
                 <a:latin typeface="Courier New" pitchFamily="34" charset="0"/>
                 <a:ea typeface="Courier New" pitchFamily="34" charset="-122"/>
@@ -6480,11 +6033,6 @@
         </p:txBody>
       </p:sp>
     </p:spTree>
-    <p:extLst>
-      <p:ext uri="{BB962C8B-B14F-4D97-AF65-F5344CB8AC3E}">
-        <p14:creationId xmlns:p14="http://schemas.microsoft.com/office/powerpoint/2010/main" val="2674551661"/>
-      </p:ext>
-    </p:extLst>
   </p:cSld>
   <p:clrMapOvr>
     <a:masterClrMapping/>
@@ -6498,9 +6046,8 @@
     <p:bg>
       <p:bgPr>
         <a:solidFill>
-          <a:srgbClr val="EEECE1"/>
+          <a:srgbClr val="FAFAF7"/>
         </a:solidFill>
-        <a:effectLst/>
       </p:bgPr>
     </p:bg>
     <p:spTree>
@@ -6538,13 +6085,13 @@
           <a:bodyPr wrap="square" lIns="0" tIns="0" rIns="0" bIns="0" rtlCol="0" anchor="ctr"/>
           <a:lstStyle/>
           <a:p>
-            <a:pPr marL="0" indent="0">
+            <a:pPr indent="0" marL="0">
               <a:buNone/>
             </a:pPr>
             <a:r>
               <a:rPr lang="en-US" sz="3000" b="1" dirty="0">
                 <a:solidFill>
-                  <a:srgbClr val="1F2120"/>
+                  <a:srgbClr val="1A202C"/>
                 </a:solidFill>
                 <a:latin typeface="Arial Black" pitchFamily="34" charset="0"/>
                 <a:ea typeface="Arial Black" pitchFamily="34" charset="-122"/>
@@ -6577,13 +6124,13 @@
           <a:bodyPr wrap="square" lIns="0" tIns="0" rIns="0" bIns="0" rtlCol="0" anchor="ctr"/>
           <a:lstStyle/>
           <a:p>
-            <a:pPr marL="0" indent="0">
+            <a:pPr indent="0" marL="0">
               <a:buNone/>
             </a:pPr>
             <a:r>
               <a:rPr lang="en-US" sz="1500" i="1" dirty="0">
                 <a:solidFill>
-                  <a:srgbClr val="707070"/>
+                  <a:srgbClr val="4A5568"/>
                 </a:solidFill>
                 <a:latin typeface="Arial" pitchFamily="34" charset="0"/>
                 <a:ea typeface="Arial" pitchFamily="34" charset="-122"/>
@@ -6614,18 +6161,11 @@
           </a:solidFill>
           <a:ln w="12700">
             <a:solidFill>
-              <a:srgbClr val="E0DDD0"/>
+              <a:srgbClr val="E2E1DC"/>
             </a:solidFill>
             <a:prstDash val="solid"/>
           </a:ln>
         </p:spPr>
-        <p:txBody>
-          <a:bodyPr/>
-          <a:lstStyle/>
-          <a:p>
-            <a:endParaRPr lang="en-US"/>
-          </a:p>
-        </p:txBody>
       </p:sp>
       <p:sp>
         <p:nvSpPr>
@@ -6642,22 +6182,15 @@
             <a:avLst/>
           </a:prstGeom>
           <a:solidFill>
-            <a:srgbClr val="CF3338"/>
+            <a:srgbClr val="2A4365"/>
           </a:solidFill>
           <a:ln w="12700">
             <a:solidFill>
-              <a:srgbClr val="CF3338"/>
+              <a:srgbClr val="2A4365"/>
             </a:solidFill>
             <a:prstDash val="solid"/>
           </a:ln>
         </p:spPr>
-        <p:txBody>
-          <a:bodyPr/>
-          <a:lstStyle/>
-          <a:p>
-            <a:endParaRPr lang="en-US"/>
-          </a:p>
-        </p:txBody>
       </p:sp>
       <p:sp>
         <p:nvSpPr>
@@ -6680,13 +6213,13 @@
           <a:bodyPr wrap="square" lIns="0" tIns="0" rIns="0" bIns="0" rtlCol="0" anchor="ctr"/>
           <a:lstStyle/>
           <a:p>
-            <a:pPr marL="0" indent="0">
+            <a:pPr indent="0" marL="0">
               <a:buNone/>
             </a:pPr>
             <a:r>
               <a:rPr lang="en-US" sz="1400" dirty="0">
                 <a:solidFill>
-                  <a:srgbClr val="1F2120"/>
+                  <a:srgbClr val="1A202C"/>
                 </a:solidFill>
                 <a:latin typeface="Courier New" pitchFamily="34" charset="0"/>
                 <a:ea typeface="Courier New" pitchFamily="34" charset="-122"/>
@@ -6697,13 +6230,13 @@
             <a:endParaRPr lang="en-US" sz="1400" dirty="0"/>
           </a:p>
           <a:p>
-            <a:pPr marL="0" indent="0">
+            <a:pPr indent="0" marL="0">
               <a:buNone/>
             </a:pPr>
             <a:r>
               <a:rPr lang="en-US" sz="1400" dirty="0">
                 <a:solidFill>
-                  <a:srgbClr val="1F2120"/>
+                  <a:srgbClr val="1A202C"/>
                 </a:solidFill>
                 <a:latin typeface="Courier New" pitchFamily="34" charset="0"/>
                 <a:ea typeface="Courier New" pitchFamily="34" charset="-122"/>
@@ -6714,19 +6247,19 @@
             <a:endParaRPr lang="en-US" sz="1400" dirty="0"/>
           </a:p>
           <a:p>
-            <a:pPr marL="0" indent="0">
+            <a:pPr indent="0" marL="0">
               <a:buNone/>
             </a:pPr>
             <a:endParaRPr lang="en-US" sz="1400" dirty="0"/>
           </a:p>
           <a:p>
-            <a:pPr marL="0" indent="0">
+            <a:pPr indent="0" marL="0">
               <a:buNone/>
             </a:pPr>
             <a:r>
               <a:rPr lang="en-US" sz="1400" dirty="0">
                 <a:solidFill>
-                  <a:srgbClr val="1F2120"/>
+                  <a:srgbClr val="1A202C"/>
                 </a:solidFill>
                 <a:latin typeface="Courier New" pitchFamily="34" charset="0"/>
                 <a:ea typeface="Courier New" pitchFamily="34" charset="-122"/>
@@ -6737,13 +6270,13 @@
             <a:endParaRPr lang="en-US" sz="1400" dirty="0"/>
           </a:p>
           <a:p>
-            <a:pPr marL="0" indent="0">
+            <a:pPr indent="0" marL="0">
               <a:buNone/>
             </a:pPr>
             <a:r>
               <a:rPr lang="en-US" sz="1400" dirty="0">
                 <a:solidFill>
-                  <a:srgbClr val="1F2120"/>
+                  <a:srgbClr val="1A202C"/>
                 </a:solidFill>
                 <a:latin typeface="Courier New" pitchFamily="34" charset="0"/>
                 <a:ea typeface="Courier New" pitchFamily="34" charset="-122"/>
@@ -6754,19 +6287,19 @@
             <a:endParaRPr lang="en-US" sz="1400" dirty="0"/>
           </a:p>
           <a:p>
-            <a:pPr marL="0" indent="0">
+            <a:pPr indent="0" marL="0">
               <a:buNone/>
             </a:pPr>
             <a:endParaRPr lang="en-US" sz="1400" dirty="0"/>
           </a:p>
           <a:p>
-            <a:pPr marL="0" indent="0">
+            <a:pPr indent="0" marL="0">
               <a:buNone/>
             </a:pPr>
             <a:r>
               <a:rPr lang="en-US" sz="1400" dirty="0">
                 <a:solidFill>
-                  <a:srgbClr val="1F2120"/>
+                  <a:srgbClr val="1A202C"/>
                 </a:solidFill>
                 <a:latin typeface="Courier New" pitchFamily="34" charset="0"/>
                 <a:ea typeface="Courier New" pitchFamily="34" charset="-122"/>
@@ -6777,13 +6310,13 @@
             <a:endParaRPr lang="en-US" sz="1400" dirty="0"/>
           </a:p>
           <a:p>
-            <a:pPr marL="0" indent="0">
+            <a:pPr indent="0" marL="0">
               <a:buNone/>
             </a:pPr>
             <a:r>
               <a:rPr lang="en-US" sz="1400" dirty="0">
                 <a:solidFill>
-                  <a:srgbClr val="1F2120"/>
+                  <a:srgbClr val="1A202C"/>
                 </a:solidFill>
                 <a:latin typeface="Courier New" pitchFamily="34" charset="0"/>
                 <a:ea typeface="Courier New" pitchFamily="34" charset="-122"/>
@@ -6816,13 +6349,13 @@
           <a:bodyPr wrap="square" lIns="0" tIns="0" rIns="0" bIns="0" rtlCol="0" anchor="ctr"/>
           <a:lstStyle/>
           <a:p>
-            <a:pPr marL="0" indent="0">
+            <a:pPr indent="0" marL="0">
               <a:buNone/>
             </a:pPr>
             <a:r>
               <a:rPr lang="en-US" sz="1300" i="1" dirty="0">
                 <a:solidFill>
-                  <a:srgbClr val="707070"/>
+                  <a:srgbClr val="4A5568"/>
                 </a:solidFill>
                 <a:latin typeface="Arial" pitchFamily="34" charset="0"/>
                 <a:ea typeface="Arial" pitchFamily="34" charset="-122"/>
@@ -6835,11 +6368,6 @@
         </p:txBody>
       </p:sp>
     </p:spTree>
-    <p:extLst>
-      <p:ext uri="{BB962C8B-B14F-4D97-AF65-F5344CB8AC3E}">
-        <p14:creationId xmlns:p14="http://schemas.microsoft.com/office/powerpoint/2010/main" val="346212381"/>
-      </p:ext>
-    </p:extLst>
   </p:cSld>
   <p:clrMapOvr>
     <a:masterClrMapping/>
@@ -6853,9 +6381,8 @@
     <p:bg>
       <p:bgPr>
         <a:solidFill>
-          <a:srgbClr val="EEECE1"/>
+          <a:srgbClr val="FAFAF7"/>
         </a:solidFill>
-        <a:effectLst/>
       </p:bgPr>
     </p:bg>
     <p:spTree>
@@ -6893,13 +6420,13 @@
           <a:bodyPr wrap="square" lIns="0" tIns="0" rIns="0" bIns="0" rtlCol="0" anchor="ctr"/>
           <a:lstStyle/>
           <a:p>
-            <a:pPr marL="0" indent="0">
+            <a:pPr indent="0" marL="0">
               <a:buNone/>
             </a:pPr>
             <a:r>
               <a:rPr lang="en-US" sz="3200" b="1" dirty="0">
                 <a:solidFill>
-                  <a:srgbClr val="1F2120"/>
+                  <a:srgbClr val="1A202C"/>
                 </a:solidFill>
                 <a:latin typeface="Arial Black" pitchFamily="34" charset="0"/>
                 <a:ea typeface="Arial Black" pitchFamily="34" charset="-122"/>
@@ -6932,13 +6459,13 @@
           <a:bodyPr wrap="square" lIns="0" tIns="0" rIns="0" bIns="0" rtlCol="0" anchor="ctr"/>
           <a:lstStyle/>
           <a:p>
-            <a:pPr marL="0" indent="0">
+            <a:pPr indent="0" marL="0">
               <a:buNone/>
             </a:pPr>
             <a:r>
               <a:rPr lang="en-US" sz="1400" i="1" dirty="0">
                 <a:solidFill>
-                  <a:srgbClr val="707070"/>
+                  <a:srgbClr val="4A5568"/>
                 </a:solidFill>
                 <a:latin typeface="Arial" pitchFamily="34" charset="0"/>
                 <a:ea typeface="Arial" pitchFamily="34" charset="-122"/>
@@ -6969,18 +6496,11 @@
           </a:solidFill>
           <a:ln w="12700">
             <a:solidFill>
-              <a:srgbClr val="E0DDD0"/>
+              <a:srgbClr val="E2E1DC"/>
             </a:solidFill>
             <a:prstDash val="solid"/>
           </a:ln>
         </p:spPr>
-        <p:txBody>
-          <a:bodyPr/>
-          <a:lstStyle/>
-          <a:p>
-            <a:endParaRPr lang="en-US"/>
-          </a:p>
-        </p:txBody>
       </p:sp>
       <p:sp>
         <p:nvSpPr>
@@ -6997,22 +6517,15 @@
             <a:avLst/>
           </a:prstGeom>
           <a:solidFill>
-            <a:srgbClr val="CF3338"/>
+            <a:srgbClr val="2A4365"/>
           </a:solidFill>
           <a:ln w="12700">
             <a:solidFill>
-              <a:srgbClr val="CF3338"/>
+              <a:srgbClr val="2A4365"/>
             </a:solidFill>
             <a:prstDash val="solid"/>
           </a:ln>
         </p:spPr>
-        <p:txBody>
-          <a:bodyPr/>
-          <a:lstStyle/>
-          <a:p>
-            <a:endParaRPr lang="en-US"/>
-          </a:p>
-        </p:txBody>
       </p:sp>
       <p:sp>
         <p:nvSpPr>
@@ -7035,13 +6548,13 @@
           <a:bodyPr wrap="square" lIns="0" tIns="0" rIns="0" bIns="0" rtlCol="0" anchor="ctr"/>
           <a:lstStyle/>
           <a:p>
-            <a:pPr marL="0" indent="0">
+            <a:pPr indent="0" marL="0">
               <a:buNone/>
             </a:pPr>
             <a:r>
               <a:rPr lang="en-US" sz="1600" dirty="0">
                 <a:solidFill>
-                  <a:srgbClr val="1F2120"/>
+                  <a:srgbClr val="1A202C"/>
                 </a:solidFill>
                 <a:latin typeface="Courier New" pitchFamily="34" charset="0"/>
                 <a:ea typeface="Courier New" pitchFamily="34" charset="-122"/>
@@ -7052,19 +6565,19 @@
             <a:endParaRPr lang="en-US" sz="1600" dirty="0"/>
           </a:p>
           <a:p>
-            <a:pPr marL="0" indent="0">
+            <a:pPr indent="0" marL="0">
               <a:buNone/>
             </a:pPr>
             <a:endParaRPr lang="en-US" sz="1600" dirty="0"/>
           </a:p>
           <a:p>
-            <a:pPr marL="0" indent="0">
+            <a:pPr indent="0" marL="0">
               <a:buNone/>
             </a:pPr>
             <a:r>
               <a:rPr lang="en-US" sz="1600" dirty="0">
                 <a:solidFill>
-                  <a:srgbClr val="1F2120"/>
+                  <a:srgbClr val="1A202C"/>
                 </a:solidFill>
                 <a:latin typeface="Courier New" pitchFamily="34" charset="0"/>
                 <a:ea typeface="Courier New" pitchFamily="34" charset="-122"/>
@@ -7075,19 +6588,19 @@
             <a:endParaRPr lang="en-US" sz="1600" dirty="0"/>
           </a:p>
           <a:p>
-            <a:pPr marL="0" indent="0">
+            <a:pPr indent="0" marL="0">
               <a:buNone/>
             </a:pPr>
             <a:endParaRPr lang="en-US" sz="1600" dirty="0"/>
           </a:p>
           <a:p>
-            <a:pPr marL="0" indent="0">
+            <a:pPr indent="0" marL="0">
               <a:buNone/>
             </a:pPr>
             <a:r>
               <a:rPr lang="en-US" sz="1600" dirty="0">
                 <a:solidFill>
-                  <a:srgbClr val="1F2120"/>
+                  <a:srgbClr val="1A202C"/>
                 </a:solidFill>
                 <a:latin typeface="Courier New" pitchFamily="34" charset="0"/>
                 <a:ea typeface="Courier New" pitchFamily="34" charset="-122"/>
@@ -7120,13 +6633,13 @@
           <a:bodyPr wrap="square" lIns="0" tIns="0" rIns="0" bIns="0" rtlCol="0" anchor="ctr"/>
           <a:lstStyle/>
           <a:p>
-            <a:pPr marL="0" indent="0">
+            <a:pPr indent="0" marL="0">
               <a:buNone/>
             </a:pPr>
             <a:r>
               <a:rPr lang="en-US" sz="1200" i="1" dirty="0">
                 <a:solidFill>
-                  <a:srgbClr val="707070"/>
+                  <a:srgbClr val="4A5568"/>
                 </a:solidFill>
                 <a:latin typeface="Arial" pitchFamily="34" charset="0"/>
                 <a:ea typeface="Arial" pitchFamily="34" charset="-122"/>
@@ -7139,11 +6652,6 @@
         </p:txBody>
       </p:sp>
     </p:spTree>
-    <p:extLst>
-      <p:ext uri="{BB962C8B-B14F-4D97-AF65-F5344CB8AC3E}">
-        <p14:creationId xmlns:p14="http://schemas.microsoft.com/office/powerpoint/2010/main" val="3027647949"/>
-      </p:ext>
-    </p:extLst>
   </p:cSld>
   <p:clrMapOvr>
     <a:masterClrMapping/>
@@ -7157,9 +6665,8 @@
     <p:bg>
       <p:bgPr>
         <a:solidFill>
-          <a:srgbClr val="C00000"/>
+          <a:srgbClr val="1A365D"/>
         </a:solidFill>
-        <a:effectLst/>
       </p:bgPr>
     </p:bg>
     <p:spTree>
@@ -7197,11 +6704,11 @@
           <a:bodyPr wrap="square" lIns="0" tIns="0" rIns="0" bIns="0" rtlCol="0" anchor="ctr"/>
           <a:lstStyle/>
           <a:p>
-            <a:pPr marL="0" indent="0">
-              <a:buNone/>
-            </a:pPr>
-            <a:r>
-              <a:rPr lang="en-US" sz="2000" kern="0" spc="800" dirty="0">
+            <a:pPr indent="0" marL="0">
+              <a:buNone/>
+            </a:pPr>
+            <a:r>
+              <a:rPr lang="en-US" sz="2000" spc="800" kern="0" dirty="0">
                 <a:solidFill>
                   <a:srgbClr val="FFFFFF"/>
                 </a:solidFill>
@@ -7236,7 +6743,7 @@
           <a:bodyPr wrap="square" lIns="0" tIns="0" rIns="0" bIns="0" rtlCol="0" anchor="ctr"/>
           <a:lstStyle/>
           <a:p>
-            <a:pPr marL="0" indent="0">
+            <a:pPr indent="0" marL="0">
               <a:buNone/>
             </a:pPr>
             <a:r>
@@ -7275,7 +6782,7 @@
           <a:bodyPr wrap="square" lIns="0" tIns="0" rIns="0" bIns="0" rtlCol="0" anchor="ctr"/>
           <a:lstStyle/>
           <a:p>
-            <a:pPr marL="0" indent="0">
+            <a:pPr indent="0" marL="0">
               <a:buNone/>
             </a:pPr>
             <a:r>
@@ -7314,7 +6821,7 @@
           <a:bodyPr wrap="square" lIns="0" tIns="0" rIns="0" bIns="0" rtlCol="0" anchor="ctr"/>
           <a:lstStyle/>
           <a:p>
-            <a:pPr marL="0" indent="0">
+            <a:pPr indent="0" marL="0">
               <a:buNone/>
             </a:pPr>
             <a:r>
@@ -7333,11 +6840,6 @@
         </p:txBody>
       </p:sp>
     </p:spTree>
-    <p:extLst>
-      <p:ext uri="{BB962C8B-B14F-4D97-AF65-F5344CB8AC3E}">
-        <p14:creationId xmlns:p14="http://schemas.microsoft.com/office/powerpoint/2010/main" val="3020388587"/>
-      </p:ext>
-    </p:extLst>
   </p:cSld>
   <p:clrMapOvr>
     <a:masterClrMapping/>
@@ -7351,9 +6853,8 @@
     <p:bg>
       <p:bgPr>
         <a:solidFill>
-          <a:srgbClr val="EEECE1"/>
+          <a:srgbClr val="FAFAF7"/>
         </a:solidFill>
-        <a:effectLst/>
       </p:bgPr>
     </p:bg>
     <p:spTree>
@@ -7391,13 +6892,13 @@
           <a:bodyPr wrap="square" lIns="0" tIns="0" rIns="0" bIns="0" rtlCol="0" anchor="ctr"/>
           <a:lstStyle/>
           <a:p>
-            <a:pPr marL="0" indent="0">
+            <a:pPr indent="0" marL="0">
               <a:buNone/>
             </a:pPr>
             <a:r>
               <a:rPr lang="en-US" sz="3000" b="1" dirty="0">
                 <a:solidFill>
-                  <a:srgbClr val="1F2120"/>
+                  <a:srgbClr val="1A202C"/>
                 </a:solidFill>
                 <a:latin typeface="Arial Black" pitchFamily="34" charset="0"/>
                 <a:ea typeface="Arial Black" pitchFamily="34" charset="-122"/>
@@ -7428,18 +6929,11 @@
           </a:solidFill>
           <a:ln w="12700">
             <a:solidFill>
-              <a:srgbClr val="E0DDD0"/>
+              <a:srgbClr val="E2E1DC"/>
             </a:solidFill>
             <a:prstDash val="solid"/>
           </a:ln>
         </p:spPr>
-        <p:txBody>
-          <a:bodyPr/>
-          <a:lstStyle/>
-          <a:p>
-            <a:endParaRPr lang="en-US"/>
-          </a:p>
-        </p:txBody>
       </p:sp>
       <p:sp>
         <p:nvSpPr>
@@ -7456,22 +6950,15 @@
             <a:avLst/>
           </a:prstGeom>
           <a:solidFill>
-            <a:srgbClr val="CF3338"/>
+            <a:srgbClr val="2A4365"/>
           </a:solidFill>
           <a:ln w="12700">
             <a:solidFill>
-              <a:srgbClr val="CF3338"/>
+              <a:srgbClr val="2A4365"/>
             </a:solidFill>
             <a:prstDash val="solid"/>
           </a:ln>
         </p:spPr>
-        <p:txBody>
-          <a:bodyPr/>
-          <a:lstStyle/>
-          <a:p>
-            <a:endParaRPr lang="en-US"/>
-          </a:p>
-        </p:txBody>
       </p:sp>
       <p:sp>
         <p:nvSpPr>
@@ -7494,13 +6981,13 @@
           <a:bodyPr wrap="square" lIns="0" tIns="0" rIns="0" bIns="0" rtlCol="0" anchor="ctr"/>
           <a:lstStyle/>
           <a:p>
-            <a:pPr marL="0" indent="0">
+            <a:pPr indent="0" marL="0">
               <a:buNone/>
             </a:pPr>
             <a:r>
               <a:rPr lang="en-US" sz="1200" dirty="0">
                 <a:solidFill>
-                  <a:srgbClr val="1F2120"/>
+                  <a:srgbClr val="1A202C"/>
                 </a:solidFill>
                 <a:latin typeface="Courier New" pitchFamily="34" charset="0"/>
                 <a:ea typeface="Courier New" pitchFamily="34" charset="-122"/>
@@ -7511,19 +6998,19 @@
             <a:endParaRPr lang="en-US" sz="1200" dirty="0"/>
           </a:p>
           <a:p>
-            <a:pPr marL="0" indent="0">
+            <a:pPr indent="0" marL="0">
               <a:buNone/>
             </a:pPr>
             <a:endParaRPr lang="en-US" sz="1200" dirty="0"/>
           </a:p>
           <a:p>
-            <a:pPr marL="0" indent="0">
+            <a:pPr indent="0" marL="0">
               <a:buNone/>
             </a:pPr>
             <a:r>
               <a:rPr lang="en-US" sz="1200" dirty="0">
                 <a:solidFill>
-                  <a:srgbClr val="1F2120"/>
+                  <a:srgbClr val="1A202C"/>
                 </a:solidFill>
                 <a:latin typeface="Courier New" pitchFamily="34" charset="0"/>
                 <a:ea typeface="Courier New" pitchFamily="34" charset="-122"/>
@@ -7534,13 +7021,13 @@
             <a:endParaRPr lang="en-US" sz="1200" dirty="0"/>
           </a:p>
           <a:p>
-            <a:pPr marL="0" indent="0">
+            <a:pPr indent="0" marL="0">
               <a:buNone/>
             </a:pPr>
             <a:r>
               <a:rPr lang="en-US" sz="1200" dirty="0">
                 <a:solidFill>
-                  <a:srgbClr val="1F2120"/>
+                  <a:srgbClr val="1A202C"/>
                 </a:solidFill>
                 <a:latin typeface="Courier New" pitchFamily="34" charset="0"/>
                 <a:ea typeface="Courier New" pitchFamily="34" charset="-122"/>
@@ -7551,13 +7038,13 @@
             <a:endParaRPr lang="en-US" sz="1200" dirty="0"/>
           </a:p>
           <a:p>
-            <a:pPr marL="0" indent="0">
+            <a:pPr indent="0" marL="0">
               <a:buNone/>
             </a:pPr>
             <a:r>
               <a:rPr lang="en-US" sz="1200" dirty="0">
                 <a:solidFill>
-                  <a:srgbClr val="1F2120"/>
+                  <a:srgbClr val="1A202C"/>
                 </a:solidFill>
                 <a:latin typeface="Courier New" pitchFamily="34" charset="0"/>
                 <a:ea typeface="Courier New" pitchFamily="34" charset="-122"/>
@@ -7568,13 +7055,13 @@
             <a:endParaRPr lang="en-US" sz="1200" dirty="0"/>
           </a:p>
           <a:p>
-            <a:pPr marL="0" indent="0">
+            <a:pPr indent="0" marL="0">
               <a:buNone/>
             </a:pPr>
             <a:r>
               <a:rPr lang="en-US" sz="1200" dirty="0">
                 <a:solidFill>
-                  <a:srgbClr val="1F2120"/>
+                  <a:srgbClr val="1A202C"/>
                 </a:solidFill>
                 <a:latin typeface="Courier New" pitchFamily="34" charset="0"/>
                 <a:ea typeface="Courier New" pitchFamily="34" charset="-122"/>
@@ -7585,19 +7072,19 @@
             <a:endParaRPr lang="en-US" sz="1200" dirty="0"/>
           </a:p>
           <a:p>
-            <a:pPr marL="0" indent="0">
+            <a:pPr indent="0" marL="0">
               <a:buNone/>
             </a:pPr>
             <a:endParaRPr lang="en-US" sz="1200" dirty="0"/>
           </a:p>
           <a:p>
-            <a:pPr marL="0" indent="0">
+            <a:pPr indent="0" marL="0">
               <a:buNone/>
             </a:pPr>
             <a:r>
               <a:rPr lang="en-US" sz="1200" dirty="0">
                 <a:solidFill>
-                  <a:srgbClr val="1F2120"/>
+                  <a:srgbClr val="1A202C"/>
                 </a:solidFill>
                 <a:latin typeface="Courier New" pitchFamily="34" charset="0"/>
                 <a:ea typeface="Courier New" pitchFamily="34" charset="-122"/>
@@ -7608,13 +7095,13 @@
             <a:endParaRPr lang="en-US" sz="1200" dirty="0"/>
           </a:p>
           <a:p>
-            <a:pPr marL="0" indent="0">
+            <a:pPr indent="0" marL="0">
               <a:buNone/>
             </a:pPr>
             <a:r>
               <a:rPr lang="en-US" sz="1200" dirty="0">
                 <a:solidFill>
-                  <a:srgbClr val="1F2120"/>
+                  <a:srgbClr val="1A202C"/>
                 </a:solidFill>
                 <a:latin typeface="Courier New" pitchFamily="34" charset="0"/>
                 <a:ea typeface="Courier New" pitchFamily="34" charset="-122"/>
@@ -7625,13 +7112,13 @@
             <a:endParaRPr lang="en-US" sz="1200" dirty="0"/>
           </a:p>
           <a:p>
-            <a:pPr marL="0" indent="0">
+            <a:pPr indent="0" marL="0">
               <a:buNone/>
             </a:pPr>
             <a:r>
               <a:rPr lang="en-US" sz="1200" dirty="0">
                 <a:solidFill>
-                  <a:srgbClr val="1F2120"/>
+                  <a:srgbClr val="1A202C"/>
                 </a:solidFill>
                 <a:latin typeface="Courier New" pitchFamily="34" charset="0"/>
                 <a:ea typeface="Courier New" pitchFamily="34" charset="-122"/>
@@ -7642,30 +7129,30 @@
             <a:endParaRPr lang="en-US" sz="1200" dirty="0"/>
           </a:p>
           <a:p>
-            <a:pPr marL="0" indent="0">
+            <a:pPr indent="0" marL="0">
               <a:buNone/>
             </a:pPr>
             <a:r>
               <a:rPr lang="en-US" sz="1200" dirty="0">
                 <a:solidFill>
-                  <a:srgbClr val="1F2120"/>
+                  <a:srgbClr val="1A202C"/>
                 </a:solidFill>
                 <a:latin typeface="Courier New" pitchFamily="34" charset="0"/>
                 <a:ea typeface="Courier New" pitchFamily="34" charset="-122"/>
                 <a:cs typeface="Courier New" pitchFamily="34" charset="-120"/>
               </a:rPr>
-              <a:t>  cmap='RdGy_r',</a:t>
+              <a:t>  cmap='RdBu_r',</a:t>
             </a:r>
             <a:endParaRPr lang="en-US" sz="1200" dirty="0"/>
           </a:p>
           <a:p>
-            <a:pPr marL="0" indent="0">
+            <a:pPr indent="0" marL="0">
               <a:buNone/>
             </a:pPr>
             <a:r>
               <a:rPr lang="en-US" sz="1200" dirty="0">
                 <a:solidFill>
-                  <a:srgbClr val="1F2120"/>
+                  <a:srgbClr val="1A202C"/>
                 </a:solidFill>
                 <a:latin typeface="Courier New" pitchFamily="34" charset="0"/>
                 <a:ea typeface="Courier New" pitchFamily="34" charset="-122"/>
@@ -7676,13 +7163,13 @@
             <a:endParaRPr lang="en-US" sz="1200" dirty="0"/>
           </a:p>
           <a:p>
-            <a:pPr marL="0" indent="0">
+            <a:pPr indent="0" marL="0">
               <a:buNone/>
             </a:pPr>
             <a:r>
               <a:rPr lang="en-US" sz="1200" dirty="0">
                 <a:solidFill>
-                  <a:srgbClr val="1F2120"/>
+                  <a:srgbClr val="1A202C"/>
                 </a:solidFill>
                 <a:latin typeface="Courier New" pitchFamily="34" charset="0"/>
                 <a:ea typeface="Courier New" pitchFamily="34" charset="-122"/>
@@ -7696,14 +7183,14 @@
       </p:sp>
       <p:pic>
         <p:nvPicPr>
-          <p:cNvPr id="6" name="Image 0" descr="/sessions/festive-gallant-bohr/mnt/outputs/images/heatmap.png"/>
+          <p:cNvPr id="6" name="Image 0" descr="/sessions/festive-gallant-bohr/mnt/outputs/images/heatmap.png">    </p:cNvPr>
           <p:cNvPicPr>
             <a:picLocks noChangeAspect="1"/>
           </p:cNvPicPr>
           <p:nvPr/>
         </p:nvPicPr>
         <p:blipFill>
-          <a:blip r:embed="rId3"/>
+          <a:blip r:embed="rId1"/>
           <a:stretch>
             <a:fillRect/>
           </a:stretch>
@@ -7739,13 +7226,13 @@
           <a:bodyPr wrap="square" lIns="0" tIns="0" rIns="0" bIns="0" rtlCol="0" anchor="ctr"/>
           <a:lstStyle/>
           <a:p>
-            <a:pPr marL="0" indent="0" algn="ctr">
+            <a:pPr algn="ctr" indent="0" marL="0">
               <a:buNone/>
             </a:pPr>
             <a:r>
               <a:rPr lang="en-US" sz="1300" b="1" i="1" dirty="0">
                 <a:solidFill>
-                  <a:srgbClr val="CF3338"/>
+                  <a:srgbClr val="2A4365"/>
                 </a:solidFill>
                 <a:latin typeface="Arial" pitchFamily="34" charset="0"/>
                 <a:ea typeface="Arial" pitchFamily="34" charset="-122"/>
@@ -7758,11 +7245,6 @@
         </p:txBody>
       </p:sp>
     </p:spTree>
-    <p:extLst>
-      <p:ext uri="{BB962C8B-B14F-4D97-AF65-F5344CB8AC3E}">
-        <p14:creationId xmlns:p14="http://schemas.microsoft.com/office/powerpoint/2010/main" val="669337890"/>
-      </p:ext>
-    </p:extLst>
   </p:cSld>
   <p:clrMapOvr>
     <a:masterClrMapping/>
@@ -7776,9 +7258,8 @@
     <p:bg>
       <p:bgPr>
         <a:solidFill>
-          <a:srgbClr val="C00000"/>
+          <a:srgbClr val="1A365D"/>
         </a:solidFill>
-        <a:effectLst/>
       </p:bgPr>
     </p:bg>
     <p:spTree>
@@ -7816,7 +7297,7 @@
           <a:bodyPr wrap="square" lIns="0" tIns="0" rIns="0" bIns="0" rtlCol="0" anchor="ctr"/>
           <a:lstStyle/>
           <a:p>
-            <a:pPr marL="0" indent="0">
+            <a:pPr indent="0" marL="0">
               <a:buNone/>
             </a:pPr>
             <a:r>
@@ -7855,7 +7336,7 @@
           <a:bodyPr wrap="square" lIns="0" tIns="0" rIns="0" bIns="0" rtlCol="0" anchor="ctr"/>
           <a:lstStyle/>
           <a:p>
-            <a:pPr marL="0" indent="0">
+            <a:pPr indent="0" marL="0">
               <a:spcAft>
                 <a:spcPts val="600"/>
               </a:spcAft>
@@ -7872,6 +7353,12 @@
               </a:rPr>
               <a:t>→  </a:t>
             </a:r>
+            <a:pPr indent="0" marL="0">
+              <a:spcAft>
+                <a:spcPts val="600"/>
+              </a:spcAft>
+              <a:buNone/>
+            </a:pPr>
             <a:r>
               <a:rPr lang="en-US" sz="2000" dirty="0">
                 <a:solidFill>
@@ -7883,6 +7370,12 @@
               </a:rPr>
               <a:t>You've heard the words "Python in Excel" but haven't typed </a:t>
             </a:r>
+            <a:pPr indent="0" marL="0">
+              <a:spcAft>
+                <a:spcPts val="600"/>
+              </a:spcAft>
+              <a:buNone/>
+            </a:pPr>
             <a:r>
               <a:rPr lang="en-US" sz="2000" b="1" dirty="0">
                 <a:solidFill>
@@ -7894,6 +7387,12 @@
               </a:rPr>
               <a:t>=PY(</a:t>
             </a:r>
+            <a:pPr indent="0" marL="0">
+              <a:spcAft>
+                <a:spcPts val="600"/>
+              </a:spcAft>
+              <a:buNone/>
+            </a:pPr>
             <a:r>
               <a:rPr lang="en-US" sz="2000" dirty="0">
                 <a:solidFill>
@@ -7908,7 +7407,7 @@
             <a:endParaRPr lang="en-US" sz="2000" dirty="0"/>
           </a:p>
           <a:p>
-            <a:pPr marL="0" indent="0">
+            <a:pPr indent="0" marL="0">
               <a:spcAft>
                 <a:spcPts val="600"/>
               </a:spcAft>
@@ -7928,7 +7427,7 @@
             <a:endParaRPr lang="en-US" sz="2000" dirty="0"/>
           </a:p>
           <a:p>
-            <a:pPr marL="0" indent="0">
+            <a:pPr indent="0" marL="0">
               <a:spcAft>
                 <a:spcPts val="600"/>
               </a:spcAft>
@@ -7945,6 +7444,12 @@
               </a:rPr>
               <a:t>→  </a:t>
             </a:r>
+            <a:pPr indent="0" marL="0">
+              <a:spcAft>
+                <a:spcPts val="600"/>
+              </a:spcAft>
+              <a:buNone/>
+            </a:pPr>
             <a:r>
               <a:rPr lang="en-US" sz="2000" dirty="0">
                 <a:solidFill>
@@ -7959,7 +7464,7 @@
             <a:endParaRPr lang="en-US" sz="2000" dirty="0"/>
           </a:p>
           <a:p>
-            <a:pPr marL="0" indent="0">
+            <a:pPr indent="0" marL="0">
               <a:spcAft>
                 <a:spcPts val="600"/>
               </a:spcAft>
@@ -7979,7 +7484,7 @@
             <a:endParaRPr lang="en-US" sz="2000" dirty="0"/>
           </a:p>
           <a:p>
-            <a:pPr marL="0" indent="0">
+            <a:pPr indent="0" marL="0">
               <a:spcAft>
                 <a:spcPts val="600"/>
               </a:spcAft>
@@ -7996,6 +7501,12 @@
               </a:rPr>
               <a:t>→  </a:t>
             </a:r>
+            <a:pPr indent="0" marL="0">
+              <a:spcAft>
+                <a:spcPts val="600"/>
+              </a:spcAft>
+              <a:buNone/>
+            </a:pPr>
             <a:r>
               <a:rPr lang="en-US" sz="2000" dirty="0">
                 <a:solidFill>
@@ -8007,6 +7518,12 @@
               </a:rPr>
               <a:t>You want to leave the next hour having </a:t>
             </a:r>
+            <a:pPr indent="0" marL="0">
+              <a:spcAft>
+                <a:spcPts val="600"/>
+              </a:spcAft>
+              <a:buNone/>
+            </a:pPr>
             <a:r>
               <a:rPr lang="en-US" sz="2000" b="1" i="1" dirty="0">
                 <a:solidFill>
@@ -8018,6 +7535,12 @@
               </a:rPr>
               <a:t>actually done it</a:t>
             </a:r>
+            <a:pPr indent="0" marL="0">
+              <a:spcAft>
+                <a:spcPts val="600"/>
+              </a:spcAft>
+              <a:buNone/>
+            </a:pPr>
             <a:r>
               <a:rPr lang="en-US" sz="2000" dirty="0">
                 <a:solidFill>
@@ -8034,11 +7557,6 @@
         </p:txBody>
       </p:sp>
     </p:spTree>
-    <p:extLst>
-      <p:ext uri="{BB962C8B-B14F-4D97-AF65-F5344CB8AC3E}">
-        <p14:creationId xmlns:p14="http://schemas.microsoft.com/office/powerpoint/2010/main" val="1940455959"/>
-      </p:ext>
-    </p:extLst>
   </p:cSld>
   <p:clrMapOvr>
     <a:masterClrMapping/>
@@ -8052,9 +7570,8 @@
     <p:bg>
       <p:bgPr>
         <a:solidFill>
-          <a:srgbClr val="EEECE1"/>
+          <a:srgbClr val="FAFAF7"/>
         </a:solidFill>
-        <a:effectLst/>
       </p:bgPr>
     </p:bg>
     <p:spTree>
@@ -8092,13 +7609,13 @@
           <a:bodyPr wrap="square" lIns="0" tIns="0" rIns="0" bIns="0" rtlCol="0" anchor="ctr"/>
           <a:lstStyle/>
           <a:p>
-            <a:pPr marL="0" indent="0">
+            <a:pPr indent="0" marL="0">
               <a:buNone/>
             </a:pPr>
             <a:r>
               <a:rPr lang="en-US" sz="3000" b="1" dirty="0">
                 <a:solidFill>
-                  <a:srgbClr val="1F2120"/>
+                  <a:srgbClr val="1A202C"/>
                 </a:solidFill>
                 <a:latin typeface="Arial Black" pitchFamily="34" charset="0"/>
                 <a:ea typeface="Arial Black" pitchFamily="34" charset="-122"/>
@@ -8129,18 +7646,11 @@
           </a:solidFill>
           <a:ln w="12700">
             <a:solidFill>
-              <a:srgbClr val="E0DDD0"/>
+              <a:srgbClr val="E2E1DC"/>
             </a:solidFill>
             <a:prstDash val="solid"/>
           </a:ln>
         </p:spPr>
-        <p:txBody>
-          <a:bodyPr/>
-          <a:lstStyle/>
-          <a:p>
-            <a:endParaRPr lang="en-US"/>
-          </a:p>
-        </p:txBody>
       </p:sp>
       <p:sp>
         <p:nvSpPr>
@@ -8157,22 +7667,15 @@
             <a:avLst/>
           </a:prstGeom>
           <a:solidFill>
-            <a:srgbClr val="CF3338"/>
+            <a:srgbClr val="2A4365"/>
           </a:solidFill>
           <a:ln w="12700">
             <a:solidFill>
-              <a:srgbClr val="CF3338"/>
+              <a:srgbClr val="2A4365"/>
             </a:solidFill>
             <a:prstDash val="solid"/>
           </a:ln>
         </p:spPr>
-        <p:txBody>
-          <a:bodyPr/>
-          <a:lstStyle/>
-          <a:p>
-            <a:endParaRPr lang="en-US"/>
-          </a:p>
-        </p:txBody>
       </p:sp>
       <p:sp>
         <p:nvSpPr>
@@ -8195,13 +7698,13 @@
           <a:bodyPr wrap="square" lIns="0" tIns="0" rIns="0" bIns="0" rtlCol="0" anchor="ctr"/>
           <a:lstStyle/>
           <a:p>
-            <a:pPr marL="0" indent="0">
+            <a:pPr indent="0" marL="0">
               <a:buNone/>
             </a:pPr>
             <a:r>
               <a:rPr lang="en-US" sz="1600" dirty="0">
                 <a:solidFill>
-                  <a:srgbClr val="1F2120"/>
+                  <a:srgbClr val="1A202C"/>
                 </a:solidFill>
                 <a:latin typeface="Courier New" pitchFamily="34" charset="0"/>
                 <a:ea typeface="Courier New" pitchFamily="34" charset="-122"/>
@@ -8234,13 +7737,13 @@
           <a:bodyPr wrap="square" lIns="0" tIns="0" rIns="0" bIns="0" rtlCol="0" anchor="ctr"/>
           <a:lstStyle/>
           <a:p>
-            <a:pPr marL="0" indent="0">
+            <a:pPr indent="0" marL="0">
               <a:buNone/>
             </a:pPr>
             <a:r>
               <a:rPr lang="en-US" sz="1600" dirty="0">
                 <a:solidFill>
-                  <a:srgbClr val="1F2120"/>
+                  <a:srgbClr val="1A202C"/>
                 </a:solidFill>
                 <a:latin typeface="Arial" pitchFamily="34" charset="0"/>
                 <a:ea typeface="Arial" pitchFamily="34" charset="-122"/>
@@ -8273,13 +7776,13 @@
           <a:bodyPr wrap="square" lIns="0" tIns="0" rIns="0" bIns="0" rtlCol="0" anchor="ctr"/>
           <a:lstStyle/>
           <a:p>
-            <a:pPr marL="0" indent="0">
+            <a:pPr indent="0" marL="0">
               <a:buNone/>
             </a:pPr>
             <a:r>
               <a:rPr lang="en-US" sz="1200" i="1" dirty="0">
                 <a:solidFill>
-                  <a:srgbClr val="707070"/>
+                  <a:srgbClr val="4A5568"/>
                 </a:solidFill>
                 <a:latin typeface="Arial" pitchFamily="34" charset="0"/>
                 <a:ea typeface="Arial" pitchFamily="34" charset="-122"/>
@@ -8312,13 +7815,13 @@
           <a:bodyPr wrap="square" lIns="0" tIns="0" rIns="0" bIns="0" rtlCol="0" anchor="ctr"/>
           <a:lstStyle/>
           <a:p>
-            <a:pPr marL="0" indent="0" algn="ctr">
+            <a:pPr algn="ctr" indent="0" marL="0">
               <a:buNone/>
             </a:pPr>
             <a:r>
               <a:rPr lang="en-US" sz="1600" b="1" i="1" dirty="0">
                 <a:solidFill>
-                  <a:srgbClr val="CF3338"/>
+                  <a:srgbClr val="2A4365"/>
                 </a:solidFill>
                 <a:latin typeface="Arial" pitchFamily="34" charset="0"/>
                 <a:ea typeface="Arial" pitchFamily="34" charset="-122"/>
@@ -8331,11 +7834,6 @@
         </p:txBody>
       </p:sp>
     </p:spTree>
-    <p:extLst>
-      <p:ext uri="{BB962C8B-B14F-4D97-AF65-F5344CB8AC3E}">
-        <p14:creationId xmlns:p14="http://schemas.microsoft.com/office/powerpoint/2010/main" val="1945135147"/>
-      </p:ext>
-    </p:extLst>
   </p:cSld>
   <p:clrMapOvr>
     <a:masterClrMapping/>
@@ -8349,9 +7847,8 @@
     <p:bg>
       <p:bgPr>
         <a:solidFill>
-          <a:srgbClr val="C00000"/>
+          <a:srgbClr val="1A365D"/>
         </a:solidFill>
-        <a:effectLst/>
       </p:bgPr>
     </p:bg>
     <p:spTree>
@@ -8389,11 +7886,11 @@
           <a:bodyPr wrap="square" lIns="0" tIns="0" rIns="0" bIns="0" rtlCol="0" anchor="ctr"/>
           <a:lstStyle/>
           <a:p>
-            <a:pPr marL="0" indent="0">
-              <a:buNone/>
-            </a:pPr>
-            <a:r>
-              <a:rPr lang="en-US" sz="2000" kern="0" spc="800" dirty="0">
+            <a:pPr indent="0" marL="0">
+              <a:buNone/>
+            </a:pPr>
+            <a:r>
+              <a:rPr lang="en-US" sz="2000" spc="800" kern="0" dirty="0">
                 <a:solidFill>
                   <a:srgbClr val="FFFFFF"/>
                 </a:solidFill>
@@ -8428,7 +7925,7 @@
           <a:bodyPr wrap="square" lIns="0" tIns="0" rIns="0" bIns="0" rtlCol="0" anchor="ctr"/>
           <a:lstStyle/>
           <a:p>
-            <a:pPr marL="0" indent="0">
+            <a:pPr indent="0" marL="0">
               <a:buNone/>
             </a:pPr>
             <a:r>
@@ -8467,7 +7964,7 @@
           <a:bodyPr wrap="square" lIns="0" tIns="0" rIns="0" bIns="0" rtlCol="0" anchor="ctr"/>
           <a:lstStyle/>
           <a:p>
-            <a:pPr marL="0" indent="0">
+            <a:pPr indent="0" marL="0">
               <a:buNone/>
             </a:pPr>
             <a:r>
@@ -8486,11 +7983,6 @@
         </p:txBody>
       </p:sp>
     </p:spTree>
-    <p:extLst>
-      <p:ext uri="{BB962C8B-B14F-4D97-AF65-F5344CB8AC3E}">
-        <p14:creationId xmlns:p14="http://schemas.microsoft.com/office/powerpoint/2010/main" val="2750851055"/>
-      </p:ext>
-    </p:extLst>
   </p:cSld>
   <p:clrMapOvr>
     <a:masterClrMapping/>
@@ -8504,9 +7996,8 @@
     <p:bg>
       <p:bgPr>
         <a:solidFill>
-          <a:srgbClr val="EEECE1"/>
+          <a:srgbClr val="FAFAF7"/>
         </a:solidFill>
-        <a:effectLst/>
       </p:bgPr>
     </p:bg>
     <p:spTree>
@@ -8544,13 +8035,13 @@
           <a:bodyPr wrap="square" lIns="0" tIns="0" rIns="0" bIns="0" rtlCol="0" anchor="ctr"/>
           <a:lstStyle/>
           <a:p>
-            <a:pPr marL="0" indent="0">
+            <a:pPr indent="0" marL="0">
               <a:buNone/>
             </a:pPr>
             <a:r>
               <a:rPr lang="en-US" sz="3000" b="1" dirty="0">
                 <a:solidFill>
-                  <a:srgbClr val="1F2120"/>
+                  <a:srgbClr val="1A202C"/>
                 </a:solidFill>
                 <a:latin typeface="Arial Black" pitchFamily="34" charset="0"/>
                 <a:ea typeface="Arial Black" pitchFamily="34" charset="-122"/>
@@ -8581,18 +8072,11 @@
           </a:solidFill>
           <a:ln w="12700">
             <a:solidFill>
-              <a:srgbClr val="E0DDD0"/>
+              <a:srgbClr val="E2E1DC"/>
             </a:solidFill>
             <a:prstDash val="solid"/>
           </a:ln>
         </p:spPr>
-        <p:txBody>
-          <a:bodyPr/>
-          <a:lstStyle/>
-          <a:p>
-            <a:endParaRPr lang="en-US"/>
-          </a:p>
-        </p:txBody>
       </p:sp>
       <p:sp>
         <p:nvSpPr>
@@ -8609,22 +8093,15 @@
             <a:avLst/>
           </a:prstGeom>
           <a:solidFill>
-            <a:srgbClr val="CF3338"/>
+            <a:srgbClr val="2A4365"/>
           </a:solidFill>
           <a:ln w="12700">
             <a:solidFill>
-              <a:srgbClr val="CF3338"/>
+              <a:srgbClr val="2A4365"/>
             </a:solidFill>
             <a:prstDash val="solid"/>
           </a:ln>
         </p:spPr>
-        <p:txBody>
-          <a:bodyPr/>
-          <a:lstStyle/>
-          <a:p>
-            <a:endParaRPr lang="en-US"/>
-          </a:p>
-        </p:txBody>
       </p:sp>
       <p:sp>
         <p:nvSpPr>
@@ -8647,11 +8124,11 @@
           <a:bodyPr wrap="square" lIns="0" tIns="0" rIns="0" bIns="0" rtlCol="0" anchor="ctr"/>
           <a:lstStyle/>
           <a:p>
-            <a:pPr marL="0" indent="0">
-              <a:buNone/>
-            </a:pPr>
-            <a:r>
-              <a:rPr lang="en-US" sz="1100" b="1" kern="0" spc="400" dirty="0">
+            <a:pPr indent="0" marL="0">
+              <a:buNone/>
+            </a:pPr>
+            <a:r>
+              <a:rPr lang="en-US" sz="1100" b="1" spc="400" kern="0" dirty="0">
                 <a:solidFill>
                   <a:srgbClr val="FFFFFF"/>
                 </a:solidFill>
@@ -8686,13 +8163,13 @@
           <a:bodyPr wrap="square" lIns="0" tIns="0" rIns="0" bIns="0" rtlCol="0" anchor="ctr"/>
           <a:lstStyle/>
           <a:p>
-            <a:pPr marL="0" indent="0">
+            <a:pPr indent="0" marL="0">
               <a:buNone/>
             </a:pPr>
             <a:r>
               <a:rPr lang="en-US" sz="1800" b="1" dirty="0">
                 <a:solidFill>
-                  <a:srgbClr val="1F2120"/>
+                  <a:srgbClr val="1A202C"/>
                 </a:solidFill>
                 <a:latin typeface="Arial Black" pitchFamily="34" charset="0"/>
                 <a:ea typeface="Arial Black" pitchFamily="34" charset="-122"/>
@@ -8725,7 +8202,7 @@
           <a:bodyPr wrap="square" lIns="0" tIns="0" rIns="0" bIns="0" rtlCol="0" anchor="ctr"/>
           <a:lstStyle/>
           <a:p>
-            <a:pPr marL="0" indent="0">
+            <a:pPr indent="0" marL="0">
               <a:spcAft>
                 <a:spcPts val="400"/>
               </a:spcAft>
@@ -8734,7 +8211,7 @@
             <a:r>
               <a:rPr lang="en-US" sz="1200" dirty="0">
                 <a:solidFill>
-                  <a:srgbClr val="707070"/>
+                  <a:srgbClr val="4A5568"/>
                 </a:solidFill>
                 <a:latin typeface="Arial" pitchFamily="34" charset="0"/>
                 <a:ea typeface="Arial" pitchFamily="34" charset="-122"/>
@@ -8767,13 +8244,13 @@
           <a:bodyPr wrap="square" lIns="0" tIns="0" rIns="0" bIns="0" rtlCol="0" anchor="ctr"/>
           <a:lstStyle/>
           <a:p>
-            <a:pPr marL="0" indent="0">
+            <a:pPr indent="0" marL="0">
               <a:buNone/>
             </a:pPr>
             <a:r>
               <a:rPr lang="en-US" sz="1100" i="1" dirty="0">
                 <a:solidFill>
-                  <a:srgbClr val="CF3338"/>
+                  <a:srgbClr val="2A4365"/>
                 </a:solidFill>
                 <a:latin typeface="Arial" pitchFamily="34" charset="0"/>
                 <a:ea typeface="Arial" pitchFamily="34" charset="-122"/>
@@ -8804,18 +8281,11 @@
           </a:solidFill>
           <a:ln w="12700">
             <a:solidFill>
-              <a:srgbClr val="E0DDD0"/>
+              <a:srgbClr val="E2E1DC"/>
             </a:solidFill>
             <a:prstDash val="solid"/>
           </a:ln>
         </p:spPr>
-        <p:txBody>
-          <a:bodyPr/>
-          <a:lstStyle/>
-          <a:p>
-            <a:endParaRPr lang="en-US"/>
-          </a:p>
-        </p:txBody>
       </p:sp>
       <p:sp>
         <p:nvSpPr>
@@ -8832,22 +8302,15 @@
             <a:avLst/>
           </a:prstGeom>
           <a:solidFill>
-            <a:srgbClr val="CF3338"/>
+            <a:srgbClr val="2A4365"/>
           </a:solidFill>
           <a:ln w="12700">
             <a:solidFill>
-              <a:srgbClr val="CF3338"/>
+              <a:srgbClr val="2A4365"/>
             </a:solidFill>
             <a:prstDash val="solid"/>
           </a:ln>
         </p:spPr>
-        <p:txBody>
-          <a:bodyPr/>
-          <a:lstStyle/>
-          <a:p>
-            <a:endParaRPr lang="en-US"/>
-          </a:p>
-        </p:txBody>
       </p:sp>
       <p:sp>
         <p:nvSpPr>
@@ -8870,11 +8333,11 @@
           <a:bodyPr wrap="square" lIns="0" tIns="0" rIns="0" bIns="0" rtlCol="0" anchor="ctr"/>
           <a:lstStyle/>
           <a:p>
-            <a:pPr marL="0" indent="0">
-              <a:buNone/>
-            </a:pPr>
-            <a:r>
-              <a:rPr lang="en-US" sz="1100" b="1" kern="0" spc="400" dirty="0">
+            <a:pPr indent="0" marL="0">
+              <a:buNone/>
+            </a:pPr>
+            <a:r>
+              <a:rPr lang="en-US" sz="1100" b="1" spc="400" kern="0" dirty="0">
                 <a:solidFill>
                   <a:srgbClr val="FFFFFF"/>
                 </a:solidFill>
@@ -8909,13 +8372,13 @@
           <a:bodyPr wrap="square" lIns="0" tIns="0" rIns="0" bIns="0" rtlCol="0" anchor="ctr"/>
           <a:lstStyle/>
           <a:p>
-            <a:pPr marL="0" indent="0">
+            <a:pPr indent="0" marL="0">
               <a:buNone/>
             </a:pPr>
             <a:r>
               <a:rPr lang="en-US" sz="1800" b="1" dirty="0">
                 <a:solidFill>
-                  <a:srgbClr val="1F2120"/>
+                  <a:srgbClr val="1A202C"/>
                 </a:solidFill>
                 <a:latin typeface="Arial Black" pitchFamily="34" charset="0"/>
                 <a:ea typeface="Arial Black" pitchFamily="34" charset="-122"/>
@@ -8948,7 +8411,7 @@
           <a:bodyPr wrap="square" lIns="0" tIns="0" rIns="0" bIns="0" rtlCol="0" anchor="ctr"/>
           <a:lstStyle/>
           <a:p>
-            <a:pPr marL="0" indent="0">
+            <a:pPr indent="0" marL="0">
               <a:spcAft>
                 <a:spcPts val="400"/>
               </a:spcAft>
@@ -8957,7 +8420,7 @@
             <a:r>
               <a:rPr lang="en-US" sz="1200" dirty="0">
                 <a:solidFill>
-                  <a:srgbClr val="707070"/>
+                  <a:srgbClr val="4A5568"/>
                 </a:solidFill>
                 <a:latin typeface="Arial" pitchFamily="34" charset="0"/>
                 <a:ea typeface="Arial" pitchFamily="34" charset="-122"/>
@@ -8990,13 +8453,13 @@
           <a:bodyPr wrap="square" lIns="0" tIns="0" rIns="0" bIns="0" rtlCol="0" anchor="ctr"/>
           <a:lstStyle/>
           <a:p>
-            <a:pPr marL="0" indent="0">
+            <a:pPr indent="0" marL="0">
               <a:buNone/>
             </a:pPr>
             <a:r>
               <a:rPr lang="en-US" sz="1100" i="1" dirty="0">
                 <a:solidFill>
-                  <a:srgbClr val="CF3338"/>
+                  <a:srgbClr val="2A4365"/>
                 </a:solidFill>
                 <a:latin typeface="Arial" pitchFamily="34" charset="0"/>
                 <a:ea typeface="Arial" pitchFamily="34" charset="-122"/>
@@ -9027,18 +8490,11 @@
           </a:solidFill>
           <a:ln w="12700">
             <a:solidFill>
-              <a:srgbClr val="E0DDD0"/>
+              <a:srgbClr val="E2E1DC"/>
             </a:solidFill>
             <a:prstDash val="solid"/>
           </a:ln>
         </p:spPr>
-        <p:txBody>
-          <a:bodyPr/>
-          <a:lstStyle/>
-          <a:p>
-            <a:endParaRPr lang="en-US"/>
-          </a:p>
-        </p:txBody>
       </p:sp>
       <p:sp>
         <p:nvSpPr>
@@ -9055,22 +8511,15 @@
             <a:avLst/>
           </a:prstGeom>
           <a:solidFill>
-            <a:srgbClr val="CF3338"/>
+            <a:srgbClr val="2A4365"/>
           </a:solidFill>
           <a:ln w="12700">
             <a:solidFill>
-              <a:srgbClr val="CF3338"/>
+              <a:srgbClr val="2A4365"/>
             </a:solidFill>
             <a:prstDash val="solid"/>
           </a:ln>
         </p:spPr>
-        <p:txBody>
-          <a:bodyPr/>
-          <a:lstStyle/>
-          <a:p>
-            <a:endParaRPr lang="en-US"/>
-          </a:p>
-        </p:txBody>
       </p:sp>
       <p:sp>
         <p:nvSpPr>
@@ -9093,11 +8542,11 @@
           <a:bodyPr wrap="square" lIns="0" tIns="0" rIns="0" bIns="0" rtlCol="0" anchor="ctr"/>
           <a:lstStyle/>
           <a:p>
-            <a:pPr marL="0" indent="0">
-              <a:buNone/>
-            </a:pPr>
-            <a:r>
-              <a:rPr lang="en-US" sz="1100" b="1" kern="0" spc="400" dirty="0">
+            <a:pPr indent="0" marL="0">
+              <a:buNone/>
+            </a:pPr>
+            <a:r>
+              <a:rPr lang="en-US" sz="1100" b="1" spc="400" kern="0" dirty="0">
                 <a:solidFill>
                   <a:srgbClr val="FFFFFF"/>
                 </a:solidFill>
@@ -9132,13 +8581,13 @@
           <a:bodyPr wrap="square" lIns="0" tIns="0" rIns="0" bIns="0" rtlCol="0" anchor="ctr"/>
           <a:lstStyle/>
           <a:p>
-            <a:pPr marL="0" indent="0">
+            <a:pPr indent="0" marL="0">
               <a:buNone/>
             </a:pPr>
             <a:r>
               <a:rPr lang="en-US" sz="1800" b="1" dirty="0">
                 <a:solidFill>
-                  <a:srgbClr val="1F2120"/>
+                  <a:srgbClr val="1A202C"/>
                 </a:solidFill>
                 <a:latin typeface="Arial Black" pitchFamily="34" charset="0"/>
                 <a:ea typeface="Arial Black" pitchFamily="34" charset="-122"/>
@@ -9171,7 +8620,7 @@
           <a:bodyPr wrap="square" lIns="0" tIns="0" rIns="0" bIns="0" rtlCol="0" anchor="ctr"/>
           <a:lstStyle/>
           <a:p>
-            <a:pPr marL="0" indent="0">
+            <a:pPr indent="0" marL="0">
               <a:spcAft>
                 <a:spcPts val="400"/>
               </a:spcAft>
@@ -9180,7 +8629,7 @@
             <a:r>
               <a:rPr lang="en-US" sz="1200" dirty="0">
                 <a:solidFill>
-                  <a:srgbClr val="707070"/>
+                  <a:srgbClr val="4A5568"/>
                 </a:solidFill>
                 <a:latin typeface="Arial" pitchFamily="34" charset="0"/>
                 <a:ea typeface="Arial" pitchFamily="34" charset="-122"/>
@@ -9213,13 +8662,13 @@
           <a:bodyPr wrap="square" lIns="0" tIns="0" rIns="0" bIns="0" rtlCol="0" anchor="ctr"/>
           <a:lstStyle/>
           <a:p>
-            <a:pPr marL="0" indent="0">
+            <a:pPr indent="0" marL="0">
               <a:buNone/>
             </a:pPr>
             <a:r>
               <a:rPr lang="en-US" sz="1100" i="1" dirty="0">
                 <a:solidFill>
-                  <a:srgbClr val="CF3338"/>
+                  <a:srgbClr val="2A4365"/>
                 </a:solidFill>
                 <a:latin typeface="Arial" pitchFamily="34" charset="0"/>
                 <a:ea typeface="Arial" pitchFamily="34" charset="-122"/>
@@ -9232,11 +8681,6 @@
         </p:txBody>
       </p:sp>
     </p:spTree>
-    <p:extLst>
-      <p:ext uri="{BB962C8B-B14F-4D97-AF65-F5344CB8AC3E}">
-        <p14:creationId xmlns:p14="http://schemas.microsoft.com/office/powerpoint/2010/main" val="2726582203"/>
-      </p:ext>
-    </p:extLst>
   </p:cSld>
   <p:clrMapOvr>
     <a:masterClrMapping/>
@@ -9250,9 +8694,8 @@
     <p:bg>
       <p:bgPr>
         <a:solidFill>
-          <a:srgbClr val="EEECE1"/>
+          <a:srgbClr val="FAFAF7"/>
         </a:solidFill>
-        <a:effectLst/>
       </p:bgPr>
     </p:bg>
     <p:spTree>
@@ -9290,13 +8733,13 @@
           <a:bodyPr wrap="square" lIns="0" tIns="0" rIns="0" bIns="0" rtlCol="0" anchor="ctr"/>
           <a:lstStyle/>
           <a:p>
-            <a:pPr marL="0" indent="0">
+            <a:pPr indent="0" marL="0">
               <a:buNone/>
             </a:pPr>
             <a:r>
               <a:rPr lang="en-US" sz="3000" b="1" dirty="0">
                 <a:solidFill>
-                  <a:srgbClr val="1F2120"/>
+                  <a:srgbClr val="1A202C"/>
                 </a:solidFill>
                 <a:latin typeface="Arial Black" pitchFamily="34" charset="0"/>
                 <a:ea typeface="Arial Black" pitchFamily="34" charset="-122"/>
@@ -9329,13 +8772,13 @@
           <a:bodyPr wrap="square" lIns="0" tIns="0" rIns="0" bIns="0" rtlCol="0" anchor="ctr"/>
           <a:lstStyle/>
           <a:p>
-            <a:pPr marL="0" indent="0">
+            <a:pPr indent="0" marL="0">
               <a:buNone/>
             </a:pPr>
             <a:r>
               <a:rPr lang="en-US" sz="1400" i="1" dirty="0">
                 <a:solidFill>
-                  <a:srgbClr val="707070"/>
+                  <a:srgbClr val="4A5568"/>
                 </a:solidFill>
                 <a:latin typeface="Arial" pitchFamily="34" charset="0"/>
                 <a:ea typeface="Arial" pitchFamily="34" charset="-122"/>
@@ -9362,22 +8805,15 @@
             <a:avLst/>
           </a:prstGeom>
           <a:solidFill>
-            <a:srgbClr val="CF3338"/>
+            <a:srgbClr val="2A4365"/>
           </a:solidFill>
           <a:ln w="12700">
             <a:solidFill>
-              <a:srgbClr val="CF3338"/>
+              <a:srgbClr val="2A4365"/>
             </a:solidFill>
             <a:prstDash val="solid"/>
           </a:ln>
         </p:spPr>
-        <p:txBody>
-          <a:bodyPr/>
-          <a:lstStyle/>
-          <a:p>
-            <a:endParaRPr lang="en-US"/>
-          </a:p>
-        </p:txBody>
       </p:sp>
       <p:sp>
         <p:nvSpPr>
@@ -9400,7 +8836,7 @@
           <a:bodyPr wrap="square" lIns="0" tIns="0" rIns="0" bIns="0" rtlCol="0" anchor="ctr"/>
           <a:lstStyle/>
           <a:p>
-            <a:pPr marL="0" indent="0" algn="ctr">
+            <a:pPr algn="ctr" indent="0" marL="0">
               <a:buNone/>
             </a:pPr>
             <a:r>
@@ -9439,13 +8875,13 @@
           <a:bodyPr wrap="square" lIns="0" tIns="0" rIns="0" bIns="0" rtlCol="0" anchor="ctr"/>
           <a:lstStyle/>
           <a:p>
-            <a:pPr marL="0" indent="0">
+            <a:pPr indent="0" marL="0">
               <a:buNone/>
             </a:pPr>
             <a:r>
               <a:rPr lang="en-US" sz="1700" b="1" dirty="0">
                 <a:solidFill>
-                  <a:srgbClr val="1F2120"/>
+                  <a:srgbClr val="1A202C"/>
                 </a:solidFill>
                 <a:latin typeface="Arial" pitchFamily="34" charset="0"/>
                 <a:ea typeface="Arial" pitchFamily="34" charset="-122"/>
@@ -9478,13 +8914,13 @@
           <a:bodyPr wrap="square" lIns="0" tIns="0" rIns="0" bIns="0" rtlCol="0" anchor="ctr"/>
           <a:lstStyle/>
           <a:p>
-            <a:pPr marL="0" indent="0">
+            <a:pPr indent="0" marL="0">
               <a:buNone/>
             </a:pPr>
             <a:r>
               <a:rPr lang="en-US" sz="1300" dirty="0">
                 <a:solidFill>
-                  <a:srgbClr val="1F2120"/>
+                  <a:srgbClr val="1A202C"/>
                 </a:solidFill>
                 <a:latin typeface="Arial" pitchFamily="34" charset="0"/>
                 <a:ea typeface="Arial" pitchFamily="34" charset="-122"/>
@@ -9511,22 +8947,15 @@
             <a:avLst/>
           </a:prstGeom>
           <a:solidFill>
-            <a:srgbClr val="CF3338"/>
+            <a:srgbClr val="2A4365"/>
           </a:solidFill>
           <a:ln w="12700">
             <a:solidFill>
-              <a:srgbClr val="CF3338"/>
+              <a:srgbClr val="2A4365"/>
             </a:solidFill>
             <a:prstDash val="solid"/>
           </a:ln>
         </p:spPr>
-        <p:txBody>
-          <a:bodyPr/>
-          <a:lstStyle/>
-          <a:p>
-            <a:endParaRPr lang="en-US"/>
-          </a:p>
-        </p:txBody>
       </p:sp>
       <p:sp>
         <p:nvSpPr>
@@ -9549,7 +8978,7 @@
           <a:bodyPr wrap="square" lIns="0" tIns="0" rIns="0" bIns="0" rtlCol="0" anchor="ctr"/>
           <a:lstStyle/>
           <a:p>
-            <a:pPr marL="0" indent="0" algn="ctr">
+            <a:pPr algn="ctr" indent="0" marL="0">
               <a:buNone/>
             </a:pPr>
             <a:r>
@@ -9588,13 +9017,13 @@
           <a:bodyPr wrap="square" lIns="0" tIns="0" rIns="0" bIns="0" rtlCol="0" anchor="ctr"/>
           <a:lstStyle/>
           <a:p>
-            <a:pPr marL="0" indent="0">
+            <a:pPr indent="0" marL="0">
               <a:buNone/>
             </a:pPr>
             <a:r>
               <a:rPr lang="en-US" sz="1700" b="1" dirty="0">
                 <a:solidFill>
-                  <a:srgbClr val="1F2120"/>
+                  <a:srgbClr val="1A202C"/>
                 </a:solidFill>
                 <a:latin typeface="Arial" pitchFamily="34" charset="0"/>
                 <a:ea typeface="Arial" pitchFamily="34" charset="-122"/>
@@ -9627,13 +9056,13 @@
           <a:bodyPr wrap="square" lIns="0" tIns="0" rIns="0" bIns="0" rtlCol="0" anchor="ctr"/>
           <a:lstStyle/>
           <a:p>
-            <a:pPr marL="0" indent="0">
+            <a:pPr indent="0" marL="0">
               <a:buNone/>
             </a:pPr>
             <a:r>
               <a:rPr lang="en-US" sz="1300" dirty="0">
                 <a:solidFill>
-                  <a:srgbClr val="1F2120"/>
+                  <a:srgbClr val="1A202C"/>
                 </a:solidFill>
                 <a:latin typeface="Arial" pitchFamily="34" charset="0"/>
                 <a:ea typeface="Arial" pitchFamily="34" charset="-122"/>
@@ -9660,22 +9089,15 @@
             <a:avLst/>
           </a:prstGeom>
           <a:solidFill>
-            <a:srgbClr val="CF3338"/>
+            <a:srgbClr val="2A4365"/>
           </a:solidFill>
           <a:ln w="12700">
             <a:solidFill>
-              <a:srgbClr val="CF3338"/>
+              <a:srgbClr val="2A4365"/>
             </a:solidFill>
             <a:prstDash val="solid"/>
           </a:ln>
         </p:spPr>
-        <p:txBody>
-          <a:bodyPr/>
-          <a:lstStyle/>
-          <a:p>
-            <a:endParaRPr lang="en-US"/>
-          </a:p>
-        </p:txBody>
       </p:sp>
       <p:sp>
         <p:nvSpPr>
@@ -9698,7 +9120,7 @@
           <a:bodyPr wrap="square" lIns="0" tIns="0" rIns="0" bIns="0" rtlCol="0" anchor="ctr"/>
           <a:lstStyle/>
           <a:p>
-            <a:pPr marL="0" indent="0" algn="ctr">
+            <a:pPr algn="ctr" indent="0" marL="0">
               <a:buNone/>
             </a:pPr>
             <a:r>
@@ -9737,13 +9159,13 @@
           <a:bodyPr wrap="square" lIns="0" tIns="0" rIns="0" bIns="0" rtlCol="0" anchor="ctr"/>
           <a:lstStyle/>
           <a:p>
-            <a:pPr marL="0" indent="0">
+            <a:pPr indent="0" marL="0">
               <a:buNone/>
             </a:pPr>
             <a:r>
               <a:rPr lang="en-US" sz="1700" b="1" dirty="0">
                 <a:solidFill>
-                  <a:srgbClr val="1F2120"/>
+                  <a:srgbClr val="1A202C"/>
                 </a:solidFill>
                 <a:latin typeface="Arial" pitchFamily="34" charset="0"/>
                 <a:ea typeface="Arial" pitchFamily="34" charset="-122"/>
@@ -9776,13 +9198,13 @@
           <a:bodyPr wrap="square" lIns="0" tIns="0" rIns="0" bIns="0" rtlCol="0" anchor="ctr"/>
           <a:lstStyle/>
           <a:p>
-            <a:pPr marL="0" indent="0">
+            <a:pPr indent="0" marL="0">
               <a:buNone/>
             </a:pPr>
             <a:r>
               <a:rPr lang="en-US" sz="1300" dirty="0">
                 <a:solidFill>
-                  <a:srgbClr val="1F2120"/>
+                  <a:srgbClr val="1A202C"/>
                 </a:solidFill>
                 <a:latin typeface="Arial" pitchFamily="34" charset="0"/>
                 <a:ea typeface="Arial" pitchFamily="34" charset="-122"/>
@@ -9795,11 +9217,6 @@
         </p:txBody>
       </p:sp>
     </p:spTree>
-    <p:extLst>
-      <p:ext uri="{BB962C8B-B14F-4D97-AF65-F5344CB8AC3E}">
-        <p14:creationId xmlns:p14="http://schemas.microsoft.com/office/powerpoint/2010/main" val="3835459936"/>
-      </p:ext>
-    </p:extLst>
   </p:cSld>
   <p:clrMapOvr>
     <a:masterClrMapping/>
@@ -9813,9 +9230,8 @@
     <p:bg>
       <p:bgPr>
         <a:solidFill>
-          <a:srgbClr val="EEECE1"/>
+          <a:srgbClr val="FAFAF7"/>
         </a:solidFill>
-        <a:effectLst/>
       </p:bgPr>
     </p:bg>
     <p:spTree>
@@ -9853,13 +9269,13 @@
           <a:bodyPr wrap="square" lIns="0" tIns="0" rIns="0" bIns="0" rtlCol="0" anchor="ctr"/>
           <a:lstStyle/>
           <a:p>
-            <a:pPr marL="0" indent="0" algn="ctr">
+            <a:pPr algn="ctr" indent="0" marL="0">
               <a:buNone/>
             </a:pPr>
             <a:r>
               <a:rPr lang="en-US" sz="8800" b="1" dirty="0">
                 <a:solidFill>
-                  <a:srgbClr val="CF3338"/>
+                  <a:srgbClr val="2A4365"/>
                 </a:solidFill>
                 <a:latin typeface="Arial Black" pitchFamily="34" charset="0"/>
                 <a:ea typeface="Arial Black" pitchFamily="34" charset="-122"/>
@@ -9892,13 +9308,13 @@
           <a:bodyPr wrap="square" lIns="0" tIns="0" rIns="0" bIns="0" rtlCol="0" anchor="ctr"/>
           <a:lstStyle/>
           <a:p>
-            <a:pPr marL="0" indent="0" algn="ctr">
+            <a:pPr algn="ctr" indent="0" marL="0">
               <a:buNone/>
             </a:pPr>
             <a:r>
               <a:rPr lang="en-US" sz="2000" i="1" dirty="0">
                 <a:solidFill>
-                  <a:srgbClr val="1F2120"/>
+                  <a:srgbClr val="1A202C"/>
                 </a:solidFill>
                 <a:latin typeface="Arial" pitchFamily="34" charset="0"/>
                 <a:ea typeface="Arial" pitchFamily="34" charset="-122"/>
@@ -9931,13 +9347,13 @@
           <a:bodyPr wrap="square" lIns="0" tIns="0" rIns="0" bIns="0" rtlCol="0" anchor="ctr"/>
           <a:lstStyle/>
           <a:p>
-            <a:pPr marL="0" indent="0" algn="ctr">
+            <a:pPr algn="ctr" indent="0" marL="0">
               <a:buNone/>
             </a:pPr>
             <a:r>
               <a:rPr lang="en-US" sz="1400" dirty="0">
                 <a:solidFill>
-                  <a:srgbClr val="707070"/>
+                  <a:srgbClr val="4A5568"/>
                 </a:solidFill>
                 <a:latin typeface="Arial" pitchFamily="34" charset="0"/>
                 <a:ea typeface="Arial" pitchFamily="34" charset="-122"/>
@@ -9950,11 +9366,6 @@
         </p:txBody>
       </p:sp>
     </p:spTree>
-    <p:extLst>
-      <p:ext uri="{BB962C8B-B14F-4D97-AF65-F5344CB8AC3E}">
-        <p14:creationId xmlns:p14="http://schemas.microsoft.com/office/powerpoint/2010/main" val="1491863313"/>
-      </p:ext>
-    </p:extLst>
   </p:cSld>
   <p:clrMapOvr>
     <a:masterClrMapping/>
@@ -9968,9 +9379,8 @@
     <p:bg>
       <p:bgPr>
         <a:solidFill>
-          <a:srgbClr val="EEECE1"/>
+          <a:srgbClr val="FAFAF7"/>
         </a:solidFill>
-        <a:effectLst/>
       </p:bgPr>
     </p:bg>
     <p:spTree>
@@ -10008,13 +9418,13 @@
           <a:bodyPr wrap="square" lIns="0" tIns="0" rIns="0" bIns="0" rtlCol="0" anchor="ctr"/>
           <a:lstStyle/>
           <a:p>
-            <a:pPr marL="0" indent="0">
+            <a:pPr indent="0" marL="0">
               <a:buNone/>
             </a:pPr>
             <a:r>
               <a:rPr lang="en-US" sz="3600" b="1" dirty="0">
                 <a:solidFill>
-                  <a:srgbClr val="CF3338"/>
+                  <a:srgbClr val="2A4365"/>
                 </a:solidFill>
                 <a:latin typeface="Arial Black" pitchFamily="34" charset="0"/>
                 <a:ea typeface="Arial Black" pitchFamily="34" charset="-122"/>
@@ -10045,18 +9455,11 @@
           </a:solidFill>
           <a:ln w="12700">
             <a:solidFill>
-              <a:srgbClr val="E0DDD0"/>
+              <a:srgbClr val="E2E1DC"/>
             </a:solidFill>
             <a:prstDash val="solid"/>
           </a:ln>
         </p:spPr>
-        <p:txBody>
-          <a:bodyPr/>
-          <a:lstStyle/>
-          <a:p>
-            <a:endParaRPr lang="en-US"/>
-          </a:p>
-        </p:txBody>
       </p:sp>
       <p:sp>
         <p:nvSpPr>
@@ -10079,13 +9482,13 @@
           <a:bodyPr wrap="square" lIns="0" tIns="0" rIns="0" bIns="0" rtlCol="0" anchor="ctr"/>
           <a:lstStyle/>
           <a:p>
-            <a:pPr marL="0" indent="0" algn="ctr">
+            <a:pPr algn="ctr" indent="0" marL="0">
               <a:buNone/>
             </a:pPr>
             <a:r>
               <a:rPr lang="en-US" sz="5600" b="1" dirty="0">
                 <a:solidFill>
-                  <a:srgbClr val="CF3338"/>
+                  <a:srgbClr val="2A4365"/>
                 </a:solidFill>
                 <a:latin typeface="Arial Black" pitchFamily="34" charset="0"/>
                 <a:ea typeface="Arial Black" pitchFamily="34" charset="-122"/>
@@ -10118,13 +9521,13 @@
           <a:bodyPr wrap="square" lIns="0" tIns="0" rIns="0" bIns="0" rtlCol="0" anchor="ctr"/>
           <a:lstStyle/>
           <a:p>
-            <a:pPr marL="0" indent="0" algn="ctr">
+            <a:pPr algn="ctr" indent="0" marL="0">
               <a:buNone/>
             </a:pPr>
             <a:r>
               <a:rPr lang="en-US" sz="1700" b="1" dirty="0">
                 <a:solidFill>
-                  <a:srgbClr val="1F2120"/>
+                  <a:srgbClr val="1A202C"/>
                 </a:solidFill>
                 <a:latin typeface="Arial" pitchFamily="34" charset="0"/>
                 <a:ea typeface="Arial" pitchFamily="34" charset="-122"/>
@@ -10157,7 +9560,7 @@
           <a:bodyPr wrap="square" lIns="0" tIns="0" rIns="0" bIns="0" rtlCol="0" anchor="ctr"/>
           <a:lstStyle/>
           <a:p>
-            <a:pPr marL="0" indent="0" algn="ctr">
+            <a:pPr algn="ctr" indent="0" marL="0">
               <a:spcAft>
                 <a:spcPts val="400"/>
               </a:spcAft>
@@ -10166,7 +9569,7 @@
             <a:r>
               <a:rPr lang="en-US" sz="1300" dirty="0">
                 <a:solidFill>
-                  <a:srgbClr val="1F2120"/>
+                  <a:srgbClr val="1A202C"/>
                 </a:solidFill>
                 <a:latin typeface="Arial" pitchFamily="34" charset="0"/>
                 <a:ea typeface="Arial" pitchFamily="34" charset="-122"/>
@@ -10197,18 +9600,11 @@
           </a:solidFill>
           <a:ln w="12700">
             <a:solidFill>
-              <a:srgbClr val="E0DDD0"/>
+              <a:srgbClr val="E2E1DC"/>
             </a:solidFill>
             <a:prstDash val="solid"/>
           </a:ln>
         </p:spPr>
-        <p:txBody>
-          <a:bodyPr/>
-          <a:lstStyle/>
-          <a:p>
-            <a:endParaRPr lang="en-US"/>
-          </a:p>
-        </p:txBody>
       </p:sp>
       <p:sp>
         <p:nvSpPr>
@@ -10231,13 +9627,13 @@
           <a:bodyPr wrap="square" lIns="0" tIns="0" rIns="0" bIns="0" rtlCol="0" anchor="ctr"/>
           <a:lstStyle/>
           <a:p>
-            <a:pPr marL="0" indent="0" algn="ctr">
+            <a:pPr algn="ctr" indent="0" marL="0">
               <a:buNone/>
             </a:pPr>
             <a:r>
               <a:rPr lang="en-US" sz="5600" b="1" dirty="0">
                 <a:solidFill>
-                  <a:srgbClr val="CF3338"/>
+                  <a:srgbClr val="2A4365"/>
                 </a:solidFill>
                 <a:latin typeface="Arial Black" pitchFamily="34" charset="0"/>
                 <a:ea typeface="Arial Black" pitchFamily="34" charset="-122"/>
@@ -10270,13 +9666,13 @@
           <a:bodyPr wrap="square" lIns="0" tIns="0" rIns="0" bIns="0" rtlCol="0" anchor="ctr"/>
           <a:lstStyle/>
           <a:p>
-            <a:pPr marL="0" indent="0" algn="ctr">
+            <a:pPr algn="ctr" indent="0" marL="0">
               <a:buNone/>
             </a:pPr>
             <a:r>
               <a:rPr lang="en-US" sz="1700" b="1" dirty="0">
                 <a:solidFill>
-                  <a:srgbClr val="1F2120"/>
+                  <a:srgbClr val="1A202C"/>
                 </a:solidFill>
                 <a:latin typeface="Arial" pitchFamily="34" charset="0"/>
                 <a:ea typeface="Arial" pitchFamily="34" charset="-122"/>
@@ -10309,7 +9705,7 @@
           <a:bodyPr wrap="square" lIns="0" tIns="0" rIns="0" bIns="0" rtlCol="0" anchor="ctr"/>
           <a:lstStyle/>
           <a:p>
-            <a:pPr marL="0" indent="0" algn="ctr">
+            <a:pPr algn="ctr" indent="0" marL="0">
               <a:spcAft>
                 <a:spcPts val="400"/>
               </a:spcAft>
@@ -10318,7 +9714,7 @@
             <a:r>
               <a:rPr lang="en-US" sz="1300" dirty="0">
                 <a:solidFill>
-                  <a:srgbClr val="1F2120"/>
+                  <a:srgbClr val="1A202C"/>
                 </a:solidFill>
                 <a:latin typeface="Arial" pitchFamily="34" charset="0"/>
                 <a:ea typeface="Arial" pitchFamily="34" charset="-122"/>
@@ -10349,18 +9745,11 @@
           </a:solidFill>
           <a:ln w="12700">
             <a:solidFill>
-              <a:srgbClr val="E0DDD0"/>
+              <a:srgbClr val="E2E1DC"/>
             </a:solidFill>
             <a:prstDash val="solid"/>
           </a:ln>
         </p:spPr>
-        <p:txBody>
-          <a:bodyPr/>
-          <a:lstStyle/>
-          <a:p>
-            <a:endParaRPr lang="en-US"/>
-          </a:p>
-        </p:txBody>
       </p:sp>
       <p:sp>
         <p:nvSpPr>
@@ -10383,13 +9772,13 @@
           <a:bodyPr wrap="square" lIns="0" tIns="0" rIns="0" bIns="0" rtlCol="0" anchor="ctr"/>
           <a:lstStyle/>
           <a:p>
-            <a:pPr marL="0" indent="0" algn="ctr">
+            <a:pPr algn="ctr" indent="0" marL="0">
               <a:buNone/>
             </a:pPr>
             <a:r>
               <a:rPr lang="en-US" sz="5600" b="1" dirty="0">
                 <a:solidFill>
-                  <a:srgbClr val="CF3338"/>
+                  <a:srgbClr val="2A4365"/>
                 </a:solidFill>
                 <a:latin typeface="Arial Black" pitchFamily="34" charset="0"/>
                 <a:ea typeface="Arial Black" pitchFamily="34" charset="-122"/>
@@ -10422,13 +9811,13 @@
           <a:bodyPr wrap="square" lIns="0" tIns="0" rIns="0" bIns="0" rtlCol="0" anchor="ctr"/>
           <a:lstStyle/>
           <a:p>
-            <a:pPr marL="0" indent="0" algn="ctr">
+            <a:pPr algn="ctr" indent="0" marL="0">
               <a:buNone/>
             </a:pPr>
             <a:r>
               <a:rPr lang="en-US" sz="1700" b="1" dirty="0">
                 <a:solidFill>
-                  <a:srgbClr val="1F2120"/>
+                  <a:srgbClr val="1A202C"/>
                 </a:solidFill>
                 <a:latin typeface="Arial" pitchFamily="34" charset="0"/>
                 <a:ea typeface="Arial" pitchFamily="34" charset="-122"/>
@@ -10461,7 +9850,7 @@
           <a:bodyPr wrap="square" lIns="0" tIns="0" rIns="0" bIns="0" rtlCol="0" anchor="ctr"/>
           <a:lstStyle/>
           <a:p>
-            <a:pPr marL="0" indent="0" algn="ctr">
+            <a:pPr algn="ctr" indent="0" marL="0">
               <a:spcAft>
                 <a:spcPts val="400"/>
               </a:spcAft>
@@ -10470,7 +9859,7 @@
             <a:r>
               <a:rPr lang="en-US" sz="1300" dirty="0">
                 <a:solidFill>
-                  <a:srgbClr val="1F2120"/>
+                  <a:srgbClr val="1A202C"/>
                 </a:solidFill>
                 <a:latin typeface="Arial" pitchFamily="34" charset="0"/>
                 <a:ea typeface="Arial" pitchFamily="34" charset="-122"/>
@@ -10483,11 +9872,6 @@
         </p:txBody>
       </p:sp>
     </p:spTree>
-    <p:extLst>
-      <p:ext uri="{BB962C8B-B14F-4D97-AF65-F5344CB8AC3E}">
-        <p14:creationId xmlns:p14="http://schemas.microsoft.com/office/powerpoint/2010/main" val="3975448428"/>
-      </p:ext>
-    </p:extLst>
   </p:cSld>
   <p:clrMapOvr>
     <a:masterClrMapping/>
@@ -10501,9 +9885,8 @@
     <p:bg>
       <p:bgPr>
         <a:solidFill>
-          <a:srgbClr val="C00000"/>
+          <a:srgbClr val="1A365D"/>
         </a:solidFill>
-        <a:effectLst/>
       </p:bgPr>
     </p:bg>
     <p:spTree>
@@ -10541,11 +9924,11 @@
           <a:bodyPr wrap="square" lIns="0" tIns="0" rIns="0" bIns="0" rtlCol="0" anchor="ctr"/>
           <a:lstStyle/>
           <a:p>
-            <a:pPr marL="0" indent="0">
-              <a:buNone/>
-            </a:pPr>
-            <a:r>
-              <a:rPr lang="en-US" sz="2000" kern="0" spc="800" dirty="0">
+            <a:pPr indent="0" marL="0">
+              <a:buNone/>
+            </a:pPr>
+            <a:r>
+              <a:rPr lang="en-US" sz="2000" spc="800" kern="0" dirty="0">
                 <a:solidFill>
                   <a:srgbClr val="FFFFFF"/>
                 </a:solidFill>
@@ -10580,7 +9963,7 @@
           <a:bodyPr wrap="square" lIns="0" tIns="0" rIns="0" bIns="0" rtlCol="0" anchor="ctr"/>
           <a:lstStyle/>
           <a:p>
-            <a:pPr marL="0" indent="0">
+            <a:pPr indent="0" marL="0">
               <a:buNone/>
             </a:pPr>
             <a:r>
@@ -10619,7 +10002,7 @@
           <a:bodyPr wrap="square" lIns="0" tIns="0" rIns="0" bIns="0" rtlCol="0" anchor="ctr"/>
           <a:lstStyle/>
           <a:p>
-            <a:pPr marL="0" indent="0">
+            <a:pPr indent="0" marL="0">
               <a:buNone/>
             </a:pPr>
             <a:r>
@@ -10658,7 +10041,7 @@
           <a:bodyPr wrap="square" lIns="0" tIns="0" rIns="0" bIns="0" rtlCol="0" anchor="ctr"/>
           <a:lstStyle/>
           <a:p>
-            <a:pPr marL="0" indent="0">
+            <a:pPr indent="0" marL="0">
               <a:buNone/>
             </a:pPr>
             <a:r>
@@ -10677,11 +10060,6 @@
         </p:txBody>
       </p:sp>
     </p:spTree>
-    <p:extLst>
-      <p:ext uri="{BB962C8B-B14F-4D97-AF65-F5344CB8AC3E}">
-        <p14:creationId xmlns:p14="http://schemas.microsoft.com/office/powerpoint/2010/main" val="257578411"/>
-      </p:ext>
-    </p:extLst>
   </p:cSld>
   <p:clrMapOvr>
     <a:masterClrMapping/>
@@ -10695,9 +10073,8 @@
     <p:bg>
       <p:bgPr>
         <a:solidFill>
-          <a:srgbClr val="EEECE1"/>
+          <a:srgbClr val="FAFAF7"/>
         </a:solidFill>
-        <a:effectLst/>
       </p:bgPr>
     </p:bg>
     <p:spTree>
@@ -10735,13 +10112,13 @@
           <a:bodyPr wrap="square" lIns="0" tIns="0" rIns="0" bIns="0" rtlCol="0" anchor="ctr"/>
           <a:lstStyle/>
           <a:p>
-            <a:pPr marL="0" indent="0">
+            <a:pPr indent="0" marL="0">
               <a:buNone/>
             </a:pPr>
             <a:r>
               <a:rPr lang="en-US" sz="3000" b="1" dirty="0">
                 <a:solidFill>
-                  <a:srgbClr val="1F2120"/>
+                  <a:srgbClr val="1A202C"/>
                 </a:solidFill>
                 <a:latin typeface="Arial Black" pitchFamily="34" charset="0"/>
                 <a:ea typeface="Arial Black" pitchFamily="34" charset="-122"/>
@@ -10774,13 +10151,13 @@
           <a:bodyPr wrap="square" lIns="0" tIns="0" rIns="0" bIns="0" rtlCol="0" anchor="ctr"/>
           <a:lstStyle/>
           <a:p>
-            <a:pPr marL="0" indent="0">
+            <a:pPr indent="0" marL="0">
               <a:buNone/>
             </a:pPr>
             <a:r>
               <a:rPr lang="en-US" sz="1500" i="1" dirty="0">
                 <a:solidFill>
-                  <a:srgbClr val="707070"/>
+                  <a:srgbClr val="4A5568"/>
                 </a:solidFill>
                 <a:latin typeface="Arial" pitchFamily="34" charset="0"/>
                 <a:ea typeface="Arial" pitchFamily="34" charset="-122"/>
@@ -10807,22 +10184,15 @@
             <a:avLst/>
           </a:prstGeom>
           <a:solidFill>
-            <a:srgbClr val="CF3338"/>
+            <a:srgbClr val="2A4365"/>
           </a:solidFill>
           <a:ln w="12700">
             <a:solidFill>
-              <a:srgbClr val="CF3338"/>
+              <a:srgbClr val="2A4365"/>
             </a:solidFill>
             <a:prstDash val="solid"/>
           </a:ln>
         </p:spPr>
-        <p:txBody>
-          <a:bodyPr/>
-          <a:lstStyle/>
-          <a:p>
-            <a:endParaRPr lang="en-US"/>
-          </a:p>
-        </p:txBody>
       </p:sp>
       <p:sp>
         <p:nvSpPr>
@@ -10845,13 +10215,13 @@
           <a:bodyPr wrap="square" lIns="0" tIns="0" rIns="0" bIns="0" rtlCol="0" anchor="ctr"/>
           <a:lstStyle/>
           <a:p>
-            <a:pPr marL="0" indent="0">
+            <a:pPr indent="0" marL="0">
               <a:buNone/>
             </a:pPr>
             <a:r>
               <a:rPr lang="en-US" sz="1600" b="1" dirty="0">
                 <a:solidFill>
-                  <a:srgbClr val="1F2120"/>
+                  <a:srgbClr val="1A202C"/>
                 </a:solidFill>
                 <a:latin typeface="Arial" pitchFamily="34" charset="0"/>
                 <a:ea typeface="Arial" pitchFamily="34" charset="-122"/>
@@ -10884,13 +10254,13 @@
           <a:bodyPr wrap="square" lIns="0" tIns="0" rIns="0" bIns="0" rtlCol="0" anchor="ctr"/>
           <a:lstStyle/>
           <a:p>
-            <a:pPr marL="0" indent="0">
+            <a:pPr indent="0" marL="0">
               <a:buNone/>
             </a:pPr>
             <a:r>
               <a:rPr lang="en-US" sz="1300" i="1" dirty="0">
                 <a:solidFill>
-                  <a:srgbClr val="1F2120"/>
+                  <a:srgbClr val="1A202C"/>
                 </a:solidFill>
                 <a:latin typeface="Arial" pitchFamily="34" charset="0"/>
                 <a:ea typeface="Arial" pitchFamily="34" charset="-122"/>
@@ -10898,10 +10268,13 @@
               </a:rPr>
               <a:t>Native Excel: nested COUNTBLANK per column.</a:t>
             </a:r>
+            <a:pPr indent="0" marL="0">
+              <a:buNone/>
+            </a:pPr>
             <a:r>
               <a:rPr lang="en-US" sz="1300" b="1" dirty="0">
                 <a:solidFill>
-                  <a:srgbClr val="CF3338"/>
+                  <a:srgbClr val="2A4365"/>
                 </a:solidFill>
                 <a:latin typeface="Arial" pitchFamily="34" charset="0"/>
                 <a:ea typeface="Arial" pitchFamily="34" charset="-122"/>
@@ -10909,10 +10282,13 @@
               </a:rPr>
               <a:t>   |   </a:t>
             </a:r>
+            <a:pPr indent="0" marL="0">
+              <a:buNone/>
+            </a:pPr>
             <a:r>
               <a:rPr lang="en-US" sz="1300" i="1" dirty="0">
                 <a:solidFill>
-                  <a:srgbClr val="1F2120"/>
+                  <a:srgbClr val="1A202C"/>
                 </a:solidFill>
                 <a:latin typeface="Arial" pitchFamily="34" charset="0"/>
                 <a:ea typeface="Arial" pitchFamily="34" charset="-122"/>
@@ -10939,22 +10315,15 @@
             <a:avLst/>
           </a:prstGeom>
           <a:solidFill>
-            <a:srgbClr val="CF3338"/>
+            <a:srgbClr val="2A4365"/>
           </a:solidFill>
           <a:ln w="12700">
             <a:solidFill>
-              <a:srgbClr val="CF3338"/>
+              <a:srgbClr val="2A4365"/>
             </a:solidFill>
             <a:prstDash val="solid"/>
           </a:ln>
         </p:spPr>
-        <p:txBody>
-          <a:bodyPr/>
-          <a:lstStyle/>
-          <a:p>
-            <a:endParaRPr lang="en-US"/>
-          </a:p>
-        </p:txBody>
       </p:sp>
       <p:sp>
         <p:nvSpPr>
@@ -10977,13 +10346,13 @@
           <a:bodyPr wrap="square" lIns="0" tIns="0" rIns="0" bIns="0" rtlCol="0" anchor="ctr"/>
           <a:lstStyle/>
           <a:p>
-            <a:pPr marL="0" indent="0">
+            <a:pPr indent="0" marL="0">
               <a:buNone/>
             </a:pPr>
             <a:r>
               <a:rPr lang="en-US" sz="1600" b="1" dirty="0">
                 <a:solidFill>
-                  <a:srgbClr val="1F2120"/>
+                  <a:srgbClr val="1A202C"/>
                 </a:solidFill>
                 <a:latin typeface="Arial" pitchFamily="34" charset="0"/>
                 <a:ea typeface="Arial" pitchFamily="34" charset="-122"/>
@@ -11016,13 +10385,13 @@
           <a:bodyPr wrap="square" lIns="0" tIns="0" rIns="0" bIns="0" rtlCol="0" anchor="ctr"/>
           <a:lstStyle/>
           <a:p>
-            <a:pPr marL="0" indent="0">
+            <a:pPr indent="0" marL="0">
               <a:buNone/>
             </a:pPr>
             <a:r>
               <a:rPr lang="en-US" sz="1300" i="1" dirty="0">
                 <a:solidFill>
-                  <a:srgbClr val="1F2120"/>
+                  <a:srgbClr val="1A202C"/>
                 </a:solidFill>
                 <a:latin typeface="Arial" pitchFamily="34" charset="0"/>
                 <a:ea typeface="Arial" pitchFamily="34" charset="-122"/>
@@ -11030,10 +10399,13 @@
               </a:rPr>
               <a:t>Native Excel: heroic helper columns.</a:t>
             </a:r>
+            <a:pPr indent="0" marL="0">
+              <a:buNone/>
+            </a:pPr>
             <a:r>
               <a:rPr lang="en-US" sz="1300" b="1" dirty="0">
                 <a:solidFill>
-                  <a:srgbClr val="CF3338"/>
+                  <a:srgbClr val="2A4365"/>
                 </a:solidFill>
                 <a:latin typeface="Arial" pitchFamily="34" charset="0"/>
                 <a:ea typeface="Arial" pitchFamily="34" charset="-122"/>
@@ -11041,10 +10413,13 @@
               </a:rPr>
               <a:t>   |   </a:t>
             </a:r>
+            <a:pPr indent="0" marL="0">
+              <a:buNone/>
+            </a:pPr>
             <a:r>
               <a:rPr lang="en-US" sz="1300" i="1" dirty="0">
                 <a:solidFill>
-                  <a:srgbClr val="1F2120"/>
+                  <a:srgbClr val="1A202C"/>
                 </a:solidFill>
                 <a:latin typeface="Arial" pitchFamily="34" charset="0"/>
                 <a:ea typeface="Arial" pitchFamily="34" charset="-122"/>
@@ -11071,22 +10446,15 @@
             <a:avLst/>
           </a:prstGeom>
           <a:solidFill>
-            <a:srgbClr val="CF3338"/>
+            <a:srgbClr val="2A4365"/>
           </a:solidFill>
           <a:ln w="12700">
             <a:solidFill>
-              <a:srgbClr val="CF3338"/>
+              <a:srgbClr val="2A4365"/>
             </a:solidFill>
             <a:prstDash val="solid"/>
           </a:ln>
         </p:spPr>
-        <p:txBody>
-          <a:bodyPr/>
-          <a:lstStyle/>
-          <a:p>
-            <a:endParaRPr lang="en-US"/>
-          </a:p>
-        </p:txBody>
       </p:sp>
       <p:sp>
         <p:nvSpPr>
@@ -11109,13 +10477,13 @@
           <a:bodyPr wrap="square" lIns="0" tIns="0" rIns="0" bIns="0" rtlCol="0" anchor="ctr"/>
           <a:lstStyle/>
           <a:p>
-            <a:pPr marL="0" indent="0">
+            <a:pPr indent="0" marL="0">
               <a:buNone/>
             </a:pPr>
             <a:r>
               <a:rPr lang="en-US" sz="1600" b="1" dirty="0">
                 <a:solidFill>
-                  <a:srgbClr val="1F2120"/>
+                  <a:srgbClr val="1A202C"/>
                 </a:solidFill>
                 <a:latin typeface="Arial" pitchFamily="34" charset="0"/>
                 <a:ea typeface="Arial" pitchFamily="34" charset="-122"/>
@@ -11148,13 +10516,13 @@
           <a:bodyPr wrap="square" lIns="0" tIns="0" rIns="0" bIns="0" rtlCol="0" anchor="ctr"/>
           <a:lstStyle/>
           <a:p>
-            <a:pPr marL="0" indent="0">
+            <a:pPr indent="0" marL="0">
               <a:buNone/>
             </a:pPr>
             <a:r>
               <a:rPr lang="en-US" sz="1300" i="1" dirty="0">
                 <a:solidFill>
-                  <a:srgbClr val="1F2120"/>
+                  <a:srgbClr val="1A202C"/>
                 </a:solidFill>
                 <a:latin typeface="Arial" pitchFamily="34" charset="0"/>
                 <a:ea typeface="Arial" pitchFamily="34" charset="-122"/>
@@ -11162,10 +10530,13 @@
               </a:rPr>
               <a:t>Native Excel: not really.</a:t>
             </a:r>
+            <a:pPr indent="0" marL="0">
+              <a:buNone/>
+            </a:pPr>
             <a:r>
               <a:rPr lang="en-US" sz="1300" b="1" dirty="0">
                 <a:solidFill>
-                  <a:srgbClr val="CF3338"/>
+                  <a:srgbClr val="2A4365"/>
                 </a:solidFill>
                 <a:latin typeface="Arial" pitchFamily="34" charset="0"/>
                 <a:ea typeface="Arial" pitchFamily="34" charset="-122"/>
@@ -11173,10 +10544,13 @@
               </a:rPr>
               <a:t>   |   </a:t>
             </a:r>
+            <a:pPr indent="0" marL="0">
+              <a:buNone/>
+            </a:pPr>
             <a:r>
               <a:rPr lang="en-US" sz="1300" i="1" dirty="0">
                 <a:solidFill>
-                  <a:srgbClr val="1F2120"/>
+                  <a:srgbClr val="1A202C"/>
                 </a:solidFill>
                 <a:latin typeface="Arial" pitchFamily="34" charset="0"/>
                 <a:ea typeface="Arial" pitchFamily="34" charset="-122"/>
@@ -11203,22 +10577,15 @@
             <a:avLst/>
           </a:prstGeom>
           <a:solidFill>
-            <a:srgbClr val="CF3338"/>
+            <a:srgbClr val="2A4365"/>
           </a:solidFill>
           <a:ln w="12700">
             <a:solidFill>
-              <a:srgbClr val="CF3338"/>
+              <a:srgbClr val="2A4365"/>
             </a:solidFill>
             <a:prstDash val="solid"/>
           </a:ln>
         </p:spPr>
-        <p:txBody>
-          <a:bodyPr/>
-          <a:lstStyle/>
-          <a:p>
-            <a:endParaRPr lang="en-US"/>
-          </a:p>
-        </p:txBody>
       </p:sp>
       <p:sp>
         <p:nvSpPr>
@@ -11241,13 +10608,13 @@
           <a:bodyPr wrap="square" lIns="0" tIns="0" rIns="0" bIns="0" rtlCol="0" anchor="ctr"/>
           <a:lstStyle/>
           <a:p>
-            <a:pPr marL="0" indent="0">
+            <a:pPr indent="0" marL="0">
               <a:buNone/>
             </a:pPr>
             <a:r>
               <a:rPr lang="en-US" sz="1600" b="1" dirty="0">
                 <a:solidFill>
-                  <a:srgbClr val="1F2120"/>
+                  <a:srgbClr val="1A202C"/>
                 </a:solidFill>
                 <a:latin typeface="Arial" pitchFamily="34" charset="0"/>
                 <a:ea typeface="Arial" pitchFamily="34" charset="-122"/>
@@ -11280,13 +10647,13 @@
           <a:bodyPr wrap="square" lIns="0" tIns="0" rIns="0" bIns="0" rtlCol="0" anchor="ctr"/>
           <a:lstStyle/>
           <a:p>
-            <a:pPr marL="0" indent="0">
+            <a:pPr indent="0" marL="0">
               <a:buNone/>
             </a:pPr>
             <a:r>
               <a:rPr lang="en-US" sz="1300" i="1" dirty="0">
                 <a:solidFill>
-                  <a:srgbClr val="1F2120"/>
+                  <a:srgbClr val="1A202C"/>
                 </a:solidFill>
                 <a:latin typeface="Arial" pitchFamily="34" charset="0"/>
                 <a:ea typeface="Arial" pitchFamily="34" charset="-122"/>
@@ -11294,10 +10661,13 @@
               </a:rPr>
               <a:t>Native Excel: Analysis ToolPak round-trip.</a:t>
             </a:r>
+            <a:pPr indent="0" marL="0">
+              <a:buNone/>
+            </a:pPr>
             <a:r>
               <a:rPr lang="en-US" sz="1300" b="1" dirty="0">
                 <a:solidFill>
-                  <a:srgbClr val="CF3338"/>
+                  <a:srgbClr val="2A4365"/>
                 </a:solidFill>
                 <a:latin typeface="Arial" pitchFamily="34" charset="0"/>
                 <a:ea typeface="Arial" pitchFamily="34" charset="-122"/>
@@ -11305,10 +10675,13 @@
               </a:rPr>
               <a:t>   |   </a:t>
             </a:r>
+            <a:pPr indent="0" marL="0">
+              <a:buNone/>
+            </a:pPr>
             <a:r>
               <a:rPr lang="en-US" sz="1300" i="1" dirty="0">
                 <a:solidFill>
-                  <a:srgbClr val="1F2120"/>
+                  <a:srgbClr val="1A202C"/>
                 </a:solidFill>
                 <a:latin typeface="Arial" pitchFamily="34" charset="0"/>
                 <a:ea typeface="Arial" pitchFamily="34" charset="-122"/>
@@ -11321,11 +10694,6 @@
         </p:txBody>
       </p:sp>
     </p:spTree>
-    <p:extLst>
-      <p:ext uri="{BB962C8B-B14F-4D97-AF65-F5344CB8AC3E}">
-        <p14:creationId xmlns:p14="http://schemas.microsoft.com/office/powerpoint/2010/main" val="958276107"/>
-      </p:ext>
-    </p:extLst>
   </p:cSld>
   <p:clrMapOvr>
     <a:masterClrMapping/>
@@ -11339,9 +10707,8 @@
     <p:bg>
       <p:bgPr>
         <a:solidFill>
-          <a:srgbClr val="EEECE1"/>
+          <a:srgbClr val="FAFAF7"/>
         </a:solidFill>
-        <a:effectLst/>
       </p:bgPr>
     </p:bg>
     <p:spTree>
@@ -11379,13 +10746,13 @@
           <a:bodyPr wrap="square" lIns="0" tIns="0" rIns="0" bIns="0" rtlCol="0" anchor="ctr"/>
           <a:lstStyle/>
           <a:p>
-            <a:pPr marL="0" indent="0">
+            <a:pPr indent="0" marL="0">
               <a:buNone/>
             </a:pPr>
             <a:r>
               <a:rPr lang="en-US" sz="3000" b="1" dirty="0">
                 <a:solidFill>
-                  <a:srgbClr val="1F2120"/>
+                  <a:srgbClr val="1A202C"/>
                 </a:solidFill>
                 <a:latin typeface="Arial Black" pitchFamily="34" charset="0"/>
                 <a:ea typeface="Arial Black" pitchFamily="34" charset="-122"/>
@@ -11418,13 +10785,13 @@
           <a:bodyPr wrap="square" lIns="0" tIns="0" rIns="0" bIns="0" rtlCol="0" anchor="ctr"/>
           <a:lstStyle/>
           <a:p>
-            <a:pPr marL="0" indent="0">
+            <a:pPr indent="0" marL="0">
               <a:buNone/>
             </a:pPr>
             <a:r>
               <a:rPr lang="en-US" sz="1500" i="1" dirty="0">
                 <a:solidFill>
-                  <a:srgbClr val="707070"/>
+                  <a:srgbClr val="4A5568"/>
                 </a:solidFill>
                 <a:latin typeface="Arial" pitchFamily="34" charset="0"/>
                 <a:ea typeface="Arial" pitchFamily="34" charset="-122"/>
@@ -11455,18 +10822,11 @@
           </a:solidFill>
           <a:ln w="12700">
             <a:solidFill>
-              <a:srgbClr val="E0DDD0"/>
+              <a:srgbClr val="E2E1DC"/>
             </a:solidFill>
             <a:prstDash val="solid"/>
           </a:ln>
         </p:spPr>
-        <p:txBody>
-          <a:bodyPr/>
-          <a:lstStyle/>
-          <a:p>
-            <a:endParaRPr lang="en-US"/>
-          </a:p>
-        </p:txBody>
       </p:sp>
       <p:sp>
         <p:nvSpPr>
@@ -11483,22 +10843,15 @@
             <a:avLst/>
           </a:prstGeom>
           <a:solidFill>
-            <a:srgbClr val="CF3338"/>
+            <a:srgbClr val="2A4365"/>
           </a:solidFill>
           <a:ln w="12700">
             <a:solidFill>
-              <a:srgbClr val="CF3338"/>
+              <a:srgbClr val="2A4365"/>
             </a:solidFill>
             <a:prstDash val="solid"/>
           </a:ln>
         </p:spPr>
-        <p:txBody>
-          <a:bodyPr/>
-          <a:lstStyle/>
-          <a:p>
-            <a:endParaRPr lang="en-US"/>
-          </a:p>
-        </p:txBody>
       </p:sp>
       <p:sp>
         <p:nvSpPr>
@@ -11521,13 +10874,13 @@
           <a:bodyPr wrap="square" lIns="0" tIns="0" rIns="0" bIns="0" rtlCol="0" anchor="ctr"/>
           <a:lstStyle/>
           <a:p>
-            <a:pPr marL="0" indent="0">
+            <a:pPr indent="0" marL="0">
               <a:buNone/>
             </a:pPr>
             <a:r>
               <a:rPr lang="en-US" sz="2000" b="1" dirty="0">
                 <a:solidFill>
-                  <a:srgbClr val="1F2120"/>
+                  <a:srgbClr val="1A202C"/>
                 </a:solidFill>
                 <a:latin typeface="Arial Black" pitchFamily="34" charset="0"/>
                 <a:ea typeface="Arial Black" pitchFamily="34" charset="-122"/>
@@ -11560,13 +10913,13 @@
           <a:bodyPr wrap="square" lIns="0" tIns="0" rIns="0" bIns="0" rtlCol="0" anchor="ctr"/>
           <a:lstStyle/>
           <a:p>
-            <a:pPr marL="0" indent="0">
+            <a:pPr indent="0" marL="0">
               <a:buNone/>
             </a:pPr>
             <a:r>
               <a:rPr lang="en-US" sz="1200" i="1" dirty="0">
                 <a:solidFill>
-                  <a:srgbClr val="707070"/>
+                  <a:srgbClr val="4A5568"/>
                 </a:solidFill>
                 <a:latin typeface="Arial" pitchFamily="34" charset="0"/>
                 <a:ea typeface="Arial" pitchFamily="34" charset="-122"/>
@@ -11599,13 +10952,13 @@
           <a:bodyPr wrap="square" lIns="0" tIns="0" rIns="0" bIns="0" rtlCol="0" anchor="ctr"/>
           <a:lstStyle/>
           <a:p>
-            <a:pPr marL="0" indent="0">
+            <a:pPr indent="0" marL="0">
               <a:buNone/>
             </a:pPr>
             <a:r>
               <a:rPr lang="en-US" sz="1200" dirty="0">
                 <a:solidFill>
-                  <a:srgbClr val="1F2120"/>
+                  <a:srgbClr val="1A202C"/>
                 </a:solidFill>
                 <a:latin typeface="Arial" pitchFamily="34" charset="0"/>
                 <a:ea typeface="Arial" pitchFamily="34" charset="-122"/>
@@ -11638,7 +10991,7 @@
           <a:bodyPr wrap="square" lIns="0" tIns="0" rIns="0" bIns="0" rtlCol="0" anchor="t"/>
           <a:lstStyle/>
           <a:p>
-            <a:pPr marL="0" indent="0" algn="l">
+            <a:pPr algn="l" indent="0" marL="0">
               <a:spcAft>
                 <a:spcPts val="800"/>
               </a:spcAft>
@@ -11647,7 +11000,7 @@
             <a:r>
               <a:rPr lang="en-US" sz="1200" dirty="0">
                 <a:solidFill>
-                  <a:srgbClr val="1F2120"/>
+                  <a:srgbClr val="1A202C"/>
                 </a:solidFill>
                 <a:latin typeface="Arial" pitchFamily="34" charset="0"/>
                 <a:ea typeface="Arial" pitchFamily="34" charset="-122"/>
@@ -11658,7 +11011,7 @@
             <a:endParaRPr lang="en-US" sz="1200" dirty="0"/>
           </a:p>
           <a:p>
-            <a:pPr marL="0" indent="0" algn="l">
+            <a:pPr algn="l" indent="0" marL="0">
               <a:spcAft>
                 <a:spcPts val="800"/>
               </a:spcAft>
@@ -11667,7 +11020,7 @@
             <a:r>
               <a:rPr lang="en-US" sz="1200" dirty="0">
                 <a:solidFill>
-                  <a:srgbClr val="1F2120"/>
+                  <a:srgbClr val="1A202C"/>
                 </a:solidFill>
                 <a:latin typeface="Arial" pitchFamily="34" charset="0"/>
                 <a:ea typeface="Arial" pitchFamily="34" charset="-122"/>
@@ -11678,7 +11031,7 @@
             <a:endParaRPr lang="en-US" sz="1200" dirty="0"/>
           </a:p>
           <a:p>
-            <a:pPr marL="0" indent="0" algn="l">
+            <a:pPr algn="l" indent="0" marL="0">
               <a:spcAft>
                 <a:spcPts val="800"/>
               </a:spcAft>
@@ -11687,7 +11040,7 @@
             <a:r>
               <a:rPr lang="en-US" sz="1200" dirty="0">
                 <a:solidFill>
-                  <a:srgbClr val="1F2120"/>
+                  <a:srgbClr val="1A202C"/>
                 </a:solidFill>
                 <a:latin typeface="Arial" pitchFamily="34" charset="0"/>
                 <a:ea typeface="Arial" pitchFamily="34" charset="-122"/>
@@ -11718,18 +11071,11 @@
           </a:solidFill>
           <a:ln w="12700">
             <a:solidFill>
-              <a:srgbClr val="E0DDD0"/>
+              <a:srgbClr val="E2E1DC"/>
             </a:solidFill>
             <a:prstDash val="solid"/>
           </a:ln>
         </p:spPr>
-        <p:txBody>
-          <a:bodyPr/>
-          <a:lstStyle/>
-          <a:p>
-            <a:endParaRPr lang="en-US"/>
-          </a:p>
-        </p:txBody>
       </p:sp>
       <p:sp>
         <p:nvSpPr>
@@ -11746,22 +11092,15 @@
             <a:avLst/>
           </a:prstGeom>
           <a:solidFill>
-            <a:srgbClr val="CF3338"/>
+            <a:srgbClr val="2A4365"/>
           </a:solidFill>
           <a:ln w="12700">
             <a:solidFill>
-              <a:srgbClr val="CF3338"/>
+              <a:srgbClr val="2A4365"/>
             </a:solidFill>
             <a:prstDash val="solid"/>
           </a:ln>
         </p:spPr>
-        <p:txBody>
-          <a:bodyPr/>
-          <a:lstStyle/>
-          <a:p>
-            <a:endParaRPr lang="en-US"/>
-          </a:p>
-        </p:txBody>
       </p:sp>
       <p:sp>
         <p:nvSpPr>
@@ -11784,13 +11123,13 @@
           <a:bodyPr wrap="square" lIns="0" tIns="0" rIns="0" bIns="0" rtlCol="0" anchor="ctr"/>
           <a:lstStyle/>
           <a:p>
-            <a:pPr marL="0" indent="0">
+            <a:pPr indent="0" marL="0">
               <a:buNone/>
             </a:pPr>
             <a:r>
               <a:rPr lang="en-US" sz="2000" b="1" dirty="0">
                 <a:solidFill>
-                  <a:srgbClr val="1F2120"/>
+                  <a:srgbClr val="1A202C"/>
                 </a:solidFill>
                 <a:latin typeface="Arial Black" pitchFamily="34" charset="0"/>
                 <a:ea typeface="Arial Black" pitchFamily="34" charset="-122"/>
@@ -11823,13 +11162,13 @@
           <a:bodyPr wrap="square" lIns="0" tIns="0" rIns="0" bIns="0" rtlCol="0" anchor="ctr"/>
           <a:lstStyle/>
           <a:p>
-            <a:pPr marL="0" indent="0">
+            <a:pPr indent="0" marL="0">
               <a:buNone/>
             </a:pPr>
             <a:r>
               <a:rPr lang="en-US" sz="1200" i="1" dirty="0">
                 <a:solidFill>
-                  <a:srgbClr val="707070"/>
+                  <a:srgbClr val="4A5568"/>
                 </a:solidFill>
                 <a:latin typeface="Arial" pitchFamily="34" charset="0"/>
                 <a:ea typeface="Arial" pitchFamily="34" charset="-122"/>
@@ -11862,13 +11201,13 @@
           <a:bodyPr wrap="square" lIns="0" tIns="0" rIns="0" bIns="0" rtlCol="0" anchor="ctr"/>
           <a:lstStyle/>
           <a:p>
-            <a:pPr marL="0" indent="0">
+            <a:pPr indent="0" marL="0">
               <a:buNone/>
             </a:pPr>
             <a:r>
               <a:rPr lang="en-US" sz="1200" dirty="0">
                 <a:solidFill>
-                  <a:srgbClr val="1F2120"/>
+                  <a:srgbClr val="1A202C"/>
                 </a:solidFill>
                 <a:latin typeface="Arial" pitchFamily="34" charset="0"/>
                 <a:ea typeface="Arial" pitchFamily="34" charset="-122"/>
@@ -11901,7 +11240,7 @@
           <a:bodyPr wrap="square" lIns="0" tIns="0" rIns="0" bIns="0" rtlCol="0" anchor="t"/>
           <a:lstStyle/>
           <a:p>
-            <a:pPr marL="0" indent="0" algn="l">
+            <a:pPr algn="l" indent="0" marL="0">
               <a:spcAft>
                 <a:spcPts val="800"/>
               </a:spcAft>
@@ -11910,7 +11249,7 @@
             <a:r>
               <a:rPr lang="en-US" sz="1200" dirty="0">
                 <a:solidFill>
-                  <a:srgbClr val="1F2120"/>
+                  <a:srgbClr val="1A202C"/>
                 </a:solidFill>
                 <a:latin typeface="Arial" pitchFamily="34" charset="0"/>
                 <a:ea typeface="Arial" pitchFamily="34" charset="-122"/>
@@ -11921,7 +11260,7 @@
             <a:endParaRPr lang="en-US" sz="1200" dirty="0"/>
           </a:p>
           <a:p>
-            <a:pPr marL="0" indent="0" algn="l">
+            <a:pPr algn="l" indent="0" marL="0">
               <a:spcAft>
                 <a:spcPts val="800"/>
               </a:spcAft>
@@ -11930,7 +11269,7 @@
             <a:r>
               <a:rPr lang="en-US" sz="1200" dirty="0">
                 <a:solidFill>
-                  <a:srgbClr val="1F2120"/>
+                  <a:srgbClr val="1A202C"/>
                 </a:solidFill>
                 <a:latin typeface="Arial" pitchFamily="34" charset="0"/>
                 <a:ea typeface="Arial" pitchFamily="34" charset="-122"/>
@@ -11941,7 +11280,7 @@
             <a:endParaRPr lang="en-US" sz="1200" dirty="0"/>
           </a:p>
           <a:p>
-            <a:pPr marL="0" indent="0" algn="l">
+            <a:pPr algn="l" indent="0" marL="0">
               <a:spcAft>
                 <a:spcPts val="800"/>
               </a:spcAft>
@@ -11950,7 +11289,7 @@
             <a:r>
               <a:rPr lang="en-US" sz="1200" dirty="0">
                 <a:solidFill>
-                  <a:srgbClr val="1F2120"/>
+                  <a:srgbClr val="1A202C"/>
                 </a:solidFill>
                 <a:latin typeface="Arial" pitchFamily="34" charset="0"/>
                 <a:ea typeface="Arial" pitchFamily="34" charset="-122"/>
@@ -11981,18 +11320,11 @@
           </a:solidFill>
           <a:ln w="12700">
             <a:solidFill>
-              <a:srgbClr val="E0DDD0"/>
+              <a:srgbClr val="E2E1DC"/>
             </a:solidFill>
             <a:prstDash val="solid"/>
           </a:ln>
         </p:spPr>
-        <p:txBody>
-          <a:bodyPr/>
-          <a:lstStyle/>
-          <a:p>
-            <a:endParaRPr lang="en-US"/>
-          </a:p>
-        </p:txBody>
       </p:sp>
       <p:sp>
         <p:nvSpPr>
@@ -12009,22 +11341,15 @@
             <a:avLst/>
           </a:prstGeom>
           <a:solidFill>
-            <a:srgbClr val="CF3338"/>
+            <a:srgbClr val="2A4365"/>
           </a:solidFill>
           <a:ln w="12700">
             <a:solidFill>
-              <a:srgbClr val="CF3338"/>
+              <a:srgbClr val="2A4365"/>
             </a:solidFill>
             <a:prstDash val="solid"/>
           </a:ln>
         </p:spPr>
-        <p:txBody>
-          <a:bodyPr/>
-          <a:lstStyle/>
-          <a:p>
-            <a:endParaRPr lang="en-US"/>
-          </a:p>
-        </p:txBody>
       </p:sp>
       <p:sp>
         <p:nvSpPr>
@@ -12047,13 +11372,13 @@
           <a:bodyPr wrap="square" lIns="0" tIns="0" rIns="0" bIns="0" rtlCol="0" anchor="ctr"/>
           <a:lstStyle/>
           <a:p>
-            <a:pPr marL="0" indent="0">
+            <a:pPr indent="0" marL="0">
               <a:buNone/>
             </a:pPr>
             <a:r>
               <a:rPr lang="en-US" sz="2000" b="1" dirty="0">
                 <a:solidFill>
-                  <a:srgbClr val="1F2120"/>
+                  <a:srgbClr val="1A202C"/>
                 </a:solidFill>
                 <a:latin typeface="Arial Black" pitchFamily="34" charset="0"/>
                 <a:ea typeface="Arial Black" pitchFamily="34" charset="-122"/>
@@ -12086,13 +11411,13 @@
           <a:bodyPr wrap="square" lIns="0" tIns="0" rIns="0" bIns="0" rtlCol="0" anchor="ctr"/>
           <a:lstStyle/>
           <a:p>
-            <a:pPr marL="0" indent="0">
+            <a:pPr indent="0" marL="0">
               <a:buNone/>
             </a:pPr>
             <a:r>
               <a:rPr lang="en-US" sz="1200" i="1" dirty="0">
                 <a:solidFill>
-                  <a:srgbClr val="707070"/>
+                  <a:srgbClr val="4A5568"/>
                 </a:solidFill>
                 <a:latin typeface="Arial" pitchFamily="34" charset="0"/>
                 <a:ea typeface="Arial" pitchFamily="34" charset="-122"/>
@@ -12125,13 +11450,13 @@
           <a:bodyPr wrap="square" lIns="0" tIns="0" rIns="0" bIns="0" rtlCol="0" anchor="ctr"/>
           <a:lstStyle/>
           <a:p>
-            <a:pPr marL="0" indent="0">
+            <a:pPr indent="0" marL="0">
               <a:buNone/>
             </a:pPr>
             <a:r>
               <a:rPr lang="en-US" sz="1200" dirty="0">
                 <a:solidFill>
-                  <a:srgbClr val="1F2120"/>
+                  <a:srgbClr val="1A202C"/>
                 </a:solidFill>
                 <a:latin typeface="Arial" pitchFamily="34" charset="0"/>
                 <a:ea typeface="Arial" pitchFamily="34" charset="-122"/>
@@ -12164,7 +11489,7 @@
           <a:bodyPr wrap="square" lIns="0" tIns="0" rIns="0" bIns="0" rtlCol="0" anchor="t"/>
           <a:lstStyle/>
           <a:p>
-            <a:pPr marL="0" indent="0" algn="l">
+            <a:pPr algn="l" indent="0" marL="0">
               <a:spcAft>
                 <a:spcPts val="800"/>
               </a:spcAft>
@@ -12173,7 +11498,7 @@
             <a:r>
               <a:rPr lang="en-US" sz="1200" dirty="0">
                 <a:solidFill>
-                  <a:srgbClr val="1F2120"/>
+                  <a:srgbClr val="1A202C"/>
                 </a:solidFill>
                 <a:latin typeface="Arial" pitchFamily="34" charset="0"/>
                 <a:ea typeface="Arial" pitchFamily="34" charset="-122"/>
@@ -12184,7 +11509,7 @@
             <a:endParaRPr lang="en-US" sz="1200" dirty="0"/>
           </a:p>
           <a:p>
-            <a:pPr marL="0" indent="0" algn="l">
+            <a:pPr algn="l" indent="0" marL="0">
               <a:spcAft>
                 <a:spcPts val="800"/>
               </a:spcAft>
@@ -12193,7 +11518,7 @@
             <a:r>
               <a:rPr lang="en-US" sz="1200" dirty="0">
                 <a:solidFill>
-                  <a:srgbClr val="1F2120"/>
+                  <a:srgbClr val="1A202C"/>
                 </a:solidFill>
                 <a:latin typeface="Arial" pitchFamily="34" charset="0"/>
                 <a:ea typeface="Arial" pitchFamily="34" charset="-122"/>
@@ -12204,7 +11529,7 @@
             <a:endParaRPr lang="en-US" sz="1200" dirty="0"/>
           </a:p>
           <a:p>
-            <a:pPr marL="0" indent="0" algn="l">
+            <a:pPr algn="l" indent="0" marL="0">
               <a:spcAft>
                 <a:spcPts val="800"/>
               </a:spcAft>
@@ -12213,7 +11538,7 @@
             <a:r>
               <a:rPr lang="en-US" sz="1200" dirty="0">
                 <a:solidFill>
-                  <a:srgbClr val="1F2120"/>
+                  <a:srgbClr val="1A202C"/>
                 </a:solidFill>
                 <a:latin typeface="Arial" pitchFamily="34" charset="0"/>
                 <a:ea typeface="Arial" pitchFamily="34" charset="-122"/>
@@ -12226,11 +11551,6 @@
         </p:txBody>
       </p:sp>
     </p:spTree>
-    <p:extLst>
-      <p:ext uri="{BB962C8B-B14F-4D97-AF65-F5344CB8AC3E}">
-        <p14:creationId xmlns:p14="http://schemas.microsoft.com/office/powerpoint/2010/main" val="3486137292"/>
-      </p:ext>
-    </p:extLst>
   </p:cSld>
   <p:clrMapOvr>
     <a:masterClrMapping/>
@@ -12244,9 +11564,8 @@
     <p:bg>
       <p:bgPr>
         <a:solidFill>
-          <a:srgbClr val="C00000"/>
+          <a:srgbClr val="1A365D"/>
         </a:solidFill>
-        <a:effectLst/>
       </p:bgPr>
     </p:bg>
     <p:spTree>
@@ -12284,11 +11603,11 @@
           <a:bodyPr wrap="square" lIns="0" tIns="0" rIns="0" bIns="0" rtlCol="0" anchor="ctr"/>
           <a:lstStyle/>
           <a:p>
-            <a:pPr marL="0" indent="0">
-              <a:buNone/>
-            </a:pPr>
-            <a:r>
-              <a:rPr lang="en-US" sz="2000" kern="0" spc="800" dirty="0">
+            <a:pPr indent="0" marL="0">
+              <a:buNone/>
+            </a:pPr>
+            <a:r>
+              <a:rPr lang="en-US" sz="2000" spc="800" kern="0" dirty="0">
                 <a:solidFill>
                   <a:srgbClr val="FFFFFF"/>
                 </a:solidFill>
@@ -12323,7 +11642,7 @@
           <a:bodyPr wrap="square" lIns="0" tIns="0" rIns="0" bIns="0" rtlCol="0" anchor="ctr"/>
           <a:lstStyle/>
           <a:p>
-            <a:pPr marL="0" indent="0">
+            <a:pPr indent="0" marL="0">
               <a:buNone/>
             </a:pPr>
             <a:r>
@@ -12362,7 +11681,7 @@
           <a:bodyPr wrap="square" lIns="0" tIns="0" rIns="0" bIns="0" rtlCol="0" anchor="ctr"/>
           <a:lstStyle/>
           <a:p>
-            <a:pPr marL="0" indent="0">
+            <a:pPr indent="0" marL="0">
               <a:buNone/>
             </a:pPr>
             <a:r>
@@ -12401,7 +11720,7 @@
           <a:bodyPr wrap="square" lIns="0" tIns="0" rIns="0" bIns="0" rtlCol="0" anchor="ctr"/>
           <a:lstStyle/>
           <a:p>
-            <a:pPr marL="0" indent="0">
+            <a:pPr indent="0" marL="0">
               <a:buNone/>
             </a:pPr>
             <a:r>
@@ -12420,11 +11739,6 @@
         </p:txBody>
       </p:sp>
     </p:spTree>
-    <p:extLst>
-      <p:ext uri="{BB962C8B-B14F-4D97-AF65-F5344CB8AC3E}">
-        <p14:creationId xmlns:p14="http://schemas.microsoft.com/office/powerpoint/2010/main" val="309072609"/>
-      </p:ext>
-    </p:extLst>
   </p:cSld>
   <p:clrMapOvr>
     <a:masterClrMapping/>
@@ -12438,9 +11752,8 @@
     <p:bg>
       <p:bgPr>
         <a:solidFill>
-          <a:srgbClr val="EEECE1"/>
+          <a:srgbClr val="FAFAF7"/>
         </a:solidFill>
-        <a:effectLst/>
       </p:bgPr>
     </p:bg>
     <p:spTree>
@@ -12478,13 +11791,13 @@
           <a:bodyPr wrap="square" lIns="0" tIns="0" rIns="0" bIns="0" rtlCol="0" anchor="ctr"/>
           <a:lstStyle/>
           <a:p>
-            <a:pPr marL="0" indent="0">
+            <a:pPr indent="0" marL="0">
               <a:buNone/>
             </a:pPr>
             <a:r>
               <a:rPr lang="en-US" sz="3000" b="1" dirty="0">
                 <a:solidFill>
-                  <a:srgbClr val="1F2120"/>
+                  <a:srgbClr val="1A202C"/>
                 </a:solidFill>
                 <a:latin typeface="Arial Black" pitchFamily="34" charset="0"/>
                 <a:ea typeface="Arial Black" pitchFamily="34" charset="-122"/>
@@ -12517,13 +11830,13 @@
           <a:bodyPr wrap="square" lIns="0" tIns="0" rIns="0" bIns="0" rtlCol="0" anchor="ctr"/>
           <a:lstStyle/>
           <a:p>
-            <a:pPr marL="0" indent="0">
+            <a:pPr indent="0" marL="0">
               <a:buNone/>
             </a:pPr>
             <a:r>
               <a:rPr lang="en-US" sz="1500" i="1" dirty="0">
                 <a:solidFill>
-                  <a:srgbClr val="707070"/>
+                  <a:srgbClr val="4A5568"/>
                 </a:solidFill>
                 <a:latin typeface="Arial" pitchFamily="34" charset="0"/>
                 <a:ea typeface="Arial" pitchFamily="34" charset="-122"/>
@@ -12554,18 +11867,11 @@
           </a:solidFill>
           <a:ln w="12700">
             <a:solidFill>
-              <a:srgbClr val="E0DDD0"/>
+              <a:srgbClr val="E2E1DC"/>
             </a:solidFill>
             <a:prstDash val="solid"/>
           </a:ln>
         </p:spPr>
-        <p:txBody>
-          <a:bodyPr/>
-          <a:lstStyle/>
-          <a:p>
-            <a:endParaRPr lang="en-US"/>
-          </a:p>
-        </p:txBody>
       </p:sp>
       <p:sp>
         <p:nvSpPr>
@@ -12588,13 +11894,13 @@
           <a:bodyPr wrap="square" lIns="0" tIns="0" rIns="0" bIns="0" rtlCol="0" anchor="ctr"/>
           <a:lstStyle/>
           <a:p>
-            <a:pPr marL="0" indent="0" algn="ctr">
+            <a:pPr algn="ctr" indent="0" marL="0">
               <a:buNone/>
             </a:pPr>
             <a:r>
               <a:rPr lang="en-US" sz="6400" b="1" dirty="0">
                 <a:solidFill>
-                  <a:srgbClr val="CF3338"/>
+                  <a:srgbClr val="2A4365"/>
                 </a:solidFill>
                 <a:latin typeface="Arial Black" pitchFamily="34" charset="0"/>
                 <a:ea typeface="Arial Black" pitchFamily="34" charset="-122"/>
@@ -12627,13 +11933,13 @@
           <a:bodyPr wrap="square" lIns="0" tIns="0" rIns="0" bIns="0" rtlCol="0" anchor="ctr"/>
           <a:lstStyle/>
           <a:p>
-            <a:pPr marL="0" indent="0" algn="ctr">
+            <a:pPr algn="ctr" indent="0" marL="0">
               <a:buNone/>
             </a:pPr>
             <a:r>
               <a:rPr lang="en-US" sz="1800" b="1" dirty="0">
                 <a:solidFill>
-                  <a:srgbClr val="1F2120"/>
+                  <a:srgbClr val="1A202C"/>
                 </a:solidFill>
                 <a:latin typeface="Arial Black" pitchFamily="34" charset="0"/>
                 <a:ea typeface="Arial Black" pitchFamily="34" charset="-122"/>
@@ -12666,13 +11972,13 @@
           <a:bodyPr wrap="square" lIns="0" tIns="0" rIns="0" bIns="0" rtlCol="0" anchor="ctr"/>
           <a:lstStyle/>
           <a:p>
-            <a:pPr marL="0" indent="0" algn="ctr">
+            <a:pPr algn="ctr" indent="0" marL="0">
               <a:buNone/>
             </a:pPr>
             <a:r>
               <a:rPr lang="en-US" sz="1600" dirty="0">
                 <a:solidFill>
-                  <a:srgbClr val="1F2120"/>
+                  <a:srgbClr val="1A202C"/>
                 </a:solidFill>
                 <a:latin typeface="Courier New" pitchFamily="34" charset="0"/>
                 <a:ea typeface="Courier New" pitchFamily="34" charset="-122"/>
@@ -12705,13 +12011,13 @@
           <a:bodyPr wrap="square" lIns="0" tIns="0" rIns="0" bIns="0" rtlCol="0" anchor="ctr"/>
           <a:lstStyle/>
           <a:p>
-            <a:pPr marL="0" indent="0" algn="ctr">
+            <a:pPr algn="ctr" indent="0" marL="0">
               <a:buNone/>
             </a:pPr>
             <a:r>
               <a:rPr lang="en-US" sz="1200" i="1" dirty="0">
                 <a:solidFill>
-                  <a:srgbClr val="707070"/>
+                  <a:srgbClr val="4A5568"/>
                 </a:solidFill>
                 <a:latin typeface="Arial" pitchFamily="34" charset="0"/>
                 <a:ea typeface="Arial" pitchFamily="34" charset="-122"/>
@@ -12742,18 +12048,11 @@
           </a:solidFill>
           <a:ln w="12700">
             <a:solidFill>
-              <a:srgbClr val="E0DDD0"/>
+              <a:srgbClr val="E2E1DC"/>
             </a:solidFill>
             <a:prstDash val="solid"/>
           </a:ln>
         </p:spPr>
-        <p:txBody>
-          <a:bodyPr/>
-          <a:lstStyle/>
-          <a:p>
-            <a:endParaRPr lang="en-US"/>
-          </a:p>
-        </p:txBody>
       </p:sp>
       <p:sp>
         <p:nvSpPr>
@@ -12776,13 +12075,13 @@
           <a:bodyPr wrap="square" lIns="0" tIns="0" rIns="0" bIns="0" rtlCol="0" anchor="ctr"/>
           <a:lstStyle/>
           <a:p>
-            <a:pPr marL="0" indent="0" algn="ctr">
+            <a:pPr algn="ctr" indent="0" marL="0">
               <a:buNone/>
             </a:pPr>
             <a:r>
               <a:rPr lang="en-US" sz="6400" b="1" dirty="0">
                 <a:solidFill>
-                  <a:srgbClr val="CF3338"/>
+                  <a:srgbClr val="2A4365"/>
                 </a:solidFill>
                 <a:latin typeface="Arial Black" pitchFamily="34" charset="0"/>
                 <a:ea typeface="Arial Black" pitchFamily="34" charset="-122"/>
@@ -12815,13 +12114,13 @@
           <a:bodyPr wrap="square" lIns="0" tIns="0" rIns="0" bIns="0" rtlCol="0" anchor="ctr"/>
           <a:lstStyle/>
           <a:p>
-            <a:pPr marL="0" indent="0" algn="ctr">
+            <a:pPr algn="ctr" indent="0" marL="0">
               <a:buNone/>
             </a:pPr>
             <a:r>
               <a:rPr lang="en-US" sz="1800" b="1" dirty="0">
                 <a:solidFill>
-                  <a:srgbClr val="1F2120"/>
+                  <a:srgbClr val="1A202C"/>
                 </a:solidFill>
                 <a:latin typeface="Arial Black" pitchFamily="34" charset="0"/>
                 <a:ea typeface="Arial Black" pitchFamily="34" charset="-122"/>
@@ -12854,13 +12153,13 @@
           <a:bodyPr wrap="square" lIns="0" tIns="0" rIns="0" bIns="0" rtlCol="0" anchor="ctr"/>
           <a:lstStyle/>
           <a:p>
-            <a:pPr marL="0" indent="0" algn="ctr">
+            <a:pPr algn="ctr" indent="0" marL="0">
               <a:buNone/>
             </a:pPr>
             <a:r>
               <a:rPr lang="en-US" sz="1600" dirty="0">
                 <a:solidFill>
-                  <a:srgbClr val="1F2120"/>
+                  <a:srgbClr val="1A202C"/>
                 </a:solidFill>
                 <a:latin typeface="Courier New" pitchFamily="34" charset="0"/>
                 <a:ea typeface="Courier New" pitchFamily="34" charset="-122"/>
@@ -12893,13 +12192,13 @@
           <a:bodyPr wrap="square" lIns="0" tIns="0" rIns="0" bIns="0" rtlCol="0" anchor="ctr"/>
           <a:lstStyle/>
           <a:p>
-            <a:pPr marL="0" indent="0" algn="ctr">
+            <a:pPr algn="ctr" indent="0" marL="0">
               <a:buNone/>
             </a:pPr>
             <a:r>
               <a:rPr lang="en-US" sz="1200" i="1" dirty="0">
                 <a:solidFill>
-                  <a:srgbClr val="707070"/>
+                  <a:srgbClr val="4A5568"/>
                 </a:solidFill>
                 <a:latin typeface="Arial" pitchFamily="34" charset="0"/>
                 <a:ea typeface="Arial" pitchFamily="34" charset="-122"/>
@@ -12930,18 +12229,11 @@
           </a:solidFill>
           <a:ln w="12700">
             <a:solidFill>
-              <a:srgbClr val="E0DDD0"/>
+              <a:srgbClr val="E2E1DC"/>
             </a:solidFill>
             <a:prstDash val="solid"/>
           </a:ln>
         </p:spPr>
-        <p:txBody>
-          <a:bodyPr/>
-          <a:lstStyle/>
-          <a:p>
-            <a:endParaRPr lang="en-US"/>
-          </a:p>
-        </p:txBody>
       </p:sp>
       <p:sp>
         <p:nvSpPr>
@@ -12964,13 +12256,13 @@
           <a:bodyPr wrap="square" lIns="0" tIns="0" rIns="0" bIns="0" rtlCol="0" anchor="ctr"/>
           <a:lstStyle/>
           <a:p>
-            <a:pPr marL="0" indent="0" algn="ctr">
+            <a:pPr algn="ctr" indent="0" marL="0">
               <a:buNone/>
             </a:pPr>
             <a:r>
               <a:rPr lang="en-US" sz="6400" b="1" dirty="0">
                 <a:solidFill>
-                  <a:srgbClr val="CF3338"/>
+                  <a:srgbClr val="2A4365"/>
                 </a:solidFill>
                 <a:latin typeface="Arial Black" pitchFamily="34" charset="0"/>
                 <a:ea typeface="Arial Black" pitchFamily="34" charset="-122"/>
@@ -13003,13 +12295,13 @@
           <a:bodyPr wrap="square" lIns="0" tIns="0" rIns="0" bIns="0" rtlCol="0" anchor="ctr"/>
           <a:lstStyle/>
           <a:p>
-            <a:pPr marL="0" indent="0" algn="ctr">
+            <a:pPr algn="ctr" indent="0" marL="0">
               <a:buNone/>
             </a:pPr>
             <a:r>
               <a:rPr lang="en-US" sz="1800" b="1" dirty="0">
                 <a:solidFill>
-                  <a:srgbClr val="1F2120"/>
+                  <a:srgbClr val="1A202C"/>
                 </a:solidFill>
                 <a:latin typeface="Arial Black" pitchFamily="34" charset="0"/>
                 <a:ea typeface="Arial Black" pitchFamily="34" charset="-122"/>
@@ -13042,13 +12334,13 @@
           <a:bodyPr wrap="square" lIns="0" tIns="0" rIns="0" bIns="0" rtlCol="0" anchor="ctr"/>
           <a:lstStyle/>
           <a:p>
-            <a:pPr marL="0" indent="0" algn="ctr">
+            <a:pPr algn="ctr" indent="0" marL="0">
               <a:buNone/>
             </a:pPr>
             <a:r>
               <a:rPr lang="en-US" sz="1600" dirty="0">
                 <a:solidFill>
-                  <a:srgbClr val="1F2120"/>
+                  <a:srgbClr val="1A202C"/>
                 </a:solidFill>
                 <a:latin typeface="Courier New" pitchFamily="34" charset="0"/>
                 <a:ea typeface="Courier New" pitchFamily="34" charset="-122"/>
@@ -13081,13 +12373,13 @@
           <a:bodyPr wrap="square" lIns="0" tIns="0" rIns="0" bIns="0" rtlCol="0" anchor="ctr"/>
           <a:lstStyle/>
           <a:p>
-            <a:pPr marL="0" indent="0" algn="ctr">
+            <a:pPr algn="ctr" indent="0" marL="0">
               <a:buNone/>
             </a:pPr>
             <a:r>
               <a:rPr lang="en-US" sz="1200" i="1" dirty="0">
                 <a:solidFill>
-                  <a:srgbClr val="707070"/>
+                  <a:srgbClr val="4A5568"/>
                 </a:solidFill>
                 <a:latin typeface="Arial" pitchFamily="34" charset="0"/>
                 <a:ea typeface="Arial" pitchFamily="34" charset="-122"/>
@@ -13120,13 +12412,13 @@
           <a:bodyPr wrap="square" lIns="0" tIns="0" rIns="0" bIns="0" rtlCol="0" anchor="ctr"/>
           <a:lstStyle/>
           <a:p>
-            <a:pPr marL="0" indent="0" algn="ctr">
+            <a:pPr algn="ctr" indent="0" marL="0">
               <a:buNone/>
             </a:pPr>
             <a:r>
               <a:rPr lang="en-US" sz="1200" i="1" dirty="0">
                 <a:solidFill>
-                  <a:srgbClr val="707070"/>
+                  <a:srgbClr val="4A5568"/>
                 </a:solidFill>
                 <a:latin typeface="Arial" pitchFamily="34" charset="0"/>
                 <a:ea typeface="Arial" pitchFamily="34" charset="-122"/>
@@ -13139,11 +12431,6 @@
         </p:txBody>
       </p:sp>
     </p:spTree>
-    <p:extLst>
-      <p:ext uri="{BB962C8B-B14F-4D97-AF65-F5344CB8AC3E}">
-        <p14:creationId xmlns:p14="http://schemas.microsoft.com/office/powerpoint/2010/main" val="3858911892"/>
-      </p:ext>
-    </p:extLst>
   </p:cSld>
   <p:clrMapOvr>
     <a:masterClrMapping/>
@@ -13157,9 +12444,8 @@
     <p:bg>
       <p:bgPr>
         <a:solidFill>
-          <a:srgbClr val="EEECE1"/>
+          <a:srgbClr val="FAFAF7"/>
         </a:solidFill>
-        <a:effectLst/>
       </p:bgPr>
     </p:bg>
     <p:spTree>
@@ -13197,13 +12483,13 @@
           <a:bodyPr wrap="square" lIns="0" tIns="0" rIns="0" bIns="0" rtlCol="0" anchor="ctr"/>
           <a:lstStyle/>
           <a:p>
-            <a:pPr marL="0" indent="0">
+            <a:pPr indent="0" marL="0">
               <a:buNone/>
             </a:pPr>
             <a:r>
               <a:rPr lang="en-US" sz="3000" b="1" dirty="0">
                 <a:solidFill>
-                  <a:srgbClr val="1F2120"/>
+                  <a:srgbClr val="1A202C"/>
                 </a:solidFill>
                 <a:latin typeface="Arial Black" pitchFamily="34" charset="0"/>
                 <a:ea typeface="Arial Black" pitchFamily="34" charset="-122"/>
@@ -13236,13 +12522,13 @@
           <a:bodyPr wrap="square" lIns="0" tIns="0" rIns="0" bIns="0" rtlCol="0" anchor="ctr"/>
           <a:lstStyle/>
           <a:p>
-            <a:pPr marL="0" indent="0">
+            <a:pPr indent="0" marL="0">
               <a:buNone/>
             </a:pPr>
             <a:r>
               <a:rPr lang="en-US" sz="1400" i="1" dirty="0">
                 <a:solidFill>
-                  <a:srgbClr val="707070"/>
+                  <a:srgbClr val="4A5568"/>
                 </a:solidFill>
                 <a:latin typeface="Arial" pitchFamily="34" charset="0"/>
                 <a:ea typeface="Arial" pitchFamily="34" charset="-122"/>
@@ -13273,18 +12559,11 @@
           </a:solidFill>
           <a:ln w="12700">
             <a:solidFill>
-              <a:srgbClr val="E0DDD0"/>
+              <a:srgbClr val="E2E1DC"/>
             </a:solidFill>
             <a:prstDash val="solid"/>
           </a:ln>
         </p:spPr>
-        <p:txBody>
-          <a:bodyPr/>
-          <a:lstStyle/>
-          <a:p>
-            <a:endParaRPr lang="en-US"/>
-          </a:p>
-        </p:txBody>
       </p:sp>
       <p:sp>
         <p:nvSpPr>
@@ -13301,22 +12580,15 @@
             <a:avLst/>
           </a:prstGeom>
           <a:solidFill>
-            <a:srgbClr val="CF3338"/>
+            <a:srgbClr val="2A4365"/>
           </a:solidFill>
           <a:ln w="12700">
             <a:solidFill>
-              <a:srgbClr val="CF3338"/>
+              <a:srgbClr val="2A4365"/>
             </a:solidFill>
             <a:prstDash val="solid"/>
           </a:ln>
         </p:spPr>
-        <p:txBody>
-          <a:bodyPr/>
-          <a:lstStyle/>
-          <a:p>
-            <a:endParaRPr lang="en-US"/>
-          </a:p>
-        </p:txBody>
       </p:sp>
       <p:sp>
         <p:nvSpPr>
@@ -13339,7 +12611,7 @@
           <a:bodyPr wrap="square" lIns="0" tIns="0" rIns="0" bIns="0" rtlCol="0" anchor="ctr"/>
           <a:lstStyle/>
           <a:p>
-            <a:pPr marL="0" indent="0">
+            <a:pPr indent="0" marL="0">
               <a:buNone/>
             </a:pPr>
             <a:r>
@@ -13388,7 +12660,7 @@
             <a:r>
               <a:rPr lang="en-US" sz="1600" dirty="0">
                 <a:solidFill>
-                  <a:srgbClr val="1F2120"/>
+                  <a:srgbClr val="1A202C"/>
                 </a:solidFill>
                 <a:latin typeface="Arial" pitchFamily="34" charset="0"/>
                 <a:ea typeface="Arial" pitchFamily="34" charset="-122"/>
@@ -13409,7 +12681,7 @@
             <a:r>
               <a:rPr lang="en-US" sz="1600" dirty="0">
                 <a:solidFill>
-                  <a:srgbClr val="1F2120"/>
+                  <a:srgbClr val="1A202C"/>
                 </a:solidFill>
                 <a:latin typeface="Arial" pitchFamily="34" charset="0"/>
                 <a:ea typeface="Arial" pitchFamily="34" charset="-122"/>
@@ -13430,7 +12702,7 @@
             <a:r>
               <a:rPr lang="en-US" sz="1600" dirty="0">
                 <a:solidFill>
-                  <a:srgbClr val="1F2120"/>
+                  <a:srgbClr val="1A202C"/>
                 </a:solidFill>
                 <a:latin typeface="Arial" pitchFamily="34" charset="0"/>
                 <a:ea typeface="Arial" pitchFamily="34" charset="-122"/>
@@ -13451,7 +12723,7 @@
             <a:r>
               <a:rPr lang="en-US" sz="1600" dirty="0">
                 <a:solidFill>
-                  <a:srgbClr val="1F2120"/>
+                  <a:srgbClr val="1A202C"/>
                 </a:solidFill>
                 <a:latin typeface="Arial" pitchFamily="34" charset="0"/>
                 <a:ea typeface="Arial" pitchFamily="34" charset="-122"/>
@@ -13482,18 +12754,11 @@
           </a:solidFill>
           <a:ln w="12700">
             <a:solidFill>
-              <a:srgbClr val="E0DDD0"/>
+              <a:srgbClr val="E2E1DC"/>
             </a:solidFill>
             <a:prstDash val="solid"/>
           </a:ln>
         </p:spPr>
-        <p:txBody>
-          <a:bodyPr/>
-          <a:lstStyle/>
-          <a:p>
-            <a:endParaRPr lang="en-US"/>
-          </a:p>
-        </p:txBody>
       </p:sp>
       <p:sp>
         <p:nvSpPr>
@@ -13510,22 +12775,15 @@
             <a:avLst/>
           </a:prstGeom>
           <a:solidFill>
-            <a:srgbClr val="1F2120"/>
+            <a:srgbClr val="1A202C"/>
           </a:solidFill>
           <a:ln w="12700">
             <a:solidFill>
-              <a:srgbClr val="1F2120"/>
+              <a:srgbClr val="1A202C"/>
             </a:solidFill>
             <a:prstDash val="solid"/>
           </a:ln>
         </p:spPr>
-        <p:txBody>
-          <a:bodyPr/>
-          <a:lstStyle/>
-          <a:p>
-            <a:endParaRPr lang="en-US"/>
-          </a:p>
-        </p:txBody>
       </p:sp>
       <p:sp>
         <p:nvSpPr>
@@ -13548,7 +12806,7 @@
           <a:bodyPr wrap="square" lIns="0" tIns="0" rIns="0" bIns="0" rtlCol="0" anchor="ctr"/>
           <a:lstStyle/>
           <a:p>
-            <a:pPr marL="0" indent="0">
+            <a:pPr indent="0" marL="0">
               <a:buNone/>
             </a:pPr>
             <a:r>
@@ -13597,7 +12855,7 @@
             <a:r>
               <a:rPr lang="en-US" sz="1600" dirty="0">
                 <a:solidFill>
-                  <a:srgbClr val="1F2120"/>
+                  <a:srgbClr val="1A202C"/>
                 </a:solidFill>
                 <a:latin typeface="Arial" pitchFamily="34" charset="0"/>
                 <a:ea typeface="Arial" pitchFamily="34" charset="-122"/>
@@ -13618,7 +12876,7 @@
             <a:r>
               <a:rPr lang="en-US" sz="1600" dirty="0">
                 <a:solidFill>
-                  <a:srgbClr val="1F2120"/>
+                  <a:srgbClr val="1A202C"/>
                 </a:solidFill>
                 <a:latin typeface="Arial" pitchFamily="34" charset="0"/>
                 <a:ea typeface="Arial" pitchFamily="34" charset="-122"/>
@@ -13639,7 +12897,7 @@
             <a:r>
               <a:rPr lang="en-US" sz="1600" dirty="0">
                 <a:solidFill>
-                  <a:srgbClr val="1F2120"/>
+                  <a:srgbClr val="1A202C"/>
                 </a:solidFill>
                 <a:latin typeface="Arial" pitchFamily="34" charset="0"/>
                 <a:ea typeface="Arial" pitchFamily="34" charset="-122"/>
@@ -13660,7 +12918,7 @@
             <a:r>
               <a:rPr lang="en-US" sz="1600" dirty="0">
                 <a:solidFill>
-                  <a:srgbClr val="1F2120"/>
+                  <a:srgbClr val="1A202C"/>
                 </a:solidFill>
                 <a:latin typeface="Arial" pitchFamily="34" charset="0"/>
                 <a:ea typeface="Arial" pitchFamily="34" charset="-122"/>
@@ -13673,11 +12931,6 @@
         </p:txBody>
       </p:sp>
     </p:spTree>
-    <p:extLst>
-      <p:ext uri="{BB962C8B-B14F-4D97-AF65-F5344CB8AC3E}">
-        <p14:creationId xmlns:p14="http://schemas.microsoft.com/office/powerpoint/2010/main" val="723003894"/>
-      </p:ext>
-    </p:extLst>
   </p:cSld>
   <p:clrMapOvr>
     <a:masterClrMapping/>
@@ -13978,341 +13231,4 @@
     </a:ext>
   </a:extLst>
 </a:theme>
-</file>
-
-<file path=ppt/theme/theme2.xml><?xml version="1.0" encoding="utf-8"?>
-<a:theme xmlns:a="http://schemas.openxmlformats.org/drawingml/2006/main" name="Office Theme">
-  <a:themeElements>
-    <a:clrScheme name="Office">
-      <a:dk1>
-        <a:sysClr val="windowText" lastClr="000000"/>
-      </a:dk1>
-      <a:lt1>
-        <a:sysClr val="window" lastClr="FFFFFF"/>
-      </a:lt1>
-      <a:dk2>
-        <a:srgbClr val="0E2841"/>
-      </a:dk2>
-      <a:lt2>
-        <a:srgbClr val="E8E8E8"/>
-      </a:lt2>
-      <a:accent1>
-        <a:srgbClr val="156082"/>
-      </a:accent1>
-      <a:accent2>
-        <a:srgbClr val="E97132"/>
-      </a:accent2>
-      <a:accent3>
-        <a:srgbClr val="196B24"/>
-      </a:accent3>
-      <a:accent4>
-        <a:srgbClr val="0F9ED5"/>
-      </a:accent4>
-      <a:accent5>
-        <a:srgbClr val="A02B93"/>
-      </a:accent5>
-      <a:accent6>
-        <a:srgbClr val="4EA72E"/>
-      </a:accent6>
-      <a:hlink>
-        <a:srgbClr val="467886"/>
-      </a:hlink>
-      <a:folHlink>
-        <a:srgbClr val="96607D"/>
-      </a:folHlink>
-    </a:clrScheme>
-    <a:fontScheme name="Office">
-      <a:majorFont>
-        <a:latin typeface="Aptos Display" panose="02110004020202020204"/>
-        <a:ea typeface=""/>
-        <a:cs typeface=""/>
-        <a:font script="Jpan" typeface="游ゴシック Light"/>
-        <a:font script="Hang" typeface="맑은 고딕"/>
-        <a:font script="Hans" typeface="等线 Light"/>
-        <a:font script="Hant" typeface="新細明體"/>
-        <a:font script="Arab" typeface="Times New Roman"/>
-        <a:font script="Hebr" typeface="Times New Roman"/>
-        <a:font script="Thai" typeface="Angsana New"/>
-        <a:font script="Ethi" typeface="Nyala"/>
-        <a:font script="Beng" typeface="Vrinda"/>
-        <a:font script="Gujr" typeface="Shruti"/>
-        <a:font script="Khmr" typeface="MoolBoran"/>
-        <a:font script="Knda" typeface="Tunga"/>
-        <a:font script="Guru" typeface="Raavi"/>
-        <a:font script="Cans" typeface="Euphemia"/>
-        <a:font script="Cher" typeface="Plantagenet Cherokee"/>
-        <a:font script="Yiii" typeface="Microsoft Yi Baiti"/>
-        <a:font script="Tibt" typeface="Microsoft Himalaya"/>
-        <a:font script="Thaa" typeface="MV Boli"/>
-        <a:font script="Deva" typeface="Mangal"/>
-        <a:font script="Telu" typeface="Gautami"/>
-        <a:font script="Taml" typeface="Latha"/>
-        <a:font script="Syrc" typeface="Estrangelo Edessa"/>
-        <a:font script="Orya" typeface="Kalinga"/>
-        <a:font script="Mlym" typeface="Kartika"/>
-        <a:font script="Laoo" typeface="DokChampa"/>
-        <a:font script="Sinh" typeface="Iskoola Pota"/>
-        <a:font script="Mong" typeface="Mongolian Baiti"/>
-        <a:font script="Viet" typeface="Times New Roman"/>
-        <a:font script="Uigh" typeface="Microsoft Uighur"/>
-        <a:font script="Geor" typeface="Sylfaen"/>
-        <a:font script="Armn" typeface="Arial"/>
-        <a:font script="Bugi" typeface="Leelawadee UI"/>
-        <a:font script="Bopo" typeface="Microsoft JhengHei"/>
-        <a:font script="Java" typeface="Javanese Text"/>
-        <a:font script="Lisu" typeface="Segoe UI"/>
-        <a:font script="Mymr" typeface="Myanmar Text"/>
-        <a:font script="Nkoo" typeface="Ebrima"/>
-        <a:font script="Olck" typeface="Nirmala UI"/>
-        <a:font script="Osma" typeface="Ebrima"/>
-        <a:font script="Phag" typeface="Phagspa"/>
-        <a:font script="Syrn" typeface="Estrangelo Edessa"/>
-        <a:font script="Syrj" typeface="Estrangelo Edessa"/>
-        <a:font script="Syre" typeface="Estrangelo Edessa"/>
-        <a:font script="Sora" typeface="Nirmala UI"/>
-        <a:font script="Tale" typeface="Microsoft Tai Le"/>
-        <a:font script="Talu" typeface="Microsoft New Tai Lue"/>
-        <a:font script="Tfng" typeface="Ebrima"/>
-      </a:majorFont>
-      <a:minorFont>
-        <a:latin typeface="Aptos" panose="02110004020202020204"/>
-        <a:ea typeface=""/>
-        <a:cs typeface=""/>
-        <a:font script="Jpan" typeface="游ゴシック"/>
-        <a:font script="Hang" typeface="맑은 고딕"/>
-        <a:font script="Hans" typeface="等线"/>
-        <a:font script="Hant" typeface="新細明體"/>
-        <a:font script="Arab" typeface="Arial"/>
-        <a:font script="Hebr" typeface="Arial"/>
-        <a:font script="Thai" typeface="Cordia New"/>
-        <a:font script="Ethi" typeface="Nyala"/>
-        <a:font script="Beng" typeface="Vrinda"/>
-        <a:font script="Gujr" typeface="Shruti"/>
-        <a:font script="Khmr" typeface="DaunPenh"/>
-        <a:font script="Knda" typeface="Tunga"/>
-        <a:font script="Guru" typeface="Raavi"/>
-        <a:font script="Cans" typeface="Euphemia"/>
-        <a:font script="Cher" typeface="Plantagenet Cherokee"/>
-        <a:font script="Yiii" typeface="Microsoft Yi Baiti"/>
-        <a:font script="Tibt" typeface="Microsoft Himalaya"/>
-        <a:font script="Thaa" typeface="MV Boli"/>
-        <a:font script="Deva" typeface="Mangal"/>
-        <a:font script="Telu" typeface="Gautami"/>
-        <a:font script="Taml" typeface="Latha"/>
-        <a:font script="Syrc" typeface="Estrangelo Edessa"/>
-        <a:font script="Orya" typeface="Kalinga"/>
-        <a:font script="Mlym" typeface="Kartika"/>
-        <a:font script="Laoo" typeface="DokChampa"/>
-        <a:font script="Sinh" typeface="Iskoola Pota"/>
-        <a:font script="Mong" typeface="Mongolian Baiti"/>
-        <a:font script="Viet" typeface="Arial"/>
-        <a:font script="Uigh" typeface="Microsoft Uighur"/>
-        <a:font script="Geor" typeface="Sylfaen"/>
-        <a:font script="Armn" typeface="Arial"/>
-        <a:font script="Bugi" typeface="Leelawadee UI"/>
-        <a:font script="Bopo" typeface="Microsoft JhengHei"/>
-        <a:font script="Java" typeface="Javanese Text"/>
-        <a:font script="Lisu" typeface="Segoe UI"/>
-        <a:font script="Mymr" typeface="Myanmar Text"/>
-        <a:font script="Nkoo" typeface="Ebrima"/>
-        <a:font script="Olck" typeface="Nirmala UI"/>
-        <a:font script="Osma" typeface="Ebrima"/>
-        <a:font script="Phag" typeface="Phagspa"/>
-        <a:font script="Syrn" typeface="Estrangelo Edessa"/>
-        <a:font script="Syrj" typeface="Estrangelo Edessa"/>
-        <a:font script="Syre" typeface="Estrangelo Edessa"/>
-        <a:font script="Sora" typeface="Nirmala UI"/>
-        <a:font script="Tale" typeface="Microsoft Tai Le"/>
-        <a:font script="Talu" typeface="Microsoft New Tai Lue"/>
-        <a:font script="Tfng" typeface="Ebrima"/>
-      </a:minorFont>
-    </a:fontScheme>
-    <a:fmtScheme name="Office">
-      <a:fillStyleLst>
-        <a:solidFill>
-          <a:schemeClr val="phClr"/>
-        </a:solidFill>
-        <a:gradFill rotWithShape="1">
-          <a:gsLst>
-            <a:gs pos="0">
-              <a:schemeClr val="phClr">
-                <a:lumMod val="110000"/>
-                <a:satMod val="105000"/>
-                <a:tint val="67000"/>
-              </a:schemeClr>
-            </a:gs>
-            <a:gs pos="50000">
-              <a:schemeClr val="phClr">
-                <a:lumMod val="105000"/>
-                <a:satMod val="103000"/>
-                <a:tint val="73000"/>
-              </a:schemeClr>
-            </a:gs>
-            <a:gs pos="100000">
-              <a:schemeClr val="phClr">
-                <a:lumMod val="105000"/>
-                <a:satMod val="109000"/>
-                <a:tint val="81000"/>
-              </a:schemeClr>
-            </a:gs>
-          </a:gsLst>
-          <a:lin ang="5400000" scaled="0"/>
-        </a:gradFill>
-        <a:gradFill rotWithShape="1">
-          <a:gsLst>
-            <a:gs pos="0">
-              <a:schemeClr val="phClr">
-                <a:satMod val="103000"/>
-                <a:lumMod val="102000"/>
-                <a:tint val="94000"/>
-              </a:schemeClr>
-            </a:gs>
-            <a:gs pos="50000">
-              <a:schemeClr val="phClr">
-                <a:satMod val="110000"/>
-                <a:lumMod val="100000"/>
-                <a:shade val="100000"/>
-              </a:schemeClr>
-            </a:gs>
-            <a:gs pos="100000">
-              <a:schemeClr val="phClr">
-                <a:lumMod val="99000"/>
-                <a:satMod val="120000"/>
-                <a:shade val="78000"/>
-              </a:schemeClr>
-            </a:gs>
-          </a:gsLst>
-          <a:lin ang="5400000" scaled="0"/>
-        </a:gradFill>
-      </a:fillStyleLst>
-      <a:lnStyleLst>
-        <a:ln w="12700" cap="flat" cmpd="sng" algn="ctr">
-          <a:solidFill>
-            <a:schemeClr val="phClr"/>
-          </a:solidFill>
-          <a:prstDash val="solid"/>
-          <a:miter lim="800000"/>
-        </a:ln>
-        <a:ln w="19050" cap="flat" cmpd="sng" algn="ctr">
-          <a:solidFill>
-            <a:schemeClr val="phClr"/>
-          </a:solidFill>
-          <a:prstDash val="solid"/>
-          <a:miter lim="800000"/>
-        </a:ln>
-        <a:ln w="25400" cap="flat" cmpd="sng" algn="ctr">
-          <a:solidFill>
-            <a:schemeClr val="phClr"/>
-          </a:solidFill>
-          <a:prstDash val="solid"/>
-          <a:miter lim="800000"/>
-        </a:ln>
-      </a:lnStyleLst>
-      <a:effectStyleLst>
-        <a:effectStyle>
-          <a:effectLst/>
-        </a:effectStyle>
-        <a:effectStyle>
-          <a:effectLst/>
-        </a:effectStyle>
-        <a:effectStyle>
-          <a:effectLst>
-            <a:outerShdw blurRad="57150" dist="19050" dir="5400000" algn="ctr" rotWithShape="0">
-              <a:srgbClr val="000000">
-                <a:alpha val="63000"/>
-              </a:srgbClr>
-            </a:outerShdw>
-          </a:effectLst>
-        </a:effectStyle>
-      </a:effectStyleLst>
-      <a:bgFillStyleLst>
-        <a:solidFill>
-          <a:schemeClr val="phClr"/>
-        </a:solidFill>
-        <a:solidFill>
-          <a:schemeClr val="phClr">
-            <a:tint val="95000"/>
-            <a:satMod val="170000"/>
-          </a:schemeClr>
-        </a:solidFill>
-        <a:gradFill rotWithShape="1">
-          <a:gsLst>
-            <a:gs pos="0">
-              <a:schemeClr val="phClr">
-                <a:tint val="93000"/>
-                <a:satMod val="150000"/>
-                <a:shade val="98000"/>
-                <a:lumMod val="102000"/>
-              </a:schemeClr>
-            </a:gs>
-            <a:gs pos="50000">
-              <a:schemeClr val="phClr">
-                <a:tint val="98000"/>
-                <a:satMod val="130000"/>
-                <a:shade val="90000"/>
-                <a:lumMod val="103000"/>
-              </a:schemeClr>
-            </a:gs>
-            <a:gs pos="100000">
-              <a:schemeClr val="phClr">
-                <a:shade val="63000"/>
-                <a:satMod val="120000"/>
-              </a:schemeClr>
-            </a:gs>
-          </a:gsLst>
-          <a:lin ang="5400000" scaled="0"/>
-        </a:gradFill>
-      </a:bgFillStyleLst>
-    </a:fmtScheme>
-  </a:themeElements>
-  <a:objectDefaults>
-    <a:lnDef>
-      <a:spPr/>
-      <a:bodyPr/>
-      <a:lstStyle/>
-      <a:style>
-        <a:lnRef idx="2">
-          <a:schemeClr val="accent1"/>
-        </a:lnRef>
-        <a:fillRef idx="0">
-          <a:schemeClr val="accent1"/>
-        </a:fillRef>
-        <a:effectRef idx="1">
-          <a:schemeClr val="accent1"/>
-        </a:effectRef>
-        <a:fontRef idx="minor">
-          <a:schemeClr val="tx1"/>
-        </a:fontRef>
-      </a:style>
-    </a:lnDef>
-  </a:objectDefaults>
-  <a:extraClrSchemeLst/>
-  <a:extLst>
-    <a:ext uri="{05A4C25C-085E-4340-85A3-A5531E510DB2}">
-      <thm15:themeFamily xmlns:thm15="http://schemas.microsoft.com/office/thememl/2012/main" name="Office Theme" id="{2E142A2C-CD16-42D6-873A-C26D2A0506FA}" vid="{1BDDFF52-6CD6-40A5-AB3C-68EB2F1E4D0A}"/>
-    </a:ext>
-  </a:extLst>
-</a:theme>
-</file>
-
-<file path=ppt/webextensions/taskpanes.xml><?xml version="1.0" encoding="utf-8"?>
-<wetp:taskpanes xmlns:wetp="http://schemas.microsoft.com/office/webextensions/taskpanes/2010/11">
-  <wetp:taskpane dockstate="right" visibility="0" width="788" row="5">
-    <wetp:webextensionref xmlns:r="http://schemas.openxmlformats.org/officeDocument/2006/relationships" r:id="rId1"/>
-  </wetp:taskpane>
-</wetp:taskpanes>
-</file>
-
-<file path=ppt/webextensions/webextension1.xml><?xml version="1.0" encoding="utf-8"?>
-<we:webextension xmlns:we="http://schemas.microsoft.com/office/webextensions/webextension/2010/11" id="{1787603C-C966-47E1-BA45-79ED3F5A0601}">
-  <we:reference id="11d7cf85-ae5a-43b8-bc58-1e1a151cce24" version="1.0.0.1" store="EXCatalog" storeType="EXCatalog"/>
-  <we:alternateReferences>
-    <we:reference id="WA200010725" version="1.0.0.1" store="en-US" storeType="OMEX"/>
-  </we:alternateReferences>
-  <we:properties>
-    <we:property name="claude.fileId" value="&quot;58eff9d7-b95c-4e78-9be9-e876933f1984&quot;"/>
-  </we:properties>
-  <we:bindings/>
-  <we:snapshot xmlns:r="http://schemas.openxmlformats.org/officeDocument/2006/relationships"/>
-</we:webextension>
 </file>
--- a/python-in-excel-first-hour-deck.pptx
+++ b/python-in-excel-first-hour-deck.pptx
@@ -22,9 +22,11 @@
     <p:sldId id="270" r:id="rId16"/>
     <p:sldId id="271" r:id="rId17"/>
     <p:sldId id="272" r:id="rId18"/>
+    <p:sldId id="280" r:id="rId31"/>
     <p:sldId id="273" r:id="rId19"/>
     <p:sldId id="274" r:id="rId20"/>
     <p:sldId id="275" r:id="rId21"/>
+    <p:sldId id="281" r:id="rId32"/>
     <p:sldId id="276" r:id="rId22"/>
     <p:sldId id="277" r:id="rId23"/>
     <p:sldId id="278" r:id="rId24"/>
@@ -3215,7 +3217,7 @@
       </p:sp>
       <p:pic>
         <p:nvPicPr>
-          <p:cNvPr id="4" name="Image 0" descr="/sessions/festive-gallant-bohr/mnt/outputs/images/calc-order.png">    </p:cNvPr>
+          <p:cNvPr id="4" name="Image 0" descr="/sessions/festive-gallant-bohr/mnt/outputs/images/calc-order.png"/>
           <p:cNvPicPr>
             <a:picLocks noChangeAspect="1"/>
           </p:cNvPicPr>
@@ -4861,7 +4863,7 @@
                 <a:ea typeface="Courier New" pitchFamily="34" charset="-122"/>
                 <a:cs typeface="Courier New" pitchFamily="34" charset="-120"/>
               </a:rPr>
-              <a:t>   percentiles=[.1, .5, .9])</a:t>
+              <a:t xml:space="preserve">   percentiles=[.1, .5, .9])</a:t>
             </a:r>
             <a:endParaRPr lang="en-US" sz="1300" dirty="0"/>
           </a:p>
@@ -4901,7 +4903,7 @@
                 <a:ea typeface="Courier New" pitchFamily="34" charset="-122"/>
                 <a:cs typeface="Courier New" pitchFamily="34" charset="-120"/>
               </a:rPr>
-              <a:t>   exclude='number')</a:t>
+              <a:t xml:space="preserve">   exclude='number')</a:t>
             </a:r>
             <a:endParaRPr lang="en-US" sz="1300" dirty="0"/>
           </a:p>
@@ -5204,7 +5206,7 @@
                 <a:ea typeface="Courier New" pitchFamily="34" charset="-122"/>
                 <a:cs typeface="Courier New" pitchFamily="34" charset="-120"/>
               </a:rPr>
-              <a:t>  .sort_values(ascending=False))</a:t>
+              <a:t xml:space="preserve">  .sort_values(ascending=False))</a:t>
             </a:r>
             <a:endParaRPr lang="en-US" sz="1200" dirty="0"/>
           </a:p>
@@ -5498,7 +5500,7 @@
                 <a:ea typeface="Courier New" pitchFamily="34" charset="-122"/>
                 <a:cs typeface="Courier New" pitchFamily="34" charset="-120"/>
               </a:rPr>
-              <a:t>  .value_counts()</a:t>
+              <a:t xml:space="preserve">  .value_counts()</a:t>
             </a:r>
             <a:endParaRPr lang="en-US" sz="1300" dirty="0"/>
           </a:p>
@@ -5555,7 +5557,7 @@
                 <a:ea typeface="Courier New" pitchFamily="34" charset="-122"/>
                 <a:cs typeface="Courier New" pitchFamily="34" charset="-120"/>
               </a:rPr>
-              <a:t>  .value_counts(</a:t>
+              <a:t xml:space="preserve">  .value_counts(</a:t>
             </a:r>
             <a:endParaRPr lang="en-US" sz="1300" dirty="0"/>
           </a:p>
@@ -5572,7 +5574,7 @@
                 <a:ea typeface="Courier New" pitchFamily="34" charset="-122"/>
                 <a:cs typeface="Courier New" pitchFamily="34" charset="-120"/>
               </a:rPr>
-              <a:t>    normalize=True)</a:t>
+              <a:t xml:space="preserve">    normalize=True)</a:t>
             </a:r>
             <a:endParaRPr lang="en-US" sz="1300" dirty="0"/>
           </a:p>
@@ -7033,7 +7035,7 @@
                 <a:ea typeface="Courier New" pitchFamily="34" charset="-122"/>
                 <a:cs typeface="Courier New" pitchFamily="34" charset="-120"/>
               </a:rPr>
-              <a:t>  sales_df['unit_price']</a:t>
+              <a:t xml:space="preserve">  sales_df['unit_price']</a:t>
             </a:r>
             <a:endParaRPr lang="en-US" sz="1200" dirty="0"/>
           </a:p>
@@ -7050,7 +7052,7 @@
                 <a:ea typeface="Courier New" pitchFamily="34" charset="-122"/>
                 <a:cs typeface="Courier New" pitchFamily="34" charset="-120"/>
               </a:rPr>
-              <a:t>  * sales_df['quantity']</a:t>
+              <a:t xml:space="preserve">  * sales_df['quantity']</a:t>
             </a:r>
             <a:endParaRPr lang="en-US" sz="1200" dirty="0"/>
           </a:p>
@@ -7107,7 +7109,7 @@
                 <a:ea typeface="Courier New" pitchFamily="34" charset="-122"/>
                 <a:cs typeface="Courier New" pitchFamily="34" charset="-120"/>
               </a:rPr>
-              <a:t>  sales_df.corr(numeric_only=True),</a:t>
+              <a:t xml:space="preserve">  sales_df.corr(numeric_only=True),</a:t>
             </a:r>
             <a:endParaRPr lang="en-US" sz="1200" dirty="0"/>
           </a:p>
@@ -7124,7 +7126,7 @@
                 <a:ea typeface="Courier New" pitchFamily="34" charset="-122"/>
                 <a:cs typeface="Courier New" pitchFamily="34" charset="-120"/>
               </a:rPr>
-              <a:t>  annot=True,</a:t>
+              <a:t xml:space="preserve">  annot=True,</a:t>
             </a:r>
             <a:endParaRPr lang="en-US" sz="1200" dirty="0"/>
           </a:p>
@@ -7141,7 +7143,7 @@
                 <a:ea typeface="Courier New" pitchFamily="34" charset="-122"/>
                 <a:cs typeface="Courier New" pitchFamily="34" charset="-120"/>
               </a:rPr>
-              <a:t>  cmap='RdBu_r',</a:t>
+              <a:t xml:space="preserve">  cmap='RdBu_r',</a:t>
             </a:r>
             <a:endParaRPr lang="en-US" sz="1200" dirty="0"/>
           </a:p>
@@ -7158,7 +7160,7 @@
                 <a:ea typeface="Courier New" pitchFamily="34" charset="-122"/>
                 <a:cs typeface="Courier New" pitchFamily="34" charset="-120"/>
               </a:rPr>
-              <a:t>  center=0</a:t>
+              <a:t xml:space="preserve">  center=0</a:t>
             </a:r>
             <a:endParaRPr lang="en-US" sz="1200" dirty="0"/>
           </a:p>
@@ -7183,7 +7185,7 @@
       </p:sp>
       <p:pic>
         <p:nvPicPr>
-          <p:cNvPr id="6" name="Image 0" descr="/sessions/festive-gallant-bohr/mnt/outputs/images/heatmap.png">    </p:cNvPr>
+          <p:cNvPr id="6" name="Image 0" descr="/sessions/festive-gallant-bohr/mnt/outputs/images/heatmap.png"/>
           <p:cNvPicPr>
             <a:picLocks noChangeAspect="1"/>
           </p:cNvPicPr>
@@ -7351,7 +7353,7 @@
                 <a:ea typeface="Arial" pitchFamily="34" charset="-122"/>
                 <a:cs typeface="Arial" pitchFamily="34" charset="-120"/>
               </a:rPr>
-              <a:t>→  </a:t>
+              <a:t xml:space="preserve">→  </a:t>
             </a:r>
             <a:pPr indent="0" marL="0">
               <a:spcAft>
@@ -7368,7 +7370,7 @@
                 <a:ea typeface="Arial" pitchFamily="34" charset="-122"/>
                 <a:cs typeface="Arial" pitchFamily="34" charset="-120"/>
               </a:rPr>
-              <a:t>You've heard the words "Python in Excel" but haven't typed </a:t>
+              <a:t xml:space="preserve">You've heard the words "Python in Excel" but haven't typed </a:t>
             </a:r>
             <a:pPr indent="0" marL="0">
               <a:spcAft>
@@ -7402,7 +7404,7 @@
                 <a:ea typeface="Arial" pitchFamily="34" charset="-122"/>
                 <a:cs typeface="Arial" pitchFamily="34" charset="-120"/>
               </a:rPr>
-              <a:t> yet.</a:t>
+              <a:t xml:space="preserve"> yet.</a:t>
             </a:r>
             <a:endParaRPr lang="en-US" sz="2000" dirty="0"/>
           </a:p>
@@ -7422,7 +7424,7 @@
                 <a:ea typeface="Arial" pitchFamily="34" charset="-122"/>
                 <a:cs typeface="Arial" pitchFamily="34" charset="-120"/>
               </a:rPr>
-              <a:t> </a:t>
+              <a:t xml:space="preserve"> </a:t>
             </a:r>
             <a:endParaRPr lang="en-US" sz="2000" dirty="0"/>
           </a:p>
@@ -7442,7 +7444,7 @@
                 <a:ea typeface="Arial" pitchFamily="34" charset="-122"/>
                 <a:cs typeface="Arial" pitchFamily="34" charset="-120"/>
               </a:rPr>
-              <a:t>→  </a:t>
+              <a:t xml:space="preserve">→  </a:t>
             </a:r>
             <a:pPr indent="0" marL="0">
               <a:spcAft>
@@ -7479,7 +7481,7 @@
                 <a:ea typeface="Arial" pitchFamily="34" charset="-122"/>
                 <a:cs typeface="Arial" pitchFamily="34" charset="-120"/>
               </a:rPr>
-              <a:t> </a:t>
+              <a:t xml:space="preserve"> </a:t>
             </a:r>
             <a:endParaRPr lang="en-US" sz="2000" dirty="0"/>
           </a:p>
@@ -7499,7 +7501,7 @@
                 <a:ea typeface="Arial" pitchFamily="34" charset="-122"/>
                 <a:cs typeface="Arial" pitchFamily="34" charset="-120"/>
               </a:rPr>
-              <a:t>→  </a:t>
+              <a:t xml:space="preserve">→  </a:t>
             </a:r>
             <a:pPr indent="0" marL="0">
               <a:spcAft>
@@ -7516,7 +7518,7 @@
                 <a:ea typeface="Arial" pitchFamily="34" charset="-122"/>
                 <a:cs typeface="Arial" pitchFamily="34" charset="-120"/>
               </a:rPr>
-              <a:t>You want to leave the next hour having </a:t>
+              <a:t xml:space="preserve">You want to leave the next hour having </a:t>
             </a:r>
             <a:pPr indent="0" marL="0">
               <a:spcAft>
@@ -8593,7 +8595,7 @@
                 <a:ea typeface="Arial Black" pitchFamily="34" charset="-122"/>
                 <a:cs typeface="Arial Black" pitchFamily="34" charset="-120"/>
               </a:rPr>
-              <a:t>Python in Excel for Data Analytics</a:t>
+              <a:t>Advancing into Analytics</a:t>
             </a:r>
             <a:endParaRPr lang="en-US" sz="1800" dirty="0"/>
           </a:p>
@@ -8635,7 +8637,7 @@
                 <a:ea typeface="Arial" pitchFamily="34" charset="-122"/>
                 <a:cs typeface="Arial" pitchFamily="34" charset="-120"/>
               </a:rPr>
-              <a:t>The Packt book this workshop is built from. Chapters 1–2 cover today's material; later chapters take it through EDA, regression, and time series.</a:t>
+              <a:t>My O’Reilly book, From Excel to Python and R. Builds on today’s mindset — taking spreadsheet skills into a real analytics stack with statistics, EDA, and your first scripts in both languages.</a:t>
             </a:r>
             <a:endParaRPr lang="en-US" sz="1200" dirty="0"/>
           </a:p>
@@ -8674,7 +8676,7 @@
                 <a:ea typeface="Arial" pitchFamily="34" charset="-122"/>
                 <a:cs typeface="Arial" pitchFamily="34" charset="-120"/>
               </a:rPr>
-              <a:t>Packt, 2026</a:t>
+              <a:t>stringfestanalytics.com/book</a:t>
             </a:r>
             <a:endParaRPr lang="en-US" sz="1100" dirty="0"/>
           </a:p>
@@ -9373,6 +9375,676 @@
 </p:sld>
 </file>
 
+<file path=ppt/slides/slide25.xml><?xml version="1.0" encoding="utf-8"?>
+<p:sld xmlns:a="http://schemas.openxmlformats.org/drawingml/2006/main" xmlns:r="http://schemas.openxmlformats.org/officeDocument/2006/relationships" xmlns:p="http://schemas.openxmlformats.org/presentationml/2006/main">
+  <p:cSld name="Slide 16">
+    <p:bg>
+      <p:bgPr>
+        <a:solidFill>
+          <a:srgbClr val="FAFAF7"/>
+        </a:solidFill>
+      </p:bgPr>
+    </p:bg>
+    <p:spTree>
+      <p:nvGrpSpPr>
+        <p:cNvPr id="1" name=""/>
+        <p:cNvGrpSpPr/>
+        <p:nvPr/>
+      </p:nvGrpSpPr>
+      <p:grpSpPr>
+        <a:xfrm>
+          <a:off x="0" y="0"/>
+          <a:ext cx="0" cy="0"/>
+          <a:chOff x="0" y="0"/>
+          <a:chExt cx="0" cy="0"/>
+        </a:xfrm>
+      </p:grpSpPr>
+      <p:sp>
+        <p:nvSpPr>
+          <p:cNvPr id="2" name="Text 0"/>
+          <p:cNvSpPr/>
+          <p:nvPr/>
+        </p:nvSpPr>
+        <p:spPr>
+          <a:xfrm>
+            <a:off x="457200" y="365760"/>
+            <a:ext cx="8229600" cy="640080"/>
+          </a:xfrm>
+          <a:prstGeom prst="rect">
+            <a:avLst/>
+          </a:prstGeom>
+          <a:noFill/>
+          <a:ln/>
+        </p:spPr>
+        <p:txBody>
+          <a:bodyPr wrap="square" lIns="0" tIns="0" rIns="0" bIns="0" rtlCol="0" anchor="ctr"/>
+          <a:lstStyle/>
+          <a:p>
+            <a:pPr indent="0" marL="0">
+              <a:buNone/>
+            </a:pPr>
+            <a:r>
+              <a:rPr lang="en-US" sz="3000" b="1" dirty="0">
+                <a:solidFill>
+                  <a:srgbClr val="1A202C"/>
+                </a:solidFill>
+                <a:latin typeface="Arial Black" pitchFamily="34" charset="0"/>
+                <a:ea typeface="Arial Black" pitchFamily="34" charset="-122"/>
+                <a:cs typeface="Arial Black" pitchFamily="34" charset="-120"/>
+              </a:rPr>
+              <a:t>Bonus pandas moves, if we have time</a:t>
+            </a:r>
+            <a:endParaRPr lang="en-US" sz="3000" dirty="0"/>
+          </a:p>
+        </p:txBody>
+      </p:sp>
+      <p:sp>
+        <p:nvSpPr>
+          <p:cNvPr id="3" name="Text 1"/>
+          <p:cNvSpPr/>
+          <p:nvPr/>
+        </p:nvSpPr>
+        <p:spPr>
+          <a:xfrm>
+            <a:off x="457200" y="1005840"/>
+            <a:ext cx="8229600" cy="365760"/>
+          </a:xfrm>
+          <a:prstGeom prst="rect">
+            <a:avLst/>
+          </a:prstGeom>
+          <a:noFill/>
+          <a:ln/>
+        </p:spPr>
+        <p:txBody>
+          <a:bodyPr wrap="square" lIns="0" tIns="0" rIns="0" bIns="0" rtlCol="0" anchor="ctr"/>
+          <a:lstStyle/>
+          <a:p>
+            <a:pPr indent="0" marL="0">
+              <a:buNone/>
+            </a:pPr>
+            <a:r>
+              <a:rPr lang="en-US" sz="1500" i="1" dirty="0">
+                <a:solidFill>
+                  <a:srgbClr val="4A5568"/>
+                </a:solidFill>
+                <a:latin typeface="Arial" pitchFamily="34" charset="0"/>
+                <a:ea typeface="Arial" pitchFamily="34" charset="-122"/>
+                <a:cs typeface="Arial" pitchFamily="34" charset="-120"/>
+              </a:rPr>
+              <a:t>Three more PivotTable-replacements. Each is one line.</a:t>
+            </a:r>
+            <a:endParaRPr lang="en-US" sz="1500" dirty="0"/>
+          </a:p>
+        </p:txBody>
+      </p:sp>
+      <p:sp>
+        <p:nvSpPr>
+          <p:cNvPr id="4" name="Shape 2"/>
+          <p:cNvSpPr/>
+          <p:nvPr/>
+        </p:nvSpPr>
+        <p:spPr>
+          <a:xfrm>
+            <a:off x="457200" y="1554480"/>
+            <a:ext cx="8229600" cy="2651760"/>
+          </a:xfrm>
+          <a:prstGeom prst="rect">
+            <a:avLst/>
+          </a:prstGeom>
+          <a:solidFill>
+            <a:srgbClr val="FFFFFF"/>
+          </a:solidFill>
+          <a:ln w="12700">
+            <a:solidFill>
+              <a:srgbClr val="E2E1DC"/>
+            </a:solidFill>
+            <a:prstDash val="solid"/>
+          </a:ln>
+        </p:spPr>
+      </p:sp>
+      <p:sp>
+        <p:nvSpPr>
+          <p:cNvPr id="5" name="Shape 3"/>
+          <p:cNvSpPr/>
+          <p:nvPr/>
+        </p:nvSpPr>
+        <p:spPr>
+          <a:xfrm>
+            <a:off x="457200" y="1554480"/>
+            <a:ext cx="137160" cy="2651760"/>
+          </a:xfrm>
+          <a:prstGeom prst="rect">
+            <a:avLst/>
+          </a:prstGeom>
+          <a:solidFill>
+            <a:srgbClr val="2A4365"/>
+          </a:solidFill>
+          <a:ln w="12700">
+            <a:solidFill>
+              <a:srgbClr val="2A4365"/>
+            </a:solidFill>
+            <a:prstDash val="solid"/>
+          </a:ln>
+        </p:spPr>
+      </p:sp>
+      <p:sp>
+        <p:nvSpPr>
+          <p:cNvPr id="6" name="Text 4"/>
+          <p:cNvSpPr/>
+          <p:nvPr/>
+        </p:nvSpPr>
+        <p:spPr>
+          <a:xfrm>
+            <a:off x="777240" y="1737360"/>
+            <a:ext cx="7680960" cy="2377440"/>
+          </a:xfrm>
+          <a:prstGeom prst="rect">
+            <a:avLst/>
+          </a:prstGeom>
+          <a:noFill/>
+          <a:ln/>
+        </p:spPr>
+        <p:txBody>
+          <a:bodyPr wrap="square" lIns="0" tIns="0" rIns="0" bIns="0" rtlCol="0" anchor="ctr"/>
+          <a:lstStyle/>
+          <a:p>
+            <a:pPr indent="0" marL="0">
+              <a:buNone/>
+            </a:pPr>
+            <a:r>
+              <a:rPr lang="en-US" sz="1400" dirty="0">
+                <a:solidFill>
+                  <a:srgbClr val="1A202C"/>
+                </a:solidFill>
+                <a:latin typeface="Courier New" pitchFamily="34" charset="0"/>
+                <a:ea typeface="Courier New" pitchFamily="34" charset="-122"/>
+                <a:cs typeface="Courier New" pitchFamily="34" charset="-120"/>
+              </a:rPr>
+              <a:t># Sort by a column, descending</a:t>
+            </a:r>
+            <a:endParaRPr lang="en-US" sz="1400" dirty="0"/>
+          </a:p>
+          <a:p>
+            <a:pPr indent="0" marL="0">
+              <a:buNone/>
+            </a:pPr>
+            <a:r>
+              <a:rPr lang="en-US" sz="1400" dirty="0">
+                <a:solidFill>
+                  <a:srgbClr val="1A202C"/>
+                </a:solidFill>
+                <a:latin typeface="Courier New" pitchFamily="34" charset="0"/>
+                <a:ea typeface="Courier New" pitchFamily="34" charset="-122"/>
+                <a:cs typeface="Courier New" pitchFamily="34" charset="-120"/>
+              </a:rPr>
+              <a:t>sales_df.sort_values('unit_price', ascending=False)</a:t>
+            </a:r>
+            <a:endParaRPr lang="en-US" sz="1400" dirty="0"/>
+          </a:p>
+          <a:p>
+            <a:pPr indent="0" marL="0">
+              <a:buNone/>
+            </a:pPr>
+            <a:endParaRPr lang="en-US" sz="1400" dirty="0"/>
+          </a:p>
+          <a:p>
+            <a:pPr indent="0" marL="0">
+              <a:buNone/>
+            </a:pPr>
+            <a:r>
+              <a:rPr lang="en-US" sz="1400" dirty="0">
+                <a:solidFill>
+                  <a:srgbClr val="1A202C"/>
+                </a:solidFill>
+                <a:latin typeface="Courier New" pitchFamily="34" charset="0"/>
+                <a:ea typeface="Courier New" pitchFamily="34" charset="-122"/>
+                <a:cs typeface="Courier New" pitchFamily="34" charset="-120"/>
+              </a:rPr>
+              <a:t># Filter rows with .query()</a:t>
+            </a:r>
+            <a:endParaRPr lang="en-US" sz="1400" dirty="0"/>
+          </a:p>
+          <a:p>
+            <a:pPr indent="0" marL="0">
+              <a:buNone/>
+            </a:pPr>
+            <a:r>
+              <a:rPr lang="en-US" sz="1400" dirty="0">
+                <a:solidFill>
+                  <a:srgbClr val="1A202C"/>
+                </a:solidFill>
+                <a:latin typeface="Courier New" pitchFamily="34" charset="0"/>
+                <a:ea typeface="Courier New" pitchFamily="34" charset="-122"/>
+                <a:cs typeface="Courier New" pitchFamily="34" charset="-120"/>
+              </a:rPr>
+              <a:t>sales_df.query("unit_price &gt; 100 and country == 'Germany'")</a:t>
+            </a:r>
+            <a:endParaRPr lang="en-US" sz="1400" dirty="0"/>
+          </a:p>
+          <a:p>
+            <a:pPr indent="0" marL="0">
+              <a:buNone/>
+            </a:pPr>
+            <a:endParaRPr lang="en-US" sz="1400" dirty="0"/>
+          </a:p>
+          <a:p>
+            <a:pPr indent="0" marL="0">
+              <a:buNone/>
+            </a:pPr>
+            <a:r>
+              <a:rPr lang="en-US" sz="1400" dirty="0">
+                <a:solidFill>
+                  <a:srgbClr val="1A202C"/>
+                </a:solidFill>
+                <a:latin typeface="Courier New" pitchFamily="34" charset="0"/>
+                <a:ea typeface="Courier New" pitchFamily="34" charset="-122"/>
+                <a:cs typeface="Courier New" pitchFamily="34" charset="-120"/>
+              </a:rPr>
+              <a:t># Top N rows by a metric</a:t>
+            </a:r>
+            <a:endParaRPr lang="en-US" sz="1400" dirty="0"/>
+          </a:p>
+          <a:p>
+            <a:pPr indent="0" marL="0">
+              <a:buNone/>
+            </a:pPr>
+            <a:r>
+              <a:rPr lang="en-US" sz="1400" dirty="0">
+                <a:solidFill>
+                  <a:srgbClr val="1A202C"/>
+                </a:solidFill>
+                <a:latin typeface="Courier New" pitchFamily="34" charset="0"/>
+                <a:ea typeface="Courier New" pitchFamily="34" charset="-122"/>
+                <a:cs typeface="Courier New" pitchFamily="34" charset="-120"/>
+              </a:rPr>
+              <a:t>sales_df.nlargest(5, 'quantity')</a:t>
+            </a:r>
+            <a:endParaRPr lang="en-US" sz="1400" dirty="0"/>
+          </a:p>
+        </p:txBody>
+      </p:sp>
+      <p:sp>
+        <p:nvSpPr>
+          <p:cNvPr id="7" name="Text 5"/>
+          <p:cNvSpPr/>
+          <p:nvPr/>
+        </p:nvSpPr>
+        <p:spPr>
+          <a:xfrm>
+            <a:off x="457200" y="4389120"/>
+            <a:ext cx="8229600" cy="365760"/>
+          </a:xfrm>
+          <a:prstGeom prst="rect">
+            <a:avLst/>
+          </a:prstGeom>
+          <a:noFill/>
+          <a:ln/>
+        </p:spPr>
+        <p:txBody>
+          <a:bodyPr wrap="square" lIns="0" tIns="0" rIns="0" bIns="0" rtlCol="0" anchor="ctr"/>
+          <a:lstStyle/>
+          <a:p>
+            <a:pPr indent="0" marL="0">
+              <a:buNone/>
+            </a:pPr>
+            <a:r>
+              <a:rPr lang="en-US" sz="1300" i="1" dirty="0">
+                <a:solidFill>
+                  <a:srgbClr val="4A5568"/>
+                </a:solidFill>
+                <a:latin typeface="Arial" pitchFamily="34" charset="0"/>
+                <a:ea typeface="Arial" pitchFamily="34" charset="-122"/>
+                <a:cs typeface="Arial" pitchFamily="34" charset="-120"/>
+              </a:rPr>
+              <a:t>sort_values, .query(), nlargest — the three I reach for after groupby.</a:t>
+            </a:r>
+            <a:endParaRPr lang="en-US" sz="1300" dirty="0"/>
+          </a:p>
+        </p:txBody>
+      </p:sp>
+    </p:spTree>
+  </p:cSld>
+  <p:clrMapOvr>
+    <a:masterClrMapping/>
+  </p:clrMapOvr>
+</p:sld>
+</file>
+
+<file path=ppt/slides/slide26.xml><?xml version="1.0" encoding="utf-8"?>
+<p:sld xmlns:a="http://schemas.openxmlformats.org/drawingml/2006/main" xmlns:r="http://schemas.openxmlformats.org/officeDocument/2006/relationships" xmlns:p="http://schemas.openxmlformats.org/presentationml/2006/main">
+  <p:cSld name="Slide 16">
+    <p:bg>
+      <p:bgPr>
+        <a:solidFill>
+          <a:srgbClr val="FAFAF7"/>
+        </a:solidFill>
+      </p:bgPr>
+    </p:bg>
+    <p:spTree>
+      <p:nvGrpSpPr>
+        <p:cNvPr id="1" name=""/>
+        <p:cNvGrpSpPr/>
+        <p:nvPr/>
+      </p:nvGrpSpPr>
+      <p:grpSpPr>
+        <a:xfrm>
+          <a:off x="0" y="0"/>
+          <a:ext cx="0" cy="0"/>
+          <a:chOff x="0" y="0"/>
+          <a:chExt cx="0" cy="0"/>
+        </a:xfrm>
+      </p:grpSpPr>
+      <p:sp>
+        <p:nvSpPr>
+          <p:cNvPr id="2" name="Text 0"/>
+          <p:cNvSpPr/>
+          <p:nvPr/>
+        </p:nvSpPr>
+        <p:spPr>
+          <a:xfrm>
+            <a:off x="457200" y="365760"/>
+            <a:ext cx="8229600" cy="640080"/>
+          </a:xfrm>
+          <a:prstGeom prst="rect">
+            <a:avLst/>
+          </a:prstGeom>
+          <a:noFill/>
+          <a:ln/>
+        </p:spPr>
+        <p:txBody>
+          <a:bodyPr wrap="square" lIns="0" tIns="0" rIns="0" bIns="0" rtlCol="0" anchor="ctr"/>
+          <a:lstStyle/>
+          <a:p>
+            <a:pPr indent="0" marL="0">
+              <a:buNone/>
+            </a:pPr>
+            <a:r>
+              <a:rPr lang="en-US" sz="3000" b="1" dirty="0">
+                <a:solidFill>
+                  <a:srgbClr val="1A202C"/>
+                </a:solidFill>
+                <a:latin typeface="Arial Black" pitchFamily="34" charset="0"/>
+                <a:ea typeface="Arial Black" pitchFamily="34" charset="-122"/>
+                <a:cs typeface="Arial Black" pitchFamily="34" charset="-120"/>
+              </a:rPr>
+              <a:t>More chart one-liners, if we have time</a:t>
+            </a:r>
+            <a:endParaRPr lang="en-US" sz="3000" dirty="0"/>
+          </a:p>
+        </p:txBody>
+      </p:sp>
+      <p:sp>
+        <p:nvSpPr>
+          <p:cNvPr id="3" name="Text 1"/>
+          <p:cNvSpPr/>
+          <p:nvPr/>
+        </p:nvSpPr>
+        <p:spPr>
+          <a:xfrm>
+            <a:off x="457200" y="1005840"/>
+            <a:ext cx="8229600" cy="365760"/>
+          </a:xfrm>
+          <a:prstGeom prst="rect">
+            <a:avLst/>
+          </a:prstGeom>
+          <a:noFill/>
+          <a:ln/>
+        </p:spPr>
+        <p:txBody>
+          <a:bodyPr wrap="square" lIns="0" tIns="0" rIns="0" bIns="0" rtlCol="0" anchor="ctr"/>
+          <a:lstStyle/>
+          <a:p>
+            <a:pPr indent="0" marL="0">
+              <a:buNone/>
+            </a:pPr>
+            <a:r>
+              <a:rPr lang="en-US" sz="1500" i="1" dirty="0">
+                <a:solidFill>
+                  <a:srgbClr val="4A5568"/>
+                </a:solidFill>
+                <a:latin typeface="Arial" pitchFamily="34" charset="0"/>
+                <a:ea typeface="Arial" pitchFamily="34" charset="-122"/>
+                <a:cs typeface="Arial" pitchFamily="34" charset="-120"/>
+              </a:rPr>
+              <a:t>Three more seaborn views — each a single line of code.</a:t>
+            </a:r>
+            <a:endParaRPr lang="en-US" sz="1500" dirty="0"/>
+          </a:p>
+        </p:txBody>
+      </p:sp>
+      <p:sp>
+        <p:nvSpPr>
+          <p:cNvPr id="4" name="Shape 2"/>
+          <p:cNvSpPr/>
+          <p:nvPr/>
+        </p:nvSpPr>
+        <p:spPr>
+          <a:xfrm>
+            <a:off x="457200" y="1554480"/>
+            <a:ext cx="8229600" cy="2651760"/>
+          </a:xfrm>
+          <a:prstGeom prst="rect">
+            <a:avLst/>
+          </a:prstGeom>
+          <a:solidFill>
+            <a:srgbClr val="FFFFFF"/>
+          </a:solidFill>
+          <a:ln w="12700">
+            <a:solidFill>
+              <a:srgbClr val="E2E1DC"/>
+            </a:solidFill>
+            <a:prstDash val="solid"/>
+          </a:ln>
+        </p:spPr>
+      </p:sp>
+      <p:sp>
+        <p:nvSpPr>
+          <p:cNvPr id="5" name="Shape 3"/>
+          <p:cNvSpPr/>
+          <p:nvPr/>
+        </p:nvSpPr>
+        <p:spPr>
+          <a:xfrm>
+            <a:off x="457200" y="1554480"/>
+            <a:ext cx="137160" cy="2651760"/>
+          </a:xfrm>
+          <a:prstGeom prst="rect">
+            <a:avLst/>
+          </a:prstGeom>
+          <a:solidFill>
+            <a:srgbClr val="2A4365"/>
+          </a:solidFill>
+          <a:ln w="12700">
+            <a:solidFill>
+              <a:srgbClr val="2A4365"/>
+            </a:solidFill>
+            <a:prstDash val="solid"/>
+          </a:ln>
+        </p:spPr>
+      </p:sp>
+      <p:sp>
+        <p:nvSpPr>
+          <p:cNvPr id="6" name="Text 4"/>
+          <p:cNvSpPr/>
+          <p:nvPr/>
+        </p:nvSpPr>
+        <p:spPr>
+          <a:xfrm>
+            <a:off x="777240" y="1737360"/>
+            <a:ext cx="7680960" cy="2377440"/>
+          </a:xfrm>
+          <a:prstGeom prst="rect">
+            <a:avLst/>
+          </a:prstGeom>
+          <a:noFill/>
+          <a:ln/>
+        </p:spPr>
+        <p:txBody>
+          <a:bodyPr wrap="square" lIns="0" tIns="0" rIns="0" bIns="0" rtlCol="0" anchor="ctr"/>
+          <a:lstStyle/>
+          <a:p>
+            <a:pPr indent="0" marL="0">
+              <a:buNone/>
+            </a:pPr>
+            <a:r>
+              <a:rPr lang="en-US" sz="1400" dirty="0">
+                <a:solidFill>
+                  <a:srgbClr val="1A202C"/>
+                </a:solidFill>
+                <a:latin typeface="Courier New" pitchFamily="34" charset="0"/>
+                <a:ea typeface="Courier New" pitchFamily="34" charset="-122"/>
+                <a:cs typeface="Courier New" pitchFamily="34" charset="-120"/>
+              </a:rPr>
+              <a:t># Distribution of one numeric column</a:t>
+            </a:r>
+            <a:endParaRPr lang="en-US" sz="1400" dirty="0"/>
+          </a:p>
+          <a:p>
+            <a:pPr indent="0" marL="0">
+              <a:buNone/>
+            </a:pPr>
+            <a:r>
+              <a:rPr lang="en-US" sz="1400" dirty="0">
+                <a:solidFill>
+                  <a:srgbClr val="1A202C"/>
+                </a:solidFill>
+                <a:latin typeface="Courier New" pitchFamily="34" charset="0"/>
+                <a:ea typeface="Courier New" pitchFamily="34" charset="-122"/>
+                <a:cs typeface="Courier New" pitchFamily="34" charset="-120"/>
+              </a:rPr>
+              <a:t>sns.histplot(sales_df, x='unit_price', bins=20)</a:t>
+            </a:r>
+            <a:endParaRPr lang="en-US" sz="1400" dirty="0"/>
+          </a:p>
+          <a:p>
+            <a:pPr indent="0" marL="0">
+              <a:buNone/>
+            </a:pPr>
+            <a:endParaRPr lang="en-US" sz="1400" dirty="0"/>
+          </a:p>
+          <a:p>
+            <a:pPr indent="0" marL="0">
+              <a:buNone/>
+            </a:pPr>
+            <a:r>
+              <a:rPr lang="en-US" sz="1400" dirty="0">
+                <a:solidFill>
+                  <a:srgbClr val="1A202C"/>
+                </a:solidFill>
+                <a:latin typeface="Courier New" pitchFamily="34" charset="0"/>
+                <a:ea typeface="Courier New" pitchFamily="34" charset="-122"/>
+                <a:cs typeface="Courier New" pitchFamily="34" charset="-120"/>
+              </a:rPr>
+              <a:t># Spread of a metric across categories</a:t>
+            </a:r>
+            <a:endParaRPr lang="en-US" sz="1400" dirty="0"/>
+          </a:p>
+          <a:p>
+            <a:pPr indent="0" marL="0">
+              <a:buNone/>
+            </a:pPr>
+            <a:r>
+              <a:rPr lang="en-US" sz="1400" dirty="0">
+                <a:solidFill>
+                  <a:srgbClr val="1A202C"/>
+                </a:solidFill>
+                <a:latin typeface="Courier New" pitchFamily="34" charset="0"/>
+                <a:ea typeface="Courier New" pitchFamily="34" charset="-122"/>
+                <a:cs typeface="Courier New" pitchFamily="34" charset="-120"/>
+              </a:rPr>
+              <a:t>sns.boxplot(sales_df, x='category', y='unit_price')</a:t>
+            </a:r>
+            <a:endParaRPr lang="en-US" sz="1400" dirty="0"/>
+          </a:p>
+          <a:p>
+            <a:pPr indent="0" marL="0">
+              <a:buNone/>
+            </a:pPr>
+            <a:endParaRPr lang="en-US" sz="1400" dirty="0"/>
+          </a:p>
+          <a:p>
+            <a:pPr indent="0" marL="0">
+              <a:buNone/>
+            </a:pPr>
+            <a:r>
+              <a:rPr lang="en-US" sz="1400" dirty="0">
+                <a:solidFill>
+                  <a:srgbClr val="1A202C"/>
+                </a:solidFill>
+                <a:latin typeface="Courier New" pitchFamily="34" charset="0"/>
+                <a:ea typeface="Courier New" pitchFamily="34" charset="-122"/>
+                <a:cs typeface="Courier New" pitchFamily="34" charset="-120"/>
+              </a:rPr>
+              <a:t># Scatter with a fitted regression line</a:t>
+            </a:r>
+            <a:endParaRPr lang="en-US" sz="1400" dirty="0"/>
+          </a:p>
+          <a:p>
+            <a:pPr indent="0" marL="0">
+              <a:buNone/>
+            </a:pPr>
+            <a:r>
+              <a:rPr lang="en-US" sz="1400" dirty="0">
+                <a:solidFill>
+                  <a:srgbClr val="1A202C"/>
+                </a:solidFill>
+                <a:latin typeface="Courier New" pitchFamily="34" charset="0"/>
+                <a:ea typeface="Courier New" pitchFamily="34" charset="-122"/>
+                <a:cs typeface="Courier New" pitchFamily="34" charset="-120"/>
+              </a:rPr>
+              <a:t>sns.regplot(sales_df, x='quantity', y='unit_price')</a:t>
+            </a:r>
+            <a:endParaRPr lang="en-US" sz="1400" dirty="0"/>
+          </a:p>
+        </p:txBody>
+      </p:sp>
+      <p:sp>
+        <p:nvSpPr>
+          <p:cNvPr id="7" name="Text 5"/>
+          <p:cNvSpPr/>
+          <p:nvPr/>
+        </p:nvSpPr>
+        <p:spPr>
+          <a:xfrm>
+            <a:off x="457200" y="4389120"/>
+            <a:ext cx="8229600" cy="365760"/>
+          </a:xfrm>
+          <a:prstGeom prst="rect">
+            <a:avLst/>
+          </a:prstGeom>
+          <a:noFill/>
+          <a:ln/>
+        </p:spPr>
+        <p:txBody>
+          <a:bodyPr wrap="square" lIns="0" tIns="0" rIns="0" bIns="0" rtlCol="0" anchor="ctr"/>
+          <a:lstStyle/>
+          <a:p>
+            <a:pPr indent="0" marL="0">
+              <a:buNone/>
+            </a:pPr>
+            <a:r>
+              <a:rPr lang="en-US" sz="1300" i="1" dirty="0">
+                <a:solidFill>
+                  <a:srgbClr val="4A5568"/>
+                </a:solidFill>
+                <a:latin typeface="Arial" pitchFamily="34" charset="0"/>
+                <a:ea typeface="Arial" pitchFamily="34" charset="-122"/>
+                <a:cs typeface="Arial" pitchFamily="34" charset="-120"/>
+              </a:rPr>
+              <a:t>Histogram, boxplot, regression scatter. Each would be a 10-minute fight in native Excel.</a:t>
+            </a:r>
+            <a:endParaRPr lang="en-US" sz="1300" dirty="0"/>
+          </a:p>
+        </p:txBody>
+      </p:sp>
+    </p:spTree>
+  </p:cSld>
+  <p:clrMapOvr>
+    <a:masterClrMapping/>
+  </p:clrMapOvr>
+</p:sld>
+</file>
+
 <file path=ppt/slides/slide3.xml><?xml version="1.0" encoding="utf-8"?>
 <p:sld xmlns:a="http://schemas.openxmlformats.org/drawingml/2006/main" xmlns:r="http://schemas.openxmlformats.org/officeDocument/2006/relationships" xmlns:p="http://schemas.openxmlformats.org/presentationml/2006/main">
   <p:cSld name="Slide 3">
@@ -10280,7 +10952,7 @@
                 <a:ea typeface="Arial" pitchFamily="34" charset="-122"/>
                 <a:cs typeface="Arial" pitchFamily="34" charset="-120"/>
               </a:rPr>
-              <a:t>   |   </a:t>
+              <a:t xml:space="preserve">   |   </a:t>
             </a:r>
             <a:pPr indent="0" marL="0">
               <a:buNone/>
@@ -10411,7 +11083,7 @@
                 <a:ea typeface="Arial" pitchFamily="34" charset="-122"/>
                 <a:cs typeface="Arial" pitchFamily="34" charset="-120"/>
               </a:rPr>
-              <a:t>   |   </a:t>
+              <a:t xml:space="preserve">   |   </a:t>
             </a:r>
             <a:pPr indent="0" marL="0">
               <a:buNone/>
@@ -10542,7 +11214,7 @@
                 <a:ea typeface="Arial" pitchFamily="34" charset="-122"/>
                 <a:cs typeface="Arial" pitchFamily="34" charset="-120"/>
               </a:rPr>
-              <a:t>   |   </a:t>
+              <a:t xml:space="preserve">   |   </a:t>
             </a:r>
             <a:pPr indent="0" marL="0">
               <a:buNone/>
@@ -10673,7 +11345,7 @@
                 <a:ea typeface="Arial" pitchFamily="34" charset="-122"/>
                 <a:cs typeface="Arial" pitchFamily="34" charset="-120"/>
               </a:rPr>
-              <a:t>   |   </a:t>
+              <a:t xml:space="preserve">   |   </a:t>
             </a:r>
             <a:pPr indent="0" marL="0">
               <a:buNone/>

--- a/python-in-excel-first-hour-deck.pptx
+++ b/python-in-excel-first-hour-deck.pptx
@@ -526,10 +526,20 @@
           <a:lstStyle/>
           <a:p>
             <a:r>
-              <a:rPr lang="en-US" dirty="0"/>
-              <a:t/>
-            </a:r>
-            <a:endParaRPr lang="en-US" dirty="0"/>
+              <a:t>Welcome in. If you're seeing this slide, you're in the right place — this is Python in Excel: Your First Hour.</a:t>
+            </a:r>
+          </a:p>
+          <a:p/>
+          <a:p>
+            <a:r>
+              <a:t>Here's the deal for the next sixty minutes. We're going to load a real dataset together. We're going to explore it with pandas. And we're going to build a chart Excel can't touch.</a:t>
+            </a:r>
+          </a:p>
+          <a:p/>
+          <a:p>
+            <a:r>
+              <a:t>You don't need to be a programmer. You just need to be comfortable in Excel. I'll do everything live, you can follow along, and you'll leave with the files we used today.</a:t>
+            </a:r>
           </a:p>
         </p:txBody>
       </p:sp>
@@ -614,10 +624,26 @@
           <a:lstStyle/>
           <a:p>
             <a:r>
-              <a:rPr lang="en-US" dirty="0"/>
-              <a:t/>
-            </a:r>
-            <a:endParaRPr lang="en-US" dirty="0"/>
+              <a:t>Pay attention to this one, because it will bite you.</a:t>
+            </a:r>
+          </a:p>
+          <a:p/>
+          <a:p>
+            <a:r>
+              <a:t>Python in Excel runs cells left to right, top to bottom. Like reading a page.</a:t>
+            </a:r>
+          </a:p>
+          <a:p/>
+          <a:p>
+            <a:r>
+              <a:t>So if you define a variable in B2, you can reference it in any cell to the right of B2 in the same row. You can reference it in any cell in row three, row four, and below. But you cannot reference it in row one — A1 is above B2, and you'll get a hash-PYTHON error.</a:t>
+            </a:r>
+          </a:p>
+          <a:p/>
+          <a:p>
+            <a:r>
+              <a:t>The fix is simple. Put your imports and your variables in the top-left of the worksheet. Build down and to the right. Read it like a page.</a:t>
+            </a:r>
           </a:p>
         </p:txBody>
       </p:sp>
@@ -702,10 +728,8 @@
           <a:lstStyle/>
           <a:p>
             <a:r>
-              <a:rPr lang="en-US" dirty="0"/>
-              <a:t/>
-            </a:r>
-            <a:endParaRPr lang="en-US" dirty="0"/>
+              <a:t>Part three. This is the meat of the session. Switch over to the second workbook — zero two dash explore dash with dash pandas. Two hundred orders, six pandas methods, no pivot tables. About twenty-five minutes.</a:t>
+            </a:r>
           </a:p>
         </p:txBody>
       </p:sp>
@@ -790,10 +814,26 @@
           <a:lstStyle/>
           <a:p>
             <a:r>
-              <a:rPr lang="en-US" dirty="0"/>
-              <a:t/>
-            </a:r>
-            <a:endParaRPr lang="en-US" dirty="0"/>
+              <a:t>First step — get the data into a DataFrame. One detail before we touch Python: convert your range to an Excel Table first. Insert, Table. Give it a name. Mine is called sales.</a:t>
+            </a:r>
+          </a:p>
+          <a:p/>
+          <a:p>
+            <a:r>
+              <a:t>Now in a PY cell — sales_df equals x-l, in parentheses, the string "sales hash all", then headers equals True. That x-l function is the bridge from a worksheet range into Python.</a:t>
+            </a:r>
+          </a:p>
+          <a:p/>
+          <a:p>
+            <a:r>
+              <a:t>Heads-up: headers equals True is added automatically when you point x-l at a Table. Keep it.</a:t>
+            </a:r>
+          </a:p>
+          <a:p/>
+          <a:p>
+            <a:r>
+              <a:t>And if you return the DataFrame on its own line — just type sales_df and press enter — you'll see the data card preview. Sanity check that the data made it in.</a:t>
+            </a:r>
           </a:p>
         </p:txBody>
       </p:sp>
@@ -878,10 +918,32 @@
           <a:lstStyle/>
           <a:p>
             <a:r>
-              <a:rPr lang="en-US" dirty="0"/>
-              <a:t/>
-            </a:r>
-            <a:endParaRPr lang="en-US" dirty="0"/>
+              <a:t>Four moves I run before I do anything serious with a dataset.</a:t>
+            </a:r>
+          </a:p>
+          <a:p/>
+          <a:p>
+            <a:r>
+              <a:t>Dot head — first five rows. Sanity check it loaded.</a:t>
+            </a:r>
+          </a:p>
+          <a:p/>
+          <a:p>
+            <a:r>
+              <a:t>Dot tail — last five rows. Sanity check the bottom, which is often messier than the top.</a:t>
+            </a:r>
+          </a:p>
+          <a:p/>
+          <a:p>
+            <a:r>
+              <a:t>Dot sample five — five random rows. Catches issues a head or tail can hide.</a:t>
+            </a:r>
+          </a:p>
+          <a:p/>
+          <a:p>
+            <a:r>
+              <a:t>Dot shape — rows by columns. Today's dataset is two hundred by seven. Now I know what I'm working with.</a:t>
+            </a:r>
           </a:p>
         </p:txBody>
       </p:sp>
@@ -966,10 +1028,26 @@
           <a:lstStyle/>
           <a:p>
             <a:r>
-              <a:rPr lang="en-US" dirty="0"/>
-              <a:t/>
-            </a:r>
-            <a:endParaRPr lang="en-US" dirty="0"/>
+              <a:t>Two more profiling wins.</a:t>
+            </a:r>
+          </a:p>
+          <a:p/>
+          <a:p>
+            <a:r>
+              <a:t>Dot describe gives you summary stats in one shot. Mean, standard deviation, min, max, quartiles. Numeric by default. Pass exclude equals number and it'll describe the text columns instead.</a:t>
+            </a:r>
+          </a:p>
+          <a:p/>
+          <a:p>
+            <a:r>
+              <a:t>Dot is-na dot sum gives you missing values per column. Divide by len of the DataFrame if you want a percent. Sort it if you want the worst columns first.</a:t>
+            </a:r>
+          </a:p>
+          <a:p/>
+          <a:p>
+            <a:r>
+              <a:t>In our dataset, customer-age has six gaps. That's perfect — gives us a teaching moment about missing data.</a:t>
+            </a:r>
           </a:p>
         </p:txBody>
       </p:sp>
@@ -1054,10 +1132,26 @@
           <a:lstStyle/>
           <a:p>
             <a:r>
-              <a:rPr lang="en-US" dirty="0"/>
-              <a:t/>
-            </a:r>
-            <a:endParaRPr lang="en-US" dirty="0"/>
+              <a:t>Value counts. This is your PivotTable replacement for frequency.</a:t>
+            </a:r>
+          </a:p>
+          <a:p/>
+          <a:p>
+            <a:r>
+              <a:t>Sales_df, square brackets country, dot value-counts. You get a sorted count of every country in the data. United States seventy-seven, Germany forty-three, U-K thirty-nine, Canada twenty-six, Australia fifteen.</a:t>
+            </a:r>
+          </a:p>
+          <a:p/>
+          <a:p>
+            <a:r>
+              <a:t>Want proportions instead of raw counts? Pass normalize equals True. Now you're looking at percentages.</a:t>
+            </a:r>
+          </a:p>
+          <a:p/>
+          <a:p>
+            <a:r>
+              <a:t>One line. In a PivotTable you'd be dragging fields. Not bad.</a:t>
+            </a:r>
           </a:p>
         </p:txBody>
       </p:sp>
@@ -1142,10 +1236,32 @@
           <a:lstStyle/>
           <a:p>
             <a:r>
-              <a:rPr lang="en-US" dirty="0"/>
-              <a:t/>
-            </a:r>
-            <a:endParaRPr lang="en-US" dirty="0"/>
+              <a:t>Group-by is the PivotTable, in code. Split. Apply. Combine.</a:t>
+            </a:r>
+          </a:p>
+          <a:p/>
+          <a:p>
+            <a:r>
+              <a:t>Sales_df dot group-by country, then bracket unit_price, dot mean. That's average unit price by country.</a:t>
+            </a:r>
+          </a:p>
+          <a:p/>
+          <a:p>
+            <a:r>
+              <a:t>Want multiple stats at once? Dot a-g-g, list of mean, min, max. Boom — three columns of summary.</a:t>
+            </a:r>
+          </a:p>
+          <a:p/>
+          <a:p>
+            <a:r>
+              <a:t>Group by two columns? Pass a list — country and category. Now you have a nested summary.</a:t>
+            </a:r>
+          </a:p>
+          <a:p/>
+          <a:p>
+            <a:r>
+              <a:t>It's like a PivotTable, except you can chain it. You can filter it. You can feed it directly into a chart.</a:t>
+            </a:r>
           </a:p>
         </p:txBody>
       </p:sp>
@@ -1230,10 +1346,32 @@
           <a:lstStyle/>
           <a:p>
             <a:r>
-              <a:rPr lang="en-US" dirty="0"/>
-              <a:t/>
-            </a:r>
-            <a:endParaRPr lang="en-US" dirty="0"/>
+              <a:t>Now let's stitch it together. Real question: "What's the average price by category — but only in the U-S — sorted high to low?"</a:t>
+            </a:r>
+          </a:p>
+          <a:p/>
+          <a:p>
+            <a:r>
+              <a:t>First line — filter sales_df where country equals United States. Call that "us".</a:t>
+            </a:r>
+          </a:p>
+          <a:p/>
+          <a:p>
+            <a:r>
+              <a:t>Second line — group us by category, take the mean of unit_price. Call that "by_cat".</a:t>
+            </a:r>
+          </a:p>
+          <a:p/>
+          <a:p>
+            <a:r>
+              <a:t>Third line — by_cat dot sort-values, ascending equals False.</a:t>
+            </a:r>
+          </a:p>
+          <a:p/>
+          <a:p>
+            <a:r>
+              <a:t>Filter. Group. Sort. Same shape as an Excel workflow. Just spelled in code.</a:t>
+            </a:r>
           </a:p>
         </p:txBody>
       </p:sp>
@@ -1318,10 +1456,8 @@
           <a:lstStyle/>
           <a:p>
             <a:r>
-              <a:rPr lang="en-US" dirty="0"/>
-              <a:t/>
-            </a:r>
-            <a:endParaRPr lang="en-US" dirty="0"/>
+              <a:t>Part four. One chart Excel can't natively produce. About ten minutes.</a:t>
+            </a:r>
           </a:p>
         </p:txBody>
       </p:sp>
@@ -1406,10 +1542,32 @@
           <a:lstStyle/>
           <a:p>
             <a:r>
-              <a:rPr lang="en-US" dirty="0"/>
-              <a:t/>
-            </a:r>
-            <a:endParaRPr lang="en-US" dirty="0"/>
+              <a:t>Here's the whole recipe. Eight lines.</a:t>
+            </a:r>
+          </a:p>
+          <a:p/>
+          <a:p>
+            <a:r>
+              <a:t>Import seaborn as s-n-s.</a:t>
+            </a:r>
+          </a:p>
+          <a:p/>
+          <a:p>
+            <a:r>
+              <a:t>Compute a revenue column as unit_price times quantity. Just so we have one more numeric column to play with.</a:t>
+            </a:r>
+          </a:p>
+          <a:p/>
+          <a:p>
+            <a:r>
+              <a:t>Then — s-n-s dot heatmap, sales_df dot corr with numeric_only equals True, annot equals True so we see the numbers, c-map equals R-d-B-u underscore r so red is negative and blue is positive, center equals zero so the color scale balances around zero.</a:t>
+            </a:r>
+          </a:p>
+          <a:p/>
+          <a:p>
+            <a:r>
+              <a:t>Run it. That's a correlation heatmap. You'd lose twenty minutes to that natively in Excel. We did it in eight lines.</a:t>
+            </a:r>
           </a:p>
         </p:txBody>
       </p:sp>
@@ -1494,10 +1652,26 @@
           <a:lstStyle/>
           <a:p>
             <a:r>
-              <a:rPr lang="en-US" dirty="0"/>
-              <a:t/>
-            </a:r>
-            <a:endParaRPr lang="en-US" dirty="0"/>
+              <a:t>Quick gut check. This session is for you if you've heard the words "Python in Excel" but haven't actually typed equals-P-Y yet.</a:t>
+            </a:r>
+          </a:p>
+          <a:p/>
+          <a:p>
+            <a:r>
+              <a:t>It's for you if you're comfortable in Excel — formulas, tables, PivotTables — but the jump into code feels intimidating.</a:t>
+            </a:r>
+          </a:p>
+          <a:p/>
+          <a:p>
+            <a:r>
+              <a:t>And it's for you if you want to leave the next hour having actually done it, not just watched a demo.</a:t>
+            </a:r>
+          </a:p>
+          <a:p/>
+          <a:p>
+            <a:r>
+              <a:t>If that's you, you're in the right room. Let's go.</a:t>
+            </a:r>
           </a:p>
         </p:txBody>
       </p:sp>
@@ -1582,10 +1756,26 @@
           <a:lstStyle/>
           <a:p>
             <a:r>
-              <a:rPr lang="en-US" dirty="0"/>
-              <a:t/>
-            </a:r>
-            <a:endParaRPr lang="en-US" dirty="0"/>
+              <a:t>If we have time, here's a bonus flourish. One line.</a:t>
+            </a:r>
+          </a:p>
+          <a:p/>
+          <a:p>
+            <a:r>
+              <a:t>S-n-s dot pair-plot, sales_df, hue equals category. Every numeric variable plotted against every other one, color-coded by category.</a:t>
+            </a:r>
+          </a:p>
+          <a:p/>
+          <a:p>
+            <a:r>
+              <a:t>Heads-up — pair-plots render slowly in cloud-backed PY cells. Show it, don't dwell on it.</a:t>
+            </a:r>
+          </a:p>
+          <a:p/>
+          <a:p>
+            <a:r>
+              <a:t>Where Excel charts feel ceremonial, seaborn one-liners feel like cheating.</a:t>
+            </a:r>
           </a:p>
         </p:txBody>
       </p:sp>
@@ -1670,10 +1860,8 @@
           <a:lstStyle/>
           <a:p>
             <a:r>
-              <a:rPr lang="en-US" dirty="0"/>
-              <a:t/>
-            </a:r>
-            <a:endParaRPr lang="en-US" dirty="0"/>
+              <a:t>Part five. Where to go from here. Quick section — about five minutes including takeaways.</a:t>
+            </a:r>
           </a:p>
         </p:txBody>
       </p:sp>
@@ -1758,10 +1946,26 @@
           <a:lstStyle/>
           <a:p>
             <a:r>
-              <a:rPr lang="en-US" dirty="0"/>
-              <a:t/>
-            </a:r>
-            <a:endParaRPr lang="en-US" dirty="0"/>
+              <a:t>Three resources to take this further.</a:t>
+            </a:r>
+          </a:p>
+          <a:p/>
+          <a:p>
+            <a:r>
+              <a:t>First — Microsoft's Python in Excel docs. Bookmark them. The platform is still moving fast. Packages and features get added. That's where you check what's current.</a:t>
+            </a:r>
+          </a:p>
+          <a:p/>
+          <a:p>
+            <a:r>
+              <a:t>Second — today's workbooks. The two files we used are yours to keep. Re-run the demos in your own time. Then — and this is the part that makes it stick — point x-l at one of your own tables and see what falls out.</a:t>
+            </a:r>
+          </a:p>
+          <a:p/>
+          <a:p>
+            <a:r>
+              <a:t>Third — if you want to go all the way from Excel into the analytics stack, my O'Reilly book, Advancing into Analytics, walks you through statistics, exploratory data analysis, and your first scripts in both Python and R. Link is stringfest analytics dot com slash book.</a:t>
+            </a:r>
           </a:p>
         </p:txBody>
       </p:sp>
@@ -1846,10 +2050,26 @@
           <a:lstStyle/>
           <a:p>
             <a:r>
-              <a:rPr lang="en-US" dirty="0"/>
-              <a:t/>
-            </a:r>
-            <a:endParaRPr lang="en-US" dirty="0"/>
+              <a:t>If you remember three things tomorrow, make it these.</a:t>
+            </a:r>
+          </a:p>
+          <a:p/>
+          <a:p>
+            <a:r>
+              <a:t>One. Cells run top-left to bottom-right. If you reference a variable above or to the left of where it's defined, you'll get hash-PYTHON. Put your imports in the top-left and build down.</a:t>
+            </a:r>
+          </a:p>
+          <a:p/>
+          <a:p>
+            <a:r>
+              <a:t>Two. It runs in the cloud. No internet, no PY. And don't expect web scraping or local file I-O — you can only pull data from inside the workbook.</a:t>
+            </a:r>
+          </a:p>
+          <a:p/>
+          <a:p>
+            <a:r>
+              <a:t>Three. The default output is Python Object, not Excel Value. If you want data to spill into the grid, toggle — Control Alt Shift M. Otherwise you'll think nothing happened.</a:t>
+            </a:r>
           </a:p>
         </p:txBody>
       </p:sp>
@@ -1934,10 +2154,14 @@
           <a:lstStyle/>
           <a:p>
             <a:r>
-              <a:rPr lang="en-US" dirty="0"/>
-              <a:t/>
-            </a:r>
-            <a:endParaRPr lang="en-US" dirty="0"/>
+              <a:t>That's the hour. Drop questions in chat — we'll work through as many as we can.</a:t>
+            </a:r>
+          </a:p>
+          <a:p/>
+          <a:p>
+            <a:r>
+              <a:t>Cheat sheet and sample files will be in your inbox after we wrap. Thanks for spending the hour with me.</a:t>
+            </a:r>
           </a:p>
         </p:txBody>
       </p:sp>
@@ -1970,6 +2194,194 @@
         <p14:creationId xmlns:p14="http://schemas.microsoft.com/office/powerpoint/2010/main" val="1024086991"/>
       </p:ext>
     </p:extLst>
+  </p:cSld>
+  <p:clrMapOvr>
+    <a:masterClrMapping/>
+  </p:clrMapOvr>
+</p:notes>
+</file>
+
+<file path=ppt/notesSlides/notesSlide25.xml><?xml version="1.0" encoding="utf-8"?>
+<p:notes xmlns:a="http://schemas.openxmlformats.org/drawingml/2006/main" xmlns:p="http://schemas.openxmlformats.org/presentationml/2006/main" xmlns:r="http://schemas.openxmlformats.org/officeDocument/2006/relationships">
+  <p:cSld>
+    <p:spTree>
+      <p:nvGrpSpPr>
+        <p:cNvPr id="1" name=""/>
+        <p:cNvGrpSpPr/>
+        <p:nvPr/>
+      </p:nvGrpSpPr>
+      <p:grpSpPr>
+        <a:xfrm>
+          <a:off x="0" y="0"/>
+          <a:ext cx="0" cy="0"/>
+          <a:chOff x="0" y="0"/>
+          <a:chExt cx="0" cy="0"/>
+        </a:xfrm>
+      </p:grpSpPr>
+      <p:sp>
+        <p:nvSpPr>
+          <p:cNvPr id="2" name="Slide Image Placeholder 1"/>
+          <p:cNvSpPr>
+            <a:spLocks noGrp="1"/>
+          </p:cNvSpPr>
+          <p:nvPr>
+            <p:ph type="sldImg" idx="2"/>
+          </p:nvPr>
+        </p:nvSpPr>
+        <p:spPr/>
+      </p:sp>
+      <p:sp>
+        <p:nvSpPr>
+          <p:cNvPr id="3" name="Notes Placeholder 2"/>
+          <p:cNvSpPr>
+            <a:spLocks noGrp="1"/>
+          </p:cNvSpPr>
+          <p:nvPr>
+            <p:ph type="body" idx="3" sz="quarter"/>
+          </p:nvPr>
+        </p:nvSpPr>
+        <p:spPr/>
+        <p:txBody>
+          <a:bodyPr/>
+          <a:lstStyle/>
+          <a:p>
+            <a:r>
+              <a:t>If we're moving fast, here are three more I reach for after group-by.</a:t>
+            </a:r>
+          </a:p>
+          <a:p/>
+          <a:p>
+            <a:r>
+              <a:t>Sort_values — sort the whole DataFrame by a column. Pass ascending equals False if you want descending.</a:t>
+            </a:r>
+          </a:p>
+          <a:p/>
+          <a:p>
+            <a:r>
+              <a:t>Dot query — filter rows with an English-like expression. Quote the whole filter as a string. Unit_price greater than one hundred, and country equals Germany.</a:t>
+            </a:r>
+          </a:p>
+          <a:p/>
+          <a:p>
+            <a:r>
+              <a:t>Dot n-largest — top N rows by a metric. N-largest five, quantity, gives you the five biggest orders.</a:t>
+            </a:r>
+          </a:p>
+          <a:p/>
+          <a:p>
+            <a:r>
+              <a:t>Three more lines. Three more PivotTable replacements. Skip this slide if we're short on time.</a:t>
+            </a:r>
+          </a:p>
+        </p:txBody>
+      </p:sp>
+      <p:sp>
+        <p:nvSpPr>
+          <p:cNvPr id="4" name="Slide Number Placeholder 3"/>
+          <p:cNvSpPr>
+            <a:spLocks noGrp="1"/>
+          </p:cNvSpPr>
+          <p:nvPr>
+            <p:ph type="sldNum" idx="5" sz="quarter"/>
+          </p:nvPr>
+        </p:nvSpPr>
+        <p:spPr/>
+      </p:sp>
+    </p:spTree>
+  </p:cSld>
+  <p:clrMapOvr>
+    <a:masterClrMapping/>
+  </p:clrMapOvr>
+</p:notes>
+</file>
+
+<file path=ppt/notesSlides/notesSlide26.xml><?xml version="1.0" encoding="utf-8"?>
+<p:notes xmlns:a="http://schemas.openxmlformats.org/drawingml/2006/main" xmlns:p="http://schemas.openxmlformats.org/presentationml/2006/main" xmlns:r="http://schemas.openxmlformats.org/officeDocument/2006/relationships">
+  <p:cSld>
+    <p:spTree>
+      <p:nvGrpSpPr>
+        <p:cNvPr id="1" name=""/>
+        <p:cNvGrpSpPr/>
+        <p:nvPr/>
+      </p:nvGrpSpPr>
+      <p:grpSpPr>
+        <a:xfrm>
+          <a:off x="0" y="0"/>
+          <a:ext cx="0" cy="0"/>
+          <a:chOff x="0" y="0"/>
+          <a:chExt cx="0" cy="0"/>
+        </a:xfrm>
+      </p:grpSpPr>
+      <p:sp>
+        <p:nvSpPr>
+          <p:cNvPr id="2" name="Slide Image Placeholder 1"/>
+          <p:cNvSpPr>
+            <a:spLocks noGrp="1"/>
+          </p:cNvSpPr>
+          <p:nvPr>
+            <p:ph type="sldImg" idx="2"/>
+          </p:nvPr>
+        </p:nvSpPr>
+        <p:spPr/>
+      </p:sp>
+      <p:sp>
+        <p:nvSpPr>
+          <p:cNvPr id="3" name="Notes Placeholder 2"/>
+          <p:cNvSpPr>
+            <a:spLocks noGrp="1"/>
+          </p:cNvSpPr>
+          <p:nvPr>
+            <p:ph type="body" idx="3" sz="quarter"/>
+          </p:nvPr>
+        </p:nvSpPr>
+        <p:spPr/>
+        <p:txBody>
+          <a:bodyPr/>
+          <a:lstStyle/>
+          <a:p>
+            <a:r>
+              <a:t>Three more seaborn one-liners worth having in your back pocket.</a:t>
+            </a:r>
+          </a:p>
+          <a:p/>
+          <a:p>
+            <a:r>
+              <a:t>Hist-plot — distribution of one numeric column. Sales_df, x equals unit_price, bins equals twenty.</a:t>
+            </a:r>
+          </a:p>
+          <a:p/>
+          <a:p>
+            <a:r>
+              <a:t>Box-plot — spread of a metric across categories. X equals category, y equals unit_price.</a:t>
+            </a:r>
+          </a:p>
+          <a:p/>
+          <a:p>
+            <a:r>
+              <a:t>Reg-plot — scatter with a fitted regression line. X equals quantity, y equals unit_price.</a:t>
+            </a:r>
+          </a:p>
+          <a:p/>
+          <a:p>
+            <a:r>
+              <a:t>Each one's a line. Each would be a ten-minute fight in native Excel. Skip if we're running long.</a:t>
+            </a:r>
+          </a:p>
+        </p:txBody>
+      </p:sp>
+      <p:sp>
+        <p:nvSpPr>
+          <p:cNvPr id="4" name="Slide Number Placeholder 3"/>
+          <p:cNvSpPr>
+            <a:spLocks noGrp="1"/>
+          </p:cNvSpPr>
+          <p:nvPr>
+            <p:ph type="sldNum" idx="5" sz="quarter"/>
+          </p:nvPr>
+        </p:nvSpPr>
+        <p:spPr/>
+      </p:sp>
+    </p:spTree>
   </p:cSld>
   <p:clrMapOvr>
     <a:masterClrMapping/>
@@ -2022,10 +2434,32 @@
           <a:lstStyle/>
           <a:p>
             <a:r>
-              <a:rPr lang="en-US" dirty="0"/>
-              <a:t/>
-            </a:r>
-            <a:endParaRPr lang="en-US" dirty="0"/>
+              <a:t>Three things you'll walk out with.</a:t>
+            </a:r>
+          </a:p>
+          <a:p/>
+          <a:p>
+            <a:r>
+              <a:t>One: you'll have written your first PY cell. Hello-world inside Excel. And — this is the part nobody warns you about — you'll know exactly why your A1 reference broke.</a:t>
+            </a:r>
+          </a:p>
+          <a:p/>
+          <a:p>
+            <a:r>
+              <a:t>Two: you'll have profiled a real dataset. Two hundred sales orders, six pandas moves, fewer formulas than you'd guess.</a:t>
+            </a:r>
+          </a:p>
+          <a:p/>
+          <a:p>
+            <a:r>
+              <a:t>Three: you'll have built a chart that earns gasps. A correlation heatmap in one line of code. Try doing that natively in Excel.</a:t>
+            </a:r>
+          </a:p>
+          <a:p/>
+          <a:p>
+            <a:r>
+              <a:t>Three things. One hour. Let's get into it.</a:t>
+            </a:r>
           </a:p>
         </p:txBody>
       </p:sp>
@@ -2110,10 +2544,8 @@
           <a:lstStyle/>
           <a:p>
             <a:r>
-              <a:rPr lang="en-US" dirty="0"/>
-              <a:t/>
-            </a:r>
-            <a:endParaRPr lang="en-US" dirty="0"/>
+              <a:t>Part one. Why Python in Excel even exists — and when to reach for it instead of formulas or Power Query. About ten minutes here.</a:t>
+            </a:r>
           </a:p>
         </p:txBody>
       </p:sp>
@@ -2198,10 +2630,38 @@
           <a:lstStyle/>
           <a:p>
             <a:r>
-              <a:rPr lang="en-US" dirty="0"/>
-              <a:t/>
-            </a:r>
-            <a:endParaRPr lang="en-US" dirty="0"/>
+              <a:t>Excel's grid is brilliant. I love it. I built my career in it. But some tasks just don't fit on a grid.</a:t>
+            </a:r>
+          </a:p>
+          <a:p/>
+          <a:p>
+            <a:r>
+              <a:t>Counting missing values across every column. Native Excel — nested COUNTBLANK per column. Pandas — one expression, sales_df dot is-na dot sum.</a:t>
+            </a:r>
+          </a:p>
+          <a:p/>
+          <a:p>
+            <a:r>
+              <a:t>Resampling a time series. Excel — heroic helper columns. Pandas — one dot resample call.</a:t>
+            </a:r>
+          </a:p>
+          <a:p/>
+          <a:p>
+            <a:r>
+              <a:t>Small multiples, jitter plots, heatmaps. Excel — not really. Seaborn — one line.</a:t>
+            </a:r>
+          </a:p>
+          <a:p/>
+          <a:p>
+            <a:r>
+              <a:t>Multi-variable descriptive stats. Excel — Analysis ToolPak round-trip. Pandas — dot describe.</a:t>
+            </a:r>
+          </a:p>
+          <a:p/>
+          <a:p>
+            <a:r>
+              <a:t>This is the gap Python in Excel fills.</a:t>
+            </a:r>
           </a:p>
         </p:txBody>
       </p:sp>
@@ -2286,10 +2746,32 @@
           <a:lstStyle/>
           <a:p>
             <a:r>
-              <a:rPr lang="en-US" dirty="0"/>
-              <a:t/>
-            </a:r>
-            <a:endParaRPr lang="en-US" dirty="0"/>
+              <a:t>Here's the part I want you to remember. Python in Excel is not a competitor to formulas or Power Query. They each have a job.</a:t>
+            </a:r>
+          </a:p>
+          <a:p/>
+          <a:p>
+            <a:r>
+              <a:t>Formulas are for quick lookups, references, ad-hoc math. Cell-anchored logic. XLOOKUP, IF, SUMIFS.</a:t>
+            </a:r>
+          </a:p>
+          <a:p/>
+          <a:p>
+            <a:r>
+              <a:t>Power Query is for repeatable data prep. When the same cleanup has to run again next month — that's Power Query.</a:t>
+            </a:r>
+          </a:p>
+          <a:p/>
+          <a:p>
+            <a:r>
+              <a:t>Python in Excel is for analysis. Statistics. Custom visualizations. DataFrames, group-by, heatmaps.</a:t>
+            </a:r>
+          </a:p>
+          <a:p/>
+          <a:p>
+            <a:r>
+              <a:t>Three tools, three jobs. Reach for the right one and your life gets easier.</a:t>
+            </a:r>
           </a:p>
         </p:txBody>
       </p:sp>
@@ -2374,10 +2856,8 @@
           <a:lstStyle/>
           <a:p>
             <a:r>
-              <a:rPr lang="en-US" dirty="0"/>
-              <a:t/>
-            </a:r>
-            <a:endParaRPr lang="en-US" dirty="0"/>
+              <a:t>Part two. How a PY cell actually works. If you're following along, open the first workbook — zero one dash your dash first dash py dash cell. About ten minutes here.</a:t>
+            </a:r>
           </a:p>
         </p:txBody>
       </p:sp>
@@ -2462,10 +2942,32 @@
           <a:lstStyle/>
           <a:p>
             <a:r>
-              <a:rPr lang="en-US" dirty="0"/>
-              <a:t/>
-            </a:r>
-            <a:endParaRPr lang="en-US" dirty="0"/>
+              <a:t>Three ways to insert a Python cell. Use whichever feels least like work.</a:t>
+            </a:r>
+          </a:p>
+          <a:p/>
+          <a:p>
+            <a:r>
+              <a:t>One — the ribbon. Formulas tab, Insert Python. That's the discoverable one, especially the first few times.</a:t>
+            </a:r>
+          </a:p>
+          <a:p/>
+          <a:p>
+            <a:r>
+              <a:t>Two — just type equals-P-Y, open paren. Once you trust it, this is fastest.</a:t>
+            </a:r>
+          </a:p>
+          <a:p/>
+          <a:p>
+            <a:r>
+              <a:t>Three — keyboard shortcut. Control Alt Shift P. Once you're showing off in a meeting.</a:t>
+            </a:r>
+          </a:p>
+          <a:p/>
+          <a:p>
+            <a:r>
+              <a:t>Whichever you use, look for the green P-Y badge in the cell and the formula bar. That's your confirmation you're in a Python cell, not a regular one.</a:t>
+            </a:r>
           </a:p>
         </p:txBody>
       </p:sp>
@@ -2550,10 +3052,26 @@
           <a:lstStyle/>
           <a:p>
             <a:r>
-              <a:rPr lang="en-US" dirty="0"/>
-              <a:t/>
-            </a:r>
-            <a:endParaRPr lang="en-US" dirty="0"/>
+              <a:t>Once a Python cell runs, there are two ways to see the output. Toggle is Control Alt Shift M.</a:t>
+            </a:r>
+          </a:p>
+          <a:p/>
+          <a:p>
+            <a:r>
+              <a:t>Default is Python Object. You'll see a little card icon, the dimensions, and a preview. The output stays in one cell. That's great mid-analysis because you can chain operations on it.</a:t>
+            </a:r>
+          </a:p>
+          <a:p/>
+          <a:p>
+            <a:r>
+              <a:t>The other mode is Excel Value. The output spills into the grid as a dynamic array. Format it with normal Excel tools, reference it with normal formulas. That's great at the end, when you're handing off to charts.</a:t>
+            </a:r>
+          </a:p>
+          <a:p/>
+          <a:p>
+            <a:r>
+              <a:t>I'll stay in Python Object mode most of today. We'll flip to Excel Value when it makes sense.</a:t>
+            </a:r>
           </a:p>
         </p:txBody>
       </p:sp>
@@ -6663,6 +7181,341 @@
 
 <file path=ppt/slides/slide18.xml><?xml version="1.0" encoding="utf-8"?>
 <p:sld xmlns:a="http://schemas.openxmlformats.org/drawingml/2006/main" xmlns:r="http://schemas.openxmlformats.org/officeDocument/2006/relationships" xmlns:p="http://schemas.openxmlformats.org/presentationml/2006/main">
+  <p:cSld name="Slide 16">
+    <p:bg>
+      <p:bgPr>
+        <a:solidFill>
+          <a:srgbClr val="FAFAF7"/>
+        </a:solidFill>
+      </p:bgPr>
+    </p:bg>
+    <p:spTree>
+      <p:nvGrpSpPr>
+        <p:cNvPr id="1" name=""/>
+        <p:cNvGrpSpPr/>
+        <p:nvPr/>
+      </p:nvGrpSpPr>
+      <p:grpSpPr>
+        <a:xfrm>
+          <a:off x="0" y="0"/>
+          <a:ext cx="0" cy="0"/>
+          <a:chOff x="0" y="0"/>
+          <a:chExt cx="0" cy="0"/>
+        </a:xfrm>
+      </p:grpSpPr>
+      <p:sp>
+        <p:nvSpPr>
+          <p:cNvPr id="2" name="Text 0"/>
+          <p:cNvSpPr/>
+          <p:nvPr/>
+        </p:nvSpPr>
+        <p:spPr>
+          <a:xfrm>
+            <a:off x="457200" y="365760"/>
+            <a:ext cx="8229600" cy="640080"/>
+          </a:xfrm>
+          <a:prstGeom prst="rect">
+            <a:avLst/>
+          </a:prstGeom>
+          <a:noFill/>
+          <a:ln/>
+        </p:spPr>
+        <p:txBody>
+          <a:bodyPr wrap="square" lIns="0" tIns="0" rIns="0" bIns="0" rtlCol="0" anchor="ctr"/>
+          <a:lstStyle/>
+          <a:p>
+            <a:pPr indent="0" marL="0">
+              <a:buNone/>
+            </a:pPr>
+            <a:r>
+              <a:rPr lang="en-US" sz="3000" b="1" dirty="0">
+                <a:solidFill>
+                  <a:srgbClr val="1A202C"/>
+                </a:solidFill>
+                <a:latin typeface="Arial Black" pitchFamily="34" charset="0"/>
+                <a:ea typeface="Arial Black" pitchFamily="34" charset="-122"/>
+                <a:cs typeface="Arial Black" pitchFamily="34" charset="-120"/>
+              </a:rPr>
+              <a:t>Bonus pandas moves, if we have time</a:t>
+            </a:r>
+            <a:endParaRPr lang="en-US" sz="3000" dirty="0"/>
+          </a:p>
+        </p:txBody>
+      </p:sp>
+      <p:sp>
+        <p:nvSpPr>
+          <p:cNvPr id="3" name="Text 1"/>
+          <p:cNvSpPr/>
+          <p:nvPr/>
+        </p:nvSpPr>
+        <p:spPr>
+          <a:xfrm>
+            <a:off x="457200" y="1005840"/>
+            <a:ext cx="8229600" cy="365760"/>
+          </a:xfrm>
+          <a:prstGeom prst="rect">
+            <a:avLst/>
+          </a:prstGeom>
+          <a:noFill/>
+          <a:ln/>
+        </p:spPr>
+        <p:txBody>
+          <a:bodyPr wrap="square" lIns="0" tIns="0" rIns="0" bIns="0" rtlCol="0" anchor="ctr"/>
+          <a:lstStyle/>
+          <a:p>
+            <a:pPr indent="0" marL="0">
+              <a:buNone/>
+            </a:pPr>
+            <a:r>
+              <a:rPr lang="en-US" sz="1500" i="1" dirty="0">
+                <a:solidFill>
+                  <a:srgbClr val="4A5568"/>
+                </a:solidFill>
+                <a:latin typeface="Arial" pitchFamily="34" charset="0"/>
+                <a:ea typeface="Arial" pitchFamily="34" charset="-122"/>
+                <a:cs typeface="Arial" pitchFamily="34" charset="-120"/>
+              </a:rPr>
+              <a:t>Three more PivotTable-replacements. Each is one line.</a:t>
+            </a:r>
+            <a:endParaRPr lang="en-US" sz="1500" dirty="0"/>
+          </a:p>
+        </p:txBody>
+      </p:sp>
+      <p:sp>
+        <p:nvSpPr>
+          <p:cNvPr id="4" name="Shape 2"/>
+          <p:cNvSpPr/>
+          <p:nvPr/>
+        </p:nvSpPr>
+        <p:spPr>
+          <a:xfrm>
+            <a:off x="457200" y="1554480"/>
+            <a:ext cx="8229600" cy="2651760"/>
+          </a:xfrm>
+          <a:prstGeom prst="rect">
+            <a:avLst/>
+          </a:prstGeom>
+          <a:solidFill>
+            <a:srgbClr val="FFFFFF"/>
+          </a:solidFill>
+          <a:ln w="12700">
+            <a:solidFill>
+              <a:srgbClr val="E2E1DC"/>
+            </a:solidFill>
+            <a:prstDash val="solid"/>
+          </a:ln>
+        </p:spPr>
+      </p:sp>
+      <p:sp>
+        <p:nvSpPr>
+          <p:cNvPr id="5" name="Shape 3"/>
+          <p:cNvSpPr/>
+          <p:nvPr/>
+        </p:nvSpPr>
+        <p:spPr>
+          <a:xfrm>
+            <a:off x="457200" y="1554480"/>
+            <a:ext cx="137160" cy="2651760"/>
+          </a:xfrm>
+          <a:prstGeom prst="rect">
+            <a:avLst/>
+          </a:prstGeom>
+          <a:solidFill>
+            <a:srgbClr val="2A4365"/>
+          </a:solidFill>
+          <a:ln w="12700">
+            <a:solidFill>
+              <a:srgbClr val="2A4365"/>
+            </a:solidFill>
+            <a:prstDash val="solid"/>
+          </a:ln>
+        </p:spPr>
+      </p:sp>
+      <p:sp>
+        <p:nvSpPr>
+          <p:cNvPr id="6" name="Text 4"/>
+          <p:cNvSpPr/>
+          <p:nvPr/>
+        </p:nvSpPr>
+        <p:spPr>
+          <a:xfrm>
+            <a:off x="777240" y="1737360"/>
+            <a:ext cx="7680960" cy="2377440"/>
+          </a:xfrm>
+          <a:prstGeom prst="rect">
+            <a:avLst/>
+          </a:prstGeom>
+          <a:noFill/>
+          <a:ln/>
+        </p:spPr>
+        <p:txBody>
+          <a:bodyPr wrap="square" lIns="0" tIns="0" rIns="0" bIns="0" rtlCol="0" anchor="ctr"/>
+          <a:lstStyle/>
+          <a:p>
+            <a:pPr indent="0" marL="0">
+              <a:buNone/>
+            </a:pPr>
+            <a:r>
+              <a:rPr lang="en-US" sz="1400" dirty="0">
+                <a:solidFill>
+                  <a:srgbClr val="1A202C"/>
+                </a:solidFill>
+                <a:latin typeface="Courier New" pitchFamily="34" charset="0"/>
+                <a:ea typeface="Courier New" pitchFamily="34" charset="-122"/>
+                <a:cs typeface="Courier New" pitchFamily="34" charset="-120"/>
+              </a:rPr>
+              <a:t># Sort by a column, descending</a:t>
+            </a:r>
+            <a:endParaRPr lang="en-US" sz="1400" dirty="0"/>
+          </a:p>
+          <a:p>
+            <a:pPr indent="0" marL="0">
+              <a:buNone/>
+            </a:pPr>
+            <a:r>
+              <a:rPr lang="en-US" sz="1400" dirty="0">
+                <a:solidFill>
+                  <a:srgbClr val="1A202C"/>
+                </a:solidFill>
+                <a:latin typeface="Courier New" pitchFamily="34" charset="0"/>
+                <a:ea typeface="Courier New" pitchFamily="34" charset="-122"/>
+                <a:cs typeface="Courier New" pitchFamily="34" charset="-120"/>
+              </a:rPr>
+              <a:t>sales_df.sort_values('unit_price', ascending=False)</a:t>
+            </a:r>
+            <a:endParaRPr lang="en-US" sz="1400" dirty="0"/>
+          </a:p>
+          <a:p>
+            <a:pPr indent="0" marL="0">
+              <a:buNone/>
+            </a:pPr>
+            <a:endParaRPr lang="en-US" sz="1400" dirty="0"/>
+          </a:p>
+          <a:p>
+            <a:pPr indent="0" marL="0">
+              <a:buNone/>
+            </a:pPr>
+            <a:r>
+              <a:rPr lang="en-US" sz="1400" dirty="0">
+                <a:solidFill>
+                  <a:srgbClr val="1A202C"/>
+                </a:solidFill>
+                <a:latin typeface="Courier New" pitchFamily="34" charset="0"/>
+                <a:ea typeface="Courier New" pitchFamily="34" charset="-122"/>
+                <a:cs typeface="Courier New" pitchFamily="34" charset="-120"/>
+              </a:rPr>
+              <a:t># Filter rows with .query()</a:t>
+            </a:r>
+            <a:endParaRPr lang="en-US" sz="1400" dirty="0"/>
+          </a:p>
+          <a:p>
+            <a:pPr indent="0" marL="0">
+              <a:buNone/>
+            </a:pPr>
+            <a:r>
+              <a:rPr lang="en-US" sz="1400" dirty="0">
+                <a:solidFill>
+                  <a:srgbClr val="1A202C"/>
+                </a:solidFill>
+                <a:latin typeface="Courier New" pitchFamily="34" charset="0"/>
+                <a:ea typeface="Courier New" pitchFamily="34" charset="-122"/>
+                <a:cs typeface="Courier New" pitchFamily="34" charset="-120"/>
+              </a:rPr>
+              <a:t>sales_df.query("unit_price &gt; 100 and country == 'Germany'")</a:t>
+            </a:r>
+            <a:endParaRPr lang="en-US" sz="1400" dirty="0"/>
+          </a:p>
+          <a:p>
+            <a:pPr indent="0" marL="0">
+              <a:buNone/>
+            </a:pPr>
+            <a:endParaRPr lang="en-US" sz="1400" dirty="0"/>
+          </a:p>
+          <a:p>
+            <a:pPr indent="0" marL="0">
+              <a:buNone/>
+            </a:pPr>
+            <a:r>
+              <a:rPr lang="en-US" sz="1400" dirty="0">
+                <a:solidFill>
+                  <a:srgbClr val="1A202C"/>
+                </a:solidFill>
+                <a:latin typeface="Courier New" pitchFamily="34" charset="0"/>
+                <a:ea typeface="Courier New" pitchFamily="34" charset="-122"/>
+                <a:cs typeface="Courier New" pitchFamily="34" charset="-120"/>
+              </a:rPr>
+              <a:t># Top N rows by a metric</a:t>
+            </a:r>
+            <a:endParaRPr lang="en-US" sz="1400" dirty="0"/>
+          </a:p>
+          <a:p>
+            <a:pPr indent="0" marL="0">
+              <a:buNone/>
+            </a:pPr>
+            <a:r>
+              <a:rPr lang="en-US" sz="1400" dirty="0">
+                <a:solidFill>
+                  <a:srgbClr val="1A202C"/>
+                </a:solidFill>
+                <a:latin typeface="Courier New" pitchFamily="34" charset="0"/>
+                <a:ea typeface="Courier New" pitchFamily="34" charset="-122"/>
+                <a:cs typeface="Courier New" pitchFamily="34" charset="-120"/>
+              </a:rPr>
+              <a:t>sales_df.nlargest(5, 'quantity')</a:t>
+            </a:r>
+            <a:endParaRPr lang="en-US" sz="1400" dirty="0"/>
+          </a:p>
+        </p:txBody>
+      </p:sp>
+      <p:sp>
+        <p:nvSpPr>
+          <p:cNvPr id="7" name="Text 5"/>
+          <p:cNvSpPr/>
+          <p:nvPr/>
+        </p:nvSpPr>
+        <p:spPr>
+          <a:xfrm>
+            <a:off x="457200" y="4389120"/>
+            <a:ext cx="8229600" cy="365760"/>
+          </a:xfrm>
+          <a:prstGeom prst="rect">
+            <a:avLst/>
+          </a:prstGeom>
+          <a:noFill/>
+          <a:ln/>
+        </p:spPr>
+        <p:txBody>
+          <a:bodyPr wrap="square" lIns="0" tIns="0" rIns="0" bIns="0" rtlCol="0" anchor="ctr"/>
+          <a:lstStyle/>
+          <a:p>
+            <a:pPr indent="0" marL="0">
+              <a:buNone/>
+            </a:pPr>
+            <a:r>
+              <a:rPr lang="en-US" sz="1300" i="1" dirty="0">
+                <a:solidFill>
+                  <a:srgbClr val="4A5568"/>
+                </a:solidFill>
+                <a:latin typeface="Arial" pitchFamily="34" charset="0"/>
+                <a:ea typeface="Arial" pitchFamily="34" charset="-122"/>
+                <a:cs typeface="Arial" pitchFamily="34" charset="-120"/>
+              </a:rPr>
+              <a:t>sort_values, .query(), nlargest — the three I reach for after groupby.</a:t>
+            </a:r>
+            <a:endParaRPr lang="en-US" sz="1300" dirty="0"/>
+          </a:p>
+        </p:txBody>
+      </p:sp>
+    </p:spTree>
+  </p:cSld>
+  <p:clrMapOvr>
+    <a:masterClrMapping/>
+  </p:clrMapOvr>
+</p:sld>
+</file>
+
+<file path=ppt/slides/slide19.xml><?xml version="1.0" encoding="utf-8"?>
+<p:sld xmlns:a="http://schemas.openxmlformats.org/drawingml/2006/main" xmlns:r="http://schemas.openxmlformats.org/officeDocument/2006/relationships" xmlns:p="http://schemas.openxmlformats.org/presentationml/2006/main">
   <p:cSld name="Slide 18">
     <p:bg>
       <p:bgPr>
@@ -6836,411 +7689,6 @@
                 <a:cs typeface="Arial" pitchFamily="34" charset="-120"/>
               </a:rPr>
               <a:t>≈ 10 minutes</a:t>
-            </a:r>
-            <a:endParaRPr lang="en-US" sz="1300" dirty="0"/>
-          </a:p>
-        </p:txBody>
-      </p:sp>
-    </p:spTree>
-  </p:cSld>
-  <p:clrMapOvr>
-    <a:masterClrMapping/>
-  </p:clrMapOvr>
-</p:sld>
-</file>
-
-<file path=ppt/slides/slide19.xml><?xml version="1.0" encoding="utf-8"?>
-<p:sld xmlns:a="http://schemas.openxmlformats.org/drawingml/2006/main" xmlns:r="http://schemas.openxmlformats.org/officeDocument/2006/relationships" xmlns:p="http://schemas.openxmlformats.org/presentationml/2006/main">
-  <p:cSld name="Slide 19">
-    <p:bg>
-      <p:bgPr>
-        <a:solidFill>
-          <a:srgbClr val="FAFAF7"/>
-        </a:solidFill>
-      </p:bgPr>
-    </p:bg>
-    <p:spTree>
-      <p:nvGrpSpPr>
-        <p:cNvPr id="1" name=""/>
-        <p:cNvGrpSpPr/>
-        <p:nvPr/>
-      </p:nvGrpSpPr>
-      <p:grpSpPr>
-        <a:xfrm>
-          <a:off x="0" y="0"/>
-          <a:ext cx="0" cy="0"/>
-          <a:chOff x="0" y="0"/>
-          <a:chExt cx="0" cy="0"/>
-        </a:xfrm>
-      </p:grpSpPr>
-      <p:sp>
-        <p:nvSpPr>
-          <p:cNvPr id="2" name="Text 0"/>
-          <p:cNvSpPr/>
-          <p:nvPr/>
-        </p:nvSpPr>
-        <p:spPr>
-          <a:xfrm>
-            <a:off x="457200" y="365760"/>
-            <a:ext cx="8229600" cy="640080"/>
-          </a:xfrm>
-          <a:prstGeom prst="rect">
-            <a:avLst/>
-          </a:prstGeom>
-          <a:noFill/>
-          <a:ln/>
-        </p:spPr>
-        <p:txBody>
-          <a:bodyPr wrap="square" lIns="0" tIns="0" rIns="0" bIns="0" rtlCol="0" anchor="ctr"/>
-          <a:lstStyle/>
-          <a:p>
-            <a:pPr indent="0" marL="0">
-              <a:buNone/>
-            </a:pPr>
-            <a:r>
-              <a:rPr lang="en-US" sz="3000" b="1" dirty="0">
-                <a:solidFill>
-                  <a:srgbClr val="1A202C"/>
-                </a:solidFill>
-                <a:latin typeface="Arial Black" pitchFamily="34" charset="0"/>
-                <a:ea typeface="Arial Black" pitchFamily="34" charset="-122"/>
-                <a:cs typeface="Arial Black" pitchFamily="34" charset="-120"/>
-              </a:rPr>
-              <a:t>The whole recipe</a:t>
-            </a:r>
-            <a:endParaRPr lang="en-US" sz="3000" dirty="0"/>
-          </a:p>
-        </p:txBody>
-      </p:sp>
-      <p:sp>
-        <p:nvSpPr>
-          <p:cNvPr id="3" name="Shape 1"/>
-          <p:cNvSpPr/>
-          <p:nvPr/>
-        </p:nvSpPr>
-        <p:spPr>
-          <a:xfrm>
-            <a:off x="457200" y="1188720"/>
-            <a:ext cx="3657600" cy="3291840"/>
-          </a:xfrm>
-          <a:prstGeom prst="rect">
-            <a:avLst/>
-          </a:prstGeom>
-          <a:solidFill>
-            <a:srgbClr val="FFFFFF"/>
-          </a:solidFill>
-          <a:ln w="12700">
-            <a:solidFill>
-              <a:srgbClr val="E2E1DC"/>
-            </a:solidFill>
-            <a:prstDash val="solid"/>
-          </a:ln>
-        </p:spPr>
-      </p:sp>
-      <p:sp>
-        <p:nvSpPr>
-          <p:cNvPr id="4" name="Shape 2"/>
-          <p:cNvSpPr/>
-          <p:nvPr/>
-        </p:nvSpPr>
-        <p:spPr>
-          <a:xfrm>
-            <a:off x="457200" y="1188720"/>
-            <a:ext cx="137160" cy="3291840"/>
-          </a:xfrm>
-          <a:prstGeom prst="rect">
-            <a:avLst/>
-          </a:prstGeom>
-          <a:solidFill>
-            <a:srgbClr val="2A4365"/>
-          </a:solidFill>
-          <a:ln w="12700">
-            <a:solidFill>
-              <a:srgbClr val="2A4365"/>
-            </a:solidFill>
-            <a:prstDash val="solid"/>
-          </a:ln>
-        </p:spPr>
-      </p:sp>
-      <p:sp>
-        <p:nvSpPr>
-          <p:cNvPr id="5" name="Text 3"/>
-          <p:cNvSpPr/>
-          <p:nvPr/>
-        </p:nvSpPr>
-        <p:spPr>
-          <a:xfrm>
-            <a:off x="777240" y="1325880"/>
-            <a:ext cx="3246120" cy="3108960"/>
-          </a:xfrm>
-          <a:prstGeom prst="rect">
-            <a:avLst/>
-          </a:prstGeom>
-          <a:noFill/>
-          <a:ln/>
-        </p:spPr>
-        <p:txBody>
-          <a:bodyPr wrap="square" lIns="0" tIns="0" rIns="0" bIns="0" rtlCol="0" anchor="ctr"/>
-          <a:lstStyle/>
-          <a:p>
-            <a:pPr indent="0" marL="0">
-              <a:buNone/>
-            </a:pPr>
-            <a:r>
-              <a:rPr lang="en-US" sz="1200" dirty="0">
-                <a:solidFill>
-                  <a:srgbClr val="1A202C"/>
-                </a:solidFill>
-                <a:latin typeface="Courier New" pitchFamily="34" charset="0"/>
-                <a:ea typeface="Courier New" pitchFamily="34" charset="-122"/>
-                <a:cs typeface="Courier New" pitchFamily="34" charset="-120"/>
-              </a:rPr>
-              <a:t>import seaborn as sns</a:t>
-            </a:r>
-            <a:endParaRPr lang="en-US" sz="1200" dirty="0"/>
-          </a:p>
-          <a:p>
-            <a:pPr indent="0" marL="0">
-              <a:buNone/>
-            </a:pPr>
-            <a:endParaRPr lang="en-US" sz="1200" dirty="0"/>
-          </a:p>
-          <a:p>
-            <a:pPr indent="0" marL="0">
-              <a:buNone/>
-            </a:pPr>
-            <a:r>
-              <a:rPr lang="en-US" sz="1200" dirty="0">
-                <a:solidFill>
-                  <a:srgbClr val="1A202C"/>
-                </a:solidFill>
-                <a:latin typeface="Courier New" pitchFamily="34" charset="0"/>
-                <a:ea typeface="Courier New" pitchFamily="34" charset="-122"/>
-                <a:cs typeface="Courier New" pitchFamily="34" charset="-120"/>
-              </a:rPr>
-              <a:t>sales_df['revenue'] = (</a:t>
-            </a:r>
-            <a:endParaRPr lang="en-US" sz="1200" dirty="0"/>
-          </a:p>
-          <a:p>
-            <a:pPr indent="0" marL="0">
-              <a:buNone/>
-            </a:pPr>
-            <a:r>
-              <a:rPr lang="en-US" sz="1200" dirty="0">
-                <a:solidFill>
-                  <a:srgbClr val="1A202C"/>
-                </a:solidFill>
-                <a:latin typeface="Courier New" pitchFamily="34" charset="0"/>
-                <a:ea typeface="Courier New" pitchFamily="34" charset="-122"/>
-                <a:cs typeface="Courier New" pitchFamily="34" charset="-120"/>
-              </a:rPr>
-              <a:t xml:space="preserve">  sales_df['unit_price']</a:t>
-            </a:r>
-            <a:endParaRPr lang="en-US" sz="1200" dirty="0"/>
-          </a:p>
-          <a:p>
-            <a:pPr indent="0" marL="0">
-              <a:buNone/>
-            </a:pPr>
-            <a:r>
-              <a:rPr lang="en-US" sz="1200" dirty="0">
-                <a:solidFill>
-                  <a:srgbClr val="1A202C"/>
-                </a:solidFill>
-                <a:latin typeface="Courier New" pitchFamily="34" charset="0"/>
-                <a:ea typeface="Courier New" pitchFamily="34" charset="-122"/>
-                <a:cs typeface="Courier New" pitchFamily="34" charset="-120"/>
-              </a:rPr>
-              <a:t xml:space="preserve">  * sales_df['quantity']</a:t>
-            </a:r>
-            <a:endParaRPr lang="en-US" sz="1200" dirty="0"/>
-          </a:p>
-          <a:p>
-            <a:pPr indent="0" marL="0">
-              <a:buNone/>
-            </a:pPr>
-            <a:r>
-              <a:rPr lang="en-US" sz="1200" dirty="0">
-                <a:solidFill>
-                  <a:srgbClr val="1A202C"/>
-                </a:solidFill>
-                <a:latin typeface="Courier New" pitchFamily="34" charset="0"/>
-                <a:ea typeface="Courier New" pitchFamily="34" charset="-122"/>
-                <a:cs typeface="Courier New" pitchFamily="34" charset="-120"/>
-              </a:rPr>
-              <a:t>)</a:t>
-            </a:r>
-            <a:endParaRPr lang="en-US" sz="1200" dirty="0"/>
-          </a:p>
-          <a:p>
-            <a:pPr indent="0" marL="0">
-              <a:buNone/>
-            </a:pPr>
-            <a:endParaRPr lang="en-US" sz="1200" dirty="0"/>
-          </a:p>
-          <a:p>
-            <a:pPr indent="0" marL="0">
-              <a:buNone/>
-            </a:pPr>
-            <a:r>
-              <a:rPr lang="en-US" sz="1200" dirty="0">
-                <a:solidFill>
-                  <a:srgbClr val="1A202C"/>
-                </a:solidFill>
-                <a:latin typeface="Courier New" pitchFamily="34" charset="0"/>
-                <a:ea typeface="Courier New" pitchFamily="34" charset="-122"/>
-                <a:cs typeface="Courier New" pitchFamily="34" charset="-120"/>
-              </a:rPr>
-              <a:t>sns.heatmap(</a:t>
-            </a:r>
-            <a:endParaRPr lang="en-US" sz="1200" dirty="0"/>
-          </a:p>
-          <a:p>
-            <a:pPr indent="0" marL="0">
-              <a:buNone/>
-            </a:pPr>
-            <a:r>
-              <a:rPr lang="en-US" sz="1200" dirty="0">
-                <a:solidFill>
-                  <a:srgbClr val="1A202C"/>
-                </a:solidFill>
-                <a:latin typeface="Courier New" pitchFamily="34" charset="0"/>
-                <a:ea typeface="Courier New" pitchFamily="34" charset="-122"/>
-                <a:cs typeface="Courier New" pitchFamily="34" charset="-120"/>
-              </a:rPr>
-              <a:t xml:space="preserve">  sales_df.corr(numeric_only=True),</a:t>
-            </a:r>
-            <a:endParaRPr lang="en-US" sz="1200" dirty="0"/>
-          </a:p>
-          <a:p>
-            <a:pPr indent="0" marL="0">
-              <a:buNone/>
-            </a:pPr>
-            <a:r>
-              <a:rPr lang="en-US" sz="1200" dirty="0">
-                <a:solidFill>
-                  <a:srgbClr val="1A202C"/>
-                </a:solidFill>
-                <a:latin typeface="Courier New" pitchFamily="34" charset="0"/>
-                <a:ea typeface="Courier New" pitchFamily="34" charset="-122"/>
-                <a:cs typeface="Courier New" pitchFamily="34" charset="-120"/>
-              </a:rPr>
-              <a:t xml:space="preserve">  annot=True,</a:t>
-            </a:r>
-            <a:endParaRPr lang="en-US" sz="1200" dirty="0"/>
-          </a:p>
-          <a:p>
-            <a:pPr indent="0" marL="0">
-              <a:buNone/>
-            </a:pPr>
-            <a:r>
-              <a:rPr lang="en-US" sz="1200" dirty="0">
-                <a:solidFill>
-                  <a:srgbClr val="1A202C"/>
-                </a:solidFill>
-                <a:latin typeface="Courier New" pitchFamily="34" charset="0"/>
-                <a:ea typeface="Courier New" pitchFamily="34" charset="-122"/>
-                <a:cs typeface="Courier New" pitchFamily="34" charset="-120"/>
-              </a:rPr>
-              <a:t xml:space="preserve">  cmap='RdBu_r',</a:t>
-            </a:r>
-            <a:endParaRPr lang="en-US" sz="1200" dirty="0"/>
-          </a:p>
-          <a:p>
-            <a:pPr indent="0" marL="0">
-              <a:buNone/>
-            </a:pPr>
-            <a:r>
-              <a:rPr lang="en-US" sz="1200" dirty="0">
-                <a:solidFill>
-                  <a:srgbClr val="1A202C"/>
-                </a:solidFill>
-                <a:latin typeface="Courier New" pitchFamily="34" charset="0"/>
-                <a:ea typeface="Courier New" pitchFamily="34" charset="-122"/>
-                <a:cs typeface="Courier New" pitchFamily="34" charset="-120"/>
-              </a:rPr>
-              <a:t xml:space="preserve">  center=0</a:t>
-            </a:r>
-            <a:endParaRPr lang="en-US" sz="1200" dirty="0"/>
-          </a:p>
-          <a:p>
-            <a:pPr indent="0" marL="0">
-              <a:buNone/>
-            </a:pPr>
-            <a:r>
-              <a:rPr lang="en-US" sz="1200" dirty="0">
-                <a:solidFill>
-                  <a:srgbClr val="1A202C"/>
-                </a:solidFill>
-                <a:latin typeface="Courier New" pitchFamily="34" charset="0"/>
-                <a:ea typeface="Courier New" pitchFamily="34" charset="-122"/>
-                <a:cs typeface="Courier New" pitchFamily="34" charset="-120"/>
-              </a:rPr>
-              <a:t>)</a:t>
-            </a:r>
-            <a:endParaRPr lang="en-US" sz="1200" dirty="0"/>
-          </a:p>
-        </p:txBody>
-      </p:sp>
-      <p:pic>
-        <p:nvPicPr>
-          <p:cNvPr id="6" name="Image 0" descr="/sessions/festive-gallant-bohr/mnt/outputs/images/heatmap.png"/>
-          <p:cNvPicPr>
-            <a:picLocks noChangeAspect="1"/>
-          </p:cNvPicPr>
-          <p:nvPr/>
-        </p:nvPicPr>
-        <p:blipFill>
-          <a:blip r:embed="rId1"/>
-          <a:stretch>
-            <a:fillRect/>
-          </a:stretch>
-        </p:blipFill>
-        <p:spPr>
-          <a:xfrm>
-            <a:off x="4297680" y="1188720"/>
-            <a:ext cx="4572000" cy="3291840"/>
-          </a:xfrm>
-          <a:prstGeom prst="rect">
-            <a:avLst/>
-          </a:prstGeom>
-        </p:spPr>
-      </p:pic>
-      <p:sp>
-        <p:nvSpPr>
-          <p:cNvPr id="7" name="Text 4"/>
-          <p:cNvSpPr/>
-          <p:nvPr/>
-        </p:nvSpPr>
-        <p:spPr>
-          <a:xfrm>
-            <a:off x="457200" y="4572000"/>
-            <a:ext cx="8229600" cy="365760"/>
-          </a:xfrm>
-          <a:prstGeom prst="rect">
-            <a:avLst/>
-          </a:prstGeom>
-          <a:noFill/>
-          <a:ln/>
-        </p:spPr>
-        <p:txBody>
-          <a:bodyPr wrap="square" lIns="0" tIns="0" rIns="0" bIns="0" rtlCol="0" anchor="ctr"/>
-          <a:lstStyle/>
-          <a:p>
-            <a:pPr algn="ctr" indent="0" marL="0">
-              <a:buNone/>
-            </a:pPr>
-            <a:r>
-              <a:rPr lang="en-US" sz="1300" b="1" i="1" dirty="0">
-                <a:solidFill>
-                  <a:srgbClr val="2A4365"/>
-                </a:solidFill>
-                <a:latin typeface="Arial" pitchFamily="34" charset="0"/>
-                <a:ea typeface="Arial" pitchFamily="34" charset="-122"/>
-                <a:cs typeface="Arial" pitchFamily="34" charset="-120"/>
-              </a:rPr>
-              <a:t>Eight lines. A chart you'd lose 20 minutes to in native Excel.</a:t>
             </a:r>
             <a:endParaRPr lang="en-US" sz="1300" dirty="0"/>
           </a:p>
@@ -7568,6 +8016,411 @@
 
 <file path=ppt/slides/slide20.xml><?xml version="1.0" encoding="utf-8"?>
 <p:sld xmlns:a="http://schemas.openxmlformats.org/drawingml/2006/main" xmlns:r="http://schemas.openxmlformats.org/officeDocument/2006/relationships" xmlns:p="http://schemas.openxmlformats.org/presentationml/2006/main">
+  <p:cSld name="Slide 19">
+    <p:bg>
+      <p:bgPr>
+        <a:solidFill>
+          <a:srgbClr val="FAFAF7"/>
+        </a:solidFill>
+      </p:bgPr>
+    </p:bg>
+    <p:spTree>
+      <p:nvGrpSpPr>
+        <p:cNvPr id="1" name=""/>
+        <p:cNvGrpSpPr/>
+        <p:nvPr/>
+      </p:nvGrpSpPr>
+      <p:grpSpPr>
+        <a:xfrm>
+          <a:off x="0" y="0"/>
+          <a:ext cx="0" cy="0"/>
+          <a:chOff x="0" y="0"/>
+          <a:chExt cx="0" cy="0"/>
+        </a:xfrm>
+      </p:grpSpPr>
+      <p:sp>
+        <p:nvSpPr>
+          <p:cNvPr id="2" name="Text 0"/>
+          <p:cNvSpPr/>
+          <p:nvPr/>
+        </p:nvSpPr>
+        <p:spPr>
+          <a:xfrm>
+            <a:off x="457200" y="365760"/>
+            <a:ext cx="8229600" cy="640080"/>
+          </a:xfrm>
+          <a:prstGeom prst="rect">
+            <a:avLst/>
+          </a:prstGeom>
+          <a:noFill/>
+          <a:ln/>
+        </p:spPr>
+        <p:txBody>
+          <a:bodyPr wrap="square" lIns="0" tIns="0" rIns="0" bIns="0" rtlCol="0" anchor="ctr"/>
+          <a:lstStyle/>
+          <a:p>
+            <a:pPr indent="0" marL="0">
+              <a:buNone/>
+            </a:pPr>
+            <a:r>
+              <a:rPr lang="en-US" sz="3000" b="1" dirty="0">
+                <a:solidFill>
+                  <a:srgbClr val="1A202C"/>
+                </a:solidFill>
+                <a:latin typeface="Arial Black" pitchFamily="34" charset="0"/>
+                <a:ea typeface="Arial Black" pitchFamily="34" charset="-122"/>
+                <a:cs typeface="Arial Black" pitchFamily="34" charset="-120"/>
+              </a:rPr>
+              <a:t>The whole recipe</a:t>
+            </a:r>
+            <a:endParaRPr lang="en-US" sz="3000" dirty="0"/>
+          </a:p>
+        </p:txBody>
+      </p:sp>
+      <p:sp>
+        <p:nvSpPr>
+          <p:cNvPr id="3" name="Shape 1"/>
+          <p:cNvSpPr/>
+          <p:nvPr/>
+        </p:nvSpPr>
+        <p:spPr>
+          <a:xfrm>
+            <a:off x="457200" y="1188720"/>
+            <a:ext cx="3657600" cy="3291840"/>
+          </a:xfrm>
+          <a:prstGeom prst="rect">
+            <a:avLst/>
+          </a:prstGeom>
+          <a:solidFill>
+            <a:srgbClr val="FFFFFF"/>
+          </a:solidFill>
+          <a:ln w="12700">
+            <a:solidFill>
+              <a:srgbClr val="E2E1DC"/>
+            </a:solidFill>
+            <a:prstDash val="solid"/>
+          </a:ln>
+        </p:spPr>
+      </p:sp>
+      <p:sp>
+        <p:nvSpPr>
+          <p:cNvPr id="4" name="Shape 2"/>
+          <p:cNvSpPr/>
+          <p:nvPr/>
+        </p:nvSpPr>
+        <p:spPr>
+          <a:xfrm>
+            <a:off x="457200" y="1188720"/>
+            <a:ext cx="137160" cy="3291840"/>
+          </a:xfrm>
+          <a:prstGeom prst="rect">
+            <a:avLst/>
+          </a:prstGeom>
+          <a:solidFill>
+            <a:srgbClr val="2A4365"/>
+          </a:solidFill>
+          <a:ln w="12700">
+            <a:solidFill>
+              <a:srgbClr val="2A4365"/>
+            </a:solidFill>
+            <a:prstDash val="solid"/>
+          </a:ln>
+        </p:spPr>
+      </p:sp>
+      <p:sp>
+        <p:nvSpPr>
+          <p:cNvPr id="5" name="Text 3"/>
+          <p:cNvSpPr/>
+          <p:nvPr/>
+        </p:nvSpPr>
+        <p:spPr>
+          <a:xfrm>
+            <a:off x="777240" y="1325880"/>
+            <a:ext cx="3246120" cy="3108960"/>
+          </a:xfrm>
+          <a:prstGeom prst="rect">
+            <a:avLst/>
+          </a:prstGeom>
+          <a:noFill/>
+          <a:ln/>
+        </p:spPr>
+        <p:txBody>
+          <a:bodyPr wrap="square" lIns="0" tIns="0" rIns="0" bIns="0" rtlCol="0" anchor="ctr"/>
+          <a:lstStyle/>
+          <a:p>
+            <a:pPr indent="0" marL="0">
+              <a:buNone/>
+            </a:pPr>
+            <a:r>
+              <a:rPr lang="en-US" sz="1200" dirty="0">
+                <a:solidFill>
+                  <a:srgbClr val="1A202C"/>
+                </a:solidFill>
+                <a:latin typeface="Courier New" pitchFamily="34" charset="0"/>
+                <a:ea typeface="Courier New" pitchFamily="34" charset="-122"/>
+                <a:cs typeface="Courier New" pitchFamily="34" charset="-120"/>
+              </a:rPr>
+              <a:t>import seaborn as sns</a:t>
+            </a:r>
+            <a:endParaRPr lang="en-US" sz="1200" dirty="0"/>
+          </a:p>
+          <a:p>
+            <a:pPr indent="0" marL="0">
+              <a:buNone/>
+            </a:pPr>
+            <a:endParaRPr lang="en-US" sz="1200" dirty="0"/>
+          </a:p>
+          <a:p>
+            <a:pPr indent="0" marL="0">
+              <a:buNone/>
+            </a:pPr>
+            <a:r>
+              <a:rPr lang="en-US" sz="1200" dirty="0">
+                <a:solidFill>
+                  <a:srgbClr val="1A202C"/>
+                </a:solidFill>
+                <a:latin typeface="Courier New" pitchFamily="34" charset="0"/>
+                <a:ea typeface="Courier New" pitchFamily="34" charset="-122"/>
+                <a:cs typeface="Courier New" pitchFamily="34" charset="-120"/>
+              </a:rPr>
+              <a:t>sales_df['revenue'] = (</a:t>
+            </a:r>
+            <a:endParaRPr lang="en-US" sz="1200" dirty="0"/>
+          </a:p>
+          <a:p>
+            <a:pPr indent="0" marL="0">
+              <a:buNone/>
+            </a:pPr>
+            <a:r>
+              <a:rPr lang="en-US" sz="1200" dirty="0">
+                <a:solidFill>
+                  <a:srgbClr val="1A202C"/>
+                </a:solidFill>
+                <a:latin typeface="Courier New" pitchFamily="34" charset="0"/>
+                <a:ea typeface="Courier New" pitchFamily="34" charset="-122"/>
+                <a:cs typeface="Courier New" pitchFamily="34" charset="-120"/>
+              </a:rPr>
+              <a:t xml:space="preserve">  sales_df['unit_price']</a:t>
+            </a:r>
+            <a:endParaRPr lang="en-US" sz="1200" dirty="0"/>
+          </a:p>
+          <a:p>
+            <a:pPr indent="0" marL="0">
+              <a:buNone/>
+            </a:pPr>
+            <a:r>
+              <a:rPr lang="en-US" sz="1200" dirty="0">
+                <a:solidFill>
+                  <a:srgbClr val="1A202C"/>
+                </a:solidFill>
+                <a:latin typeface="Courier New" pitchFamily="34" charset="0"/>
+                <a:ea typeface="Courier New" pitchFamily="34" charset="-122"/>
+                <a:cs typeface="Courier New" pitchFamily="34" charset="-120"/>
+              </a:rPr>
+              <a:t xml:space="preserve">  * sales_df['quantity']</a:t>
+            </a:r>
+            <a:endParaRPr lang="en-US" sz="1200" dirty="0"/>
+          </a:p>
+          <a:p>
+            <a:pPr indent="0" marL="0">
+              <a:buNone/>
+            </a:pPr>
+            <a:r>
+              <a:rPr lang="en-US" sz="1200" dirty="0">
+                <a:solidFill>
+                  <a:srgbClr val="1A202C"/>
+                </a:solidFill>
+                <a:latin typeface="Courier New" pitchFamily="34" charset="0"/>
+                <a:ea typeface="Courier New" pitchFamily="34" charset="-122"/>
+                <a:cs typeface="Courier New" pitchFamily="34" charset="-120"/>
+              </a:rPr>
+              <a:t>)</a:t>
+            </a:r>
+            <a:endParaRPr lang="en-US" sz="1200" dirty="0"/>
+          </a:p>
+          <a:p>
+            <a:pPr indent="0" marL="0">
+              <a:buNone/>
+            </a:pPr>
+            <a:endParaRPr lang="en-US" sz="1200" dirty="0"/>
+          </a:p>
+          <a:p>
+            <a:pPr indent="0" marL="0">
+              <a:buNone/>
+            </a:pPr>
+            <a:r>
+              <a:rPr lang="en-US" sz="1200" dirty="0">
+                <a:solidFill>
+                  <a:srgbClr val="1A202C"/>
+                </a:solidFill>
+                <a:latin typeface="Courier New" pitchFamily="34" charset="0"/>
+                <a:ea typeface="Courier New" pitchFamily="34" charset="-122"/>
+                <a:cs typeface="Courier New" pitchFamily="34" charset="-120"/>
+              </a:rPr>
+              <a:t>sns.heatmap(</a:t>
+            </a:r>
+            <a:endParaRPr lang="en-US" sz="1200" dirty="0"/>
+          </a:p>
+          <a:p>
+            <a:pPr indent="0" marL="0">
+              <a:buNone/>
+            </a:pPr>
+            <a:r>
+              <a:rPr lang="en-US" sz="1200" dirty="0">
+                <a:solidFill>
+                  <a:srgbClr val="1A202C"/>
+                </a:solidFill>
+                <a:latin typeface="Courier New" pitchFamily="34" charset="0"/>
+                <a:ea typeface="Courier New" pitchFamily="34" charset="-122"/>
+                <a:cs typeface="Courier New" pitchFamily="34" charset="-120"/>
+              </a:rPr>
+              <a:t xml:space="preserve">  sales_df.corr(numeric_only=True),</a:t>
+            </a:r>
+            <a:endParaRPr lang="en-US" sz="1200" dirty="0"/>
+          </a:p>
+          <a:p>
+            <a:pPr indent="0" marL="0">
+              <a:buNone/>
+            </a:pPr>
+            <a:r>
+              <a:rPr lang="en-US" sz="1200" dirty="0">
+                <a:solidFill>
+                  <a:srgbClr val="1A202C"/>
+                </a:solidFill>
+                <a:latin typeface="Courier New" pitchFamily="34" charset="0"/>
+                <a:ea typeface="Courier New" pitchFamily="34" charset="-122"/>
+                <a:cs typeface="Courier New" pitchFamily="34" charset="-120"/>
+              </a:rPr>
+              <a:t xml:space="preserve">  annot=True,</a:t>
+            </a:r>
+            <a:endParaRPr lang="en-US" sz="1200" dirty="0"/>
+          </a:p>
+          <a:p>
+            <a:pPr indent="0" marL="0">
+              <a:buNone/>
+            </a:pPr>
+            <a:r>
+              <a:rPr lang="en-US" sz="1200" dirty="0">
+                <a:solidFill>
+                  <a:srgbClr val="1A202C"/>
+                </a:solidFill>
+                <a:latin typeface="Courier New" pitchFamily="34" charset="0"/>
+                <a:ea typeface="Courier New" pitchFamily="34" charset="-122"/>
+                <a:cs typeface="Courier New" pitchFamily="34" charset="-120"/>
+              </a:rPr>
+              <a:t xml:space="preserve">  cmap='RdBu_r',</a:t>
+            </a:r>
+            <a:endParaRPr lang="en-US" sz="1200" dirty="0"/>
+          </a:p>
+          <a:p>
+            <a:pPr indent="0" marL="0">
+              <a:buNone/>
+            </a:pPr>
+            <a:r>
+              <a:rPr lang="en-US" sz="1200" dirty="0">
+                <a:solidFill>
+                  <a:srgbClr val="1A202C"/>
+                </a:solidFill>
+                <a:latin typeface="Courier New" pitchFamily="34" charset="0"/>
+                <a:ea typeface="Courier New" pitchFamily="34" charset="-122"/>
+                <a:cs typeface="Courier New" pitchFamily="34" charset="-120"/>
+              </a:rPr>
+              <a:t xml:space="preserve">  center=0</a:t>
+            </a:r>
+            <a:endParaRPr lang="en-US" sz="1200" dirty="0"/>
+          </a:p>
+          <a:p>
+            <a:pPr indent="0" marL="0">
+              <a:buNone/>
+            </a:pPr>
+            <a:r>
+              <a:rPr lang="en-US" sz="1200" dirty="0">
+                <a:solidFill>
+                  <a:srgbClr val="1A202C"/>
+                </a:solidFill>
+                <a:latin typeface="Courier New" pitchFamily="34" charset="0"/>
+                <a:ea typeface="Courier New" pitchFamily="34" charset="-122"/>
+                <a:cs typeface="Courier New" pitchFamily="34" charset="-120"/>
+              </a:rPr>
+              <a:t>)</a:t>
+            </a:r>
+            <a:endParaRPr lang="en-US" sz="1200" dirty="0"/>
+          </a:p>
+        </p:txBody>
+      </p:sp>
+      <p:pic>
+        <p:nvPicPr>
+          <p:cNvPr id="6" name="Image 0" descr="/sessions/festive-gallant-bohr/mnt/outputs/images/heatmap.png"/>
+          <p:cNvPicPr>
+            <a:picLocks noChangeAspect="1"/>
+          </p:cNvPicPr>
+          <p:nvPr/>
+        </p:nvPicPr>
+        <p:blipFill>
+          <a:blip r:embed="rId1"/>
+          <a:stretch>
+            <a:fillRect/>
+          </a:stretch>
+        </p:blipFill>
+        <p:spPr>
+          <a:xfrm>
+            <a:off x="4297680" y="1188720"/>
+            <a:ext cx="4572000" cy="3291840"/>
+          </a:xfrm>
+          <a:prstGeom prst="rect">
+            <a:avLst/>
+          </a:prstGeom>
+        </p:spPr>
+      </p:pic>
+      <p:sp>
+        <p:nvSpPr>
+          <p:cNvPr id="7" name="Text 4"/>
+          <p:cNvSpPr/>
+          <p:nvPr/>
+        </p:nvSpPr>
+        <p:spPr>
+          <a:xfrm>
+            <a:off x="457200" y="4572000"/>
+            <a:ext cx="8229600" cy="365760"/>
+          </a:xfrm>
+          <a:prstGeom prst="rect">
+            <a:avLst/>
+          </a:prstGeom>
+          <a:noFill/>
+          <a:ln/>
+        </p:spPr>
+        <p:txBody>
+          <a:bodyPr wrap="square" lIns="0" tIns="0" rIns="0" bIns="0" rtlCol="0" anchor="ctr"/>
+          <a:lstStyle/>
+          <a:p>
+            <a:pPr algn="ctr" indent="0" marL="0">
+              <a:buNone/>
+            </a:pPr>
+            <a:r>
+              <a:rPr lang="en-US" sz="1300" b="1" i="1" dirty="0">
+                <a:solidFill>
+                  <a:srgbClr val="2A4365"/>
+                </a:solidFill>
+                <a:latin typeface="Arial" pitchFamily="34" charset="0"/>
+                <a:ea typeface="Arial" pitchFamily="34" charset="-122"/>
+                <a:cs typeface="Arial" pitchFamily="34" charset="-120"/>
+              </a:rPr>
+              <a:t>Eight lines. A chart you'd lose 20 minutes to in native Excel.</a:t>
+            </a:r>
+            <a:endParaRPr lang="en-US" sz="1300" dirty="0"/>
+          </a:p>
+        </p:txBody>
+      </p:sp>
+    </p:spTree>
+  </p:cSld>
+  <p:clrMapOvr>
+    <a:masterClrMapping/>
+  </p:clrMapOvr>
+</p:sld>
+</file>
+
+<file path=ppt/slides/slide21.xml><?xml version="1.0" encoding="utf-8"?>
+<p:sld xmlns:a="http://schemas.openxmlformats.org/drawingml/2006/main" xmlns:r="http://schemas.openxmlformats.org/officeDocument/2006/relationships" xmlns:p="http://schemas.openxmlformats.org/presentationml/2006/main">
   <p:cSld name="Slide 20">
     <p:bg>
       <p:bgPr>
@@ -7843,7 +8696,342 @@
 </p:sld>
 </file>
 
-<file path=ppt/slides/slide21.xml><?xml version="1.0" encoding="utf-8"?>
+<file path=ppt/slides/slide22.xml><?xml version="1.0" encoding="utf-8"?>
+<p:sld xmlns:a="http://schemas.openxmlformats.org/drawingml/2006/main" xmlns:r="http://schemas.openxmlformats.org/officeDocument/2006/relationships" xmlns:p="http://schemas.openxmlformats.org/presentationml/2006/main">
+  <p:cSld name="Slide 16">
+    <p:bg>
+      <p:bgPr>
+        <a:solidFill>
+          <a:srgbClr val="FAFAF7"/>
+        </a:solidFill>
+      </p:bgPr>
+    </p:bg>
+    <p:spTree>
+      <p:nvGrpSpPr>
+        <p:cNvPr id="1" name=""/>
+        <p:cNvGrpSpPr/>
+        <p:nvPr/>
+      </p:nvGrpSpPr>
+      <p:grpSpPr>
+        <a:xfrm>
+          <a:off x="0" y="0"/>
+          <a:ext cx="0" cy="0"/>
+          <a:chOff x="0" y="0"/>
+          <a:chExt cx="0" cy="0"/>
+        </a:xfrm>
+      </p:grpSpPr>
+      <p:sp>
+        <p:nvSpPr>
+          <p:cNvPr id="2" name="Text 0"/>
+          <p:cNvSpPr/>
+          <p:nvPr/>
+        </p:nvSpPr>
+        <p:spPr>
+          <a:xfrm>
+            <a:off x="457200" y="365760"/>
+            <a:ext cx="8229600" cy="640080"/>
+          </a:xfrm>
+          <a:prstGeom prst="rect">
+            <a:avLst/>
+          </a:prstGeom>
+          <a:noFill/>
+          <a:ln/>
+        </p:spPr>
+        <p:txBody>
+          <a:bodyPr wrap="square" lIns="0" tIns="0" rIns="0" bIns="0" rtlCol="0" anchor="ctr"/>
+          <a:lstStyle/>
+          <a:p>
+            <a:pPr indent="0" marL="0">
+              <a:buNone/>
+            </a:pPr>
+            <a:r>
+              <a:rPr lang="en-US" sz="3000" b="1" dirty="0">
+                <a:solidFill>
+                  <a:srgbClr val="1A202C"/>
+                </a:solidFill>
+                <a:latin typeface="Arial Black" pitchFamily="34" charset="0"/>
+                <a:ea typeface="Arial Black" pitchFamily="34" charset="-122"/>
+                <a:cs typeface="Arial Black" pitchFamily="34" charset="-120"/>
+              </a:rPr>
+              <a:t>More chart one-liners, if we have time</a:t>
+            </a:r>
+            <a:endParaRPr lang="en-US" sz="3000" dirty="0"/>
+          </a:p>
+        </p:txBody>
+      </p:sp>
+      <p:sp>
+        <p:nvSpPr>
+          <p:cNvPr id="3" name="Text 1"/>
+          <p:cNvSpPr/>
+          <p:nvPr/>
+        </p:nvSpPr>
+        <p:spPr>
+          <a:xfrm>
+            <a:off x="457200" y="1005840"/>
+            <a:ext cx="8229600" cy="365760"/>
+          </a:xfrm>
+          <a:prstGeom prst="rect">
+            <a:avLst/>
+          </a:prstGeom>
+          <a:noFill/>
+          <a:ln/>
+        </p:spPr>
+        <p:txBody>
+          <a:bodyPr wrap="square" lIns="0" tIns="0" rIns="0" bIns="0" rtlCol="0" anchor="ctr"/>
+          <a:lstStyle/>
+          <a:p>
+            <a:pPr indent="0" marL="0">
+              <a:buNone/>
+            </a:pPr>
+            <a:r>
+              <a:rPr lang="en-US" sz="1500" i="1" dirty="0">
+                <a:solidFill>
+                  <a:srgbClr val="4A5568"/>
+                </a:solidFill>
+                <a:latin typeface="Arial" pitchFamily="34" charset="0"/>
+                <a:ea typeface="Arial" pitchFamily="34" charset="-122"/>
+                <a:cs typeface="Arial" pitchFamily="34" charset="-120"/>
+              </a:rPr>
+              <a:t>Three more seaborn views — each a single line of code.</a:t>
+            </a:r>
+            <a:endParaRPr lang="en-US" sz="1500" dirty="0"/>
+          </a:p>
+        </p:txBody>
+      </p:sp>
+      <p:sp>
+        <p:nvSpPr>
+          <p:cNvPr id="4" name="Shape 2"/>
+          <p:cNvSpPr/>
+          <p:nvPr/>
+        </p:nvSpPr>
+        <p:spPr>
+          <a:xfrm>
+            <a:off x="457200" y="1554480"/>
+            <a:ext cx="8229600" cy="2651760"/>
+          </a:xfrm>
+          <a:prstGeom prst="rect">
+            <a:avLst/>
+          </a:prstGeom>
+          <a:solidFill>
+            <a:srgbClr val="FFFFFF"/>
+          </a:solidFill>
+          <a:ln w="12700">
+            <a:solidFill>
+              <a:srgbClr val="E2E1DC"/>
+            </a:solidFill>
+            <a:prstDash val="solid"/>
+          </a:ln>
+        </p:spPr>
+      </p:sp>
+      <p:sp>
+        <p:nvSpPr>
+          <p:cNvPr id="5" name="Shape 3"/>
+          <p:cNvSpPr/>
+          <p:nvPr/>
+        </p:nvSpPr>
+        <p:spPr>
+          <a:xfrm>
+            <a:off x="457200" y="1554480"/>
+            <a:ext cx="137160" cy="2651760"/>
+          </a:xfrm>
+          <a:prstGeom prst="rect">
+            <a:avLst/>
+          </a:prstGeom>
+          <a:solidFill>
+            <a:srgbClr val="2A4365"/>
+          </a:solidFill>
+          <a:ln w="12700">
+            <a:solidFill>
+              <a:srgbClr val="2A4365"/>
+            </a:solidFill>
+            <a:prstDash val="solid"/>
+          </a:ln>
+        </p:spPr>
+      </p:sp>
+      <p:sp>
+        <p:nvSpPr>
+          <p:cNvPr id="6" name="Text 4"/>
+          <p:cNvSpPr/>
+          <p:nvPr/>
+        </p:nvSpPr>
+        <p:spPr>
+          <a:xfrm>
+            <a:off x="777240" y="1737360"/>
+            <a:ext cx="7680960" cy="2377440"/>
+          </a:xfrm>
+          <a:prstGeom prst="rect">
+            <a:avLst/>
+          </a:prstGeom>
+          <a:noFill/>
+          <a:ln/>
+        </p:spPr>
+        <p:txBody>
+          <a:bodyPr wrap="square" lIns="0" tIns="0" rIns="0" bIns="0" rtlCol="0" anchor="ctr"/>
+          <a:lstStyle/>
+          <a:p>
+            <a:pPr indent="0" marL="0">
+              <a:buNone/>
+            </a:pPr>
+            <a:r>
+              <a:rPr lang="en-US" sz="1400" dirty="0">
+                <a:solidFill>
+                  <a:srgbClr val="1A202C"/>
+                </a:solidFill>
+                <a:latin typeface="Courier New" pitchFamily="34" charset="0"/>
+                <a:ea typeface="Courier New" pitchFamily="34" charset="-122"/>
+                <a:cs typeface="Courier New" pitchFamily="34" charset="-120"/>
+              </a:rPr>
+              <a:t># Distribution of one numeric column</a:t>
+            </a:r>
+            <a:endParaRPr lang="en-US" sz="1400" dirty="0"/>
+          </a:p>
+          <a:p>
+            <a:pPr indent="0" marL="0">
+              <a:buNone/>
+            </a:pPr>
+            <a:r>
+              <a:rPr lang="en-US" sz="1400" dirty="0">
+                <a:solidFill>
+                  <a:srgbClr val="1A202C"/>
+                </a:solidFill>
+                <a:latin typeface="Courier New" pitchFamily="34" charset="0"/>
+                <a:ea typeface="Courier New" pitchFamily="34" charset="-122"/>
+                <a:cs typeface="Courier New" pitchFamily="34" charset="-120"/>
+              </a:rPr>
+              <a:t>sns.histplot(sales_df, x='unit_price', bins=20)</a:t>
+            </a:r>
+            <a:endParaRPr lang="en-US" sz="1400" dirty="0"/>
+          </a:p>
+          <a:p>
+            <a:pPr indent="0" marL="0">
+              <a:buNone/>
+            </a:pPr>
+            <a:endParaRPr lang="en-US" sz="1400" dirty="0"/>
+          </a:p>
+          <a:p>
+            <a:pPr indent="0" marL="0">
+              <a:buNone/>
+            </a:pPr>
+            <a:r>
+              <a:rPr lang="en-US" sz="1400" dirty="0">
+                <a:solidFill>
+                  <a:srgbClr val="1A202C"/>
+                </a:solidFill>
+                <a:latin typeface="Courier New" pitchFamily="34" charset="0"/>
+                <a:ea typeface="Courier New" pitchFamily="34" charset="-122"/>
+                <a:cs typeface="Courier New" pitchFamily="34" charset="-120"/>
+              </a:rPr>
+              <a:t># Spread of a metric across categories</a:t>
+            </a:r>
+            <a:endParaRPr lang="en-US" sz="1400" dirty="0"/>
+          </a:p>
+          <a:p>
+            <a:pPr indent="0" marL="0">
+              <a:buNone/>
+            </a:pPr>
+            <a:r>
+              <a:rPr lang="en-US" sz="1400" dirty="0">
+                <a:solidFill>
+                  <a:srgbClr val="1A202C"/>
+                </a:solidFill>
+                <a:latin typeface="Courier New" pitchFamily="34" charset="0"/>
+                <a:ea typeface="Courier New" pitchFamily="34" charset="-122"/>
+                <a:cs typeface="Courier New" pitchFamily="34" charset="-120"/>
+              </a:rPr>
+              <a:t>sns.boxplot(sales_df, x='category', y='unit_price')</a:t>
+            </a:r>
+            <a:endParaRPr lang="en-US" sz="1400" dirty="0"/>
+          </a:p>
+          <a:p>
+            <a:pPr indent="0" marL="0">
+              <a:buNone/>
+            </a:pPr>
+            <a:endParaRPr lang="en-US" sz="1400" dirty="0"/>
+          </a:p>
+          <a:p>
+            <a:pPr indent="0" marL="0">
+              <a:buNone/>
+            </a:pPr>
+            <a:r>
+              <a:rPr lang="en-US" sz="1400" dirty="0">
+                <a:solidFill>
+                  <a:srgbClr val="1A202C"/>
+                </a:solidFill>
+                <a:latin typeface="Courier New" pitchFamily="34" charset="0"/>
+                <a:ea typeface="Courier New" pitchFamily="34" charset="-122"/>
+                <a:cs typeface="Courier New" pitchFamily="34" charset="-120"/>
+              </a:rPr>
+              <a:t># Scatter with a fitted regression line</a:t>
+            </a:r>
+            <a:endParaRPr lang="en-US" sz="1400" dirty="0"/>
+          </a:p>
+          <a:p>
+            <a:pPr indent="0" marL="0">
+              <a:buNone/>
+            </a:pPr>
+            <a:r>
+              <a:rPr lang="en-US" sz="1400" dirty="0">
+                <a:solidFill>
+                  <a:srgbClr val="1A202C"/>
+                </a:solidFill>
+                <a:latin typeface="Courier New" pitchFamily="34" charset="0"/>
+                <a:ea typeface="Courier New" pitchFamily="34" charset="-122"/>
+                <a:cs typeface="Courier New" pitchFamily="34" charset="-120"/>
+              </a:rPr>
+              <a:t>sns.regplot(sales_df, x='quantity', y='unit_price')</a:t>
+            </a:r>
+            <a:endParaRPr lang="en-US" sz="1400" dirty="0"/>
+          </a:p>
+        </p:txBody>
+      </p:sp>
+      <p:sp>
+        <p:nvSpPr>
+          <p:cNvPr id="7" name="Text 5"/>
+          <p:cNvSpPr/>
+          <p:nvPr/>
+        </p:nvSpPr>
+        <p:spPr>
+          <a:xfrm>
+            <a:off x="457200" y="4389120"/>
+            <a:ext cx="8229600" cy="365760"/>
+          </a:xfrm>
+          <a:prstGeom prst="rect">
+            <a:avLst/>
+          </a:prstGeom>
+          <a:noFill/>
+          <a:ln/>
+        </p:spPr>
+        <p:txBody>
+          <a:bodyPr wrap="square" lIns="0" tIns="0" rIns="0" bIns="0" rtlCol="0" anchor="ctr"/>
+          <a:lstStyle/>
+          <a:p>
+            <a:pPr indent="0" marL="0">
+              <a:buNone/>
+            </a:pPr>
+            <a:r>
+              <a:rPr lang="en-US" sz="1300" i="1" dirty="0">
+                <a:solidFill>
+                  <a:srgbClr val="4A5568"/>
+                </a:solidFill>
+                <a:latin typeface="Arial" pitchFamily="34" charset="0"/>
+                <a:ea typeface="Arial" pitchFamily="34" charset="-122"/>
+                <a:cs typeface="Arial" pitchFamily="34" charset="-120"/>
+              </a:rPr>
+              <a:t>Histogram, boxplot, regression scatter. Each would be a 10-minute fight in native Excel.</a:t>
+            </a:r>
+            <a:endParaRPr lang="en-US" sz="1300" dirty="0"/>
+          </a:p>
+        </p:txBody>
+      </p:sp>
+    </p:spTree>
+  </p:cSld>
+  <p:clrMapOvr>
+    <a:masterClrMapping/>
+  </p:clrMapOvr>
+</p:sld>
+</file>
+
+<file path=ppt/slides/slide23.xml><?xml version="1.0" encoding="utf-8"?>
 <p:sld xmlns:a="http://schemas.openxmlformats.org/drawingml/2006/main" xmlns:r="http://schemas.openxmlformats.org/officeDocument/2006/relationships" xmlns:p="http://schemas.openxmlformats.org/presentationml/2006/main">
   <p:cSld name="Slide 21">
     <p:bg>
@@ -7992,7 +9180,7 @@
 </p:sld>
 </file>
 
-<file path=ppt/slides/slide22.xml><?xml version="1.0" encoding="utf-8"?>
+<file path=ppt/slides/slide24.xml><?xml version="1.0" encoding="utf-8"?>
 <p:sld xmlns:a="http://schemas.openxmlformats.org/drawingml/2006/main" xmlns:r="http://schemas.openxmlformats.org/officeDocument/2006/relationships" xmlns:p="http://schemas.openxmlformats.org/presentationml/2006/main">
   <p:cSld name="Slide 22">
     <p:bg>
@@ -8690,7 +9878,7 @@
 </p:sld>
 </file>
 
-<file path=ppt/slides/slide23.xml><?xml version="1.0" encoding="utf-8"?>
+<file path=ppt/slides/slide25.xml><?xml version="1.0" encoding="utf-8"?>
 <p:sld xmlns:a="http://schemas.openxmlformats.org/drawingml/2006/main" xmlns:r="http://schemas.openxmlformats.org/officeDocument/2006/relationships" xmlns:p="http://schemas.openxmlformats.org/presentationml/2006/main">
   <p:cSld name="Slide 23">
     <p:bg>
@@ -9226,7 +10414,7 @@
 </p:sld>
 </file>
 
-<file path=ppt/slides/slide24.xml><?xml version="1.0" encoding="utf-8"?>
+<file path=ppt/slides/slide26.xml><?xml version="1.0" encoding="utf-8"?>
 <p:sld xmlns:a="http://schemas.openxmlformats.org/drawingml/2006/main" xmlns:r="http://schemas.openxmlformats.org/officeDocument/2006/relationships" xmlns:p="http://schemas.openxmlformats.org/presentationml/2006/main">
   <p:cSld name="Slide 24">
     <p:bg>
@@ -9364,676 +10552,6 @@
               <a:t>Cheat sheet + sample files in your inbox after we wrap.</a:t>
             </a:r>
             <a:endParaRPr lang="en-US" sz="1400" dirty="0"/>
-          </a:p>
-        </p:txBody>
-      </p:sp>
-    </p:spTree>
-  </p:cSld>
-  <p:clrMapOvr>
-    <a:masterClrMapping/>
-  </p:clrMapOvr>
-</p:sld>
-</file>
-
-<file path=ppt/slides/slide25.xml><?xml version="1.0" encoding="utf-8"?>
-<p:sld xmlns:a="http://schemas.openxmlformats.org/drawingml/2006/main" xmlns:r="http://schemas.openxmlformats.org/officeDocument/2006/relationships" xmlns:p="http://schemas.openxmlformats.org/presentationml/2006/main">
-  <p:cSld name="Slide 16">
-    <p:bg>
-      <p:bgPr>
-        <a:solidFill>
-          <a:srgbClr val="FAFAF7"/>
-        </a:solidFill>
-      </p:bgPr>
-    </p:bg>
-    <p:spTree>
-      <p:nvGrpSpPr>
-        <p:cNvPr id="1" name=""/>
-        <p:cNvGrpSpPr/>
-        <p:nvPr/>
-      </p:nvGrpSpPr>
-      <p:grpSpPr>
-        <a:xfrm>
-          <a:off x="0" y="0"/>
-          <a:ext cx="0" cy="0"/>
-          <a:chOff x="0" y="0"/>
-          <a:chExt cx="0" cy="0"/>
-        </a:xfrm>
-      </p:grpSpPr>
-      <p:sp>
-        <p:nvSpPr>
-          <p:cNvPr id="2" name="Text 0"/>
-          <p:cNvSpPr/>
-          <p:nvPr/>
-        </p:nvSpPr>
-        <p:spPr>
-          <a:xfrm>
-            <a:off x="457200" y="365760"/>
-            <a:ext cx="8229600" cy="640080"/>
-          </a:xfrm>
-          <a:prstGeom prst="rect">
-            <a:avLst/>
-          </a:prstGeom>
-          <a:noFill/>
-          <a:ln/>
-        </p:spPr>
-        <p:txBody>
-          <a:bodyPr wrap="square" lIns="0" tIns="0" rIns="0" bIns="0" rtlCol="0" anchor="ctr"/>
-          <a:lstStyle/>
-          <a:p>
-            <a:pPr indent="0" marL="0">
-              <a:buNone/>
-            </a:pPr>
-            <a:r>
-              <a:rPr lang="en-US" sz="3000" b="1" dirty="0">
-                <a:solidFill>
-                  <a:srgbClr val="1A202C"/>
-                </a:solidFill>
-                <a:latin typeface="Arial Black" pitchFamily="34" charset="0"/>
-                <a:ea typeface="Arial Black" pitchFamily="34" charset="-122"/>
-                <a:cs typeface="Arial Black" pitchFamily="34" charset="-120"/>
-              </a:rPr>
-              <a:t>Bonus pandas moves, if we have time</a:t>
-            </a:r>
-            <a:endParaRPr lang="en-US" sz="3000" dirty="0"/>
-          </a:p>
-        </p:txBody>
-      </p:sp>
-      <p:sp>
-        <p:nvSpPr>
-          <p:cNvPr id="3" name="Text 1"/>
-          <p:cNvSpPr/>
-          <p:nvPr/>
-        </p:nvSpPr>
-        <p:spPr>
-          <a:xfrm>
-            <a:off x="457200" y="1005840"/>
-            <a:ext cx="8229600" cy="365760"/>
-          </a:xfrm>
-          <a:prstGeom prst="rect">
-            <a:avLst/>
-          </a:prstGeom>
-          <a:noFill/>
-          <a:ln/>
-        </p:spPr>
-        <p:txBody>
-          <a:bodyPr wrap="square" lIns="0" tIns="0" rIns="0" bIns="0" rtlCol="0" anchor="ctr"/>
-          <a:lstStyle/>
-          <a:p>
-            <a:pPr indent="0" marL="0">
-              <a:buNone/>
-            </a:pPr>
-            <a:r>
-              <a:rPr lang="en-US" sz="1500" i="1" dirty="0">
-                <a:solidFill>
-                  <a:srgbClr val="4A5568"/>
-                </a:solidFill>
-                <a:latin typeface="Arial" pitchFamily="34" charset="0"/>
-                <a:ea typeface="Arial" pitchFamily="34" charset="-122"/>
-                <a:cs typeface="Arial" pitchFamily="34" charset="-120"/>
-              </a:rPr>
-              <a:t>Three more PivotTable-replacements. Each is one line.</a:t>
-            </a:r>
-            <a:endParaRPr lang="en-US" sz="1500" dirty="0"/>
-          </a:p>
-        </p:txBody>
-      </p:sp>
-      <p:sp>
-        <p:nvSpPr>
-          <p:cNvPr id="4" name="Shape 2"/>
-          <p:cNvSpPr/>
-          <p:nvPr/>
-        </p:nvSpPr>
-        <p:spPr>
-          <a:xfrm>
-            <a:off x="457200" y="1554480"/>
-            <a:ext cx="8229600" cy="2651760"/>
-          </a:xfrm>
-          <a:prstGeom prst="rect">
-            <a:avLst/>
-          </a:prstGeom>
-          <a:solidFill>
-            <a:srgbClr val="FFFFFF"/>
-          </a:solidFill>
-          <a:ln w="12700">
-            <a:solidFill>
-              <a:srgbClr val="E2E1DC"/>
-            </a:solidFill>
-            <a:prstDash val="solid"/>
-          </a:ln>
-        </p:spPr>
-      </p:sp>
-      <p:sp>
-        <p:nvSpPr>
-          <p:cNvPr id="5" name="Shape 3"/>
-          <p:cNvSpPr/>
-          <p:nvPr/>
-        </p:nvSpPr>
-        <p:spPr>
-          <a:xfrm>
-            <a:off x="457200" y="1554480"/>
-            <a:ext cx="137160" cy="2651760"/>
-          </a:xfrm>
-          <a:prstGeom prst="rect">
-            <a:avLst/>
-          </a:prstGeom>
-          <a:solidFill>
-            <a:srgbClr val="2A4365"/>
-          </a:solidFill>
-          <a:ln w="12700">
-            <a:solidFill>
-              <a:srgbClr val="2A4365"/>
-            </a:solidFill>
-            <a:prstDash val="solid"/>
-          </a:ln>
-        </p:spPr>
-      </p:sp>
-      <p:sp>
-        <p:nvSpPr>
-          <p:cNvPr id="6" name="Text 4"/>
-          <p:cNvSpPr/>
-          <p:nvPr/>
-        </p:nvSpPr>
-        <p:spPr>
-          <a:xfrm>
-            <a:off x="777240" y="1737360"/>
-            <a:ext cx="7680960" cy="2377440"/>
-          </a:xfrm>
-          <a:prstGeom prst="rect">
-            <a:avLst/>
-          </a:prstGeom>
-          <a:noFill/>
-          <a:ln/>
-        </p:spPr>
-        <p:txBody>
-          <a:bodyPr wrap="square" lIns="0" tIns="0" rIns="0" bIns="0" rtlCol="0" anchor="ctr"/>
-          <a:lstStyle/>
-          <a:p>
-            <a:pPr indent="0" marL="0">
-              <a:buNone/>
-            </a:pPr>
-            <a:r>
-              <a:rPr lang="en-US" sz="1400" dirty="0">
-                <a:solidFill>
-                  <a:srgbClr val="1A202C"/>
-                </a:solidFill>
-                <a:latin typeface="Courier New" pitchFamily="34" charset="0"/>
-                <a:ea typeface="Courier New" pitchFamily="34" charset="-122"/>
-                <a:cs typeface="Courier New" pitchFamily="34" charset="-120"/>
-              </a:rPr>
-              <a:t># Sort by a column, descending</a:t>
-            </a:r>
-            <a:endParaRPr lang="en-US" sz="1400" dirty="0"/>
-          </a:p>
-          <a:p>
-            <a:pPr indent="0" marL="0">
-              <a:buNone/>
-            </a:pPr>
-            <a:r>
-              <a:rPr lang="en-US" sz="1400" dirty="0">
-                <a:solidFill>
-                  <a:srgbClr val="1A202C"/>
-                </a:solidFill>
-                <a:latin typeface="Courier New" pitchFamily="34" charset="0"/>
-                <a:ea typeface="Courier New" pitchFamily="34" charset="-122"/>
-                <a:cs typeface="Courier New" pitchFamily="34" charset="-120"/>
-              </a:rPr>
-              <a:t>sales_df.sort_values('unit_price', ascending=False)</a:t>
-            </a:r>
-            <a:endParaRPr lang="en-US" sz="1400" dirty="0"/>
-          </a:p>
-          <a:p>
-            <a:pPr indent="0" marL="0">
-              <a:buNone/>
-            </a:pPr>
-            <a:endParaRPr lang="en-US" sz="1400" dirty="0"/>
-          </a:p>
-          <a:p>
-            <a:pPr indent="0" marL="0">
-              <a:buNone/>
-            </a:pPr>
-            <a:r>
-              <a:rPr lang="en-US" sz="1400" dirty="0">
-                <a:solidFill>
-                  <a:srgbClr val="1A202C"/>
-                </a:solidFill>
-                <a:latin typeface="Courier New" pitchFamily="34" charset="0"/>
-                <a:ea typeface="Courier New" pitchFamily="34" charset="-122"/>
-                <a:cs typeface="Courier New" pitchFamily="34" charset="-120"/>
-              </a:rPr>
-              <a:t># Filter rows with .query()</a:t>
-            </a:r>
-            <a:endParaRPr lang="en-US" sz="1400" dirty="0"/>
-          </a:p>
-          <a:p>
-            <a:pPr indent="0" marL="0">
-              <a:buNone/>
-            </a:pPr>
-            <a:r>
-              <a:rPr lang="en-US" sz="1400" dirty="0">
-                <a:solidFill>
-                  <a:srgbClr val="1A202C"/>
-                </a:solidFill>
-                <a:latin typeface="Courier New" pitchFamily="34" charset="0"/>
-                <a:ea typeface="Courier New" pitchFamily="34" charset="-122"/>
-                <a:cs typeface="Courier New" pitchFamily="34" charset="-120"/>
-              </a:rPr>
-              <a:t>sales_df.query("unit_price &gt; 100 and country == 'Germany'")</a:t>
-            </a:r>
-            <a:endParaRPr lang="en-US" sz="1400" dirty="0"/>
-          </a:p>
-          <a:p>
-            <a:pPr indent="0" marL="0">
-              <a:buNone/>
-            </a:pPr>
-            <a:endParaRPr lang="en-US" sz="1400" dirty="0"/>
-          </a:p>
-          <a:p>
-            <a:pPr indent="0" marL="0">
-              <a:buNone/>
-            </a:pPr>
-            <a:r>
-              <a:rPr lang="en-US" sz="1400" dirty="0">
-                <a:solidFill>
-                  <a:srgbClr val="1A202C"/>
-                </a:solidFill>
-                <a:latin typeface="Courier New" pitchFamily="34" charset="0"/>
-                <a:ea typeface="Courier New" pitchFamily="34" charset="-122"/>
-                <a:cs typeface="Courier New" pitchFamily="34" charset="-120"/>
-              </a:rPr>
-              <a:t># Top N rows by a metric</a:t>
-            </a:r>
-            <a:endParaRPr lang="en-US" sz="1400" dirty="0"/>
-          </a:p>
-          <a:p>
-            <a:pPr indent="0" marL="0">
-              <a:buNone/>
-            </a:pPr>
-            <a:r>
-              <a:rPr lang="en-US" sz="1400" dirty="0">
-                <a:solidFill>
-                  <a:srgbClr val="1A202C"/>
-                </a:solidFill>
-                <a:latin typeface="Courier New" pitchFamily="34" charset="0"/>
-                <a:ea typeface="Courier New" pitchFamily="34" charset="-122"/>
-                <a:cs typeface="Courier New" pitchFamily="34" charset="-120"/>
-              </a:rPr>
-              <a:t>sales_df.nlargest(5, 'quantity')</a:t>
-            </a:r>
-            <a:endParaRPr lang="en-US" sz="1400" dirty="0"/>
-          </a:p>
-        </p:txBody>
-      </p:sp>
-      <p:sp>
-        <p:nvSpPr>
-          <p:cNvPr id="7" name="Text 5"/>
-          <p:cNvSpPr/>
-          <p:nvPr/>
-        </p:nvSpPr>
-        <p:spPr>
-          <a:xfrm>
-            <a:off x="457200" y="4389120"/>
-            <a:ext cx="8229600" cy="365760"/>
-          </a:xfrm>
-          <a:prstGeom prst="rect">
-            <a:avLst/>
-          </a:prstGeom>
-          <a:noFill/>
-          <a:ln/>
-        </p:spPr>
-        <p:txBody>
-          <a:bodyPr wrap="square" lIns="0" tIns="0" rIns="0" bIns="0" rtlCol="0" anchor="ctr"/>
-          <a:lstStyle/>
-          <a:p>
-            <a:pPr indent="0" marL="0">
-              <a:buNone/>
-            </a:pPr>
-            <a:r>
-              <a:rPr lang="en-US" sz="1300" i="1" dirty="0">
-                <a:solidFill>
-                  <a:srgbClr val="4A5568"/>
-                </a:solidFill>
-                <a:latin typeface="Arial" pitchFamily="34" charset="0"/>
-                <a:ea typeface="Arial" pitchFamily="34" charset="-122"/>
-                <a:cs typeface="Arial" pitchFamily="34" charset="-120"/>
-              </a:rPr>
-              <a:t>sort_values, .query(), nlargest — the three I reach for after groupby.</a:t>
-            </a:r>
-            <a:endParaRPr lang="en-US" sz="1300" dirty="0"/>
-          </a:p>
-        </p:txBody>
-      </p:sp>
-    </p:spTree>
-  </p:cSld>
-  <p:clrMapOvr>
-    <a:masterClrMapping/>
-  </p:clrMapOvr>
-</p:sld>
-</file>
-
-<file path=ppt/slides/slide26.xml><?xml version="1.0" encoding="utf-8"?>
-<p:sld xmlns:a="http://schemas.openxmlformats.org/drawingml/2006/main" xmlns:r="http://schemas.openxmlformats.org/officeDocument/2006/relationships" xmlns:p="http://schemas.openxmlformats.org/presentationml/2006/main">
-  <p:cSld name="Slide 16">
-    <p:bg>
-      <p:bgPr>
-        <a:solidFill>
-          <a:srgbClr val="FAFAF7"/>
-        </a:solidFill>
-      </p:bgPr>
-    </p:bg>
-    <p:spTree>
-      <p:nvGrpSpPr>
-        <p:cNvPr id="1" name=""/>
-        <p:cNvGrpSpPr/>
-        <p:nvPr/>
-      </p:nvGrpSpPr>
-      <p:grpSpPr>
-        <a:xfrm>
-          <a:off x="0" y="0"/>
-          <a:ext cx="0" cy="0"/>
-          <a:chOff x="0" y="0"/>
-          <a:chExt cx="0" cy="0"/>
-        </a:xfrm>
-      </p:grpSpPr>
-      <p:sp>
-        <p:nvSpPr>
-          <p:cNvPr id="2" name="Text 0"/>
-          <p:cNvSpPr/>
-          <p:nvPr/>
-        </p:nvSpPr>
-        <p:spPr>
-          <a:xfrm>
-            <a:off x="457200" y="365760"/>
-            <a:ext cx="8229600" cy="640080"/>
-          </a:xfrm>
-          <a:prstGeom prst="rect">
-            <a:avLst/>
-          </a:prstGeom>
-          <a:noFill/>
-          <a:ln/>
-        </p:spPr>
-        <p:txBody>
-          <a:bodyPr wrap="square" lIns="0" tIns="0" rIns="0" bIns="0" rtlCol="0" anchor="ctr"/>
-          <a:lstStyle/>
-          <a:p>
-            <a:pPr indent="0" marL="0">
-              <a:buNone/>
-            </a:pPr>
-            <a:r>
-              <a:rPr lang="en-US" sz="3000" b="1" dirty="0">
-                <a:solidFill>
-                  <a:srgbClr val="1A202C"/>
-                </a:solidFill>
-                <a:latin typeface="Arial Black" pitchFamily="34" charset="0"/>
-                <a:ea typeface="Arial Black" pitchFamily="34" charset="-122"/>
-                <a:cs typeface="Arial Black" pitchFamily="34" charset="-120"/>
-              </a:rPr>
-              <a:t>More chart one-liners, if we have time</a:t>
-            </a:r>
-            <a:endParaRPr lang="en-US" sz="3000" dirty="0"/>
-          </a:p>
-        </p:txBody>
-      </p:sp>
-      <p:sp>
-        <p:nvSpPr>
-          <p:cNvPr id="3" name="Text 1"/>
-          <p:cNvSpPr/>
-          <p:nvPr/>
-        </p:nvSpPr>
-        <p:spPr>
-          <a:xfrm>
-            <a:off x="457200" y="1005840"/>
-            <a:ext cx="8229600" cy="365760"/>
-          </a:xfrm>
-          <a:prstGeom prst="rect">
-            <a:avLst/>
-          </a:prstGeom>
-          <a:noFill/>
-          <a:ln/>
-        </p:spPr>
-        <p:txBody>
-          <a:bodyPr wrap="square" lIns="0" tIns="0" rIns="0" bIns="0" rtlCol="0" anchor="ctr"/>
-          <a:lstStyle/>
-          <a:p>
-            <a:pPr indent="0" marL="0">
-              <a:buNone/>
-            </a:pPr>
-            <a:r>
-              <a:rPr lang="en-US" sz="1500" i="1" dirty="0">
-                <a:solidFill>
-                  <a:srgbClr val="4A5568"/>
-                </a:solidFill>
-                <a:latin typeface="Arial" pitchFamily="34" charset="0"/>
-                <a:ea typeface="Arial" pitchFamily="34" charset="-122"/>
-                <a:cs typeface="Arial" pitchFamily="34" charset="-120"/>
-              </a:rPr>
-              <a:t>Three more seaborn views — each a single line of code.</a:t>
-            </a:r>
-            <a:endParaRPr lang="en-US" sz="1500" dirty="0"/>
-          </a:p>
-        </p:txBody>
-      </p:sp>
-      <p:sp>
-        <p:nvSpPr>
-          <p:cNvPr id="4" name="Shape 2"/>
-          <p:cNvSpPr/>
-          <p:nvPr/>
-        </p:nvSpPr>
-        <p:spPr>
-          <a:xfrm>
-            <a:off x="457200" y="1554480"/>
-            <a:ext cx="8229600" cy="2651760"/>
-          </a:xfrm>
-          <a:prstGeom prst="rect">
-            <a:avLst/>
-          </a:prstGeom>
-          <a:solidFill>
-            <a:srgbClr val="FFFFFF"/>
-          </a:solidFill>
-          <a:ln w="12700">
-            <a:solidFill>
-              <a:srgbClr val="E2E1DC"/>
-            </a:solidFill>
-            <a:prstDash val="solid"/>
-          </a:ln>
-        </p:spPr>
-      </p:sp>
-      <p:sp>
-        <p:nvSpPr>
-          <p:cNvPr id="5" name="Shape 3"/>
-          <p:cNvSpPr/>
-          <p:nvPr/>
-        </p:nvSpPr>
-        <p:spPr>
-          <a:xfrm>
-            <a:off x="457200" y="1554480"/>
-            <a:ext cx="137160" cy="2651760"/>
-          </a:xfrm>
-          <a:prstGeom prst="rect">
-            <a:avLst/>
-          </a:prstGeom>
-          <a:solidFill>
-            <a:srgbClr val="2A4365"/>
-          </a:solidFill>
-          <a:ln w="12700">
-            <a:solidFill>
-              <a:srgbClr val="2A4365"/>
-            </a:solidFill>
-            <a:prstDash val="solid"/>
-          </a:ln>
-        </p:spPr>
-      </p:sp>
-      <p:sp>
-        <p:nvSpPr>
-          <p:cNvPr id="6" name="Text 4"/>
-          <p:cNvSpPr/>
-          <p:nvPr/>
-        </p:nvSpPr>
-        <p:spPr>
-          <a:xfrm>
-            <a:off x="777240" y="1737360"/>
-            <a:ext cx="7680960" cy="2377440"/>
-          </a:xfrm>
-          <a:prstGeom prst="rect">
-            <a:avLst/>
-          </a:prstGeom>
-          <a:noFill/>
-          <a:ln/>
-        </p:spPr>
-        <p:txBody>
-          <a:bodyPr wrap="square" lIns="0" tIns="0" rIns="0" bIns="0" rtlCol="0" anchor="ctr"/>
-          <a:lstStyle/>
-          <a:p>
-            <a:pPr indent="0" marL="0">
-              <a:buNone/>
-            </a:pPr>
-            <a:r>
-              <a:rPr lang="en-US" sz="1400" dirty="0">
-                <a:solidFill>
-                  <a:srgbClr val="1A202C"/>
-                </a:solidFill>
-                <a:latin typeface="Courier New" pitchFamily="34" charset="0"/>
-                <a:ea typeface="Courier New" pitchFamily="34" charset="-122"/>
-                <a:cs typeface="Courier New" pitchFamily="34" charset="-120"/>
-              </a:rPr>
-              <a:t># Distribution of one numeric column</a:t>
-            </a:r>
-            <a:endParaRPr lang="en-US" sz="1400" dirty="0"/>
-          </a:p>
-          <a:p>
-            <a:pPr indent="0" marL="0">
-              <a:buNone/>
-            </a:pPr>
-            <a:r>
-              <a:rPr lang="en-US" sz="1400" dirty="0">
-                <a:solidFill>
-                  <a:srgbClr val="1A202C"/>
-                </a:solidFill>
-                <a:latin typeface="Courier New" pitchFamily="34" charset="0"/>
-                <a:ea typeface="Courier New" pitchFamily="34" charset="-122"/>
-                <a:cs typeface="Courier New" pitchFamily="34" charset="-120"/>
-              </a:rPr>
-              <a:t>sns.histplot(sales_df, x='unit_price', bins=20)</a:t>
-            </a:r>
-            <a:endParaRPr lang="en-US" sz="1400" dirty="0"/>
-          </a:p>
-          <a:p>
-            <a:pPr indent="0" marL="0">
-              <a:buNone/>
-            </a:pPr>
-            <a:endParaRPr lang="en-US" sz="1400" dirty="0"/>
-          </a:p>
-          <a:p>
-            <a:pPr indent="0" marL="0">
-              <a:buNone/>
-            </a:pPr>
-            <a:r>
-              <a:rPr lang="en-US" sz="1400" dirty="0">
-                <a:solidFill>
-                  <a:srgbClr val="1A202C"/>
-                </a:solidFill>
-                <a:latin typeface="Courier New" pitchFamily="34" charset="0"/>
-                <a:ea typeface="Courier New" pitchFamily="34" charset="-122"/>
-                <a:cs typeface="Courier New" pitchFamily="34" charset="-120"/>
-              </a:rPr>
-              <a:t># Spread of a metric across categories</a:t>
-            </a:r>
-            <a:endParaRPr lang="en-US" sz="1400" dirty="0"/>
-          </a:p>
-          <a:p>
-            <a:pPr indent="0" marL="0">
-              <a:buNone/>
-            </a:pPr>
-            <a:r>
-              <a:rPr lang="en-US" sz="1400" dirty="0">
-                <a:solidFill>
-                  <a:srgbClr val="1A202C"/>
-                </a:solidFill>
-                <a:latin typeface="Courier New" pitchFamily="34" charset="0"/>
-                <a:ea typeface="Courier New" pitchFamily="34" charset="-122"/>
-                <a:cs typeface="Courier New" pitchFamily="34" charset="-120"/>
-              </a:rPr>
-              <a:t>sns.boxplot(sales_df, x='category', y='unit_price')</a:t>
-            </a:r>
-            <a:endParaRPr lang="en-US" sz="1400" dirty="0"/>
-          </a:p>
-          <a:p>
-            <a:pPr indent="0" marL="0">
-              <a:buNone/>
-            </a:pPr>
-            <a:endParaRPr lang="en-US" sz="1400" dirty="0"/>
-          </a:p>
-          <a:p>
-            <a:pPr indent="0" marL="0">
-              <a:buNone/>
-            </a:pPr>
-            <a:r>
-              <a:rPr lang="en-US" sz="1400" dirty="0">
-                <a:solidFill>
-                  <a:srgbClr val="1A202C"/>
-                </a:solidFill>
-                <a:latin typeface="Courier New" pitchFamily="34" charset="0"/>
-                <a:ea typeface="Courier New" pitchFamily="34" charset="-122"/>
-                <a:cs typeface="Courier New" pitchFamily="34" charset="-120"/>
-              </a:rPr>
-              <a:t># Scatter with a fitted regression line</a:t>
-            </a:r>
-            <a:endParaRPr lang="en-US" sz="1400" dirty="0"/>
-          </a:p>
-          <a:p>
-            <a:pPr indent="0" marL="0">
-              <a:buNone/>
-            </a:pPr>
-            <a:r>
-              <a:rPr lang="en-US" sz="1400" dirty="0">
-                <a:solidFill>
-                  <a:srgbClr val="1A202C"/>
-                </a:solidFill>
-                <a:latin typeface="Courier New" pitchFamily="34" charset="0"/>
-                <a:ea typeface="Courier New" pitchFamily="34" charset="-122"/>
-                <a:cs typeface="Courier New" pitchFamily="34" charset="-120"/>
-              </a:rPr>
-              <a:t>sns.regplot(sales_df, x='quantity', y='unit_price')</a:t>
-            </a:r>
-            <a:endParaRPr lang="en-US" sz="1400" dirty="0"/>
-          </a:p>
-        </p:txBody>
-      </p:sp>
-      <p:sp>
-        <p:nvSpPr>
-          <p:cNvPr id="7" name="Text 5"/>
-          <p:cNvSpPr/>
-          <p:nvPr/>
-        </p:nvSpPr>
-        <p:spPr>
-          <a:xfrm>
-            <a:off x="457200" y="4389120"/>
-            <a:ext cx="8229600" cy="365760"/>
-          </a:xfrm>
-          <a:prstGeom prst="rect">
-            <a:avLst/>
-          </a:prstGeom>
-          <a:noFill/>
-          <a:ln/>
-        </p:spPr>
-        <p:txBody>
-          <a:bodyPr wrap="square" lIns="0" tIns="0" rIns="0" bIns="0" rtlCol="0" anchor="ctr"/>
-          <a:lstStyle/>
-          <a:p>
-            <a:pPr indent="0" marL="0">
-              <a:buNone/>
-            </a:pPr>
-            <a:r>
-              <a:rPr lang="en-US" sz="1300" i="1" dirty="0">
-                <a:solidFill>
-                  <a:srgbClr val="4A5568"/>
-                </a:solidFill>
-                <a:latin typeface="Arial" pitchFamily="34" charset="0"/>
-                <a:ea typeface="Arial" pitchFamily="34" charset="-122"/>
-                <a:cs typeface="Arial" pitchFamily="34" charset="-120"/>
-              </a:rPr>
-              <a:t>Histogram, boxplot, regression scatter. Each would be a 10-minute fight in native Excel.</a:t>
-            </a:r>
-            <a:endParaRPr lang="en-US" sz="1300" dirty="0"/>
           </a:p>
         </p:txBody>
       </p:sp>

--- a/python-in-excel-first-hour-deck.pptx
+++ b/python-in-excel-first-hour-deck.pptx
@@ -526,7 +526,7 @@
           <a:lstStyle/>
           <a:p>
             <a:r>
-              <a:t>Welcome in. If you're seeing this slide, you're in the right place — this is Python in Excel: Your First Hour.</a:t>
+              <a:t>Welcome in. If you're seeing this slide, you're in the right place, this is Python in Excel: Your First Hour.</a:t>
             </a:r>
           </a:p>
           <a:p/>
@@ -636,7 +636,7 @@
           <a:p/>
           <a:p>
             <a:r>
-              <a:t>So if you define a variable in B2, you can reference it in any cell to the right of B2 in the same row. You can reference it in any cell in row three, row four, and below. But you cannot reference it in row one — A1 is above B2, and you'll get a hash-PYTHON error.</a:t>
+              <a:t>So if you define a variable in B2, you can reference it in any cell to the right of B2 in the same row. You can reference it in any cell in row three, row four, and below. But you cannot reference it in row one, A1 is above B2, and you'll get a hash-PYTHON error.</a:t>
             </a:r>
           </a:p>
           <a:p/>
@@ -728,7 +728,7 @@
           <a:lstStyle/>
           <a:p>
             <a:r>
-              <a:t>Part three. This is the meat of the session. Switch over to the second workbook — zero two dash explore dash with dash pandas. Two hundred orders, six pandas methods, no pivot tables. About twenty-five minutes.</a:t>
+              <a:t>Part three. This is the meat of the session. Switch over to the second workbook, zero two dash explore dash with dash pandas. Two hundred orders, six pandas methods, no pivot tables. About twenty-five minutes.</a:t>
             </a:r>
           </a:p>
         </p:txBody>
@@ -814,13 +814,13 @@
           <a:lstStyle/>
           <a:p>
             <a:r>
-              <a:t>First step — get the data into a DataFrame. One detail before we touch Python: convert your range to an Excel Table first. Insert, Table. Give it a name. Mine is called sales.</a:t>
+              <a:t>First step: get the data into a DataFrame. One detail before we touch Python: convert your range to an Excel Table first. Insert, Table. Give it a name. Mine is called sales.</a:t>
             </a:r>
           </a:p>
           <a:p/>
           <a:p>
             <a:r>
-              <a:t>Now in a PY cell — sales_df equals x-l, in parentheses, the string "sales hash all", then headers equals True. That x-l function is the bridge from a worksheet range into Python.</a:t>
+              <a:t>Now in a PY cell, sales_df equals x-l, in parentheses, the string "sales hash all", then headers equals True. That x-l function is the bridge from a worksheet range into Python.</a:t>
             </a:r>
           </a:p>
           <a:p/>
@@ -832,7 +832,7 @@
           <a:p/>
           <a:p>
             <a:r>
-              <a:t>And if you return the DataFrame on its own line — just type sales_df and press enter — you'll see the data card preview. Sanity check that the data made it in.</a:t>
+              <a:t>And if you return the DataFrame on its own line, just type sales_df and press enter, you'll see the data card preview. Sanity check that the data made it in.</a:t>
             </a:r>
           </a:p>
         </p:txBody>
@@ -924,25 +924,25 @@
           <a:p/>
           <a:p>
             <a:r>
-              <a:t>Dot head — first five rows. Sanity check it loaded.</a:t>
+              <a:t>Dot head: first five rows. Sanity check it loaded.</a:t>
             </a:r>
           </a:p>
           <a:p/>
           <a:p>
             <a:r>
-              <a:t>Dot tail — last five rows. Sanity check the bottom, which is often messier than the top.</a:t>
+              <a:t>Dot tail: last five rows. Sanity check the bottom, which is often messier than the top.</a:t>
             </a:r>
           </a:p>
           <a:p/>
           <a:p>
             <a:r>
-              <a:t>Dot sample five — five random rows. Catches issues a head or tail can hide.</a:t>
+              <a:t>Dot sample five: five random rows. Catches issues a head or tail can hide.</a:t>
             </a:r>
           </a:p>
           <a:p/>
           <a:p>
             <a:r>
-              <a:t>Dot shape — rows by columns. Today's dataset is two hundred by seven. Now I know what I'm working with.</a:t>
+              <a:t>Dot shape: rows by columns. Today's dataset is two hundred by seven. Now I know what I'm working with.</a:t>
             </a:r>
           </a:p>
         </p:txBody>
@@ -1046,7 +1046,7 @@
           <a:p/>
           <a:p>
             <a:r>
-              <a:t>In our dataset, customer-age has six gaps. That's perfect — gives us a teaching moment about missing data.</a:t>
+              <a:t>In our dataset, customer-age has six gaps. That's perfect: gives us a teaching moment about missing data.</a:t>
             </a:r>
           </a:p>
         </p:txBody>
@@ -1248,13 +1248,13 @@
           <a:p/>
           <a:p>
             <a:r>
-              <a:t>Want multiple stats at once? Dot a-g-g, list of mean, min, max. Boom — three columns of summary.</a:t>
+              <a:t>Want multiple stats at once? Dot a-g-g, list of mean, min, max. Boom: three columns of summary.</a:t>
             </a:r>
           </a:p>
           <a:p/>
           <a:p>
             <a:r>
-              <a:t>Group by two columns? Pass a list — country and category. Now you have a nested summary.</a:t>
+              <a:t>Group by two columns? Pass a list: country and category. Now you have a nested summary.</a:t>
             </a:r>
           </a:p>
           <a:p/>
@@ -1346,25 +1346,25 @@
           <a:lstStyle/>
           <a:p>
             <a:r>
-              <a:t>Now let's stitch it together. Real question: "What's the average price by category — but only in the U-S — sorted high to low?"</a:t>
+              <a:t>Now let's stitch it together. Real question: "What's the average price by category, but only in the U-S, sorted high to low?"</a:t>
             </a:r>
           </a:p>
           <a:p/>
           <a:p>
             <a:r>
-              <a:t>First line — filter sales_df where country equals United States. Call that "us".</a:t>
+              <a:t>First line: filter sales_df where country equals United States. Call that "us".</a:t>
             </a:r>
           </a:p>
           <a:p/>
           <a:p>
             <a:r>
-              <a:t>Second line — group us by category, take the mean of unit_price. Call that "by_cat".</a:t>
+              <a:t>Second line: group us by category, take the mean of unit_price. Call that "by_cat".</a:t>
             </a:r>
           </a:p>
           <a:p/>
           <a:p>
             <a:r>
-              <a:t>Third line — by_cat dot sort-values, ascending equals False.</a:t>
+              <a:t>Third line: by_cat dot sort-values, ascending equals False.</a:t>
             </a:r>
           </a:p>
           <a:p/>
@@ -1560,7 +1560,7 @@
           <a:p/>
           <a:p>
             <a:r>
-              <a:t>Then — s-n-s dot heatmap, sales_df dot corr with numeric_only equals True, annot equals True so we see the numbers, c-map equals R-d-B-u underscore r so red is negative and blue is positive, center equals zero so the color scale balances around zero.</a:t>
+              <a:t>Then, s-n-s dot heatmap, sales_df dot corr with numeric_only equals True, annot equals True so we see the numbers, c-map equals R-d-B-u underscore r so red is negative and blue is positive, center equals zero so the color scale balances around zero.</a:t>
             </a:r>
           </a:p>
           <a:p/>
@@ -1658,7 +1658,7 @@
           <a:p/>
           <a:p>
             <a:r>
-              <a:t>It's for you if you're comfortable in Excel — formulas, tables, PivotTables — but the jump into code feels intimidating.</a:t>
+              <a:t>It's for you if you're comfortable in Excel, formulas, tables, PivotTables, but the jump into code feels intimidating.</a:t>
             </a:r>
           </a:p>
           <a:p/>
@@ -1768,7 +1768,7 @@
           <a:p/>
           <a:p>
             <a:r>
-              <a:t>Heads-up — pair-plots render slowly in cloud-backed PY cells. Show it, don't dwell on it.</a:t>
+              <a:t>Heads-up: pair-plots render slowly in cloud-backed PY cells. Show it, don't dwell on it.</a:t>
             </a:r>
           </a:p>
           <a:p/>
@@ -1860,7 +1860,7 @@
           <a:lstStyle/>
           <a:p>
             <a:r>
-              <a:t>Part five. Where to go from here. Quick section — about five minutes including takeaways.</a:t>
+              <a:t>Part five. Where to go from here. Quick section: about five minutes including takeaways.</a:t>
             </a:r>
           </a:p>
         </p:txBody>
@@ -1952,19 +1952,19 @@
           <a:p/>
           <a:p>
             <a:r>
-              <a:t>First — Microsoft's Python in Excel docs. Bookmark them. The platform is still moving fast. Packages and features get added. That's where you check what's current.</a:t>
+              <a:t>First: Microsoft's Python in Excel docs. Bookmark them. The platform is still moving fast. Packages and features get added. That's where you check what's current.</a:t>
             </a:r>
           </a:p>
           <a:p/>
           <a:p>
             <a:r>
-              <a:t>Second — today's workbooks. The two files we used are yours to keep. Re-run the demos in your own time. Then — and this is the part that makes it stick — point x-l at one of your own tables and see what falls out.</a:t>
+              <a:t>Second: today's workbooks. The two files we used are yours to keep. Re-run the demos in your own time. Then, and this is the part that makes it stick, point x-l at one of your own tables and see what falls out.</a:t>
             </a:r>
           </a:p>
           <a:p/>
           <a:p>
             <a:r>
-              <a:t>Third — if you want to go all the way from Excel into the analytics stack, my O'Reilly book, Advancing into Analytics, walks you through statistics, exploratory data analysis, and your first scripts in both Python and R. Link is stringfest analytics dot com slash book.</a:t>
+              <a:t>Third: if you want to go all the way from Excel into the analytics stack, my O'Reilly book, Advancing into Analytics, walks you through statistics, exploratory data analysis, and your first scripts in both Python and R. Link is stringfest analytics dot com slash book.</a:t>
             </a:r>
           </a:p>
         </p:txBody>
@@ -2062,13 +2062,13 @@
           <a:p/>
           <a:p>
             <a:r>
-              <a:t>Two. It runs in the cloud. No internet, no PY. And don't expect web scraping or local file I-O — you can only pull data from inside the workbook.</a:t>
+              <a:t>Two. It runs in the cloud. No internet, no PY. And don't expect web scraping or local file I-O, you can only pull data from inside the workbook.</a:t>
             </a:r>
           </a:p>
           <a:p/>
           <a:p>
             <a:r>
-              <a:t>Three. The default output is Python Object, not Excel Value. If you want data to spill into the grid, toggle — Control Alt Shift M. Otherwise you'll think nothing happened.</a:t>
+              <a:t>Three. The default output is Python Object, not Excel Value. If you want data to spill into the grid, toggle, Control Alt Shift M. Otherwise you'll think nothing happened.</a:t>
             </a:r>
           </a:p>
         </p:txBody>
@@ -2154,7 +2154,7 @@
           <a:lstStyle/>
           <a:p>
             <a:r>
-              <a:t>That's the hour. Drop questions in chat — we'll work through as many as we can.</a:t>
+              <a:t>That's the hour. Drop questions in chat, we'll work through as many as we can.</a:t>
             </a:r>
           </a:p>
           <a:p/>
@@ -2252,19 +2252,19 @@
           <a:p/>
           <a:p>
             <a:r>
-              <a:t>Sort_values — sort the whole DataFrame by a column. Pass ascending equals False if you want descending.</a:t>
+              <a:t>Sort_values: sort the whole DataFrame by a column. Pass ascending equals False if you want descending.</a:t>
             </a:r>
           </a:p>
           <a:p/>
           <a:p>
             <a:r>
-              <a:t>Dot query — filter rows with an English-like expression. Quote the whole filter as a string. Unit_price greater than one hundred, and country equals Germany.</a:t>
+              <a:t>Dot query: filter rows with an English-like expression. Quote the whole filter as a string. Unit_price greater than one hundred, and country equals Germany.</a:t>
             </a:r>
           </a:p>
           <a:p/>
           <a:p>
             <a:r>
-              <a:t>Dot n-largest — top N rows by a metric. N-largest five, quantity, gives you the five biggest orders.</a:t>
+              <a:t>Dot n-largest: top N rows by a metric. N-largest five, quantity, gives you the five biggest orders.</a:t>
             </a:r>
           </a:p>
           <a:p/>
@@ -2346,19 +2346,19 @@
           <a:p/>
           <a:p>
             <a:r>
-              <a:t>Hist-plot — distribution of one numeric column. Sales_df, x equals unit_price, bins equals twenty.</a:t>
+              <a:t>Hist-plot: distribution of one numeric column. Sales_df, x equals unit_price, bins equals twenty.</a:t>
             </a:r>
           </a:p>
           <a:p/>
           <a:p>
             <a:r>
-              <a:t>Box-plot — spread of a metric across categories. X equals category, y equals unit_price.</a:t>
+              <a:t>Box-plot: spread of a metric across categories. X equals category, y equals unit_price.</a:t>
             </a:r>
           </a:p>
           <a:p/>
           <a:p>
             <a:r>
-              <a:t>Reg-plot — scatter with a fitted regression line. X equals quantity, y equals unit_price.</a:t>
+              <a:t>Reg-plot: scatter with a fitted regression line. X equals quantity, y equals unit_price.</a:t>
             </a:r>
           </a:p>
           <a:p/>
@@ -2440,7 +2440,7 @@
           <a:p/>
           <a:p>
             <a:r>
-              <a:t>One: you'll have written your first PY cell. Hello-world inside Excel. And — this is the part nobody warns you about — you'll know exactly why your A1 reference broke.</a:t>
+              <a:t>One: you'll have written your first PY cell. Hello-world inside Excel. And, this is the part nobody warns you about, you'll know exactly why your A1 reference broke.</a:t>
             </a:r>
           </a:p>
           <a:p/>
@@ -2544,7 +2544,7 @@
           <a:lstStyle/>
           <a:p>
             <a:r>
-              <a:t>Part one. Why Python in Excel even exists — and when to reach for it instead of formulas or Power Query. About ten minutes here.</a:t>
+              <a:t>Part one. Why Python in Excel even exists, and when to reach for it instead of formulas or Power Query. About ten minutes here.</a:t>
             </a:r>
           </a:p>
         </p:txBody>
@@ -2636,25 +2636,25 @@
           <a:p/>
           <a:p>
             <a:r>
-              <a:t>Counting missing values across every column. Native Excel — nested COUNTBLANK per column. Pandas — one expression, sales_df dot is-na dot sum.</a:t>
+              <a:t>Counting missing values across every column. Native Excel: nested COUNTBLANK per column. Pandas: one expression, sales_df dot is-na dot sum.</a:t>
             </a:r>
           </a:p>
           <a:p/>
           <a:p>
             <a:r>
-              <a:t>Resampling a time series. Excel — heroic helper columns. Pandas — one dot resample call.</a:t>
+              <a:t>Resampling a time series. Excel: heroic helper columns. Pandas: one dot resample call.</a:t>
             </a:r>
           </a:p>
           <a:p/>
           <a:p>
             <a:r>
-              <a:t>Small multiples, jitter plots, heatmaps. Excel — not really. Seaborn — one line.</a:t>
+              <a:t>Small multiples, jitter plots, heatmaps. Excel: not really. Seaborn: one line.</a:t>
             </a:r>
           </a:p>
           <a:p/>
           <a:p>
             <a:r>
-              <a:t>Multi-variable descriptive stats. Excel — Analysis ToolPak round-trip. Pandas — dot describe.</a:t>
+              <a:t>Multi-variable descriptive stats. Excel: Analysis ToolPak round-trip. Pandas: dot describe.</a:t>
             </a:r>
           </a:p>
           <a:p/>
@@ -2758,7 +2758,7 @@
           <a:p/>
           <a:p>
             <a:r>
-              <a:t>Power Query is for repeatable data prep. When the same cleanup has to run again next month — that's Power Query.</a:t>
+              <a:t>Power Query is for repeatable data prep. When the same cleanup has to run again next month, that's Power Query.</a:t>
             </a:r>
           </a:p>
           <a:p/>
@@ -2856,7 +2856,7 @@
           <a:lstStyle/>
           <a:p>
             <a:r>
-              <a:t>Part two. How a PY cell actually works. If you're following along, open the first workbook — zero one dash your dash first dash py dash cell. About ten minutes here.</a:t>
+              <a:t>Part two. How a PY cell actually works. If you're following along, open the first workbook, zero one dash your dash first dash py dash cell. About ten minutes here.</a:t>
             </a:r>
           </a:p>
         </p:txBody>
@@ -2948,19 +2948,19 @@
           <a:p/>
           <a:p>
             <a:r>
-              <a:t>One — the ribbon. Formulas tab, Insert Python. That's the discoverable one, especially the first few times.</a:t>
+              <a:t>One: the ribbon. Formulas tab, Insert Python. That's the discoverable one, especially the first few times.</a:t>
             </a:r>
           </a:p>
           <a:p/>
           <a:p>
             <a:r>
-              <a:t>Two — just type equals-P-Y, open paren. Once you trust it, this is fastest.</a:t>
+              <a:t>Two: just type equals-P-Y, open paren. Once you trust it, this is fastest.</a:t>
             </a:r>
           </a:p>
           <a:p/>
           <a:p>
             <a:r>
-              <a:t>Three — keyboard shortcut. Control Alt Shift P. Once you're showing off in a meeting.</a:t>
+              <a:t>Three: keyboard shortcut. Control Alt Shift P. Once you're showing off in a meeting.</a:t>
             </a:r>
           </a:p>
           <a:p/>
@@ -3727,7 +3727,7 @@
                 <a:ea typeface="Arial" pitchFamily="34" charset="-122"/>
                 <a:cs typeface="Arial" pitchFamily="34" charset="-120"/>
               </a:rPr>
-              <a:t>Python in Excel runs cells left-to-right, top-to-bottom — like reading a page.</a:t>
+              <a:t>Python in Excel runs cells left-to-right, top-to-bottom, like reading a page.</a:t>
             </a:r>
             <a:endParaRPr lang="en-US" sz="1500" dirty="0"/>
           </a:p>
@@ -3875,7 +3875,7 @@
                 <a:ea typeface="Arial" pitchFamily="34" charset="-122"/>
                 <a:cs typeface="Arial" pitchFamily="34" charset="-120"/>
               </a:rPr>
-              <a:t>NOT in row 1 — A1 throws #PYTHON</a:t>
+              <a:t>NOT in row 1, A1 throws #PYTHON</a:t>
             </a:r>
             <a:endParaRPr lang="en-US" sz="1300" dirty="0"/>
           </a:p>
@@ -4460,7 +4460,7 @@
                 <a:ea typeface="Arial" pitchFamily="34" charset="-122"/>
                 <a:cs typeface="Arial" pitchFamily="34" charset="-120"/>
               </a:rPr>
-              <a:t>headers=True is auto-added when you point it at a table — keep it.</a:t>
+              <a:t>headers=True is auto-added when you point it at a table, keep it.</a:t>
             </a:r>
             <a:endParaRPr lang="en-US" sz="1600" dirty="0"/>
           </a:p>
@@ -5763,7 +5763,7 @@
                 <a:ea typeface="Arial" pitchFamily="34" charset="-122"/>
                 <a:cs typeface="Arial" pitchFamily="34" charset="-120"/>
               </a:rPr>
-              <a:t>Our customer_age has six gaps — perfect teaching moment.</a:t>
+              <a:t>Our customer_age has six gaps, perfect teaching moment.</a:t>
             </a:r>
             <a:endParaRPr lang="en-US" sz="1100" dirty="0"/>
           </a:p>
@@ -6617,7 +6617,7 @@
                 <a:ea typeface="Arial Black" pitchFamily="34" charset="-122"/>
                 <a:cs typeface="Arial Black" pitchFamily="34" charset="-120"/>
               </a:rPr>
-              <a:t>groupby() — the PivotTable, in code</a:t>
+              <a:t>groupby(): the PivotTable, in code</a:t>
             </a:r>
             <a:endParaRPr lang="en-US" sz="3000" dirty="0"/>
           </a:p>
@@ -6881,7 +6881,7 @@
                 <a:ea typeface="Arial" pitchFamily="34" charset="-122"/>
                 <a:cs typeface="Arial" pitchFamily="34" charset="-120"/>
               </a:rPr>
-              <a:t>Like an Excel PivotTable — except you can chain it, filter it, and feed it into a chart.</a:t>
+              <a:t>Like an Excel PivotTable, except you can chain it, filter it, and feed it into a chart.</a:t>
             </a:r>
             <a:endParaRPr lang="en-US" sz="1300" dirty="0"/>
           </a:p>
@@ -6991,7 +6991,7 @@
                 <a:ea typeface="Arial" pitchFamily="34" charset="-122"/>
                 <a:cs typeface="Arial" pitchFamily="34" charset="-120"/>
               </a:rPr>
-              <a:t>"What's the average price by category — but only in the US — sorted high to low?"</a:t>
+              <a:t>"What's the average price by category, but only in the US, sorted high to low?"</a:t>
             </a:r>
             <a:endParaRPr lang="en-US" sz="1400" dirty="0"/>
           </a:p>
@@ -7500,7 +7500,7 @@
                 <a:ea typeface="Arial" pitchFamily="34" charset="-122"/>
                 <a:cs typeface="Arial" pitchFamily="34" charset="-120"/>
               </a:rPr>
-              <a:t>sort_values, .query(), nlargest — the three I reach for after groupby.</a:t>
+              <a:t>sort_values, .query(), nlargest: the three I reach for after groupby.</a:t>
             </a:r>
             <a:endParaRPr lang="en-US" sz="1300" dirty="0"/>
           </a:p>
@@ -7909,7 +7909,7 @@
                 <a:ea typeface="Arial" pitchFamily="34" charset="-122"/>
                 <a:cs typeface="Arial" pitchFamily="34" charset="-120"/>
               </a:rPr>
-              <a:t>You're comfortable in Excel — formulas, tables, PivotTables — but the next step feels intimidating.</a:t>
+              <a:t>You're comfortable in Excel: formulas, tables, PivotTables, but the next step feels intimidating.</a:t>
             </a:r>
             <a:endParaRPr lang="en-US" sz="2000" dirty="0"/>
           </a:p>
@@ -8792,7 +8792,7 @@
                 <a:ea typeface="Arial" pitchFamily="34" charset="-122"/>
                 <a:cs typeface="Arial" pitchFamily="34" charset="-120"/>
               </a:rPr>
-              <a:t>Three more seaborn views — each a single line of code.</a:t>
+              <a:t>Three more seaborn views: each a single line of code.</a:t>
             </a:r>
             <a:endParaRPr lang="en-US" sz="1500" dirty="0"/>
           </a:p>
@@ -9407,7 +9407,7 @@
                 <a:ea typeface="Arial" pitchFamily="34" charset="-122"/>
                 <a:cs typeface="Arial" pitchFamily="34" charset="-120"/>
               </a:rPr>
-              <a:t>The source of truth for available packages, version requirements, and the latest features. The platform is still moving fast — bookmark it.</a:t>
+              <a:t>The source of truth for available packages, version requirements, and the latest features. The platform is still moving fast, bookmark it.</a:t>
             </a:r>
             <a:endParaRPr lang="en-US" sz="1200" dirty="0"/>
           </a:p>
@@ -9825,7 +9825,7 @@
                 <a:ea typeface="Arial" pitchFamily="34" charset="-122"/>
                 <a:cs typeface="Arial" pitchFamily="34" charset="-120"/>
               </a:rPr>
-              <a:t>My O’Reilly book, From Excel to Python and R. Builds on today’s mindset — taking spreadsheet skills into a real analytics stack with statistics, EDA, and your first scripts in both languages.</a:t>
+              <a:t>My O’Reilly book. Builds on today’s mindset: taking spreadsheet skills into a real analytics stack with statistics, EDA, and your first scripts in both Python and R.</a:t>
             </a:r>
             <a:endParaRPr lang="en-US" sz="1200" dirty="0"/>
           </a:p>
@@ -10258,7 +10258,7 @@
                 <a:ea typeface="Arial" pitchFamily="34" charset="-122"/>
                 <a:cs typeface="Arial" pitchFamily="34" charset="-120"/>
               </a:rPr>
-              <a:t>No internet, no PY(). And don't expect web-scraping or local file I/O — you can only pull data from inside the workbook.</a:t>
+              <a:t>No internet, no PY(). And don't expect web-scraping or local file I/O, you can only pull data from inside the workbook.</a:t>
             </a:r>
             <a:endParaRPr lang="en-US" sz="1300" dirty="0"/>
           </a:p>
@@ -10510,7 +10510,7 @@
                 <a:ea typeface="Arial" pitchFamily="34" charset="-122"/>
                 <a:cs typeface="Arial" pitchFamily="34" charset="-120"/>
               </a:rPr>
-              <a:t>Drop them in chat — we'll work through as many as we can.</a:t>
+              <a:t>Drop them in chat, we'll work through as many as we can.</a:t>
             </a:r>
             <a:endParaRPr lang="en-US" sz="2000" dirty="0"/>
           </a:p>
@@ -10765,7 +10765,7 @@
                 <a:ea typeface="Arial" pitchFamily="34" charset="-122"/>
                 <a:cs typeface="Arial" pitchFamily="34" charset="-120"/>
               </a:rPr>
-              <a:t>Hello-world inside Excel — and you'll know exactly why your A1 reference broke.</a:t>
+              <a:t>Hello-world inside Excel, and you'll know exactly why your A1 reference broke.</a:t>
             </a:r>
             <a:endParaRPr lang="en-US" sz="1300" dirty="0"/>
           </a:p>
@@ -12844,7 +12844,7 @@
                 <a:ea typeface="Arial Black" pitchFamily="34" charset="-122"/>
                 <a:cs typeface="Arial Black" pitchFamily="34" charset="-120"/>
               </a:rPr>
-              <a:t>Hello, world — in a cell.</a:t>
+              <a:t>Hello, world: in a cell.</a:t>
             </a:r>
             <a:endParaRPr lang="en-US" sz="4800" dirty="0"/>
           </a:p>
@@ -13614,7 +13614,7 @@
                 <a:ea typeface="Arial" pitchFamily="34" charset="-122"/>
                 <a:cs typeface="Arial" pitchFamily="34" charset="-120"/>
               </a:rPr>
-              <a:t>Look for the green PY badge in the cell + formula bar — that's your confirmation.</a:t>
+              <a:t>Look for the green PY badge in the cell + formula bar, that's your confirmation.</a:t>
             </a:r>
             <a:endParaRPr lang="en-US" sz="1200" dirty="0"/>
           </a:p>
@@ -13877,7 +13877,7 @@
                 <a:ea typeface="Arial" pitchFamily="34" charset="-122"/>
                 <a:cs typeface="Arial" pitchFamily="34" charset="-120"/>
               </a:rPr>
-              <a:t>Stays in one cell — no spill</a:t>
+              <a:t>Stays in one cell: no spill</a:t>
             </a:r>
             <a:endParaRPr lang="en-US" sz="1600" dirty="0"/>
           </a:p>
